--- a/public/downloads/dg32-lite-architecture.pptx
+++ b/public/downloads/dg32-lite-architecture.pptx
@@ -2,28 +2,28 @@
 <file path=ppt/presentation.xml><?xml version="1.0" encoding="utf-8"?>
 <p:presentation xmlns:p="http://schemas.openxmlformats.org/presentationml/2006/main">
   <p:sldMasterIdLst>
-    <p:sldMasterId xmlns:r="http://schemas.openxmlformats.org/officeDocument/2006/relationships" id="2147483648" r:id="Rf6a399c9ccf94562"/>
+    <p:sldMasterId xmlns:r="http://schemas.openxmlformats.org/officeDocument/2006/relationships" id="2147483648" r:id="R7811cb8382c44e8a"/>
   </p:sldMasterIdLst>
   <p:notesMasterIdLst>
-    <p:notesMasterId xmlns:r="http://schemas.openxmlformats.org/officeDocument/2006/relationships" r:id="R2d3bd5ed08e6412e"/>
+    <p:notesMasterId xmlns:r="http://schemas.openxmlformats.org/officeDocument/2006/relationships" r:id="R3922cf1630d74560"/>
   </p:notesMasterIdLst>
   <p:sldIdLst>
-    <p:sldId xmlns:r="http://schemas.openxmlformats.org/officeDocument/2006/relationships" id="256" r:id="R0fe8cc0b359a40c0"/>
-    <p:sldId xmlns:r="http://schemas.openxmlformats.org/officeDocument/2006/relationships" id="257" r:id="R448a8dd512cb492a"/>
-    <p:sldId xmlns:r="http://schemas.openxmlformats.org/officeDocument/2006/relationships" id="258" r:id="R070330ec28014056"/>
-    <p:sldId xmlns:r="http://schemas.openxmlformats.org/officeDocument/2006/relationships" id="259" r:id="R723adf1e6b4440b5"/>
-    <p:sldId xmlns:r="http://schemas.openxmlformats.org/officeDocument/2006/relationships" id="260" r:id="Rc2530908165d42e1"/>
-    <p:sldId xmlns:r="http://schemas.openxmlformats.org/officeDocument/2006/relationships" id="261" r:id="R5af5f56da21d4cd3"/>
-    <p:sldId xmlns:r="http://schemas.openxmlformats.org/officeDocument/2006/relationships" id="262" r:id="R83f9cfe6ddcd4051"/>
-    <p:sldId xmlns:r="http://schemas.openxmlformats.org/officeDocument/2006/relationships" id="263" r:id="Rcd42e846db1c42cd"/>
-    <p:sldId xmlns:r="http://schemas.openxmlformats.org/officeDocument/2006/relationships" id="264" r:id="Rfe8acda2a67a4b5e"/>
-    <p:sldId xmlns:r="http://schemas.openxmlformats.org/officeDocument/2006/relationships" id="265" r:id="R7c321b8e2cfd41ed"/>
-    <p:sldId xmlns:r="http://schemas.openxmlformats.org/officeDocument/2006/relationships" id="266" r:id="R0adf04a5d4f6425f"/>
-    <p:sldId xmlns:r="http://schemas.openxmlformats.org/officeDocument/2006/relationships" id="267" r:id="R7c3c63f9b6f64179"/>
-    <p:sldId xmlns:r="http://schemas.openxmlformats.org/officeDocument/2006/relationships" id="268" r:id="R4c14f2b13bf14675"/>
-    <p:sldId xmlns:r="http://schemas.openxmlformats.org/officeDocument/2006/relationships" id="269" r:id="R032ea3f08d3246d7"/>
-    <p:sldId xmlns:r="http://schemas.openxmlformats.org/officeDocument/2006/relationships" id="270" r:id="Rb5113cd681d04842"/>
-    <p:sldId xmlns:r="http://schemas.openxmlformats.org/officeDocument/2006/relationships" id="271" r:id="Rbd2b398ad6494924"/>
+    <p:sldId xmlns:r="http://schemas.openxmlformats.org/officeDocument/2006/relationships" id="256" r:id="R25dd623470c3424f"/>
+    <p:sldId xmlns:r="http://schemas.openxmlformats.org/officeDocument/2006/relationships" id="257" r:id="R529e5f70cd01439c"/>
+    <p:sldId xmlns:r="http://schemas.openxmlformats.org/officeDocument/2006/relationships" id="258" r:id="R81179827451e4195"/>
+    <p:sldId xmlns:r="http://schemas.openxmlformats.org/officeDocument/2006/relationships" id="259" r:id="Ra7f937b015c44641"/>
+    <p:sldId xmlns:r="http://schemas.openxmlformats.org/officeDocument/2006/relationships" id="260" r:id="R4eeec0f62768482f"/>
+    <p:sldId xmlns:r="http://schemas.openxmlformats.org/officeDocument/2006/relationships" id="261" r:id="R13f6b3f9a1174a3a"/>
+    <p:sldId xmlns:r="http://schemas.openxmlformats.org/officeDocument/2006/relationships" id="262" r:id="Rd0bf41337c9946b4"/>
+    <p:sldId xmlns:r="http://schemas.openxmlformats.org/officeDocument/2006/relationships" id="263" r:id="Rd5950ab160494726"/>
+    <p:sldId xmlns:r="http://schemas.openxmlformats.org/officeDocument/2006/relationships" id="264" r:id="R7a800d3f9be44dc9"/>
+    <p:sldId xmlns:r="http://schemas.openxmlformats.org/officeDocument/2006/relationships" id="265" r:id="Radab43a4de61493c"/>
+    <p:sldId xmlns:r="http://schemas.openxmlformats.org/officeDocument/2006/relationships" id="266" r:id="R56fb5a815fbc4ab4"/>
+    <p:sldId xmlns:r="http://schemas.openxmlformats.org/officeDocument/2006/relationships" id="267" r:id="R1e470c9053774148"/>
+    <p:sldId xmlns:r="http://schemas.openxmlformats.org/officeDocument/2006/relationships" id="268" r:id="Re54091ef4ede43f4"/>
+    <p:sldId xmlns:r="http://schemas.openxmlformats.org/officeDocument/2006/relationships" id="269" r:id="R4c03b16b47da4e11"/>
+    <p:sldId xmlns:r="http://schemas.openxmlformats.org/officeDocument/2006/relationships" id="270" r:id="R39d551f4df354d04"/>
+    <p:sldId xmlns:r="http://schemas.openxmlformats.org/officeDocument/2006/relationships" id="271" r:id="Re1f0f0902e534746"/>
   </p:sldIdLst>
   <p:sldSz cx="12192000" cy="6858000"/>
   <p:notesSz cx="6858000" cy="9144000"/>
@@ -667,7 +667,7 @@
           <a:lstStyle xmlns:a="http://schemas.openxmlformats.org/drawingml/2006/main"/>
           <a:p xmlns:a="http://schemas.openxmlformats.org/drawingml/2006/main">
             <a:r>
-              <a:t>All of this fits in a nine-by-nine millimetre QFN with sixty-four pins: forty-four signals, and the rest supplies and ground. Seven pins drive the bridge, six read position, two carry the analog current input, and one, FAULT_N, is the hardware trip. The compute variant, DG32-2DOM, uses exactly the same pinout.</a:t>
+              <a:t>All of it fits a nine-by-nine millimetre QFN with sixty-four pins: forty-four signals, and the rest power and ground. Seven pins drive the bridge, six read position, two carry the analog current input, and a single pin, FAULT_N, shuts the drive down in hardware. Because DG32-2DOM uses exactly this pinout, a board built for one takes either chip.</a:t>
             </a:r>
           </a:p>
         </p:txBody>
@@ -877,7 +877,7 @@
           <a:lstStyle xmlns:a="http://schemas.openxmlformats.org/drawingml/2006/main"/>
           <a:p xmlns:a="http://schemas.openxmlformats.org/drawingml/2006/main">
             <a:r>
-              <a:t>The roadmap closes those gaps in order. First silicon on the September 2026 shuttle measures what simulation predicted. The second spin adds a twelve-bit multi-channel ADC and embedded flash. Then come CAN-FD and interactive CPU debug. DG32-2DOM runs in parallel, with its design complete and in physical trials.</a:t>
+              <a:t>The roadmap works through those weaknesses, largest first. First silicon, on the September twenty twenty-six shuttle, tests the simulations against real parts. The following spin tackles the two largest gaps: an analog converter with twelve bits and several channels, and flash on the die. Only after that come CAN-FD and interactive debugging. DG32-2DOM advances meanwhile, its design finished and now in physical trials.</a:t>
             </a:r>
           </a:p>
         </p:txBody>
@@ -947,7 +947,7 @@
           <a:lstStyle xmlns:a="http://schemas.openxmlformats.org/drawingml/2006/main"/>
           <a:p xmlns:a="http://schemas.openxmlformats.org/drawingml/2006/main">
             <a:r>
-              <a:t>Three things to take away. Safety is in the core: two CPUs must agree, in hardware. Control is in silicon: the loop cost is fixed and known. And the next milestone is measurement: first silicon turns these design values into measured ones. This deck claims no measured silicon results and no functional-safety certification yet.</a:t>
+              <a:t>Three ideas to hold on to. The protection is built into the processor itself, not bolted on in software. The costly parts of motor control are dedicated hardware, so the price of one loop is fixed and known in advance. And the weaknesses are named, with fixes scheduled. None of this has yet been measured on silicon, and no functional-safety certification is claimed; bring-up is where the numbers become real.</a:t>
             </a:r>
           </a:p>
         </p:txBody>
@@ -1017,7 +1017,7 @@
           <a:lstStyle xmlns:a="http://schemas.openxmlformats.org/drawingml/2006/main"/>
           <a:p xmlns:a="http://schemas.openxmlformats.org/drawingml/2006/main">
             <a:r>
-              <a:t>Here is the whole story on one slide. One 130 nanometre chip carries the microcontroller, the motor-control peripherals and a hardware safety monitor. The two cores run in lockstep. The current loop reaches about one hundred kilohertz in simulation, and a CPU disagreement latches within thirty-nine cycles and drives a fault pin that can switch the power bridge off.</a:t>
+              <a:t>Here is the whole case in brief. DG32-LITE puts a microcontroller, its motor peripherals and its own safety monitor, built in hardware, into one one-hundred-thirty-nanometre part. The two cores check each other on every stored write. In simulation the current loop reaches about one hundred kilohertz, and a disagreement is latched within thirty-nine cycles, driving a pin that can shut the power bridge off.</a:t>
             </a:r>
           </a:p>
         </p:txBody>
@@ -1157,7 +1157,7 @@
           <a:lstStyle xmlns:a="http://schemas.openxmlformats.org/drawingml/2006/main"/>
           <a:p xmlns:a="http://schemas.openxmlformats.org/drawingml/2006/main">
             <a:r>
-              <a:t>DG32-LITE is six block groups on one bus. The safety core, memory and supervision sit above it; motor drive, sensing, connectivity and test sit below. The bus has two masters, the CPU and a DMA, with deterministic latency. Any address that is unmapped or disabled answers with a bus error instead of hanging, which matters on a chip with no debugger halt.</a:t>
+              <a:t>The architecture is six groups of blocks around a single bus. The safety core, the memory and the supervisors sit on one side of it; the motor drive, sensing and math, and connectivity and test sit on the other. Only the CPU and a DMA can start a transfer, and every transfer takes a predictable time. Because the chip has no debugger halt, a bad address returns an error rather than freezing it.</a:t>
             </a:r>
           </a:p>
         </p:txBody>
@@ -1227,7 +1227,7 @@
           <a:lstStyle xmlns:a="http://schemas.openxmlformats.org/drawingml/2006/main"/>
           <a:p xmlns:a="http://schemas.openxmlformats.org/drawingml/2006/main">
             <a:r>
-              <a:t>Four hard constraints shaped every block. There is no debugger halt, so nothing may hang. The lockstep core tops out around fifty-five to sixty-two megahertz, so the die runs at fifty. The core costs about eight clock cycles per instruction, so the loop moves into hardware. And the memory macros have no spare bits, so the chip ships without ECC, and says so.</a:t>
+              <a:t>Every design choice traces back to a limit found while hardening the chip. Nothing outside can halt the CPU, so nothing is allowed to hang. The lockstep core tops out between fifty-five and sixty-two megahertz, so the entire die is clocked at fifty. Each instruction costs about eight clock cycles, too slow for the loop, so the loop moved into hardware. And with no spare memory bits, the chip goes out without error correction, stated plainly.</a:t>
             </a:r>
           </a:p>
         </p:txBody>
@@ -1367,7 +1367,7 @@
           <a:lstStyle xmlns:a="http://schemas.openxmlformats.org/drawingml/2006/main"/>
           <a:p xmlns:a="http://schemas.openxmlformats.org/drawingml/2006/main">
             <a:r>
-              <a:t>The chip boots itself. At power-on the mask ROM prints a banner, validates the flash image header, copies the application from external QSPI flash into SRAM, and jumps to it. If the flash is blank, the ROM starts a UART monitor instead, so a bare board can still be inspected. The trade-off is loading at boot instead of executing in place.</a:t>
+              <a:t>Reaching running code takes no helper processor or debugger. Hard-wired ROM logic greets the serial console, confirms the image in external flash is valid, loads it into SRAM and hands over control. A board with empty flash is not stranded either: the ROM drops into a serial monitor that can program and start it. The price is copying code at every boot, since nothing runs directly out of flash.</a:t>
             </a:r>
           </a:p>
         </p:txBody>
@@ -1575,7 +1575,7 @@
   </p:cSld>
   <p:clrMap bg1="lt1" tx1="dk1" bg2="lt2" tx2="dk2" accent1="accent1" accent2="accent2" accent3="accent3" accent4="accent4" accent5="accent5" accent6="accent6" hlink="hlink" folHlink="folHlink"/>
   <p:sldLayoutIdLst>
-    <p:sldLayoutId xmlns:r="http://schemas.openxmlformats.org/officeDocument/2006/relationships" id="2147483649" r:id="Rcad27e1827734a7c"/>
+    <p:sldLayoutId xmlns:r="http://schemas.openxmlformats.org/officeDocument/2006/relationships" id="2147483649" r:id="R53c6f30c84d846a7"/>
   </p:sldLayoutIdLst>
   <p:txStyles>
     <p:titleStyle>
@@ -2119,7 +2119,7 @@
           <p:cNvPr id="107" name="">
             <a:extLst xmlns:a="http://schemas.openxmlformats.org/drawingml/2006/main">
               <a:ext uri="{FF2B5EF4-FFF2-40B4-BE49-F238E27FC236}">
-                <a16:creationId xmlns:a16="http://schemas.microsoft.com/office/drawing/2014/main" id="{F3A3FF2B-4CD1-40EA-82ED-88A5D18F070B}"/>
+                <a16:creationId xmlns:a16="http://schemas.microsoft.com/office/drawing/2014/main" id="{97CD8114-8F6F-46B2-AD30-2EFF7527D30F}"/>
               </a:ext>
             </a:extLst>
           </p:cNvPr>
@@ -2150,7 +2150,7 @@
           <p:cNvPr id="2" name="">
             <a:extLst xmlns:a="http://schemas.openxmlformats.org/drawingml/2006/main">
               <a:ext uri="{FF2B5EF4-FFF2-40B4-BE49-F238E27FC236}">
-                <a16:creationId xmlns:a16="http://schemas.microsoft.com/office/drawing/2014/main" id="{0A8161D5-4535-42DA-ABF4-7FE188EBEDA1}"/>
+                <a16:creationId xmlns:a16="http://schemas.microsoft.com/office/drawing/2014/main" id="{4247C126-0480-4324-A92B-1316C9914BED}"/>
               </a:ext>
             </a:extLst>
           </p:cNvPr>
@@ -2195,7 +2195,7 @@
           <p:cNvPr id="3" name="">
             <a:extLst xmlns:a="http://schemas.openxmlformats.org/drawingml/2006/main">
               <a:ext uri="{FF2B5EF4-FFF2-40B4-BE49-F238E27FC236}">
-                <a16:creationId xmlns:a16="http://schemas.microsoft.com/office/drawing/2014/main" id="{D394E55E-33C2-4309-AC82-E2862B914B85}"/>
+                <a16:creationId xmlns:a16="http://schemas.microsoft.com/office/drawing/2014/main" id="{08D35417-7A87-470D-B155-82201251ABF6}"/>
               </a:ext>
             </a:extLst>
           </p:cNvPr>
@@ -2240,7 +2240,7 @@
           <p:cNvPr id="4" name="">
             <a:extLst xmlns:a="http://schemas.openxmlformats.org/drawingml/2006/main">
               <a:ext uri="{FF2B5EF4-FFF2-40B4-BE49-F238E27FC236}">
-                <a16:creationId xmlns:a16="http://schemas.microsoft.com/office/drawing/2014/main" id="{9CD10895-D392-439B-8D8E-11F0D2EFD893}"/>
+                <a16:creationId xmlns:a16="http://schemas.microsoft.com/office/drawing/2014/main" id="{0EB8E847-02B8-41FF-B98A-003C96C2F163}"/>
               </a:ext>
             </a:extLst>
           </p:cNvPr>
@@ -2271,7 +2271,7 @@
           <p:cNvPr id="5" name="">
             <a:extLst xmlns:a="http://schemas.openxmlformats.org/drawingml/2006/main">
               <a:ext uri="{FF2B5EF4-FFF2-40B4-BE49-F238E27FC236}">
-                <a16:creationId xmlns:a16="http://schemas.microsoft.com/office/drawing/2014/main" id="{171B6D5B-85DB-4DDC-B1C3-E59873B5DB73}"/>
+                <a16:creationId xmlns:a16="http://schemas.microsoft.com/office/drawing/2014/main" id="{DF790F53-C6BC-470B-AF4C-068F29E363A0}"/>
               </a:ext>
             </a:extLst>
           </p:cNvPr>
@@ -2316,7 +2316,7 @@
           <p:cNvPr id="6" name="">
             <a:extLst xmlns:a="http://schemas.openxmlformats.org/drawingml/2006/main">
               <a:ext uri="{FF2B5EF4-FFF2-40B4-BE49-F238E27FC236}">
-                <a16:creationId xmlns:a16="http://schemas.microsoft.com/office/drawing/2014/main" id="{4C726D13-DDF7-4E2A-85EB-7837947F9CE5}"/>
+                <a16:creationId xmlns:a16="http://schemas.microsoft.com/office/drawing/2014/main" id="{5A78A394-3826-4AAB-8C93-9E4F80A01D20}"/>
               </a:ext>
             </a:extLst>
           </p:cNvPr>
@@ -2349,7 +2349,7 @@
           <p:cNvPr id="7" name="">
             <a:extLst xmlns:a="http://schemas.openxmlformats.org/drawingml/2006/main">
               <a:ext uri="{FF2B5EF4-FFF2-40B4-BE49-F238E27FC236}">
-                <a16:creationId xmlns:a16="http://schemas.microsoft.com/office/drawing/2014/main" id="{BDDE6962-7DF3-454B-B46A-886146E943ED}"/>
+                <a16:creationId xmlns:a16="http://schemas.microsoft.com/office/drawing/2014/main" id="{86D7DBBC-98E3-4F20-B3E0-1F775262FEC1}"/>
               </a:ext>
             </a:extLst>
           </p:cNvPr>
@@ -2380,7 +2380,7 @@
           <p:cNvPr id="8" name="">
             <a:extLst xmlns:a="http://schemas.openxmlformats.org/drawingml/2006/main">
               <a:ext uri="{FF2B5EF4-FFF2-40B4-BE49-F238E27FC236}">
-                <a16:creationId xmlns:a16="http://schemas.microsoft.com/office/drawing/2014/main" id="{B426BDBA-126C-48DE-B930-D61C78150CE4}"/>
+                <a16:creationId xmlns:a16="http://schemas.microsoft.com/office/drawing/2014/main" id="{ED35F95D-1445-470E-937F-F0ACC256D3F8}"/>
               </a:ext>
             </a:extLst>
           </p:cNvPr>
@@ -2411,7 +2411,7 @@
           <p:cNvPr id="9" name="">
             <a:extLst xmlns:a="http://schemas.openxmlformats.org/drawingml/2006/main">
               <a:ext uri="{FF2B5EF4-FFF2-40B4-BE49-F238E27FC236}">
-                <a16:creationId xmlns:a16="http://schemas.microsoft.com/office/drawing/2014/main" id="{FAEED50E-CF48-4F1A-9DA2-A588E5967DB1}"/>
+                <a16:creationId xmlns:a16="http://schemas.microsoft.com/office/drawing/2014/main" id="{ACDFD22F-7535-48D1-A5C7-1F532C0C932A}"/>
               </a:ext>
             </a:extLst>
           </p:cNvPr>
@@ -2442,7 +2442,7 @@
           <p:cNvPr id="10" name="">
             <a:extLst xmlns:a="http://schemas.openxmlformats.org/drawingml/2006/main">
               <a:ext uri="{FF2B5EF4-FFF2-40B4-BE49-F238E27FC236}">
-                <a16:creationId xmlns:a16="http://schemas.microsoft.com/office/drawing/2014/main" id="{F96BA7AA-7E56-4777-8F54-C08706EAFF94}"/>
+                <a16:creationId xmlns:a16="http://schemas.microsoft.com/office/drawing/2014/main" id="{D9BE02C3-25DB-4BAA-B860-5C4098141D13}"/>
               </a:ext>
             </a:extLst>
           </p:cNvPr>
@@ -2473,7 +2473,7 @@
           <p:cNvPr id="11" name="">
             <a:extLst xmlns:a="http://schemas.openxmlformats.org/drawingml/2006/main">
               <a:ext uri="{FF2B5EF4-FFF2-40B4-BE49-F238E27FC236}">
-                <a16:creationId xmlns:a16="http://schemas.microsoft.com/office/drawing/2014/main" id="{053B691C-1ACA-4987-92EC-CDA4A10DF6F6}"/>
+                <a16:creationId xmlns:a16="http://schemas.microsoft.com/office/drawing/2014/main" id="{B43F1A09-6EDD-4BF8-92B7-1E1AD7883F96}"/>
               </a:ext>
             </a:extLst>
           </p:cNvPr>
@@ -2504,7 +2504,7 @@
           <p:cNvPr id="12" name="">
             <a:extLst xmlns:a="http://schemas.openxmlformats.org/drawingml/2006/main">
               <a:ext uri="{FF2B5EF4-FFF2-40B4-BE49-F238E27FC236}">
-                <a16:creationId xmlns:a16="http://schemas.microsoft.com/office/drawing/2014/main" id="{7F0F9D60-0658-4BDC-95E7-FFE32190744A}"/>
+                <a16:creationId xmlns:a16="http://schemas.microsoft.com/office/drawing/2014/main" id="{60733EBF-2102-46E0-9E20-C26C349C2593}"/>
               </a:ext>
             </a:extLst>
           </p:cNvPr>
@@ -2535,7 +2535,7 @@
           <p:cNvPr id="13" name="">
             <a:extLst xmlns:a="http://schemas.openxmlformats.org/drawingml/2006/main">
               <a:ext uri="{FF2B5EF4-FFF2-40B4-BE49-F238E27FC236}">
-                <a16:creationId xmlns:a16="http://schemas.microsoft.com/office/drawing/2014/main" id="{170DAA8E-CCCC-44F4-A701-55FAEAF1E84F}"/>
+                <a16:creationId xmlns:a16="http://schemas.microsoft.com/office/drawing/2014/main" id="{C22B4C15-D26C-4F4C-B3AB-DAC376EC9AF2}"/>
               </a:ext>
             </a:extLst>
           </p:cNvPr>
@@ -2566,7 +2566,7 @@
           <p:cNvPr id="14" name="">
             <a:extLst xmlns:a="http://schemas.openxmlformats.org/drawingml/2006/main">
               <a:ext uri="{FF2B5EF4-FFF2-40B4-BE49-F238E27FC236}">
-                <a16:creationId xmlns:a16="http://schemas.microsoft.com/office/drawing/2014/main" id="{D5F9FD88-4852-4175-B554-F931BA181A70}"/>
+                <a16:creationId xmlns:a16="http://schemas.microsoft.com/office/drawing/2014/main" id="{6E3EFA4A-0AB7-4BD9-81E5-C41C1EDDC151}"/>
               </a:ext>
             </a:extLst>
           </p:cNvPr>
@@ -2597,7 +2597,7 @@
           <p:cNvPr id="15" name="">
             <a:extLst xmlns:a="http://schemas.openxmlformats.org/drawingml/2006/main">
               <a:ext uri="{FF2B5EF4-FFF2-40B4-BE49-F238E27FC236}">
-                <a16:creationId xmlns:a16="http://schemas.microsoft.com/office/drawing/2014/main" id="{03F2EB66-0C96-45B8-8F86-AB19829A35F3}"/>
+                <a16:creationId xmlns:a16="http://schemas.microsoft.com/office/drawing/2014/main" id="{1CD5E525-3653-422F-A36D-882BA9EB9A50}"/>
               </a:ext>
             </a:extLst>
           </p:cNvPr>
@@ -2628,7 +2628,7 @@
           <p:cNvPr id="16" name="">
             <a:extLst xmlns:a="http://schemas.openxmlformats.org/drawingml/2006/main">
               <a:ext uri="{FF2B5EF4-FFF2-40B4-BE49-F238E27FC236}">
-                <a16:creationId xmlns:a16="http://schemas.microsoft.com/office/drawing/2014/main" id="{5A818616-B37D-458D-B799-040B9309C68D}"/>
+                <a16:creationId xmlns:a16="http://schemas.microsoft.com/office/drawing/2014/main" id="{FA4DE914-A4AE-434E-A876-AD44F81F6635}"/>
               </a:ext>
             </a:extLst>
           </p:cNvPr>
@@ -2659,7 +2659,7 @@
           <p:cNvPr id="17" name="">
             <a:extLst xmlns:a="http://schemas.openxmlformats.org/drawingml/2006/main">
               <a:ext uri="{FF2B5EF4-FFF2-40B4-BE49-F238E27FC236}">
-                <a16:creationId xmlns:a16="http://schemas.microsoft.com/office/drawing/2014/main" id="{977B72E1-D5FF-45E9-B482-62EAC290045B}"/>
+                <a16:creationId xmlns:a16="http://schemas.microsoft.com/office/drawing/2014/main" id="{CF4251D3-4AB3-4D0B-BFDC-A6F98176D89E}"/>
               </a:ext>
             </a:extLst>
           </p:cNvPr>
@@ -2690,7 +2690,7 @@
           <p:cNvPr id="18" name="">
             <a:extLst xmlns:a="http://schemas.openxmlformats.org/drawingml/2006/main">
               <a:ext uri="{FF2B5EF4-FFF2-40B4-BE49-F238E27FC236}">
-                <a16:creationId xmlns:a16="http://schemas.microsoft.com/office/drawing/2014/main" id="{4DD42E4E-8C5D-43E7-A9AC-053C960A02A4}"/>
+                <a16:creationId xmlns:a16="http://schemas.microsoft.com/office/drawing/2014/main" id="{C1B72B3D-C715-463D-8C09-51391CA2ADF0}"/>
               </a:ext>
             </a:extLst>
           </p:cNvPr>
@@ -2721,7 +2721,7 @@
           <p:cNvPr id="19" name="">
             <a:extLst xmlns:a="http://schemas.openxmlformats.org/drawingml/2006/main">
               <a:ext uri="{FF2B5EF4-FFF2-40B4-BE49-F238E27FC236}">
-                <a16:creationId xmlns:a16="http://schemas.microsoft.com/office/drawing/2014/main" id="{0F801643-4260-4D11-9773-2771A8F4C3F6}"/>
+                <a16:creationId xmlns:a16="http://schemas.microsoft.com/office/drawing/2014/main" id="{077E2986-A444-406F-9825-77BBE1AC0C82}"/>
               </a:ext>
             </a:extLst>
           </p:cNvPr>
@@ -2752,7 +2752,7 @@
           <p:cNvPr id="20" name="">
             <a:extLst xmlns:a="http://schemas.openxmlformats.org/drawingml/2006/main">
               <a:ext uri="{FF2B5EF4-FFF2-40B4-BE49-F238E27FC236}">
-                <a16:creationId xmlns:a16="http://schemas.microsoft.com/office/drawing/2014/main" id="{14518FF4-1F92-46D9-9842-69388E84C275}"/>
+                <a16:creationId xmlns:a16="http://schemas.microsoft.com/office/drawing/2014/main" id="{9A401B41-A850-4B21-9F57-F61B3F704DFD}"/>
               </a:ext>
             </a:extLst>
           </p:cNvPr>
@@ -2783,7 +2783,7 @@
           <p:cNvPr id="21" name="">
             <a:extLst xmlns:a="http://schemas.openxmlformats.org/drawingml/2006/main">
               <a:ext uri="{FF2B5EF4-FFF2-40B4-BE49-F238E27FC236}">
-                <a16:creationId xmlns:a16="http://schemas.microsoft.com/office/drawing/2014/main" id="{A1CD9080-5F3D-47E6-9B21-BEC0FC96506C}"/>
+                <a16:creationId xmlns:a16="http://schemas.microsoft.com/office/drawing/2014/main" id="{63900316-0DED-47E3-A99B-197AECD1940E}"/>
               </a:ext>
             </a:extLst>
           </p:cNvPr>
@@ -2814,7 +2814,7 @@
           <p:cNvPr id="22" name="">
             <a:extLst xmlns:a="http://schemas.openxmlformats.org/drawingml/2006/main">
               <a:ext uri="{FF2B5EF4-FFF2-40B4-BE49-F238E27FC236}">
-                <a16:creationId xmlns:a16="http://schemas.microsoft.com/office/drawing/2014/main" id="{969E84AF-45C7-4617-A2CA-AEB558F44E1F}"/>
+                <a16:creationId xmlns:a16="http://schemas.microsoft.com/office/drawing/2014/main" id="{A2ADFE7F-DAF3-477B-A247-E03DB0A6B79E}"/>
               </a:ext>
             </a:extLst>
           </p:cNvPr>
@@ -2845,7 +2845,7 @@
           <p:cNvPr id="23" name="">
             <a:extLst xmlns:a="http://schemas.openxmlformats.org/drawingml/2006/main">
               <a:ext uri="{FF2B5EF4-FFF2-40B4-BE49-F238E27FC236}">
-                <a16:creationId xmlns:a16="http://schemas.microsoft.com/office/drawing/2014/main" id="{B9CDC80A-B0A4-4370-8DB5-A88E82A859FE}"/>
+                <a16:creationId xmlns:a16="http://schemas.microsoft.com/office/drawing/2014/main" id="{2F7DB348-E974-4F98-86B6-42C334B74FE2}"/>
               </a:ext>
             </a:extLst>
           </p:cNvPr>
@@ -2876,7 +2876,7 @@
           <p:cNvPr id="24" name="">
             <a:extLst xmlns:a="http://schemas.openxmlformats.org/drawingml/2006/main">
               <a:ext uri="{FF2B5EF4-FFF2-40B4-BE49-F238E27FC236}">
-                <a16:creationId xmlns:a16="http://schemas.microsoft.com/office/drawing/2014/main" id="{8A4B79BB-7092-4A5C-ADC8-1FB3DF140394}"/>
+                <a16:creationId xmlns:a16="http://schemas.microsoft.com/office/drawing/2014/main" id="{76AE4C3A-A3E9-4BA2-A14B-204CD9B42F62}"/>
               </a:ext>
             </a:extLst>
           </p:cNvPr>
@@ -2907,7 +2907,7 @@
           <p:cNvPr id="25" name="">
             <a:extLst xmlns:a="http://schemas.openxmlformats.org/drawingml/2006/main">
               <a:ext uri="{FF2B5EF4-FFF2-40B4-BE49-F238E27FC236}">
-                <a16:creationId xmlns:a16="http://schemas.microsoft.com/office/drawing/2014/main" id="{0C383C77-8000-4F97-8DEC-84B44BDA76A6}"/>
+                <a16:creationId xmlns:a16="http://schemas.microsoft.com/office/drawing/2014/main" id="{1983E867-0265-4777-B0E2-EA908557F2F0}"/>
               </a:ext>
             </a:extLst>
           </p:cNvPr>
@@ -2938,7 +2938,7 @@
           <p:cNvPr id="26" name="">
             <a:extLst xmlns:a="http://schemas.openxmlformats.org/drawingml/2006/main">
               <a:ext uri="{FF2B5EF4-FFF2-40B4-BE49-F238E27FC236}">
-                <a16:creationId xmlns:a16="http://schemas.microsoft.com/office/drawing/2014/main" id="{2DBACCFF-09E6-4EBB-9515-DFCE18EFBAB7}"/>
+                <a16:creationId xmlns:a16="http://schemas.microsoft.com/office/drawing/2014/main" id="{785F6A1B-295F-4592-B4A1-B7BF76D87C35}"/>
               </a:ext>
             </a:extLst>
           </p:cNvPr>
@@ -2969,7 +2969,7 @@
           <p:cNvPr id="27" name="">
             <a:extLst xmlns:a="http://schemas.openxmlformats.org/drawingml/2006/main">
               <a:ext uri="{FF2B5EF4-FFF2-40B4-BE49-F238E27FC236}">
-                <a16:creationId xmlns:a16="http://schemas.microsoft.com/office/drawing/2014/main" id="{0D238C6A-4B06-486B-B5D7-DA0617EC054E}"/>
+                <a16:creationId xmlns:a16="http://schemas.microsoft.com/office/drawing/2014/main" id="{21FAB86E-BE89-424B-99F2-2A5359050709}"/>
               </a:ext>
             </a:extLst>
           </p:cNvPr>
@@ -3000,7 +3000,7 @@
           <p:cNvPr id="28" name="">
             <a:extLst xmlns:a="http://schemas.openxmlformats.org/drawingml/2006/main">
               <a:ext uri="{FF2B5EF4-FFF2-40B4-BE49-F238E27FC236}">
-                <a16:creationId xmlns:a16="http://schemas.microsoft.com/office/drawing/2014/main" id="{8C12E5F6-FF98-45E9-A462-5C830626CEE5}"/>
+                <a16:creationId xmlns:a16="http://schemas.microsoft.com/office/drawing/2014/main" id="{F3D491BE-FBE5-476C-BE92-AD0138E46D81}"/>
               </a:ext>
             </a:extLst>
           </p:cNvPr>
@@ -3031,7 +3031,7 @@
           <p:cNvPr id="29" name="">
             <a:extLst xmlns:a="http://schemas.openxmlformats.org/drawingml/2006/main">
               <a:ext uri="{FF2B5EF4-FFF2-40B4-BE49-F238E27FC236}">
-                <a16:creationId xmlns:a16="http://schemas.microsoft.com/office/drawing/2014/main" id="{F2E02E46-44CD-46BB-BF66-0B8FC3ED402B}"/>
+                <a16:creationId xmlns:a16="http://schemas.microsoft.com/office/drawing/2014/main" id="{351DA435-7BAC-4DFB-A592-9269B6F0B367}"/>
               </a:ext>
             </a:extLst>
           </p:cNvPr>
@@ -3062,7 +3062,7 @@
           <p:cNvPr id="30" name="">
             <a:extLst xmlns:a="http://schemas.openxmlformats.org/drawingml/2006/main">
               <a:ext uri="{FF2B5EF4-FFF2-40B4-BE49-F238E27FC236}">
-                <a16:creationId xmlns:a16="http://schemas.microsoft.com/office/drawing/2014/main" id="{04C51988-FE9E-454F-AEBD-40D1A939666B}"/>
+                <a16:creationId xmlns:a16="http://schemas.microsoft.com/office/drawing/2014/main" id="{D07C348F-DED6-4FD3-A582-25D9D2FB8B7F}"/>
               </a:ext>
             </a:extLst>
           </p:cNvPr>
@@ -3093,7 +3093,7 @@
           <p:cNvPr id="31" name="">
             <a:extLst xmlns:a="http://schemas.openxmlformats.org/drawingml/2006/main">
               <a:ext uri="{FF2B5EF4-FFF2-40B4-BE49-F238E27FC236}">
-                <a16:creationId xmlns:a16="http://schemas.microsoft.com/office/drawing/2014/main" id="{95D4B40B-6E67-4593-9D02-28C796D50D57}"/>
+                <a16:creationId xmlns:a16="http://schemas.microsoft.com/office/drawing/2014/main" id="{53E8D608-145C-4687-BE28-96DDA2536C12}"/>
               </a:ext>
             </a:extLst>
           </p:cNvPr>
@@ -3124,7 +3124,7 @@
           <p:cNvPr id="32" name="">
             <a:extLst xmlns:a="http://schemas.openxmlformats.org/drawingml/2006/main">
               <a:ext uri="{FF2B5EF4-FFF2-40B4-BE49-F238E27FC236}">
-                <a16:creationId xmlns:a16="http://schemas.microsoft.com/office/drawing/2014/main" id="{CDE2DD5B-BDEA-4FA2-8F2F-8AB6B87C2F96}"/>
+                <a16:creationId xmlns:a16="http://schemas.microsoft.com/office/drawing/2014/main" id="{3A295F95-3F9F-4C74-8DF5-D972F2693CCA}"/>
               </a:ext>
             </a:extLst>
           </p:cNvPr>
@@ -3155,7 +3155,7 @@
           <p:cNvPr id="33" name="">
             <a:extLst xmlns:a="http://schemas.openxmlformats.org/drawingml/2006/main">
               <a:ext uri="{FF2B5EF4-FFF2-40B4-BE49-F238E27FC236}">
-                <a16:creationId xmlns:a16="http://schemas.microsoft.com/office/drawing/2014/main" id="{49094C65-9294-4EB9-847C-5A2A8CC930F2}"/>
+                <a16:creationId xmlns:a16="http://schemas.microsoft.com/office/drawing/2014/main" id="{1F3A473F-6DC3-48FB-83D4-76701A4AFE51}"/>
               </a:ext>
             </a:extLst>
           </p:cNvPr>
@@ -3186,7 +3186,7 @@
           <p:cNvPr id="34" name="">
             <a:extLst xmlns:a="http://schemas.openxmlformats.org/drawingml/2006/main">
               <a:ext uri="{FF2B5EF4-FFF2-40B4-BE49-F238E27FC236}">
-                <a16:creationId xmlns:a16="http://schemas.microsoft.com/office/drawing/2014/main" id="{6708FB04-9D13-44DF-8A9F-6E75B5733BEA}"/>
+                <a16:creationId xmlns:a16="http://schemas.microsoft.com/office/drawing/2014/main" id="{2D6A1885-0B03-4DAC-A7F4-4FF4C1228143}"/>
               </a:ext>
             </a:extLst>
           </p:cNvPr>
@@ -3217,7 +3217,7 @@
           <p:cNvPr id="35" name="">
             <a:extLst xmlns:a="http://schemas.openxmlformats.org/drawingml/2006/main">
               <a:ext uri="{FF2B5EF4-FFF2-40B4-BE49-F238E27FC236}">
-                <a16:creationId xmlns:a16="http://schemas.microsoft.com/office/drawing/2014/main" id="{992B4926-8B40-400C-AC62-DF727519BAC9}"/>
+                <a16:creationId xmlns:a16="http://schemas.microsoft.com/office/drawing/2014/main" id="{6ACF7A38-CBFF-4DF2-9C50-BA4DC754251B}"/>
               </a:ext>
             </a:extLst>
           </p:cNvPr>
@@ -3248,7 +3248,7 @@
           <p:cNvPr id="36" name="">
             <a:extLst xmlns:a="http://schemas.openxmlformats.org/drawingml/2006/main">
               <a:ext uri="{FF2B5EF4-FFF2-40B4-BE49-F238E27FC236}">
-                <a16:creationId xmlns:a16="http://schemas.microsoft.com/office/drawing/2014/main" id="{1D9D36B9-E401-4D57-9810-5813E1F2944F}"/>
+                <a16:creationId xmlns:a16="http://schemas.microsoft.com/office/drawing/2014/main" id="{E3870806-26F3-44DF-B3DB-2B39237343AB}"/>
               </a:ext>
             </a:extLst>
           </p:cNvPr>
@@ -3279,7 +3279,7 @@
           <p:cNvPr id="37" name="">
             <a:extLst xmlns:a="http://schemas.openxmlformats.org/drawingml/2006/main">
               <a:ext uri="{FF2B5EF4-FFF2-40B4-BE49-F238E27FC236}">
-                <a16:creationId xmlns:a16="http://schemas.microsoft.com/office/drawing/2014/main" id="{44AD89F4-1636-4071-9E7C-83F82EBA5FD6}"/>
+                <a16:creationId xmlns:a16="http://schemas.microsoft.com/office/drawing/2014/main" id="{BEB8CEBF-3BF8-4D58-9086-911B75D4E00D}"/>
               </a:ext>
             </a:extLst>
           </p:cNvPr>
@@ -3310,7 +3310,7 @@
           <p:cNvPr id="38" name="">
             <a:extLst xmlns:a="http://schemas.openxmlformats.org/drawingml/2006/main">
               <a:ext uri="{FF2B5EF4-FFF2-40B4-BE49-F238E27FC236}">
-                <a16:creationId xmlns:a16="http://schemas.microsoft.com/office/drawing/2014/main" id="{AEFB0193-7EB2-42DF-8B53-14C412FE5565}"/>
+                <a16:creationId xmlns:a16="http://schemas.microsoft.com/office/drawing/2014/main" id="{3676C356-08CF-44CA-9A96-8534D18E6B65}"/>
               </a:ext>
             </a:extLst>
           </p:cNvPr>
@@ -3341,7 +3341,7 @@
           <p:cNvPr id="39" name="">
             <a:extLst xmlns:a="http://schemas.openxmlformats.org/drawingml/2006/main">
               <a:ext uri="{FF2B5EF4-FFF2-40B4-BE49-F238E27FC236}">
-                <a16:creationId xmlns:a16="http://schemas.microsoft.com/office/drawing/2014/main" id="{CFA2EE53-F793-4963-9534-567297C352BF}"/>
+                <a16:creationId xmlns:a16="http://schemas.microsoft.com/office/drawing/2014/main" id="{8FD05209-1EC5-4A55-9406-55439BC7C61C}"/>
               </a:ext>
             </a:extLst>
           </p:cNvPr>
@@ -3372,7 +3372,7 @@
           <p:cNvPr id="40" name="">
             <a:extLst xmlns:a="http://schemas.openxmlformats.org/drawingml/2006/main">
               <a:ext uri="{FF2B5EF4-FFF2-40B4-BE49-F238E27FC236}">
-                <a16:creationId xmlns:a16="http://schemas.microsoft.com/office/drawing/2014/main" id="{C46E919F-82BB-4A4A-B7F8-656F652B7EA0}"/>
+                <a16:creationId xmlns:a16="http://schemas.microsoft.com/office/drawing/2014/main" id="{F4A7B3B8-4976-4EB9-82ED-A2404B9F08B1}"/>
               </a:ext>
             </a:extLst>
           </p:cNvPr>
@@ -3403,7 +3403,7 @@
           <p:cNvPr id="41" name="">
             <a:extLst xmlns:a="http://schemas.openxmlformats.org/drawingml/2006/main">
               <a:ext uri="{FF2B5EF4-FFF2-40B4-BE49-F238E27FC236}">
-                <a16:creationId xmlns:a16="http://schemas.microsoft.com/office/drawing/2014/main" id="{DEC4B596-461C-46DE-B4CE-E5826B7F9FFC}"/>
+                <a16:creationId xmlns:a16="http://schemas.microsoft.com/office/drawing/2014/main" id="{D43F2294-92CC-4091-B017-C17AABD82E28}"/>
               </a:ext>
             </a:extLst>
           </p:cNvPr>
@@ -3434,7 +3434,7 @@
           <p:cNvPr id="42" name="">
             <a:extLst xmlns:a="http://schemas.openxmlformats.org/drawingml/2006/main">
               <a:ext uri="{FF2B5EF4-FFF2-40B4-BE49-F238E27FC236}">
-                <a16:creationId xmlns:a16="http://schemas.microsoft.com/office/drawing/2014/main" id="{C68B884A-6645-4D29-966C-8E4FAA08B775}"/>
+                <a16:creationId xmlns:a16="http://schemas.microsoft.com/office/drawing/2014/main" id="{A73E1B7E-27CB-4EB9-88A1-66D1BE56C8E6}"/>
               </a:ext>
             </a:extLst>
           </p:cNvPr>
@@ -3465,7 +3465,7 @@
           <p:cNvPr id="43" name="">
             <a:extLst xmlns:a="http://schemas.openxmlformats.org/drawingml/2006/main">
               <a:ext uri="{FF2B5EF4-FFF2-40B4-BE49-F238E27FC236}">
-                <a16:creationId xmlns:a16="http://schemas.microsoft.com/office/drawing/2014/main" id="{E56C8C4C-A331-452F-80F7-0051B48DAD4D}"/>
+                <a16:creationId xmlns:a16="http://schemas.microsoft.com/office/drawing/2014/main" id="{0776FA8F-1A97-495E-857D-769578BDE235}"/>
               </a:ext>
             </a:extLst>
           </p:cNvPr>
@@ -3496,7 +3496,7 @@
           <p:cNvPr id="44" name="">
             <a:extLst xmlns:a="http://schemas.openxmlformats.org/drawingml/2006/main">
               <a:ext uri="{FF2B5EF4-FFF2-40B4-BE49-F238E27FC236}">
-                <a16:creationId xmlns:a16="http://schemas.microsoft.com/office/drawing/2014/main" id="{4F75B26A-89A8-476C-9F99-D667A0C5A5B4}"/>
+                <a16:creationId xmlns:a16="http://schemas.microsoft.com/office/drawing/2014/main" id="{E3562649-EC2C-418A-9267-0FAF41BD4106}"/>
               </a:ext>
             </a:extLst>
           </p:cNvPr>
@@ -3527,7 +3527,7 @@
           <p:cNvPr id="45" name="">
             <a:extLst xmlns:a="http://schemas.openxmlformats.org/drawingml/2006/main">
               <a:ext uri="{FF2B5EF4-FFF2-40B4-BE49-F238E27FC236}">
-                <a16:creationId xmlns:a16="http://schemas.microsoft.com/office/drawing/2014/main" id="{070F453F-86AA-4972-8902-503AA6290A93}"/>
+                <a16:creationId xmlns:a16="http://schemas.microsoft.com/office/drawing/2014/main" id="{F9E6C0BB-A522-4460-80F6-DA4153BEC2BC}"/>
               </a:ext>
             </a:extLst>
           </p:cNvPr>
@@ -3558,7 +3558,7 @@
           <p:cNvPr id="46" name="">
             <a:extLst xmlns:a="http://schemas.openxmlformats.org/drawingml/2006/main">
               <a:ext uri="{FF2B5EF4-FFF2-40B4-BE49-F238E27FC236}">
-                <a16:creationId xmlns:a16="http://schemas.microsoft.com/office/drawing/2014/main" id="{5D582A75-FF6F-4FC3-8E0F-070A97FE5E79}"/>
+                <a16:creationId xmlns:a16="http://schemas.microsoft.com/office/drawing/2014/main" id="{A23697D8-3ADF-4184-9DA1-AF14990C83F1}"/>
               </a:ext>
             </a:extLst>
           </p:cNvPr>
@@ -3589,7 +3589,7 @@
           <p:cNvPr id="47" name="">
             <a:extLst xmlns:a="http://schemas.openxmlformats.org/drawingml/2006/main">
               <a:ext uri="{FF2B5EF4-FFF2-40B4-BE49-F238E27FC236}">
-                <a16:creationId xmlns:a16="http://schemas.microsoft.com/office/drawing/2014/main" id="{B4C9FE58-9BB0-4B5E-B6E6-E9A57BF30E1C}"/>
+                <a16:creationId xmlns:a16="http://schemas.microsoft.com/office/drawing/2014/main" id="{36086D49-2165-40E8-AF9E-FC9ED8308B77}"/>
               </a:ext>
             </a:extLst>
           </p:cNvPr>
@@ -3620,7 +3620,7 @@
           <p:cNvPr id="48" name="">
             <a:extLst xmlns:a="http://schemas.openxmlformats.org/drawingml/2006/main">
               <a:ext uri="{FF2B5EF4-FFF2-40B4-BE49-F238E27FC236}">
-                <a16:creationId xmlns:a16="http://schemas.microsoft.com/office/drawing/2014/main" id="{ADFA3475-090B-4050-B7BB-FE31F9B95FE5}"/>
+                <a16:creationId xmlns:a16="http://schemas.microsoft.com/office/drawing/2014/main" id="{C71AEE73-1CAF-4644-A4D0-8BE532EA2821}"/>
               </a:ext>
             </a:extLst>
           </p:cNvPr>
@@ -3651,7 +3651,7 @@
           <p:cNvPr id="49" name="">
             <a:extLst xmlns:a="http://schemas.openxmlformats.org/drawingml/2006/main">
               <a:ext uri="{FF2B5EF4-FFF2-40B4-BE49-F238E27FC236}">
-                <a16:creationId xmlns:a16="http://schemas.microsoft.com/office/drawing/2014/main" id="{C6CFF453-E13B-45C0-82BB-7E7666265DB7}"/>
+                <a16:creationId xmlns:a16="http://schemas.microsoft.com/office/drawing/2014/main" id="{E76F7066-D588-4A61-829D-4855CAA6E375}"/>
               </a:ext>
             </a:extLst>
           </p:cNvPr>
@@ -3682,7 +3682,7 @@
           <p:cNvPr id="50" name="">
             <a:extLst xmlns:a="http://schemas.openxmlformats.org/drawingml/2006/main">
               <a:ext uri="{FF2B5EF4-FFF2-40B4-BE49-F238E27FC236}">
-                <a16:creationId xmlns:a16="http://schemas.microsoft.com/office/drawing/2014/main" id="{6CE42776-4E93-458C-A976-CBADB10FE201}"/>
+                <a16:creationId xmlns:a16="http://schemas.microsoft.com/office/drawing/2014/main" id="{A7950A59-83D0-4448-817B-F95AFB80A818}"/>
               </a:ext>
             </a:extLst>
           </p:cNvPr>
@@ -3713,7 +3713,7 @@
           <p:cNvPr id="51" name="">
             <a:extLst xmlns:a="http://schemas.openxmlformats.org/drawingml/2006/main">
               <a:ext uri="{FF2B5EF4-FFF2-40B4-BE49-F238E27FC236}">
-                <a16:creationId xmlns:a16="http://schemas.microsoft.com/office/drawing/2014/main" id="{8018CE9B-BFED-4716-B361-C68E37B13DB2}"/>
+                <a16:creationId xmlns:a16="http://schemas.microsoft.com/office/drawing/2014/main" id="{83E471D2-5AE5-45B6-BE27-B5EC41EF626E}"/>
               </a:ext>
             </a:extLst>
           </p:cNvPr>
@@ -3744,7 +3744,7 @@
           <p:cNvPr id="52" name="">
             <a:extLst xmlns:a="http://schemas.openxmlformats.org/drawingml/2006/main">
               <a:ext uri="{FF2B5EF4-FFF2-40B4-BE49-F238E27FC236}">
-                <a16:creationId xmlns:a16="http://schemas.microsoft.com/office/drawing/2014/main" id="{24BA22F3-DC93-4FAD-9672-C6C44F2D5EA1}"/>
+                <a16:creationId xmlns:a16="http://schemas.microsoft.com/office/drawing/2014/main" id="{F6ED04CB-388B-4F71-8135-3E0AD08B5942}"/>
               </a:ext>
             </a:extLst>
           </p:cNvPr>
@@ -3775,7 +3775,7 @@
           <p:cNvPr id="53" name="">
             <a:extLst xmlns:a="http://schemas.openxmlformats.org/drawingml/2006/main">
               <a:ext uri="{FF2B5EF4-FFF2-40B4-BE49-F238E27FC236}">
-                <a16:creationId xmlns:a16="http://schemas.microsoft.com/office/drawing/2014/main" id="{22B976C3-F1F2-437D-A237-6A2A6C2402A6}"/>
+                <a16:creationId xmlns:a16="http://schemas.microsoft.com/office/drawing/2014/main" id="{D1BDB92E-178A-4484-A3E2-9A9C8637BADA}"/>
               </a:ext>
             </a:extLst>
           </p:cNvPr>
@@ -3806,7 +3806,7 @@
           <p:cNvPr id="54" name="">
             <a:extLst xmlns:a="http://schemas.openxmlformats.org/drawingml/2006/main">
               <a:ext uri="{FF2B5EF4-FFF2-40B4-BE49-F238E27FC236}">
-                <a16:creationId xmlns:a16="http://schemas.microsoft.com/office/drawing/2014/main" id="{E2FC085F-4A1A-4292-AF17-BBAEAA17A1AC}"/>
+                <a16:creationId xmlns:a16="http://schemas.microsoft.com/office/drawing/2014/main" id="{FF3FC374-EC4F-408A-AEDC-8CB0C8B03AB7}"/>
               </a:ext>
             </a:extLst>
           </p:cNvPr>
@@ -3837,7 +3837,7 @@
           <p:cNvPr id="55" name="">
             <a:extLst xmlns:a="http://schemas.openxmlformats.org/drawingml/2006/main">
               <a:ext uri="{FF2B5EF4-FFF2-40B4-BE49-F238E27FC236}">
-                <a16:creationId xmlns:a16="http://schemas.microsoft.com/office/drawing/2014/main" id="{5E5DA771-AA52-48D5-A1A7-C9D0B441A47E}"/>
+                <a16:creationId xmlns:a16="http://schemas.microsoft.com/office/drawing/2014/main" id="{9699D32C-1FA4-46C3-85E6-FD297FE2F0C9}"/>
               </a:ext>
             </a:extLst>
           </p:cNvPr>
@@ -3868,7 +3868,7 @@
           <p:cNvPr id="56" name="">
             <a:extLst xmlns:a="http://schemas.openxmlformats.org/drawingml/2006/main">
               <a:ext uri="{FF2B5EF4-FFF2-40B4-BE49-F238E27FC236}">
-                <a16:creationId xmlns:a16="http://schemas.microsoft.com/office/drawing/2014/main" id="{054A86C8-6DF8-4DD8-9BC0-6F2F5C148CEC}"/>
+                <a16:creationId xmlns:a16="http://schemas.microsoft.com/office/drawing/2014/main" id="{3AC787DE-087C-4EA8-B595-B46F472F36CF}"/>
               </a:ext>
             </a:extLst>
           </p:cNvPr>
@@ -3899,7 +3899,7 @@
           <p:cNvPr id="57" name="">
             <a:extLst xmlns:a="http://schemas.openxmlformats.org/drawingml/2006/main">
               <a:ext uri="{FF2B5EF4-FFF2-40B4-BE49-F238E27FC236}">
-                <a16:creationId xmlns:a16="http://schemas.microsoft.com/office/drawing/2014/main" id="{8D6E4D3E-C5D3-40B7-B579-5AA757EF58D8}"/>
+                <a16:creationId xmlns:a16="http://schemas.microsoft.com/office/drawing/2014/main" id="{56C0E161-ED4F-4A0E-B2EB-E55DBE306DBA}"/>
               </a:ext>
             </a:extLst>
           </p:cNvPr>
@@ -3930,7 +3930,7 @@
           <p:cNvPr id="58" name="">
             <a:extLst xmlns:a="http://schemas.openxmlformats.org/drawingml/2006/main">
               <a:ext uri="{FF2B5EF4-FFF2-40B4-BE49-F238E27FC236}">
-                <a16:creationId xmlns:a16="http://schemas.microsoft.com/office/drawing/2014/main" id="{36D0C765-DD41-47C1-BB99-FFF7A617F1E0}"/>
+                <a16:creationId xmlns:a16="http://schemas.microsoft.com/office/drawing/2014/main" id="{34A67508-3248-4595-B3DC-3BB39D49292A}"/>
               </a:ext>
             </a:extLst>
           </p:cNvPr>
@@ -3961,7 +3961,7 @@
           <p:cNvPr id="59" name="">
             <a:extLst xmlns:a="http://schemas.openxmlformats.org/drawingml/2006/main">
               <a:ext uri="{FF2B5EF4-FFF2-40B4-BE49-F238E27FC236}">
-                <a16:creationId xmlns:a16="http://schemas.microsoft.com/office/drawing/2014/main" id="{F36BCE66-3383-4457-9891-38EF10499404}"/>
+                <a16:creationId xmlns:a16="http://schemas.microsoft.com/office/drawing/2014/main" id="{85D21B42-2BA2-44D9-BF43-76FEC7158CCB}"/>
               </a:ext>
             </a:extLst>
           </p:cNvPr>
@@ -3992,7 +3992,7 @@
           <p:cNvPr id="60" name="">
             <a:extLst xmlns:a="http://schemas.openxmlformats.org/drawingml/2006/main">
               <a:ext uri="{FF2B5EF4-FFF2-40B4-BE49-F238E27FC236}">
-                <a16:creationId xmlns:a16="http://schemas.microsoft.com/office/drawing/2014/main" id="{ABCFED39-2A65-46F5-9B2C-0667E4D055F1}"/>
+                <a16:creationId xmlns:a16="http://schemas.microsoft.com/office/drawing/2014/main" id="{89E2B7EE-DA21-4DBB-B9F3-A990568B4DC6}"/>
               </a:ext>
             </a:extLst>
           </p:cNvPr>
@@ -4023,7 +4023,7 @@
           <p:cNvPr id="61" name="">
             <a:extLst xmlns:a="http://schemas.openxmlformats.org/drawingml/2006/main">
               <a:ext uri="{FF2B5EF4-FFF2-40B4-BE49-F238E27FC236}">
-                <a16:creationId xmlns:a16="http://schemas.microsoft.com/office/drawing/2014/main" id="{E0A11089-EA7F-4C34-A540-E1FF0216E61D}"/>
+                <a16:creationId xmlns:a16="http://schemas.microsoft.com/office/drawing/2014/main" id="{6BAB768A-8C8A-410F-9405-D725F22D854F}"/>
               </a:ext>
             </a:extLst>
           </p:cNvPr>
@@ -4054,7 +4054,7 @@
           <p:cNvPr id="62" name="">
             <a:extLst xmlns:a="http://schemas.openxmlformats.org/drawingml/2006/main">
               <a:ext uri="{FF2B5EF4-FFF2-40B4-BE49-F238E27FC236}">
-                <a16:creationId xmlns:a16="http://schemas.microsoft.com/office/drawing/2014/main" id="{CB724B1B-069F-41AE-B2A7-097723124FD1}"/>
+                <a16:creationId xmlns:a16="http://schemas.microsoft.com/office/drawing/2014/main" id="{A1B49439-77AF-4815-A33B-4E3198B6F421}"/>
               </a:ext>
             </a:extLst>
           </p:cNvPr>
@@ -4085,7 +4085,7 @@
           <p:cNvPr id="63" name="">
             <a:extLst xmlns:a="http://schemas.openxmlformats.org/drawingml/2006/main">
               <a:ext uri="{FF2B5EF4-FFF2-40B4-BE49-F238E27FC236}">
-                <a16:creationId xmlns:a16="http://schemas.microsoft.com/office/drawing/2014/main" id="{6F91DC0D-5D35-4A25-8F8E-7C46633BC9ED}"/>
+                <a16:creationId xmlns:a16="http://schemas.microsoft.com/office/drawing/2014/main" id="{03532807-C31E-4EE1-BE25-04E50A7ED781}"/>
               </a:ext>
             </a:extLst>
           </p:cNvPr>
@@ -4116,7 +4116,7 @@
           <p:cNvPr id="64" name="">
             <a:extLst xmlns:a="http://schemas.openxmlformats.org/drawingml/2006/main">
               <a:ext uri="{FF2B5EF4-FFF2-40B4-BE49-F238E27FC236}">
-                <a16:creationId xmlns:a16="http://schemas.microsoft.com/office/drawing/2014/main" id="{981B91E3-A758-414A-AB91-57732BE965FB}"/>
+                <a16:creationId xmlns:a16="http://schemas.microsoft.com/office/drawing/2014/main" id="{543EDA0A-18D5-4B55-B3F0-86522321734B}"/>
               </a:ext>
             </a:extLst>
           </p:cNvPr>
@@ -4147,7 +4147,7 @@
           <p:cNvPr id="65" name="">
             <a:extLst xmlns:a="http://schemas.openxmlformats.org/drawingml/2006/main">
               <a:ext uri="{FF2B5EF4-FFF2-40B4-BE49-F238E27FC236}">
-                <a16:creationId xmlns:a16="http://schemas.microsoft.com/office/drawing/2014/main" id="{3DFD89F3-59EC-4C71-B4AB-A939F707A57E}"/>
+                <a16:creationId xmlns:a16="http://schemas.microsoft.com/office/drawing/2014/main" id="{639E8CA3-E9A1-4068-A16B-271C3FDF2A36}"/>
               </a:ext>
             </a:extLst>
           </p:cNvPr>
@@ -4178,7 +4178,7 @@
           <p:cNvPr id="66" name="">
             <a:extLst xmlns:a="http://schemas.openxmlformats.org/drawingml/2006/main">
               <a:ext uri="{FF2B5EF4-FFF2-40B4-BE49-F238E27FC236}">
-                <a16:creationId xmlns:a16="http://schemas.microsoft.com/office/drawing/2014/main" id="{AAAB79DD-35CD-4301-8344-258F3D77CB49}"/>
+                <a16:creationId xmlns:a16="http://schemas.microsoft.com/office/drawing/2014/main" id="{7125452D-B5AB-438E-8CB6-3532B5309109}"/>
               </a:ext>
             </a:extLst>
           </p:cNvPr>
@@ -4209,7 +4209,7 @@
           <p:cNvPr id="67" name="">
             <a:extLst xmlns:a="http://schemas.openxmlformats.org/drawingml/2006/main">
               <a:ext uri="{FF2B5EF4-FFF2-40B4-BE49-F238E27FC236}">
-                <a16:creationId xmlns:a16="http://schemas.microsoft.com/office/drawing/2014/main" id="{DCFED264-4E2A-4F3B-A18F-73A70A699335}"/>
+                <a16:creationId xmlns:a16="http://schemas.microsoft.com/office/drawing/2014/main" id="{7D675B4C-B8E3-4935-92AF-EF582A99D49D}"/>
               </a:ext>
             </a:extLst>
           </p:cNvPr>
@@ -4240,7 +4240,7 @@
           <p:cNvPr id="68" name="">
             <a:extLst xmlns:a="http://schemas.openxmlformats.org/drawingml/2006/main">
               <a:ext uri="{FF2B5EF4-FFF2-40B4-BE49-F238E27FC236}">
-                <a16:creationId xmlns:a16="http://schemas.microsoft.com/office/drawing/2014/main" id="{6DA129B1-D687-4874-AAA4-B2143B982F16}"/>
+                <a16:creationId xmlns:a16="http://schemas.microsoft.com/office/drawing/2014/main" id="{6B612251-315E-48A0-8977-CE8A028BE82D}"/>
               </a:ext>
             </a:extLst>
           </p:cNvPr>
@@ -4271,7 +4271,7 @@
           <p:cNvPr id="69" name="">
             <a:extLst xmlns:a="http://schemas.openxmlformats.org/drawingml/2006/main">
               <a:ext uri="{FF2B5EF4-FFF2-40B4-BE49-F238E27FC236}">
-                <a16:creationId xmlns:a16="http://schemas.microsoft.com/office/drawing/2014/main" id="{C66B5FC6-E012-456D-BB79-AAFC388C44B7}"/>
+                <a16:creationId xmlns:a16="http://schemas.microsoft.com/office/drawing/2014/main" id="{D3AB1472-57C2-4A73-B842-0FCA038A762D}"/>
               </a:ext>
             </a:extLst>
           </p:cNvPr>
@@ -4302,7 +4302,7 @@
           <p:cNvPr id="70" name="">
             <a:extLst xmlns:a="http://schemas.openxmlformats.org/drawingml/2006/main">
               <a:ext uri="{FF2B5EF4-FFF2-40B4-BE49-F238E27FC236}">
-                <a16:creationId xmlns:a16="http://schemas.microsoft.com/office/drawing/2014/main" id="{BF06048E-7B3D-46BC-A2C5-1AEDE75DEA12}"/>
+                <a16:creationId xmlns:a16="http://schemas.microsoft.com/office/drawing/2014/main" id="{3BFB4D75-B416-4ED2-9074-62A7B5894DD9}"/>
               </a:ext>
             </a:extLst>
           </p:cNvPr>
@@ -4333,7 +4333,7 @@
           <p:cNvPr id="71" name="">
             <a:extLst xmlns:a="http://schemas.openxmlformats.org/drawingml/2006/main">
               <a:ext uri="{FF2B5EF4-FFF2-40B4-BE49-F238E27FC236}">
-                <a16:creationId xmlns:a16="http://schemas.microsoft.com/office/drawing/2014/main" id="{742CE349-A57A-4EAA-AAF8-D2EBAC5F22A2}"/>
+                <a16:creationId xmlns:a16="http://schemas.microsoft.com/office/drawing/2014/main" id="{97F681CD-FA40-4397-89B0-6C7B699536C8}"/>
               </a:ext>
             </a:extLst>
           </p:cNvPr>
@@ -4364,7 +4364,7 @@
           <p:cNvPr id="72" name="">
             <a:extLst xmlns:a="http://schemas.openxmlformats.org/drawingml/2006/main">
               <a:ext uri="{FF2B5EF4-FFF2-40B4-BE49-F238E27FC236}">
-                <a16:creationId xmlns:a16="http://schemas.microsoft.com/office/drawing/2014/main" id="{98425207-6452-439D-826F-7498A21BAB6E}"/>
+                <a16:creationId xmlns:a16="http://schemas.microsoft.com/office/drawing/2014/main" id="{E13F5528-1D4F-4B80-843E-F809DC4DD992}"/>
               </a:ext>
             </a:extLst>
           </p:cNvPr>
@@ -4397,7 +4397,7 @@
           <p:cNvPr id="73" name="">
             <a:extLst xmlns:a="http://schemas.openxmlformats.org/drawingml/2006/main">
               <a:ext uri="{FF2B5EF4-FFF2-40B4-BE49-F238E27FC236}">
-                <a16:creationId xmlns:a16="http://schemas.microsoft.com/office/drawing/2014/main" id="{7E0A8367-A1E4-41B9-A4AD-86559861816F}"/>
+                <a16:creationId xmlns:a16="http://schemas.microsoft.com/office/drawing/2014/main" id="{42405C03-F36B-462A-8B4B-2443776D2B0B}"/>
               </a:ext>
             </a:extLst>
           </p:cNvPr>
@@ -4428,7 +4428,7 @@
           <p:cNvPr id="74" name="">
             <a:extLst xmlns:a="http://schemas.openxmlformats.org/drawingml/2006/main">
               <a:ext uri="{FF2B5EF4-FFF2-40B4-BE49-F238E27FC236}">
-                <a16:creationId xmlns:a16="http://schemas.microsoft.com/office/drawing/2014/main" id="{5F67134C-5F09-4106-81D5-AC4F6C751C34}"/>
+                <a16:creationId xmlns:a16="http://schemas.microsoft.com/office/drawing/2014/main" id="{C312080D-AA90-4575-BA9A-906DD97AB86B}"/>
               </a:ext>
             </a:extLst>
           </p:cNvPr>
@@ -4459,7 +4459,7 @@
           <p:cNvPr id="75" name="">
             <a:extLst xmlns:a="http://schemas.openxmlformats.org/drawingml/2006/main">
               <a:ext uri="{FF2B5EF4-FFF2-40B4-BE49-F238E27FC236}">
-                <a16:creationId xmlns:a16="http://schemas.microsoft.com/office/drawing/2014/main" id="{92EEF369-D6B6-4CA7-9EBF-70C5E83D2BA7}"/>
+                <a16:creationId xmlns:a16="http://schemas.microsoft.com/office/drawing/2014/main" id="{5A97C74A-ED51-421F-A53C-E8785572E658}"/>
               </a:ext>
             </a:extLst>
           </p:cNvPr>
@@ -4490,7 +4490,7 @@
           <p:cNvPr id="76" name="">
             <a:extLst xmlns:a="http://schemas.openxmlformats.org/drawingml/2006/main">
               <a:ext uri="{FF2B5EF4-FFF2-40B4-BE49-F238E27FC236}">
-                <a16:creationId xmlns:a16="http://schemas.microsoft.com/office/drawing/2014/main" id="{68678943-3CFD-4D03-8D1C-259123943601}"/>
+                <a16:creationId xmlns:a16="http://schemas.microsoft.com/office/drawing/2014/main" id="{6E5C52CE-B920-412A-90AD-17B76B0B05D5}"/>
               </a:ext>
             </a:extLst>
           </p:cNvPr>
@@ -4521,7 +4521,7 @@
           <p:cNvPr id="77" name="">
             <a:extLst xmlns:a="http://schemas.openxmlformats.org/drawingml/2006/main">
               <a:ext uri="{FF2B5EF4-FFF2-40B4-BE49-F238E27FC236}">
-                <a16:creationId xmlns:a16="http://schemas.microsoft.com/office/drawing/2014/main" id="{D8B27725-24BE-466F-8CF6-FCAB2F114592}"/>
+                <a16:creationId xmlns:a16="http://schemas.microsoft.com/office/drawing/2014/main" id="{8B76999B-74D8-4890-A717-70D3FCC180C6}"/>
               </a:ext>
             </a:extLst>
           </p:cNvPr>
@@ -4552,7 +4552,7 @@
           <p:cNvPr id="78" name="">
             <a:extLst xmlns:a="http://schemas.openxmlformats.org/drawingml/2006/main">
               <a:ext uri="{FF2B5EF4-FFF2-40B4-BE49-F238E27FC236}">
-                <a16:creationId xmlns:a16="http://schemas.microsoft.com/office/drawing/2014/main" id="{C3A40255-C5E3-4956-AE49-0FEBE3B11884}"/>
+                <a16:creationId xmlns:a16="http://schemas.microsoft.com/office/drawing/2014/main" id="{210A2A86-0A05-46BA-A28A-CC3FBF6F00F4}"/>
               </a:ext>
             </a:extLst>
           </p:cNvPr>
@@ -4583,7 +4583,7 @@
           <p:cNvPr id="79" name="">
             <a:extLst xmlns:a="http://schemas.openxmlformats.org/drawingml/2006/main">
               <a:ext uri="{FF2B5EF4-FFF2-40B4-BE49-F238E27FC236}">
-                <a16:creationId xmlns:a16="http://schemas.microsoft.com/office/drawing/2014/main" id="{170C9AEF-0300-4F86-9CB2-6D50044296D6}"/>
+                <a16:creationId xmlns:a16="http://schemas.microsoft.com/office/drawing/2014/main" id="{E72B156F-9477-4DB0-B391-47CC0C3E9D48}"/>
               </a:ext>
             </a:extLst>
           </p:cNvPr>
@@ -4614,7 +4614,7 @@
           <p:cNvPr id="80" name="">
             <a:extLst xmlns:a="http://schemas.openxmlformats.org/drawingml/2006/main">
               <a:ext uri="{FF2B5EF4-FFF2-40B4-BE49-F238E27FC236}">
-                <a16:creationId xmlns:a16="http://schemas.microsoft.com/office/drawing/2014/main" id="{E308BA93-5F46-408F-8E88-A44A69FA3D05}"/>
+                <a16:creationId xmlns:a16="http://schemas.microsoft.com/office/drawing/2014/main" id="{5BC75A7F-8442-4223-8787-68F408A0072E}"/>
               </a:ext>
             </a:extLst>
           </p:cNvPr>
@@ -4645,7 +4645,7 @@
           <p:cNvPr id="81" name="">
             <a:extLst xmlns:a="http://schemas.openxmlformats.org/drawingml/2006/main">
               <a:ext uri="{FF2B5EF4-FFF2-40B4-BE49-F238E27FC236}">
-                <a16:creationId xmlns:a16="http://schemas.microsoft.com/office/drawing/2014/main" id="{176C4677-6812-4597-9C37-6AB32EAA726C}"/>
+                <a16:creationId xmlns:a16="http://schemas.microsoft.com/office/drawing/2014/main" id="{360E7CBC-EB38-4023-96B5-4C195AB3E38F}"/>
               </a:ext>
             </a:extLst>
           </p:cNvPr>
@@ -4676,7 +4676,7 @@
           <p:cNvPr id="82" name="">
             <a:extLst xmlns:a="http://schemas.openxmlformats.org/drawingml/2006/main">
               <a:ext uri="{FF2B5EF4-FFF2-40B4-BE49-F238E27FC236}">
-                <a16:creationId xmlns:a16="http://schemas.microsoft.com/office/drawing/2014/main" id="{1BECC986-2BFA-4B8E-A11E-28D09F039042}"/>
+                <a16:creationId xmlns:a16="http://schemas.microsoft.com/office/drawing/2014/main" id="{DE124440-4DC6-47C4-B3BC-37FA649BA21C}"/>
               </a:ext>
             </a:extLst>
           </p:cNvPr>
@@ -4707,7 +4707,7 @@
           <p:cNvPr id="83" name="">
             <a:extLst xmlns:a="http://schemas.openxmlformats.org/drawingml/2006/main">
               <a:ext uri="{FF2B5EF4-FFF2-40B4-BE49-F238E27FC236}">
-                <a16:creationId xmlns:a16="http://schemas.microsoft.com/office/drawing/2014/main" id="{6AFFBB54-80D3-47A4-8E5F-29AC4509D3BE}"/>
+                <a16:creationId xmlns:a16="http://schemas.microsoft.com/office/drawing/2014/main" id="{2E7E1371-A235-4ABD-8C77-7A4311E4F556}"/>
               </a:ext>
             </a:extLst>
           </p:cNvPr>
@@ -4738,7 +4738,7 @@
           <p:cNvPr id="84" name="">
             <a:extLst xmlns:a="http://schemas.openxmlformats.org/drawingml/2006/main">
               <a:ext uri="{FF2B5EF4-FFF2-40B4-BE49-F238E27FC236}">
-                <a16:creationId xmlns:a16="http://schemas.microsoft.com/office/drawing/2014/main" id="{893FD1F8-26EB-4DF3-9553-DBDD5155AB76}"/>
+                <a16:creationId xmlns:a16="http://schemas.microsoft.com/office/drawing/2014/main" id="{40379318-DE76-437D-BACC-ACA3A0A67BF9}"/>
               </a:ext>
             </a:extLst>
           </p:cNvPr>
@@ -4769,7 +4769,7 @@
           <p:cNvPr id="85" name="">
             <a:extLst xmlns:a="http://schemas.openxmlformats.org/drawingml/2006/main">
               <a:ext uri="{FF2B5EF4-FFF2-40B4-BE49-F238E27FC236}">
-                <a16:creationId xmlns:a16="http://schemas.microsoft.com/office/drawing/2014/main" id="{B5B59C6D-8ED5-451C-A583-5ED28DF4242D}"/>
+                <a16:creationId xmlns:a16="http://schemas.microsoft.com/office/drawing/2014/main" id="{CC9E4D59-E475-4B57-BD55-BE445E15B309}"/>
               </a:ext>
             </a:extLst>
           </p:cNvPr>
@@ -4800,7 +4800,7 @@
           <p:cNvPr id="86" name="">
             <a:extLst xmlns:a="http://schemas.openxmlformats.org/drawingml/2006/main">
               <a:ext uri="{FF2B5EF4-FFF2-40B4-BE49-F238E27FC236}">
-                <a16:creationId xmlns:a16="http://schemas.microsoft.com/office/drawing/2014/main" id="{A2E8EB21-6A15-4E9D-BE6B-DDDE76FD77F7}"/>
+                <a16:creationId xmlns:a16="http://schemas.microsoft.com/office/drawing/2014/main" id="{E049BB0D-2BD6-46D7-8809-2DD3331FCDEA}"/>
               </a:ext>
             </a:extLst>
           </p:cNvPr>
@@ -4831,7 +4831,7 @@
           <p:cNvPr id="87" name="">
             <a:extLst xmlns:a="http://schemas.openxmlformats.org/drawingml/2006/main">
               <a:ext uri="{FF2B5EF4-FFF2-40B4-BE49-F238E27FC236}">
-                <a16:creationId xmlns:a16="http://schemas.microsoft.com/office/drawing/2014/main" id="{54802619-A071-4B07-8FF4-70921C67F462}"/>
+                <a16:creationId xmlns:a16="http://schemas.microsoft.com/office/drawing/2014/main" id="{98B69469-7245-4136-BBBD-1F1E22104A16}"/>
               </a:ext>
             </a:extLst>
           </p:cNvPr>
@@ -4862,7 +4862,7 @@
           <p:cNvPr id="88" name="">
             <a:extLst xmlns:a="http://schemas.openxmlformats.org/drawingml/2006/main">
               <a:ext uri="{FF2B5EF4-FFF2-40B4-BE49-F238E27FC236}">
-                <a16:creationId xmlns:a16="http://schemas.microsoft.com/office/drawing/2014/main" id="{DB2582A1-6C22-4C1B-8B3F-4B5E695866C1}"/>
+                <a16:creationId xmlns:a16="http://schemas.microsoft.com/office/drawing/2014/main" id="{C0987CFA-C5C8-4FEE-9AD3-72D379CE9778}"/>
               </a:ext>
             </a:extLst>
           </p:cNvPr>
@@ -4893,7 +4893,7 @@
           <p:cNvPr id="89" name="">
             <a:extLst xmlns:a="http://schemas.openxmlformats.org/drawingml/2006/main">
               <a:ext uri="{FF2B5EF4-FFF2-40B4-BE49-F238E27FC236}">
-                <a16:creationId xmlns:a16="http://schemas.microsoft.com/office/drawing/2014/main" id="{804E4F7C-9C32-47E1-96DB-B758C6291128}"/>
+                <a16:creationId xmlns:a16="http://schemas.microsoft.com/office/drawing/2014/main" id="{DA130846-4F7D-44D5-83CE-0A251D31657A}"/>
               </a:ext>
             </a:extLst>
           </p:cNvPr>
@@ -4924,7 +4924,7 @@
           <p:cNvPr id="90" name="">
             <a:extLst xmlns:a="http://schemas.openxmlformats.org/drawingml/2006/main">
               <a:ext uri="{FF2B5EF4-FFF2-40B4-BE49-F238E27FC236}">
-                <a16:creationId xmlns:a16="http://schemas.microsoft.com/office/drawing/2014/main" id="{B5ED0CC0-875C-4B59-B060-2F8068800940}"/>
+                <a16:creationId xmlns:a16="http://schemas.microsoft.com/office/drawing/2014/main" id="{FA90892A-3BFC-4258-A4D8-E7D279F63F25}"/>
               </a:ext>
             </a:extLst>
           </p:cNvPr>
@@ -4969,7 +4969,7 @@
           <p:cNvPr id="91" name="">
             <a:extLst xmlns:a="http://schemas.openxmlformats.org/drawingml/2006/main">
               <a:ext uri="{FF2B5EF4-FFF2-40B4-BE49-F238E27FC236}">
-                <a16:creationId xmlns:a16="http://schemas.microsoft.com/office/drawing/2014/main" id="{6309DAE6-DD40-40BE-B25D-C1C14C21285A}"/>
+                <a16:creationId xmlns:a16="http://schemas.microsoft.com/office/drawing/2014/main" id="{92BA6465-E116-4E13-8A96-5925D84CDDE9}"/>
               </a:ext>
             </a:extLst>
           </p:cNvPr>
@@ -5000,7 +5000,7 @@
           <p:cNvPr id="92" name="">
             <a:extLst xmlns:a="http://schemas.openxmlformats.org/drawingml/2006/main">
               <a:ext uri="{FF2B5EF4-FFF2-40B4-BE49-F238E27FC236}">
-                <a16:creationId xmlns:a16="http://schemas.microsoft.com/office/drawing/2014/main" id="{9C09029A-7658-4712-A3D3-B61DB82BCB6B}"/>
+                <a16:creationId xmlns:a16="http://schemas.microsoft.com/office/drawing/2014/main" id="{C2FD64EB-97A4-4C19-84F2-F1981F534C30}"/>
               </a:ext>
             </a:extLst>
           </p:cNvPr>
@@ -5045,7 +5045,7 @@
           <p:cNvPr id="93" name="">
             <a:extLst xmlns:a="http://schemas.openxmlformats.org/drawingml/2006/main">
               <a:ext uri="{FF2B5EF4-FFF2-40B4-BE49-F238E27FC236}">
-                <a16:creationId xmlns:a16="http://schemas.microsoft.com/office/drawing/2014/main" id="{9F01E4C0-D79B-4C58-886F-627F1D50884E}"/>
+                <a16:creationId xmlns:a16="http://schemas.microsoft.com/office/drawing/2014/main" id="{540015CC-A972-43AA-891F-2EC1F91D7CFF}"/>
               </a:ext>
             </a:extLst>
           </p:cNvPr>
@@ -5090,7 +5090,7 @@
           <p:cNvPr id="94" name="">
             <a:extLst xmlns:a="http://schemas.openxmlformats.org/drawingml/2006/main">
               <a:ext uri="{FF2B5EF4-FFF2-40B4-BE49-F238E27FC236}">
-                <a16:creationId xmlns:a16="http://schemas.microsoft.com/office/drawing/2014/main" id="{7BF83968-6D21-453C-AE88-6B98A3D11E61}"/>
+                <a16:creationId xmlns:a16="http://schemas.microsoft.com/office/drawing/2014/main" id="{3DD6CD9D-FB83-4E98-AEF3-5958428ADEBD}"/>
               </a:ext>
             </a:extLst>
           </p:cNvPr>
@@ -5121,7 +5121,7 @@
           <p:cNvPr id="95" name="">
             <a:extLst xmlns:a="http://schemas.openxmlformats.org/drawingml/2006/main">
               <a:ext uri="{FF2B5EF4-FFF2-40B4-BE49-F238E27FC236}">
-                <a16:creationId xmlns:a16="http://schemas.microsoft.com/office/drawing/2014/main" id="{D6A3C53D-338A-4F0B-A746-2D3ADBB34B62}"/>
+                <a16:creationId xmlns:a16="http://schemas.microsoft.com/office/drawing/2014/main" id="{CD5DFE11-0E95-43A3-8151-A9A8A8AB918A}"/>
               </a:ext>
             </a:extLst>
           </p:cNvPr>
@@ -5166,7 +5166,7 @@
           <p:cNvPr id="96" name="">
             <a:extLst xmlns:a="http://schemas.openxmlformats.org/drawingml/2006/main">
               <a:ext uri="{FF2B5EF4-FFF2-40B4-BE49-F238E27FC236}">
-                <a16:creationId xmlns:a16="http://schemas.microsoft.com/office/drawing/2014/main" id="{3D41C155-2DD7-4E6B-936E-CBDB7866965F}"/>
+                <a16:creationId xmlns:a16="http://schemas.microsoft.com/office/drawing/2014/main" id="{5BA68787-DB19-428E-9DBD-2721CA205659}"/>
               </a:ext>
             </a:extLst>
           </p:cNvPr>
@@ -5211,7 +5211,7 @@
           <p:cNvPr id="97" name="">
             <a:extLst xmlns:a="http://schemas.openxmlformats.org/drawingml/2006/main">
               <a:ext uri="{FF2B5EF4-FFF2-40B4-BE49-F238E27FC236}">
-                <a16:creationId xmlns:a16="http://schemas.microsoft.com/office/drawing/2014/main" id="{E6986CE9-0B16-40D2-823A-677F34A382D2}"/>
+                <a16:creationId xmlns:a16="http://schemas.microsoft.com/office/drawing/2014/main" id="{246A44D8-225A-49A4-8870-BA1B8C1EF3DB}"/>
               </a:ext>
             </a:extLst>
           </p:cNvPr>
@@ -5242,7 +5242,7 @@
           <p:cNvPr id="98" name="">
             <a:extLst xmlns:a="http://schemas.openxmlformats.org/drawingml/2006/main">
               <a:ext uri="{FF2B5EF4-FFF2-40B4-BE49-F238E27FC236}">
-                <a16:creationId xmlns:a16="http://schemas.microsoft.com/office/drawing/2014/main" id="{6C9FB40A-95F0-4263-B41A-22E868E5B8EB}"/>
+                <a16:creationId xmlns:a16="http://schemas.microsoft.com/office/drawing/2014/main" id="{98F4C3EB-DF58-4AB8-B320-F94BC4C28FB1}"/>
               </a:ext>
             </a:extLst>
           </p:cNvPr>
@@ -5287,7 +5287,7 @@
           <p:cNvPr id="99" name="">
             <a:extLst xmlns:a="http://schemas.openxmlformats.org/drawingml/2006/main">
               <a:ext uri="{FF2B5EF4-FFF2-40B4-BE49-F238E27FC236}">
-                <a16:creationId xmlns:a16="http://schemas.microsoft.com/office/drawing/2014/main" id="{5DEF4BEA-E8D5-4197-B27F-E7577631410D}"/>
+                <a16:creationId xmlns:a16="http://schemas.microsoft.com/office/drawing/2014/main" id="{F3290339-5B9E-4CE1-ABF0-4F635C09144F}"/>
               </a:ext>
             </a:extLst>
           </p:cNvPr>
@@ -5332,7 +5332,7 @@
           <p:cNvPr id="100" name="">
             <a:extLst xmlns:a="http://schemas.openxmlformats.org/drawingml/2006/main">
               <a:ext uri="{FF2B5EF4-FFF2-40B4-BE49-F238E27FC236}">
-                <a16:creationId xmlns:a16="http://schemas.microsoft.com/office/drawing/2014/main" id="{8D508288-78B6-47E2-81E3-FC75ABA76E63}"/>
+                <a16:creationId xmlns:a16="http://schemas.microsoft.com/office/drawing/2014/main" id="{64F4AD74-46DC-4621-84AD-94228E561973}"/>
               </a:ext>
             </a:extLst>
           </p:cNvPr>
@@ -5363,7 +5363,7 @@
           <p:cNvPr id="101" name="">
             <a:extLst xmlns:a="http://schemas.openxmlformats.org/drawingml/2006/main">
               <a:ext uri="{FF2B5EF4-FFF2-40B4-BE49-F238E27FC236}">
-                <a16:creationId xmlns:a16="http://schemas.microsoft.com/office/drawing/2014/main" id="{CA0ED003-F1A0-474A-B19F-7AF21DB456F8}"/>
+                <a16:creationId xmlns:a16="http://schemas.microsoft.com/office/drawing/2014/main" id="{FB879A16-FB4C-44B3-876B-915D887BE03A}"/>
               </a:ext>
             </a:extLst>
           </p:cNvPr>
@@ -5408,7 +5408,7 @@
           <p:cNvPr id="102" name="">
             <a:extLst xmlns:a="http://schemas.openxmlformats.org/drawingml/2006/main">
               <a:ext uri="{FF2B5EF4-FFF2-40B4-BE49-F238E27FC236}">
-                <a16:creationId xmlns:a16="http://schemas.microsoft.com/office/drawing/2014/main" id="{041A6C5C-118A-4A9F-81EB-E15DB0D9A3AF}"/>
+                <a16:creationId xmlns:a16="http://schemas.microsoft.com/office/drawing/2014/main" id="{0951FA08-DD20-4C96-9959-D5DC9A61E075}"/>
               </a:ext>
             </a:extLst>
           </p:cNvPr>
@@ -5453,7 +5453,7 @@
           <p:cNvPr id="103" name="">
             <a:extLst xmlns:a="http://schemas.openxmlformats.org/drawingml/2006/main">
               <a:ext uri="{FF2B5EF4-FFF2-40B4-BE49-F238E27FC236}">
-                <a16:creationId xmlns:a16="http://schemas.microsoft.com/office/drawing/2014/main" id="{80902087-114F-4EB0-A45C-F116719F069F}"/>
+                <a16:creationId xmlns:a16="http://schemas.microsoft.com/office/drawing/2014/main" id="{3265448C-2443-4D6E-90D2-CCB55E24E191}"/>
               </a:ext>
             </a:extLst>
           </p:cNvPr>
@@ -5498,7 +5498,7 @@
           <p:cNvPr id="104" name="">
             <a:extLst xmlns:a="http://schemas.openxmlformats.org/drawingml/2006/main">
               <a:ext uri="{FF2B5EF4-FFF2-40B4-BE49-F238E27FC236}">
-                <a16:creationId xmlns:a16="http://schemas.microsoft.com/office/drawing/2014/main" id="{F86E5D52-F7C3-4D21-AC0A-DDAB010A93C4}"/>
+                <a16:creationId xmlns:a16="http://schemas.microsoft.com/office/drawing/2014/main" id="{CD1BAA83-625D-46D0-868B-4B53B63F7164}"/>
               </a:ext>
             </a:extLst>
           </p:cNvPr>
@@ -5529,7 +5529,7 @@
           <p:cNvPr id="105" name="">
             <a:extLst xmlns:a="http://schemas.openxmlformats.org/drawingml/2006/main">
               <a:ext uri="{FF2B5EF4-FFF2-40B4-BE49-F238E27FC236}">
-                <a16:creationId xmlns:a16="http://schemas.microsoft.com/office/drawing/2014/main" id="{BEEBA6F6-1D7B-47B1-A6AC-0644DEF75868}"/>
+                <a16:creationId xmlns:a16="http://schemas.microsoft.com/office/drawing/2014/main" id="{BAAD0194-138F-4BB1-B11C-8F988BE31471}"/>
               </a:ext>
             </a:extLst>
           </p:cNvPr>
@@ -5574,7 +5574,7 @@
           <p:cNvPr id="106" name="">
             <a:extLst xmlns:a="http://schemas.openxmlformats.org/drawingml/2006/main">
               <a:ext uri="{FF2B5EF4-FFF2-40B4-BE49-F238E27FC236}">
-                <a16:creationId xmlns:a16="http://schemas.microsoft.com/office/drawing/2014/main" id="{560E083E-0E84-467F-A07D-5A9B3272089D}"/>
+                <a16:creationId xmlns:a16="http://schemas.microsoft.com/office/drawing/2014/main" id="{69B471F6-2400-4F4D-871F-BCFEC25AB4C1}"/>
               </a:ext>
             </a:extLst>
           </p:cNvPr>
@@ -5617,7 +5617,7 @@
     </p:spTree>
     <p:extLst>
       <p:ext uri="{BB962C8B-B14F-4D97-AF65-F5344CB8AC3E}">
-        <p14:creationId xmlns:p14="http://schemas.microsoft.com/office/powerpoint/2010/main" val="29091666"/>
+        <p14:creationId xmlns:p14="http://schemas.microsoft.com/office/powerpoint/2010/main" val="824586102"/>
       </p:ext>
     </p:extLst>
   </p:cSld>
@@ -5641,7 +5641,7 @@
           <p:cNvPr id="40" name="">
             <a:extLst xmlns:a="http://schemas.openxmlformats.org/drawingml/2006/main">
               <a:ext uri="{FF2B5EF4-FFF2-40B4-BE49-F238E27FC236}">
-                <a16:creationId xmlns:a16="http://schemas.microsoft.com/office/drawing/2014/main" id="{0211FBEB-D7F6-465A-8191-91E8E1BF7DA4}"/>
+                <a16:creationId xmlns:a16="http://schemas.microsoft.com/office/drawing/2014/main" id="{C035169A-F1AC-441F-BAE8-9E8647EC81BE}"/>
               </a:ext>
             </a:extLst>
           </p:cNvPr>
@@ -5672,7 +5672,7 @@
           <p:cNvPr id="2" name="">
             <a:extLst xmlns:a="http://schemas.openxmlformats.org/drawingml/2006/main">
               <a:ext uri="{FF2B5EF4-FFF2-40B4-BE49-F238E27FC236}">
-                <a16:creationId xmlns:a16="http://schemas.microsoft.com/office/drawing/2014/main" id="{CA65E09E-9E60-4792-A638-5AC6F4D83A5B}"/>
+                <a16:creationId xmlns:a16="http://schemas.microsoft.com/office/drawing/2014/main" id="{AD8D44C1-7F3A-420F-AB55-EA699D6F692C}"/>
               </a:ext>
             </a:extLst>
           </p:cNvPr>
@@ -5717,7 +5717,7 @@
           <p:cNvPr id="3" name="">
             <a:extLst xmlns:a="http://schemas.openxmlformats.org/drawingml/2006/main">
               <a:ext uri="{FF2B5EF4-FFF2-40B4-BE49-F238E27FC236}">
-                <a16:creationId xmlns:a16="http://schemas.microsoft.com/office/drawing/2014/main" id="{74C04A81-5228-41E5-8478-DB8ABA91D1CC}"/>
+                <a16:creationId xmlns:a16="http://schemas.microsoft.com/office/drawing/2014/main" id="{B1BFE8A7-BEA0-4F0E-98AC-298B4A56065B}"/>
               </a:ext>
             </a:extLst>
           </p:cNvPr>
@@ -5762,7 +5762,7 @@
           <p:cNvPr id="4" name="">
             <a:extLst xmlns:a="http://schemas.openxmlformats.org/drawingml/2006/main">
               <a:ext uri="{FF2B5EF4-FFF2-40B4-BE49-F238E27FC236}">
-                <a16:creationId xmlns:a16="http://schemas.microsoft.com/office/drawing/2014/main" id="{A5C17438-76AE-42AF-B612-721A25CAE4D0}"/>
+                <a16:creationId xmlns:a16="http://schemas.microsoft.com/office/drawing/2014/main" id="{BD48A940-B7D0-4DA1-B599-6D6D6989A113}"/>
               </a:ext>
             </a:extLst>
           </p:cNvPr>
@@ -5807,7 +5807,7 @@
           <p:cNvPr id="5" name="">
             <a:extLst xmlns:a="http://schemas.openxmlformats.org/drawingml/2006/main">
               <a:ext uri="{FF2B5EF4-FFF2-40B4-BE49-F238E27FC236}">
-                <a16:creationId xmlns:a16="http://schemas.microsoft.com/office/drawing/2014/main" id="{AC3A1500-F27E-442C-952F-B5EDAF2645A6}"/>
+                <a16:creationId xmlns:a16="http://schemas.microsoft.com/office/drawing/2014/main" id="{244F980D-245F-4443-B083-A6A6F774BC32}"/>
               </a:ext>
             </a:extLst>
           </p:cNvPr>
@@ -5838,7 +5838,7 @@
           <p:cNvPr id="6" name="">
             <a:extLst xmlns:a="http://schemas.openxmlformats.org/drawingml/2006/main">
               <a:ext uri="{FF2B5EF4-FFF2-40B4-BE49-F238E27FC236}">
-                <a16:creationId xmlns:a16="http://schemas.microsoft.com/office/drawing/2014/main" id="{E1AC0D8C-23E2-49E6-94BD-4A6A55B2153B}"/>
+                <a16:creationId xmlns:a16="http://schemas.microsoft.com/office/drawing/2014/main" id="{300FDCBE-8DF9-4AD0-B450-CBFF3048001F}"/>
               </a:ext>
             </a:extLst>
           </p:cNvPr>
@@ -5869,7 +5869,7 @@
           <p:cNvPr id="7" name="">
             <a:extLst xmlns:a="http://schemas.openxmlformats.org/drawingml/2006/main">
               <a:ext uri="{FF2B5EF4-FFF2-40B4-BE49-F238E27FC236}">
-                <a16:creationId xmlns:a16="http://schemas.microsoft.com/office/drawing/2014/main" id="{EE10CC67-8322-4A1A-BC69-12ABAD571179}"/>
+                <a16:creationId xmlns:a16="http://schemas.microsoft.com/office/drawing/2014/main" id="{E218CFAE-8C82-4520-AA67-748AC87B187A}"/>
               </a:ext>
             </a:extLst>
           </p:cNvPr>
@@ -5914,7 +5914,7 @@
           <p:cNvPr id="8" name="">
             <a:extLst xmlns:a="http://schemas.openxmlformats.org/drawingml/2006/main">
               <a:ext uri="{FF2B5EF4-FFF2-40B4-BE49-F238E27FC236}">
-                <a16:creationId xmlns:a16="http://schemas.microsoft.com/office/drawing/2014/main" id="{B2908A4E-73F0-426F-8E50-59D409C0845A}"/>
+                <a16:creationId xmlns:a16="http://schemas.microsoft.com/office/drawing/2014/main" id="{235A4317-90F8-4FB4-B1F8-B281C5F7433D}"/>
               </a:ext>
             </a:extLst>
           </p:cNvPr>
@@ -5959,7 +5959,7 @@
           <p:cNvPr id="9" name="">
             <a:extLst xmlns:a="http://schemas.openxmlformats.org/drawingml/2006/main">
               <a:ext uri="{FF2B5EF4-FFF2-40B4-BE49-F238E27FC236}">
-                <a16:creationId xmlns:a16="http://schemas.microsoft.com/office/drawing/2014/main" id="{EA420DF0-D9F9-476C-8CE3-371B4947FCA3}"/>
+                <a16:creationId xmlns:a16="http://schemas.microsoft.com/office/drawing/2014/main" id="{3DC31213-34C8-459C-BB1C-72ABFCDE8F02}"/>
               </a:ext>
             </a:extLst>
           </p:cNvPr>
@@ -5990,7 +5990,7 @@
           <p:cNvPr id="10" name="">
             <a:extLst xmlns:a="http://schemas.openxmlformats.org/drawingml/2006/main">
               <a:ext uri="{FF2B5EF4-FFF2-40B4-BE49-F238E27FC236}">
-                <a16:creationId xmlns:a16="http://schemas.microsoft.com/office/drawing/2014/main" id="{A3A5A692-6D85-4011-A665-1CE5BCC21B5B}"/>
+                <a16:creationId xmlns:a16="http://schemas.microsoft.com/office/drawing/2014/main" id="{CB71D88C-298C-40E3-942D-73D7603071F0}"/>
               </a:ext>
             </a:extLst>
           </p:cNvPr>
@@ -6035,7 +6035,7 @@
           <p:cNvPr id="11" name="">
             <a:extLst xmlns:a="http://schemas.openxmlformats.org/drawingml/2006/main">
               <a:ext uri="{FF2B5EF4-FFF2-40B4-BE49-F238E27FC236}">
-                <a16:creationId xmlns:a16="http://schemas.microsoft.com/office/drawing/2014/main" id="{F78D8246-6BA3-46C1-890D-50E0713DF9FA}"/>
+                <a16:creationId xmlns:a16="http://schemas.microsoft.com/office/drawing/2014/main" id="{82335B13-6CF1-474A-A59B-BFFDBAB828FE}"/>
               </a:ext>
             </a:extLst>
           </p:cNvPr>
@@ -6070,7 +6070,7 @@
           <p:cNvPr id="12" name="">
             <a:extLst xmlns:a="http://schemas.openxmlformats.org/drawingml/2006/main">
               <a:ext uri="{FF2B5EF4-FFF2-40B4-BE49-F238E27FC236}">
-                <a16:creationId xmlns:a16="http://schemas.microsoft.com/office/drawing/2014/main" id="{16E7ACAE-CD9B-4307-8D49-C49E78A4E49A}"/>
+                <a16:creationId xmlns:a16="http://schemas.microsoft.com/office/drawing/2014/main" id="{30A32916-2557-45E7-873C-EA62F926AD89}"/>
               </a:ext>
             </a:extLst>
           </p:cNvPr>
@@ -6115,7 +6115,7 @@
           <p:cNvPr id="13" name="">
             <a:extLst xmlns:a="http://schemas.openxmlformats.org/drawingml/2006/main">
               <a:ext uri="{FF2B5EF4-FFF2-40B4-BE49-F238E27FC236}">
-                <a16:creationId xmlns:a16="http://schemas.microsoft.com/office/drawing/2014/main" id="{D7450819-BF22-4FE4-BFF9-56ADFD39210D}"/>
+                <a16:creationId xmlns:a16="http://schemas.microsoft.com/office/drawing/2014/main" id="{94CA640F-0087-4438-A87D-931ABC3B8127}"/>
               </a:ext>
             </a:extLst>
           </p:cNvPr>
@@ -6160,7 +6160,7 @@
           <p:cNvPr id="14" name="">
             <a:extLst xmlns:a="http://schemas.openxmlformats.org/drawingml/2006/main">
               <a:ext uri="{FF2B5EF4-FFF2-40B4-BE49-F238E27FC236}">
-                <a16:creationId xmlns:a16="http://schemas.microsoft.com/office/drawing/2014/main" id="{94DDB6BA-8487-4859-B9F2-55038E8C9D32}"/>
+                <a16:creationId xmlns:a16="http://schemas.microsoft.com/office/drawing/2014/main" id="{BC5593C5-B674-4A73-ACC4-396B18483D5D}"/>
               </a:ext>
             </a:extLst>
           </p:cNvPr>
@@ -6195,7 +6195,7 @@
           <p:cNvPr id="15" name="">
             <a:extLst xmlns:a="http://schemas.openxmlformats.org/drawingml/2006/main">
               <a:ext uri="{FF2B5EF4-FFF2-40B4-BE49-F238E27FC236}">
-                <a16:creationId xmlns:a16="http://schemas.microsoft.com/office/drawing/2014/main" id="{BD6943AC-F4A0-432D-A5F7-365F78A9A163}"/>
+                <a16:creationId xmlns:a16="http://schemas.microsoft.com/office/drawing/2014/main" id="{22B4FD67-82E9-4AF7-A901-98319ACA4CAF}"/>
               </a:ext>
             </a:extLst>
           </p:cNvPr>
@@ -6240,7 +6240,7 @@
           <p:cNvPr id="16" name="">
             <a:extLst xmlns:a="http://schemas.openxmlformats.org/drawingml/2006/main">
               <a:ext uri="{FF2B5EF4-FFF2-40B4-BE49-F238E27FC236}">
-                <a16:creationId xmlns:a16="http://schemas.microsoft.com/office/drawing/2014/main" id="{0EA8D713-175D-4E83-B0CC-12AAC139276A}"/>
+                <a16:creationId xmlns:a16="http://schemas.microsoft.com/office/drawing/2014/main" id="{52CE26A3-0A24-4F72-9351-CB1406972AA9}"/>
               </a:ext>
             </a:extLst>
           </p:cNvPr>
@@ -6285,7 +6285,7 @@
           <p:cNvPr id="17" name="">
             <a:extLst xmlns:a="http://schemas.openxmlformats.org/drawingml/2006/main">
               <a:ext uri="{FF2B5EF4-FFF2-40B4-BE49-F238E27FC236}">
-                <a16:creationId xmlns:a16="http://schemas.microsoft.com/office/drawing/2014/main" id="{F2E8DA5E-4CBC-435B-BFB4-15D16E6D580D}"/>
+                <a16:creationId xmlns:a16="http://schemas.microsoft.com/office/drawing/2014/main" id="{66A83E12-5A8B-4294-AF5F-490778362E83}"/>
               </a:ext>
             </a:extLst>
           </p:cNvPr>
@@ -6320,7 +6320,7 @@
           <p:cNvPr id="18" name="">
             <a:extLst xmlns:a="http://schemas.openxmlformats.org/drawingml/2006/main">
               <a:ext uri="{FF2B5EF4-FFF2-40B4-BE49-F238E27FC236}">
-                <a16:creationId xmlns:a16="http://schemas.microsoft.com/office/drawing/2014/main" id="{6F900B4B-D616-43E8-8F23-5C49DC3B546A}"/>
+                <a16:creationId xmlns:a16="http://schemas.microsoft.com/office/drawing/2014/main" id="{749ADCFE-F1C6-4D47-B723-EE75B6AF5D0C}"/>
               </a:ext>
             </a:extLst>
           </p:cNvPr>
@@ -6365,7 +6365,7 @@
           <p:cNvPr id="19" name="">
             <a:extLst xmlns:a="http://schemas.openxmlformats.org/drawingml/2006/main">
               <a:ext uri="{FF2B5EF4-FFF2-40B4-BE49-F238E27FC236}">
-                <a16:creationId xmlns:a16="http://schemas.microsoft.com/office/drawing/2014/main" id="{577BDB45-75B1-4EC8-A643-D066EF27F3B8}"/>
+                <a16:creationId xmlns:a16="http://schemas.microsoft.com/office/drawing/2014/main" id="{8D81C999-7D10-4C00-A915-05CB4F8AA178}"/>
               </a:ext>
             </a:extLst>
           </p:cNvPr>
@@ -6410,7 +6410,7 @@
           <p:cNvPr id="20" name="">
             <a:extLst xmlns:a="http://schemas.openxmlformats.org/drawingml/2006/main">
               <a:ext uri="{FF2B5EF4-FFF2-40B4-BE49-F238E27FC236}">
-                <a16:creationId xmlns:a16="http://schemas.microsoft.com/office/drawing/2014/main" id="{A3FF411A-C2B7-495A-9BFD-289BE5D6FC61}"/>
+                <a16:creationId xmlns:a16="http://schemas.microsoft.com/office/drawing/2014/main" id="{EB13FB7C-A040-46C6-BC50-061D9D27E221}"/>
               </a:ext>
             </a:extLst>
           </p:cNvPr>
@@ -6445,7 +6445,7 @@
           <p:cNvPr id="21" name="">
             <a:extLst xmlns:a="http://schemas.openxmlformats.org/drawingml/2006/main">
               <a:ext uri="{FF2B5EF4-FFF2-40B4-BE49-F238E27FC236}">
-                <a16:creationId xmlns:a16="http://schemas.microsoft.com/office/drawing/2014/main" id="{BAB80B7E-8961-4306-A71B-BAF46EC2A96E}"/>
+                <a16:creationId xmlns:a16="http://schemas.microsoft.com/office/drawing/2014/main" id="{280949BD-2A39-4959-9EBC-5378A0662DAC}"/>
               </a:ext>
             </a:extLst>
           </p:cNvPr>
@@ -6490,7 +6490,7 @@
           <p:cNvPr id="22" name="">
             <a:extLst xmlns:a="http://schemas.openxmlformats.org/drawingml/2006/main">
               <a:ext uri="{FF2B5EF4-FFF2-40B4-BE49-F238E27FC236}">
-                <a16:creationId xmlns:a16="http://schemas.microsoft.com/office/drawing/2014/main" id="{35AC895B-0309-4882-9F51-B1C6D1236794}"/>
+                <a16:creationId xmlns:a16="http://schemas.microsoft.com/office/drawing/2014/main" id="{A4D03F58-28EB-4962-874D-16FD4EB052EA}"/>
               </a:ext>
             </a:extLst>
           </p:cNvPr>
@@ -6535,7 +6535,7 @@
           <p:cNvPr id="23" name="">
             <a:extLst xmlns:a="http://schemas.openxmlformats.org/drawingml/2006/main">
               <a:ext uri="{FF2B5EF4-FFF2-40B4-BE49-F238E27FC236}">
-                <a16:creationId xmlns:a16="http://schemas.microsoft.com/office/drawing/2014/main" id="{FFF5ACE6-3DB9-4C78-93A1-5358C740F596}"/>
+                <a16:creationId xmlns:a16="http://schemas.microsoft.com/office/drawing/2014/main" id="{D14449C7-6C9D-409A-9B25-9779E929FA36}"/>
               </a:ext>
             </a:extLst>
           </p:cNvPr>
@@ -6570,7 +6570,7 @@
           <p:cNvPr id="24" name="">
             <a:extLst xmlns:a="http://schemas.openxmlformats.org/drawingml/2006/main">
               <a:ext uri="{FF2B5EF4-FFF2-40B4-BE49-F238E27FC236}">
-                <a16:creationId xmlns:a16="http://schemas.microsoft.com/office/drawing/2014/main" id="{CB2E9192-57E3-433A-B722-4224F119E868}"/>
+                <a16:creationId xmlns:a16="http://schemas.microsoft.com/office/drawing/2014/main" id="{43071501-9146-402E-A56A-212F580C307C}"/>
               </a:ext>
             </a:extLst>
           </p:cNvPr>
@@ -6601,7 +6601,7 @@
           <p:cNvPr id="25" name="">
             <a:extLst xmlns:a="http://schemas.openxmlformats.org/drawingml/2006/main">
               <a:ext uri="{FF2B5EF4-FFF2-40B4-BE49-F238E27FC236}">
-                <a16:creationId xmlns:a16="http://schemas.microsoft.com/office/drawing/2014/main" id="{4B678B4F-26AF-4FD9-A97F-2EDD4631F10F}"/>
+                <a16:creationId xmlns:a16="http://schemas.microsoft.com/office/drawing/2014/main" id="{F124EC10-2096-4A92-A564-EB0B30F8098A}"/>
               </a:ext>
             </a:extLst>
           </p:cNvPr>
@@ -6646,7 +6646,7 @@
           <p:cNvPr id="26" name="">
             <a:extLst xmlns:a="http://schemas.openxmlformats.org/drawingml/2006/main">
               <a:ext uri="{FF2B5EF4-FFF2-40B4-BE49-F238E27FC236}">
-                <a16:creationId xmlns:a16="http://schemas.microsoft.com/office/drawing/2014/main" id="{59673FC9-8CA6-4CCB-A9C9-B6510487485D}"/>
+                <a16:creationId xmlns:a16="http://schemas.microsoft.com/office/drawing/2014/main" id="{270A7652-1674-4A08-A521-11E28402E2CA}"/>
               </a:ext>
             </a:extLst>
           </p:cNvPr>
@@ -6691,7 +6691,7 @@
           <p:cNvPr id="27" name="">
             <a:extLst xmlns:a="http://schemas.openxmlformats.org/drawingml/2006/main">
               <a:ext uri="{FF2B5EF4-FFF2-40B4-BE49-F238E27FC236}">
-                <a16:creationId xmlns:a16="http://schemas.microsoft.com/office/drawing/2014/main" id="{0F0459F7-F74E-460A-A7B1-31CB28CAA18E}"/>
+                <a16:creationId xmlns:a16="http://schemas.microsoft.com/office/drawing/2014/main" id="{7475B939-D83A-482E-AE28-B2BA9315D20B}"/>
               </a:ext>
             </a:extLst>
           </p:cNvPr>
@@ -6726,7 +6726,7 @@
           <p:cNvPr id="28" name="">
             <a:extLst xmlns:a="http://schemas.openxmlformats.org/drawingml/2006/main">
               <a:ext uri="{FF2B5EF4-FFF2-40B4-BE49-F238E27FC236}">
-                <a16:creationId xmlns:a16="http://schemas.microsoft.com/office/drawing/2014/main" id="{6DD939B7-4E54-4EB8-9112-C1D14A1C6753}"/>
+                <a16:creationId xmlns:a16="http://schemas.microsoft.com/office/drawing/2014/main" id="{85F4F6D9-188E-4C1B-B57A-61A4634A775C}"/>
               </a:ext>
             </a:extLst>
           </p:cNvPr>
@@ -6757,7 +6757,7 @@
           <p:cNvPr id="29" name="">
             <a:extLst xmlns:a="http://schemas.openxmlformats.org/drawingml/2006/main">
               <a:ext uri="{FF2B5EF4-FFF2-40B4-BE49-F238E27FC236}">
-                <a16:creationId xmlns:a16="http://schemas.microsoft.com/office/drawing/2014/main" id="{8ED963E3-DE49-43C0-839B-AD06135FBE30}"/>
+                <a16:creationId xmlns:a16="http://schemas.microsoft.com/office/drawing/2014/main" id="{C31431B7-FA64-4D5B-B751-FF8F19D77CB9}"/>
               </a:ext>
             </a:extLst>
           </p:cNvPr>
@@ -6802,7 +6802,7 @@
           <p:cNvPr id="30" name="">
             <a:extLst xmlns:a="http://schemas.openxmlformats.org/drawingml/2006/main">
               <a:ext uri="{FF2B5EF4-FFF2-40B4-BE49-F238E27FC236}">
-                <a16:creationId xmlns:a16="http://schemas.microsoft.com/office/drawing/2014/main" id="{1B2BABDD-2332-47AD-8C04-2CACDFC13B1B}"/>
+                <a16:creationId xmlns:a16="http://schemas.microsoft.com/office/drawing/2014/main" id="{2A689AB2-E583-4236-A937-2BDE0EE7CCEA}"/>
               </a:ext>
             </a:extLst>
           </p:cNvPr>
@@ -6847,7 +6847,7 @@
           <p:cNvPr id="31" name="">
             <a:extLst xmlns:a="http://schemas.openxmlformats.org/drawingml/2006/main">
               <a:ext uri="{FF2B5EF4-FFF2-40B4-BE49-F238E27FC236}">
-                <a16:creationId xmlns:a16="http://schemas.microsoft.com/office/drawing/2014/main" id="{C581B622-77D3-4621-A207-85849C733CA9}"/>
+                <a16:creationId xmlns:a16="http://schemas.microsoft.com/office/drawing/2014/main" id="{09D30B55-A893-4BE4-8178-846B546141FF}"/>
               </a:ext>
             </a:extLst>
           </p:cNvPr>
@@ -6882,7 +6882,7 @@
           <p:cNvPr id="32" name="">
             <a:extLst xmlns:a="http://schemas.openxmlformats.org/drawingml/2006/main">
               <a:ext uri="{FF2B5EF4-FFF2-40B4-BE49-F238E27FC236}">
-                <a16:creationId xmlns:a16="http://schemas.microsoft.com/office/drawing/2014/main" id="{5D8BB238-3560-4C02-98D4-AAA8EEB10CB6}"/>
+                <a16:creationId xmlns:a16="http://schemas.microsoft.com/office/drawing/2014/main" id="{19B2D31E-4EB9-4ACD-9417-E56DA8A44D18}"/>
               </a:ext>
             </a:extLst>
           </p:cNvPr>
@@ -6913,7 +6913,7 @@
           <p:cNvPr id="33" name="">
             <a:extLst xmlns:a="http://schemas.openxmlformats.org/drawingml/2006/main">
               <a:ext uri="{FF2B5EF4-FFF2-40B4-BE49-F238E27FC236}">
-                <a16:creationId xmlns:a16="http://schemas.microsoft.com/office/drawing/2014/main" id="{0438B25A-CFDB-42D8-B0C1-33F8A5B362BE}"/>
+                <a16:creationId xmlns:a16="http://schemas.microsoft.com/office/drawing/2014/main" id="{3C69FF2E-7FB5-4F38-BDED-FEDEB7984A7A}"/>
               </a:ext>
             </a:extLst>
           </p:cNvPr>
@@ -6958,7 +6958,7 @@
           <p:cNvPr id="34" name="">
             <a:extLst xmlns:a="http://schemas.openxmlformats.org/drawingml/2006/main">
               <a:ext uri="{FF2B5EF4-FFF2-40B4-BE49-F238E27FC236}">
-                <a16:creationId xmlns:a16="http://schemas.microsoft.com/office/drawing/2014/main" id="{DF1D7A7F-B49B-4552-AD0C-A74BB70448D8}"/>
+                <a16:creationId xmlns:a16="http://schemas.microsoft.com/office/drawing/2014/main" id="{55A4D62A-7CA7-4935-B5F7-87CA8D49953F}"/>
               </a:ext>
             </a:extLst>
           </p:cNvPr>
@@ -7003,7 +7003,7 @@
           <p:cNvPr id="35" name="">
             <a:extLst xmlns:a="http://schemas.openxmlformats.org/drawingml/2006/main">
               <a:ext uri="{FF2B5EF4-FFF2-40B4-BE49-F238E27FC236}">
-                <a16:creationId xmlns:a16="http://schemas.microsoft.com/office/drawing/2014/main" id="{FBF02563-2FA8-4FB9-9B04-D6F8853A3660}"/>
+                <a16:creationId xmlns:a16="http://schemas.microsoft.com/office/drawing/2014/main" id="{74D34D28-04B8-4BD4-B26C-6CA9B5453E6B}"/>
               </a:ext>
             </a:extLst>
           </p:cNvPr>
@@ -7038,7 +7038,7 @@
           <p:cNvPr id="36" name="">
             <a:extLst xmlns:a="http://schemas.openxmlformats.org/drawingml/2006/main">
               <a:ext uri="{FF2B5EF4-FFF2-40B4-BE49-F238E27FC236}">
-                <a16:creationId xmlns:a16="http://schemas.microsoft.com/office/drawing/2014/main" id="{AE1C72E6-D5B8-44A8-AB11-BC70F92E27B3}"/>
+                <a16:creationId xmlns:a16="http://schemas.microsoft.com/office/drawing/2014/main" id="{E5897C1C-2E3B-4634-A7A2-86F82EFC2D2D}"/>
               </a:ext>
             </a:extLst>
           </p:cNvPr>
@@ -7069,7 +7069,7 @@
           <p:cNvPr id="37" name="">
             <a:extLst xmlns:a="http://schemas.openxmlformats.org/drawingml/2006/main">
               <a:ext uri="{FF2B5EF4-FFF2-40B4-BE49-F238E27FC236}">
-                <a16:creationId xmlns:a16="http://schemas.microsoft.com/office/drawing/2014/main" id="{CABCD085-FD23-4BAB-9068-58AA2D5F7E35}"/>
+                <a16:creationId xmlns:a16="http://schemas.microsoft.com/office/drawing/2014/main" id="{B37AD0D5-5A75-4706-B614-88D594201823}"/>
               </a:ext>
             </a:extLst>
           </p:cNvPr>
@@ -7114,7 +7114,7 @@
           <p:cNvPr id="38" name="">
             <a:extLst xmlns:a="http://schemas.openxmlformats.org/drawingml/2006/main">
               <a:ext uri="{FF2B5EF4-FFF2-40B4-BE49-F238E27FC236}">
-                <a16:creationId xmlns:a16="http://schemas.microsoft.com/office/drawing/2014/main" id="{4C4450CC-7107-408A-9E1F-07ACA6FD1B91}"/>
+                <a16:creationId xmlns:a16="http://schemas.microsoft.com/office/drawing/2014/main" id="{CB295B32-D173-4F95-8365-9B444DD6289E}"/>
               </a:ext>
             </a:extLst>
           </p:cNvPr>
@@ -7159,7 +7159,7 @@
           <p:cNvPr id="39" name="">
             <a:extLst xmlns:a="http://schemas.openxmlformats.org/drawingml/2006/main">
               <a:ext uri="{FF2B5EF4-FFF2-40B4-BE49-F238E27FC236}">
-                <a16:creationId xmlns:a16="http://schemas.microsoft.com/office/drawing/2014/main" id="{8DAA262A-C808-4E48-8A33-8B1989FE351C}"/>
+                <a16:creationId xmlns:a16="http://schemas.microsoft.com/office/drawing/2014/main" id="{F3BE684A-9818-4460-9AE2-8CAFB71B5EC7}"/>
               </a:ext>
             </a:extLst>
           </p:cNvPr>
@@ -7202,7 +7202,7 @@
     </p:spTree>
     <p:extLst>
       <p:ext uri="{BB962C8B-B14F-4D97-AF65-F5344CB8AC3E}">
-        <p14:creationId xmlns:p14="http://schemas.microsoft.com/office/powerpoint/2010/main" val="254788798"/>
+        <p14:creationId xmlns:p14="http://schemas.microsoft.com/office/powerpoint/2010/main" val="1937629504"/>
       </p:ext>
     </p:extLst>
   </p:cSld>
@@ -7226,7 +7226,7 @@
           <p:cNvPr id="52" name="">
             <a:extLst xmlns:a="http://schemas.openxmlformats.org/drawingml/2006/main">
               <a:ext uri="{FF2B5EF4-FFF2-40B4-BE49-F238E27FC236}">
-                <a16:creationId xmlns:a16="http://schemas.microsoft.com/office/drawing/2014/main" id="{386AB560-DC79-4BB2-A354-56056339EC76}"/>
+                <a16:creationId xmlns:a16="http://schemas.microsoft.com/office/drawing/2014/main" id="{DE73E177-5294-49AD-A4DB-46EC0AFD960D}"/>
               </a:ext>
             </a:extLst>
           </p:cNvPr>
@@ -7257,7 +7257,7 @@
           <p:cNvPr id="2" name="">
             <a:extLst xmlns:a="http://schemas.openxmlformats.org/drawingml/2006/main">
               <a:ext uri="{FF2B5EF4-FFF2-40B4-BE49-F238E27FC236}">
-                <a16:creationId xmlns:a16="http://schemas.microsoft.com/office/drawing/2014/main" id="{C51A3CD1-8FD1-41B1-924F-723A0D35D24C}"/>
+                <a16:creationId xmlns:a16="http://schemas.microsoft.com/office/drawing/2014/main" id="{17260467-E6F4-4CBE-AF51-5C5C00A2BC60}"/>
               </a:ext>
             </a:extLst>
           </p:cNvPr>
@@ -7302,7 +7302,7 @@
           <p:cNvPr id="3" name="">
             <a:extLst xmlns:a="http://schemas.openxmlformats.org/drawingml/2006/main">
               <a:ext uri="{FF2B5EF4-FFF2-40B4-BE49-F238E27FC236}">
-                <a16:creationId xmlns:a16="http://schemas.microsoft.com/office/drawing/2014/main" id="{0078A851-3214-49D6-9F86-84726A319560}"/>
+                <a16:creationId xmlns:a16="http://schemas.microsoft.com/office/drawing/2014/main" id="{279C91DF-AF30-4CE5-8D02-1E9B7FA090AF}"/>
               </a:ext>
             </a:extLst>
           </p:cNvPr>
@@ -7347,7 +7347,7 @@
           <p:cNvPr id="4" name="">
             <a:extLst xmlns:a="http://schemas.openxmlformats.org/drawingml/2006/main">
               <a:ext uri="{FF2B5EF4-FFF2-40B4-BE49-F238E27FC236}">
-                <a16:creationId xmlns:a16="http://schemas.microsoft.com/office/drawing/2014/main" id="{2CA19E92-1753-4718-A71F-D61A77104007}"/>
+                <a16:creationId xmlns:a16="http://schemas.microsoft.com/office/drawing/2014/main" id="{73CC35B4-95F4-496B-AD74-2A6517AB7D78}"/>
               </a:ext>
             </a:extLst>
           </p:cNvPr>
@@ -7392,7 +7392,7 @@
           <p:cNvPr id="5" name="">
             <a:extLst xmlns:a="http://schemas.openxmlformats.org/drawingml/2006/main">
               <a:ext uri="{FF2B5EF4-FFF2-40B4-BE49-F238E27FC236}">
-                <a16:creationId xmlns:a16="http://schemas.microsoft.com/office/drawing/2014/main" id="{363ED3B4-F3C1-4A75-AA97-C71627BE7B0A}"/>
+                <a16:creationId xmlns:a16="http://schemas.microsoft.com/office/drawing/2014/main" id="{C24DE5E7-0D00-4DAC-B7F0-718F19DE646B}"/>
               </a:ext>
             </a:extLst>
           </p:cNvPr>
@@ -7423,7 +7423,7 @@
           <p:cNvPr id="6" name="">
             <a:extLst xmlns:a="http://schemas.openxmlformats.org/drawingml/2006/main">
               <a:ext uri="{FF2B5EF4-FFF2-40B4-BE49-F238E27FC236}">
-                <a16:creationId xmlns:a16="http://schemas.microsoft.com/office/drawing/2014/main" id="{9C9CBCED-33B3-4098-B8FA-B20498D180B6}"/>
+                <a16:creationId xmlns:a16="http://schemas.microsoft.com/office/drawing/2014/main" id="{FE9C631C-24A9-4863-9D46-735C8A198C1E}"/>
               </a:ext>
             </a:extLst>
           </p:cNvPr>
@@ -7454,7 +7454,7 @@
           <p:cNvPr id="7" name="">
             <a:extLst xmlns:a="http://schemas.openxmlformats.org/drawingml/2006/main">
               <a:ext uri="{FF2B5EF4-FFF2-40B4-BE49-F238E27FC236}">
-                <a16:creationId xmlns:a16="http://schemas.microsoft.com/office/drawing/2014/main" id="{6CD55BB8-0518-4D48-9350-5C4A3758E754}"/>
+                <a16:creationId xmlns:a16="http://schemas.microsoft.com/office/drawing/2014/main" id="{EA84D32F-86D2-4024-ADCB-F5C8A69EB262}"/>
               </a:ext>
             </a:extLst>
           </p:cNvPr>
@@ -7499,7 +7499,7 @@
           <p:cNvPr id="8" name="">
             <a:extLst xmlns:a="http://schemas.openxmlformats.org/drawingml/2006/main">
               <a:ext uri="{FF2B5EF4-FFF2-40B4-BE49-F238E27FC236}">
-                <a16:creationId xmlns:a16="http://schemas.microsoft.com/office/drawing/2014/main" id="{0A7A3211-927E-4CC7-9452-595FA3FFBFCA}"/>
+                <a16:creationId xmlns:a16="http://schemas.microsoft.com/office/drawing/2014/main" id="{0773CA97-453B-4E4D-9D98-08565BDA9182}"/>
               </a:ext>
             </a:extLst>
           </p:cNvPr>
@@ -7544,7 +7544,7 @@
           <p:cNvPr id="9" name="">
             <a:extLst xmlns:a="http://schemas.openxmlformats.org/drawingml/2006/main">
               <a:ext uri="{FF2B5EF4-FFF2-40B4-BE49-F238E27FC236}">
-                <a16:creationId xmlns:a16="http://schemas.microsoft.com/office/drawing/2014/main" id="{3117D32C-DAB9-4D11-B06A-B08160F7CD1A}"/>
+                <a16:creationId xmlns:a16="http://schemas.microsoft.com/office/drawing/2014/main" id="{D02F7F37-9501-4F23-9FF5-7E9264C59864}"/>
               </a:ext>
             </a:extLst>
           </p:cNvPr>
@@ -7589,7 +7589,7 @@
           <p:cNvPr id="10" name="">
             <a:extLst xmlns:a="http://schemas.openxmlformats.org/drawingml/2006/main">
               <a:ext uri="{FF2B5EF4-FFF2-40B4-BE49-F238E27FC236}">
-                <a16:creationId xmlns:a16="http://schemas.microsoft.com/office/drawing/2014/main" id="{1BE710FC-7288-42D8-9F74-EA8DC07A9F76}"/>
+                <a16:creationId xmlns:a16="http://schemas.microsoft.com/office/drawing/2014/main" id="{BCBBEA7A-483E-4FA1-AD8E-DAC0B949AB7E}"/>
               </a:ext>
             </a:extLst>
           </p:cNvPr>
@@ -7620,7 +7620,7 @@
           <p:cNvPr id="11" name="">
             <a:extLst xmlns:a="http://schemas.openxmlformats.org/drawingml/2006/main">
               <a:ext uri="{FF2B5EF4-FFF2-40B4-BE49-F238E27FC236}">
-                <a16:creationId xmlns:a16="http://schemas.microsoft.com/office/drawing/2014/main" id="{59268656-BD8B-4C88-BE37-613F2C512E9B}"/>
+                <a16:creationId xmlns:a16="http://schemas.microsoft.com/office/drawing/2014/main" id="{19A834A9-9463-4B21-943D-51808EB8CA1C}"/>
               </a:ext>
             </a:extLst>
           </p:cNvPr>
@@ -7651,7 +7651,7 @@
           <p:cNvPr id="12" name="">
             <a:extLst xmlns:a="http://schemas.openxmlformats.org/drawingml/2006/main">
               <a:ext uri="{FF2B5EF4-FFF2-40B4-BE49-F238E27FC236}">
-                <a16:creationId xmlns:a16="http://schemas.microsoft.com/office/drawing/2014/main" id="{BC702A3D-80F1-487F-A35C-4D09189E783B}"/>
+                <a16:creationId xmlns:a16="http://schemas.microsoft.com/office/drawing/2014/main" id="{4AECB2B1-EC0A-4205-9955-DEFE5180CB89}"/>
               </a:ext>
             </a:extLst>
           </p:cNvPr>
@@ -7696,7 +7696,7 @@
           <p:cNvPr id="13" name="">
             <a:extLst xmlns:a="http://schemas.openxmlformats.org/drawingml/2006/main">
               <a:ext uri="{FF2B5EF4-FFF2-40B4-BE49-F238E27FC236}">
-                <a16:creationId xmlns:a16="http://schemas.microsoft.com/office/drawing/2014/main" id="{EAFF5F06-E054-494F-A52A-1C6ECA4649A8}"/>
+                <a16:creationId xmlns:a16="http://schemas.microsoft.com/office/drawing/2014/main" id="{AA6EED82-9F16-4C5A-98B9-14BE4AEF4338}"/>
               </a:ext>
             </a:extLst>
           </p:cNvPr>
@@ -7741,7 +7741,7 @@
           <p:cNvPr id="14" name="">
             <a:extLst xmlns:a="http://schemas.openxmlformats.org/drawingml/2006/main">
               <a:ext uri="{FF2B5EF4-FFF2-40B4-BE49-F238E27FC236}">
-                <a16:creationId xmlns:a16="http://schemas.microsoft.com/office/drawing/2014/main" id="{89A1B21F-5651-4754-BFBE-5723666013B6}"/>
+                <a16:creationId xmlns:a16="http://schemas.microsoft.com/office/drawing/2014/main" id="{A1DD0E1F-A851-4B4E-96E1-6F621BDCF93B}"/>
               </a:ext>
             </a:extLst>
           </p:cNvPr>
@@ -7772,7 +7772,7 @@
           <p:cNvPr id="15" name="">
             <a:extLst xmlns:a="http://schemas.openxmlformats.org/drawingml/2006/main">
               <a:ext uri="{FF2B5EF4-FFF2-40B4-BE49-F238E27FC236}">
-                <a16:creationId xmlns:a16="http://schemas.microsoft.com/office/drawing/2014/main" id="{E372A481-D520-42B4-A998-4D4EBCFEDDFB}"/>
+                <a16:creationId xmlns:a16="http://schemas.microsoft.com/office/drawing/2014/main" id="{2AEED257-D835-41A5-BF44-F48F71BEB8C0}"/>
               </a:ext>
             </a:extLst>
           </p:cNvPr>
@@ -7803,7 +7803,7 @@
           <p:cNvPr id="16" name="">
             <a:extLst xmlns:a="http://schemas.openxmlformats.org/drawingml/2006/main">
               <a:ext uri="{FF2B5EF4-FFF2-40B4-BE49-F238E27FC236}">
-                <a16:creationId xmlns:a16="http://schemas.microsoft.com/office/drawing/2014/main" id="{D0C0A496-7315-4877-80AE-3E61A679A3C3}"/>
+                <a16:creationId xmlns:a16="http://schemas.microsoft.com/office/drawing/2014/main" id="{292A1DBD-57A2-44BF-A0BC-8283EAF5DD5E}"/>
               </a:ext>
             </a:extLst>
           </p:cNvPr>
@@ -7848,7 +7848,7 @@
           <p:cNvPr id="17" name="">
             <a:extLst xmlns:a="http://schemas.openxmlformats.org/drawingml/2006/main">
               <a:ext uri="{FF2B5EF4-FFF2-40B4-BE49-F238E27FC236}">
-                <a16:creationId xmlns:a16="http://schemas.microsoft.com/office/drawing/2014/main" id="{22BBA18B-6977-4435-8A7E-A167A85AC01F}"/>
+                <a16:creationId xmlns:a16="http://schemas.microsoft.com/office/drawing/2014/main" id="{57246FB5-8374-47EC-9ECC-BE01696D0BB4}"/>
               </a:ext>
             </a:extLst>
           </p:cNvPr>
@@ -7893,7 +7893,7 @@
           <p:cNvPr id="18" name="">
             <a:extLst xmlns:a="http://schemas.openxmlformats.org/drawingml/2006/main">
               <a:ext uri="{FF2B5EF4-FFF2-40B4-BE49-F238E27FC236}">
-                <a16:creationId xmlns:a16="http://schemas.microsoft.com/office/drawing/2014/main" id="{D65EA8E0-1B6A-45CB-B6D1-B3ADCFDE037C}"/>
+                <a16:creationId xmlns:a16="http://schemas.microsoft.com/office/drawing/2014/main" id="{1A989B02-12CB-4AF4-8A40-4FB658E5C240}"/>
               </a:ext>
             </a:extLst>
           </p:cNvPr>
@@ -7924,7 +7924,7 @@
           <p:cNvPr id="19" name="">
             <a:extLst xmlns:a="http://schemas.openxmlformats.org/drawingml/2006/main">
               <a:ext uri="{FF2B5EF4-FFF2-40B4-BE49-F238E27FC236}">
-                <a16:creationId xmlns:a16="http://schemas.microsoft.com/office/drawing/2014/main" id="{D70C6ED5-013D-4086-BC62-439BF6A3C626}"/>
+                <a16:creationId xmlns:a16="http://schemas.microsoft.com/office/drawing/2014/main" id="{2DA229A4-3BBC-4F86-8243-9356170F9B29}"/>
               </a:ext>
             </a:extLst>
           </p:cNvPr>
@@ -7955,7 +7955,7 @@
           <p:cNvPr id="20" name="">
             <a:extLst xmlns:a="http://schemas.openxmlformats.org/drawingml/2006/main">
               <a:ext uri="{FF2B5EF4-FFF2-40B4-BE49-F238E27FC236}">
-                <a16:creationId xmlns:a16="http://schemas.microsoft.com/office/drawing/2014/main" id="{5DB38A65-17E6-4232-A5F7-388DC959299C}"/>
+                <a16:creationId xmlns:a16="http://schemas.microsoft.com/office/drawing/2014/main" id="{75D52521-83BC-4746-ADFD-51CB79409A76}"/>
               </a:ext>
             </a:extLst>
           </p:cNvPr>
@@ -8000,7 +8000,7 @@
           <p:cNvPr id="21" name="">
             <a:extLst xmlns:a="http://schemas.openxmlformats.org/drawingml/2006/main">
               <a:ext uri="{FF2B5EF4-FFF2-40B4-BE49-F238E27FC236}">
-                <a16:creationId xmlns:a16="http://schemas.microsoft.com/office/drawing/2014/main" id="{AB75CB2F-5CE7-40A6-808E-891BE6844310}"/>
+                <a16:creationId xmlns:a16="http://schemas.microsoft.com/office/drawing/2014/main" id="{4A59FC5A-5ABD-49D8-BEF4-31121F7DE8BA}"/>
               </a:ext>
             </a:extLst>
           </p:cNvPr>
@@ -8045,7 +8045,7 @@
           <p:cNvPr id="22" name="">
             <a:extLst xmlns:a="http://schemas.openxmlformats.org/drawingml/2006/main">
               <a:ext uri="{FF2B5EF4-FFF2-40B4-BE49-F238E27FC236}">
-                <a16:creationId xmlns:a16="http://schemas.microsoft.com/office/drawing/2014/main" id="{04306220-1162-49F2-9DCB-1BEC6040DA9B}"/>
+                <a16:creationId xmlns:a16="http://schemas.microsoft.com/office/drawing/2014/main" id="{025A847A-00E8-4816-8CE7-BA35FBA86469}"/>
               </a:ext>
             </a:extLst>
           </p:cNvPr>
@@ -8076,7 +8076,7 @@
           <p:cNvPr id="23" name="">
             <a:extLst xmlns:a="http://schemas.openxmlformats.org/drawingml/2006/main">
               <a:ext uri="{FF2B5EF4-FFF2-40B4-BE49-F238E27FC236}">
-                <a16:creationId xmlns:a16="http://schemas.microsoft.com/office/drawing/2014/main" id="{598CA5D9-63FD-4AE8-84C3-1FA146EDEB69}"/>
+                <a16:creationId xmlns:a16="http://schemas.microsoft.com/office/drawing/2014/main" id="{B053E68E-C118-4FB1-B01A-E3CC4E627624}"/>
               </a:ext>
             </a:extLst>
           </p:cNvPr>
@@ -8107,7 +8107,7 @@
           <p:cNvPr id="24" name="">
             <a:extLst xmlns:a="http://schemas.openxmlformats.org/drawingml/2006/main">
               <a:ext uri="{FF2B5EF4-FFF2-40B4-BE49-F238E27FC236}">
-                <a16:creationId xmlns:a16="http://schemas.microsoft.com/office/drawing/2014/main" id="{C26E51E3-9F3C-4AA1-BD32-AE29F0D3D297}"/>
+                <a16:creationId xmlns:a16="http://schemas.microsoft.com/office/drawing/2014/main" id="{C9AA3A0B-A612-4BAF-9EA6-D7BF4AD5FB23}"/>
               </a:ext>
             </a:extLst>
           </p:cNvPr>
@@ -8152,7 +8152,7 @@
           <p:cNvPr id="25" name="">
             <a:extLst xmlns:a="http://schemas.openxmlformats.org/drawingml/2006/main">
               <a:ext uri="{FF2B5EF4-FFF2-40B4-BE49-F238E27FC236}">
-                <a16:creationId xmlns:a16="http://schemas.microsoft.com/office/drawing/2014/main" id="{0BCEF680-ABD8-4868-BD68-B047171C082D}"/>
+                <a16:creationId xmlns:a16="http://schemas.microsoft.com/office/drawing/2014/main" id="{C8547F88-253E-4882-AB54-EC62BBEEE758}"/>
               </a:ext>
             </a:extLst>
           </p:cNvPr>
@@ -8197,7 +8197,7 @@
           <p:cNvPr id="26" name="">
             <a:extLst xmlns:a="http://schemas.openxmlformats.org/drawingml/2006/main">
               <a:ext uri="{FF2B5EF4-FFF2-40B4-BE49-F238E27FC236}">
-                <a16:creationId xmlns:a16="http://schemas.microsoft.com/office/drawing/2014/main" id="{7C583742-F302-4959-A1D9-C4A1323D0DBD}"/>
+                <a16:creationId xmlns:a16="http://schemas.microsoft.com/office/drawing/2014/main" id="{BA3FDDC7-0277-4FFB-8D9A-0E48ACC587B4}"/>
               </a:ext>
             </a:extLst>
           </p:cNvPr>
@@ -8228,7 +8228,7 @@
           <p:cNvPr id="27" name="">
             <a:extLst xmlns:a="http://schemas.openxmlformats.org/drawingml/2006/main">
               <a:ext uri="{FF2B5EF4-FFF2-40B4-BE49-F238E27FC236}">
-                <a16:creationId xmlns:a16="http://schemas.microsoft.com/office/drawing/2014/main" id="{2DE29014-A061-485D-9C48-8994498802AF}"/>
+                <a16:creationId xmlns:a16="http://schemas.microsoft.com/office/drawing/2014/main" id="{94F1C716-456A-4FBA-A528-670E82C580D2}"/>
               </a:ext>
             </a:extLst>
           </p:cNvPr>
@@ -8259,7 +8259,7 @@
           <p:cNvPr id="28" name="">
             <a:extLst xmlns:a="http://schemas.openxmlformats.org/drawingml/2006/main">
               <a:ext uri="{FF2B5EF4-FFF2-40B4-BE49-F238E27FC236}">
-                <a16:creationId xmlns:a16="http://schemas.microsoft.com/office/drawing/2014/main" id="{15722CB5-AA82-445B-888D-1279D103E6A1}"/>
+                <a16:creationId xmlns:a16="http://schemas.microsoft.com/office/drawing/2014/main" id="{2EE738F3-6C3F-4872-96C8-9BDA702C1400}"/>
               </a:ext>
             </a:extLst>
           </p:cNvPr>
@@ -8304,7 +8304,7 @@
           <p:cNvPr id="29" name="">
             <a:extLst xmlns:a="http://schemas.openxmlformats.org/drawingml/2006/main">
               <a:ext uri="{FF2B5EF4-FFF2-40B4-BE49-F238E27FC236}">
-                <a16:creationId xmlns:a16="http://schemas.microsoft.com/office/drawing/2014/main" id="{F0697F13-E8DD-4E16-AFAA-27162940C48E}"/>
+                <a16:creationId xmlns:a16="http://schemas.microsoft.com/office/drawing/2014/main" id="{307DEDAE-C0BE-4BE2-9B5A-79DB00F7160D}"/>
               </a:ext>
             </a:extLst>
           </p:cNvPr>
@@ -8349,7 +8349,7 @@
           <p:cNvPr id="30" name="">
             <a:extLst xmlns:a="http://schemas.openxmlformats.org/drawingml/2006/main">
               <a:ext uri="{FF2B5EF4-FFF2-40B4-BE49-F238E27FC236}">
-                <a16:creationId xmlns:a16="http://schemas.microsoft.com/office/drawing/2014/main" id="{F4E63733-C365-4CBD-A82B-B55CD4D2A88D}"/>
+                <a16:creationId xmlns:a16="http://schemas.microsoft.com/office/drawing/2014/main" id="{A708EC8D-EA0C-491D-A79C-505ED44F1626}"/>
               </a:ext>
             </a:extLst>
           </p:cNvPr>
@@ -8380,7 +8380,7 @@
           <p:cNvPr id="31" name="">
             <a:extLst xmlns:a="http://schemas.openxmlformats.org/drawingml/2006/main">
               <a:ext uri="{FF2B5EF4-FFF2-40B4-BE49-F238E27FC236}">
-                <a16:creationId xmlns:a16="http://schemas.microsoft.com/office/drawing/2014/main" id="{EA72B462-EF06-4070-94D6-F0CBF9D05DE1}"/>
+                <a16:creationId xmlns:a16="http://schemas.microsoft.com/office/drawing/2014/main" id="{4C4D173B-CD81-4C10-B13A-EFDE479BE01E}"/>
               </a:ext>
             </a:extLst>
           </p:cNvPr>
@@ -8411,7 +8411,7 @@
           <p:cNvPr id="32" name="">
             <a:extLst xmlns:a="http://schemas.openxmlformats.org/drawingml/2006/main">
               <a:ext uri="{FF2B5EF4-FFF2-40B4-BE49-F238E27FC236}">
-                <a16:creationId xmlns:a16="http://schemas.microsoft.com/office/drawing/2014/main" id="{C760509C-E599-48EA-8A1C-DBDAB4F0A152}"/>
+                <a16:creationId xmlns:a16="http://schemas.microsoft.com/office/drawing/2014/main" id="{65B71B52-BC2D-4EDC-B637-F69AAB0BCA57}"/>
               </a:ext>
             </a:extLst>
           </p:cNvPr>
@@ -8456,7 +8456,7 @@
           <p:cNvPr id="33" name="">
             <a:extLst xmlns:a="http://schemas.openxmlformats.org/drawingml/2006/main">
               <a:ext uri="{FF2B5EF4-FFF2-40B4-BE49-F238E27FC236}">
-                <a16:creationId xmlns:a16="http://schemas.microsoft.com/office/drawing/2014/main" id="{1C5D4234-6F71-4471-9959-FC1C94E62E9A}"/>
+                <a16:creationId xmlns:a16="http://schemas.microsoft.com/office/drawing/2014/main" id="{408513F6-A9A1-4666-80C3-7DFBAFD5D65D}"/>
               </a:ext>
             </a:extLst>
           </p:cNvPr>
@@ -8501,7 +8501,7 @@
           <p:cNvPr id="34" name="">
             <a:extLst xmlns:a="http://schemas.openxmlformats.org/drawingml/2006/main">
               <a:ext uri="{FF2B5EF4-FFF2-40B4-BE49-F238E27FC236}">
-                <a16:creationId xmlns:a16="http://schemas.microsoft.com/office/drawing/2014/main" id="{682337CB-E0B7-431A-835F-D2BACE68282A}"/>
+                <a16:creationId xmlns:a16="http://schemas.microsoft.com/office/drawing/2014/main" id="{29AEF09E-D0BA-4457-9644-1E1E7CC4D146}"/>
               </a:ext>
             </a:extLst>
           </p:cNvPr>
@@ -8532,7 +8532,7 @@
           <p:cNvPr id="35" name="">
             <a:extLst xmlns:a="http://schemas.openxmlformats.org/drawingml/2006/main">
               <a:ext uri="{FF2B5EF4-FFF2-40B4-BE49-F238E27FC236}">
-                <a16:creationId xmlns:a16="http://schemas.microsoft.com/office/drawing/2014/main" id="{AE247BFE-98DD-41DD-9169-FB02E1A6D3B5}"/>
+                <a16:creationId xmlns:a16="http://schemas.microsoft.com/office/drawing/2014/main" id="{6ED461FB-8ABF-4815-A955-13C04BEBA8DD}"/>
               </a:ext>
             </a:extLst>
           </p:cNvPr>
@@ -8563,7 +8563,7 @@
           <p:cNvPr id="36" name="">
             <a:extLst xmlns:a="http://schemas.openxmlformats.org/drawingml/2006/main">
               <a:ext uri="{FF2B5EF4-FFF2-40B4-BE49-F238E27FC236}">
-                <a16:creationId xmlns:a16="http://schemas.microsoft.com/office/drawing/2014/main" id="{1FC585FE-BB3B-473F-A32C-F49D989DF80D}"/>
+                <a16:creationId xmlns:a16="http://schemas.microsoft.com/office/drawing/2014/main" id="{DB13AD5A-15FE-4971-B0F4-B1FC516F3A0E}"/>
               </a:ext>
             </a:extLst>
           </p:cNvPr>
@@ -8608,7 +8608,7 @@
           <p:cNvPr id="37" name="">
             <a:extLst xmlns:a="http://schemas.openxmlformats.org/drawingml/2006/main">
               <a:ext uri="{FF2B5EF4-FFF2-40B4-BE49-F238E27FC236}">
-                <a16:creationId xmlns:a16="http://schemas.microsoft.com/office/drawing/2014/main" id="{3D9A23D0-71A5-4687-B6EF-2C4E95001858}"/>
+                <a16:creationId xmlns:a16="http://schemas.microsoft.com/office/drawing/2014/main" id="{FBB5B973-41C7-4DC2-8EF8-3017C35ABF26}"/>
               </a:ext>
             </a:extLst>
           </p:cNvPr>
@@ -8653,7 +8653,7 @@
           <p:cNvPr id="38" name="">
             <a:extLst xmlns:a="http://schemas.openxmlformats.org/drawingml/2006/main">
               <a:ext uri="{FF2B5EF4-FFF2-40B4-BE49-F238E27FC236}">
-                <a16:creationId xmlns:a16="http://schemas.microsoft.com/office/drawing/2014/main" id="{E79BFB5D-4947-4955-A7A7-0B5A172B6DA5}"/>
+                <a16:creationId xmlns:a16="http://schemas.microsoft.com/office/drawing/2014/main" id="{567B5AC3-D1B6-41CB-872C-375C4C96079A}"/>
               </a:ext>
             </a:extLst>
           </p:cNvPr>
@@ -8684,7 +8684,7 @@
           <p:cNvPr id="39" name="">
             <a:extLst xmlns:a="http://schemas.openxmlformats.org/drawingml/2006/main">
               <a:ext uri="{FF2B5EF4-FFF2-40B4-BE49-F238E27FC236}">
-                <a16:creationId xmlns:a16="http://schemas.microsoft.com/office/drawing/2014/main" id="{695D09BC-BE80-4CB7-A57A-2862D5F284CE}"/>
+                <a16:creationId xmlns:a16="http://schemas.microsoft.com/office/drawing/2014/main" id="{89A00BD9-5FE3-44A2-8F48-375802B8402C}"/>
               </a:ext>
             </a:extLst>
           </p:cNvPr>
@@ -8715,7 +8715,7 @@
           <p:cNvPr id="40" name="">
             <a:extLst xmlns:a="http://schemas.openxmlformats.org/drawingml/2006/main">
               <a:ext uri="{FF2B5EF4-FFF2-40B4-BE49-F238E27FC236}">
-                <a16:creationId xmlns:a16="http://schemas.microsoft.com/office/drawing/2014/main" id="{5B10CDFF-F4BF-4B17-93FB-BA51AB6C1485}"/>
+                <a16:creationId xmlns:a16="http://schemas.microsoft.com/office/drawing/2014/main" id="{F0965CC6-A2FE-4D0B-9008-BC2CACC6D682}"/>
               </a:ext>
             </a:extLst>
           </p:cNvPr>
@@ -8760,7 +8760,7 @@
           <p:cNvPr id="41" name="">
             <a:extLst xmlns:a="http://schemas.openxmlformats.org/drawingml/2006/main">
               <a:ext uri="{FF2B5EF4-FFF2-40B4-BE49-F238E27FC236}">
-                <a16:creationId xmlns:a16="http://schemas.microsoft.com/office/drawing/2014/main" id="{6A2CE041-2AB2-4C46-8274-FBC035F5CFDE}"/>
+                <a16:creationId xmlns:a16="http://schemas.microsoft.com/office/drawing/2014/main" id="{E70947A6-9BEB-4A74-A311-5C2D6A1CBDD9}"/>
               </a:ext>
             </a:extLst>
           </p:cNvPr>
@@ -8791,7 +8791,7 @@
           <p:cNvPr id="42" name="">
             <a:extLst xmlns:a="http://schemas.openxmlformats.org/drawingml/2006/main">
               <a:ext uri="{FF2B5EF4-FFF2-40B4-BE49-F238E27FC236}">
-                <a16:creationId xmlns:a16="http://schemas.microsoft.com/office/drawing/2014/main" id="{9A0E0D74-9B15-4F58-8FAE-E0E739A1F70F}"/>
+                <a16:creationId xmlns:a16="http://schemas.microsoft.com/office/drawing/2014/main" id="{33E64678-42A5-4CC4-BFAB-AD3DD9BFA54A}"/>
               </a:ext>
             </a:extLst>
           </p:cNvPr>
@@ -8836,7 +8836,7 @@
           <p:cNvPr id="43" name="">
             <a:extLst xmlns:a="http://schemas.openxmlformats.org/drawingml/2006/main">
               <a:ext uri="{FF2B5EF4-FFF2-40B4-BE49-F238E27FC236}">
-                <a16:creationId xmlns:a16="http://schemas.microsoft.com/office/drawing/2014/main" id="{04ECE9C0-AEFE-4392-B0F4-E6C0F88E5FB2}"/>
+                <a16:creationId xmlns:a16="http://schemas.microsoft.com/office/drawing/2014/main" id="{4F833E55-C47F-475E-A60A-D706BBB87DA9}"/>
               </a:ext>
             </a:extLst>
           </p:cNvPr>
@@ -8871,7 +8871,7 @@
           <p:cNvPr id="44" name="">
             <a:extLst xmlns:a="http://schemas.openxmlformats.org/drawingml/2006/main">
               <a:ext uri="{FF2B5EF4-FFF2-40B4-BE49-F238E27FC236}">
-                <a16:creationId xmlns:a16="http://schemas.microsoft.com/office/drawing/2014/main" id="{81883A2C-EA75-46FB-801A-AF7B3BB2F3FD}"/>
+                <a16:creationId xmlns:a16="http://schemas.microsoft.com/office/drawing/2014/main" id="{1C38C1CC-6CE1-41F8-B89F-00981F20EC0B}"/>
               </a:ext>
             </a:extLst>
           </p:cNvPr>
@@ -8916,7 +8916,7 @@
           <p:cNvPr id="45" name="">
             <a:extLst xmlns:a="http://schemas.openxmlformats.org/drawingml/2006/main">
               <a:ext uri="{FF2B5EF4-FFF2-40B4-BE49-F238E27FC236}">
-                <a16:creationId xmlns:a16="http://schemas.microsoft.com/office/drawing/2014/main" id="{A4BCC5F6-79CF-4512-8104-A24313C16416}"/>
+                <a16:creationId xmlns:a16="http://schemas.microsoft.com/office/drawing/2014/main" id="{B5EBFB84-C0D6-4A2D-9823-0C776D6CB2A7}"/>
               </a:ext>
             </a:extLst>
           </p:cNvPr>
@@ -8961,7 +8961,7 @@
           <p:cNvPr id="46" name="">
             <a:extLst xmlns:a="http://schemas.openxmlformats.org/drawingml/2006/main">
               <a:ext uri="{FF2B5EF4-FFF2-40B4-BE49-F238E27FC236}">
-                <a16:creationId xmlns:a16="http://schemas.microsoft.com/office/drawing/2014/main" id="{15033BF9-99EF-4964-9158-A1A596CA4B36}"/>
+                <a16:creationId xmlns:a16="http://schemas.microsoft.com/office/drawing/2014/main" id="{F2409E55-A639-48AE-8F25-96531665C9D0}"/>
               </a:ext>
             </a:extLst>
           </p:cNvPr>
@@ -9006,7 +9006,7 @@
           <p:cNvPr id="47" name="">
             <a:extLst xmlns:a="http://schemas.openxmlformats.org/drawingml/2006/main">
               <a:ext uri="{FF2B5EF4-FFF2-40B4-BE49-F238E27FC236}">
-                <a16:creationId xmlns:a16="http://schemas.microsoft.com/office/drawing/2014/main" id="{0391E9F8-BD33-4CD2-85A0-8A6C63B228EB}"/>
+                <a16:creationId xmlns:a16="http://schemas.microsoft.com/office/drawing/2014/main" id="{C2781E13-FBF4-417C-AA3C-6A7B011CE1DE}"/>
               </a:ext>
             </a:extLst>
           </p:cNvPr>
@@ -9041,7 +9041,7 @@
           <p:cNvPr id="48" name="">
             <a:extLst xmlns:a="http://schemas.openxmlformats.org/drawingml/2006/main">
               <a:ext uri="{FF2B5EF4-FFF2-40B4-BE49-F238E27FC236}">
-                <a16:creationId xmlns:a16="http://schemas.microsoft.com/office/drawing/2014/main" id="{67371D6D-5030-4531-8541-D2E90C7C6DA5}"/>
+                <a16:creationId xmlns:a16="http://schemas.microsoft.com/office/drawing/2014/main" id="{B3B55023-2BFF-4B22-80AD-29EA49284D9B}"/>
               </a:ext>
             </a:extLst>
           </p:cNvPr>
@@ -9072,7 +9072,7 @@
           <p:cNvPr id="49" name="">
             <a:extLst xmlns:a="http://schemas.openxmlformats.org/drawingml/2006/main">
               <a:ext uri="{FF2B5EF4-FFF2-40B4-BE49-F238E27FC236}">
-                <a16:creationId xmlns:a16="http://schemas.microsoft.com/office/drawing/2014/main" id="{D3664414-7CB2-4D94-B039-4E4C91DC7215}"/>
+                <a16:creationId xmlns:a16="http://schemas.microsoft.com/office/drawing/2014/main" id="{06FC477C-B3BD-4464-8E55-74AA8216378A}"/>
               </a:ext>
             </a:extLst>
           </p:cNvPr>
@@ -9117,7 +9117,7 @@
           <p:cNvPr id="50" name="">
             <a:extLst xmlns:a="http://schemas.openxmlformats.org/drawingml/2006/main">
               <a:ext uri="{FF2B5EF4-FFF2-40B4-BE49-F238E27FC236}">
-                <a16:creationId xmlns:a16="http://schemas.microsoft.com/office/drawing/2014/main" id="{92C9A5FD-323C-484B-9CA8-8155B276655A}"/>
+                <a16:creationId xmlns:a16="http://schemas.microsoft.com/office/drawing/2014/main" id="{E8611074-F4B9-4A4A-B8C6-72DD4B86379D}"/>
               </a:ext>
             </a:extLst>
           </p:cNvPr>
@@ -9162,7 +9162,7 @@
           <p:cNvPr id="51" name="">
             <a:extLst xmlns:a="http://schemas.openxmlformats.org/drawingml/2006/main">
               <a:ext uri="{FF2B5EF4-FFF2-40B4-BE49-F238E27FC236}">
-                <a16:creationId xmlns:a16="http://schemas.microsoft.com/office/drawing/2014/main" id="{248BBD58-D81E-42B3-B187-5AC19B69EF80}"/>
+                <a16:creationId xmlns:a16="http://schemas.microsoft.com/office/drawing/2014/main" id="{045DCE2D-7A76-4130-AB3B-BAFB2EC1B0F6}"/>
               </a:ext>
             </a:extLst>
           </p:cNvPr>
@@ -9205,7 +9205,7 @@
     </p:spTree>
     <p:extLst>
       <p:ext uri="{BB962C8B-B14F-4D97-AF65-F5344CB8AC3E}">
-        <p14:creationId xmlns:p14="http://schemas.microsoft.com/office/powerpoint/2010/main" val="369323126"/>
+        <p14:creationId xmlns:p14="http://schemas.microsoft.com/office/powerpoint/2010/main" val="828189437"/>
       </p:ext>
     </p:extLst>
   </p:cSld>
@@ -9229,7 +9229,7 @@
           <p:cNvPr id="79" name="">
             <a:extLst xmlns:a="http://schemas.openxmlformats.org/drawingml/2006/main">
               <a:ext uri="{FF2B5EF4-FFF2-40B4-BE49-F238E27FC236}">
-                <a16:creationId xmlns:a16="http://schemas.microsoft.com/office/drawing/2014/main" id="{6F93D561-2E04-4CFA-B510-35E325618AFE}"/>
+                <a16:creationId xmlns:a16="http://schemas.microsoft.com/office/drawing/2014/main" id="{FF4E59F4-6139-4C22-822C-43CF4C8EDC2A}"/>
               </a:ext>
             </a:extLst>
           </p:cNvPr>
@@ -9260,7 +9260,7 @@
           <p:cNvPr id="2" name="">
             <a:extLst xmlns:a="http://schemas.openxmlformats.org/drawingml/2006/main">
               <a:ext uri="{FF2B5EF4-FFF2-40B4-BE49-F238E27FC236}">
-                <a16:creationId xmlns:a16="http://schemas.microsoft.com/office/drawing/2014/main" id="{B06F6258-1778-4B1C-AF7A-96ABD57E37AF}"/>
+                <a16:creationId xmlns:a16="http://schemas.microsoft.com/office/drawing/2014/main" id="{89F7C444-2C93-4346-BED5-71E7DE7E1414}"/>
               </a:ext>
             </a:extLst>
           </p:cNvPr>
@@ -9305,7 +9305,7 @@
           <p:cNvPr id="3" name="">
             <a:extLst xmlns:a="http://schemas.openxmlformats.org/drawingml/2006/main">
               <a:ext uri="{FF2B5EF4-FFF2-40B4-BE49-F238E27FC236}">
-                <a16:creationId xmlns:a16="http://schemas.microsoft.com/office/drawing/2014/main" id="{611B1AE1-CDA5-4AFA-8483-01A75353B3E6}"/>
+                <a16:creationId xmlns:a16="http://schemas.microsoft.com/office/drawing/2014/main" id="{F88A69FC-D2A7-4D67-B4DA-B0319A5310E4}"/>
               </a:ext>
             </a:extLst>
           </p:cNvPr>
@@ -9350,7 +9350,7 @@
           <p:cNvPr id="4" name="">
             <a:extLst xmlns:a="http://schemas.openxmlformats.org/drawingml/2006/main">
               <a:ext uri="{FF2B5EF4-FFF2-40B4-BE49-F238E27FC236}">
-                <a16:creationId xmlns:a16="http://schemas.microsoft.com/office/drawing/2014/main" id="{EEC9A1B0-83FD-4809-9AAF-236DF0D86B29}"/>
+                <a16:creationId xmlns:a16="http://schemas.microsoft.com/office/drawing/2014/main" id="{DA0DC34F-5780-4A27-BD39-D5B51197941E}"/>
               </a:ext>
             </a:extLst>
           </p:cNvPr>
@@ -9395,7 +9395,7 @@
           <p:cNvPr id="5" name="">
             <a:extLst xmlns:a="http://schemas.openxmlformats.org/drawingml/2006/main">
               <a:ext uri="{FF2B5EF4-FFF2-40B4-BE49-F238E27FC236}">
-                <a16:creationId xmlns:a16="http://schemas.microsoft.com/office/drawing/2014/main" id="{8D58B1AE-06F9-426A-9A37-2AE8F31398C6}"/>
+                <a16:creationId xmlns:a16="http://schemas.microsoft.com/office/drawing/2014/main" id="{B2C4BCA2-6891-4383-84C3-FEE7A7967765}"/>
               </a:ext>
             </a:extLst>
           </p:cNvPr>
@@ -9426,7 +9426,7 @@
           <p:cNvPr id="6" name="">
             <a:extLst xmlns:a="http://schemas.openxmlformats.org/drawingml/2006/main">
               <a:ext uri="{FF2B5EF4-FFF2-40B4-BE49-F238E27FC236}">
-                <a16:creationId xmlns:a16="http://schemas.microsoft.com/office/drawing/2014/main" id="{9C5BBBE7-A456-495E-8226-649A7E28E7A8}"/>
+                <a16:creationId xmlns:a16="http://schemas.microsoft.com/office/drawing/2014/main" id="{EB020A0C-A430-4B45-AD19-B1696B777DFF}"/>
               </a:ext>
             </a:extLst>
           </p:cNvPr>
@@ -9457,7 +9457,7 @@
           <p:cNvPr id="7" name="">
             <a:extLst xmlns:a="http://schemas.openxmlformats.org/drawingml/2006/main">
               <a:ext uri="{FF2B5EF4-FFF2-40B4-BE49-F238E27FC236}">
-                <a16:creationId xmlns:a16="http://schemas.microsoft.com/office/drawing/2014/main" id="{3E43C474-936E-4CEA-819C-D90FBA93A19B}"/>
+                <a16:creationId xmlns:a16="http://schemas.microsoft.com/office/drawing/2014/main" id="{9A1EA783-A74A-48AB-8614-61DA81826567}"/>
               </a:ext>
             </a:extLst>
           </p:cNvPr>
@@ -9502,7 +9502,7 @@
           <p:cNvPr id="8" name="">
             <a:extLst xmlns:a="http://schemas.openxmlformats.org/drawingml/2006/main">
               <a:ext uri="{FF2B5EF4-FFF2-40B4-BE49-F238E27FC236}">
-                <a16:creationId xmlns:a16="http://schemas.microsoft.com/office/drawing/2014/main" id="{67A2B67B-FE49-4D5A-98A3-CAE8D9795604}"/>
+                <a16:creationId xmlns:a16="http://schemas.microsoft.com/office/drawing/2014/main" id="{B694F427-0ACA-4B21-A49E-522C08701616}"/>
               </a:ext>
             </a:extLst>
           </p:cNvPr>
@@ -9547,7 +9547,7 @@
           <p:cNvPr id="9" name="">
             <a:extLst xmlns:a="http://schemas.openxmlformats.org/drawingml/2006/main">
               <a:ext uri="{FF2B5EF4-FFF2-40B4-BE49-F238E27FC236}">
-                <a16:creationId xmlns:a16="http://schemas.microsoft.com/office/drawing/2014/main" id="{D2BCC1EE-823F-49D1-92CE-14A4792B5CB0}"/>
+                <a16:creationId xmlns:a16="http://schemas.microsoft.com/office/drawing/2014/main" id="{68833F24-8674-4DC7-A2BD-DDBBD125B15F}"/>
               </a:ext>
             </a:extLst>
           </p:cNvPr>
@@ -9578,7 +9578,7 @@
           <p:cNvPr id="10" name="">
             <a:extLst xmlns:a="http://schemas.openxmlformats.org/drawingml/2006/main">
               <a:ext uri="{FF2B5EF4-FFF2-40B4-BE49-F238E27FC236}">
-                <a16:creationId xmlns:a16="http://schemas.microsoft.com/office/drawing/2014/main" id="{ED56B74E-427E-4D43-9A85-AE613CD4DBA2}"/>
+                <a16:creationId xmlns:a16="http://schemas.microsoft.com/office/drawing/2014/main" id="{9D3F7519-9AB7-4AC9-BAEB-FF153F54480F}"/>
               </a:ext>
             </a:extLst>
           </p:cNvPr>
@@ -9623,7 +9623,7 @@
           <p:cNvPr id="11" name="">
             <a:extLst xmlns:a="http://schemas.openxmlformats.org/drawingml/2006/main">
               <a:ext uri="{FF2B5EF4-FFF2-40B4-BE49-F238E27FC236}">
-                <a16:creationId xmlns:a16="http://schemas.microsoft.com/office/drawing/2014/main" id="{2CB2B272-10B5-44DF-8973-305E09976F4C}"/>
+                <a16:creationId xmlns:a16="http://schemas.microsoft.com/office/drawing/2014/main" id="{217CFDDB-7035-43BB-940E-F61A7581B78D}"/>
               </a:ext>
             </a:extLst>
           </p:cNvPr>
@@ -9668,7 +9668,7 @@
           <p:cNvPr id="12" name="">
             <a:extLst xmlns:a="http://schemas.openxmlformats.org/drawingml/2006/main">
               <a:ext uri="{FF2B5EF4-FFF2-40B4-BE49-F238E27FC236}">
-                <a16:creationId xmlns:a16="http://schemas.microsoft.com/office/drawing/2014/main" id="{5F1F8240-9C52-4D85-86DE-2E0752B4BAAF}"/>
+                <a16:creationId xmlns:a16="http://schemas.microsoft.com/office/drawing/2014/main" id="{4D9E7AC6-E45A-4F70-9884-3B49BD33BADF}"/>
               </a:ext>
             </a:extLst>
           </p:cNvPr>
@@ -9713,7 +9713,7 @@
           <p:cNvPr id="13" name="">
             <a:extLst xmlns:a="http://schemas.openxmlformats.org/drawingml/2006/main">
               <a:ext uri="{FF2B5EF4-FFF2-40B4-BE49-F238E27FC236}">
-                <a16:creationId xmlns:a16="http://schemas.microsoft.com/office/drawing/2014/main" id="{B5F22CE7-BF10-41ED-9842-A93BDB9FE9DA}"/>
+                <a16:creationId xmlns:a16="http://schemas.microsoft.com/office/drawing/2014/main" id="{3D1BABBB-E17B-47E4-A138-FE781731F69B}"/>
               </a:ext>
             </a:extLst>
           </p:cNvPr>
@@ -9746,7 +9746,7 @@
           <p:cNvPr id="14" name="">
             <a:extLst xmlns:a="http://schemas.openxmlformats.org/drawingml/2006/main">
               <a:ext uri="{FF2B5EF4-FFF2-40B4-BE49-F238E27FC236}">
-                <a16:creationId xmlns:a16="http://schemas.microsoft.com/office/drawing/2014/main" id="{D10C9A75-DB35-4D3F-AEB5-90AB656F8349}"/>
+                <a16:creationId xmlns:a16="http://schemas.microsoft.com/office/drawing/2014/main" id="{A628E50C-52C3-4E1C-B3B6-D4522BC32861}"/>
               </a:ext>
             </a:extLst>
           </p:cNvPr>
@@ -9791,7 +9791,7 @@
           <p:cNvPr id="15" name="">
             <a:extLst xmlns:a="http://schemas.openxmlformats.org/drawingml/2006/main">
               <a:ext uri="{FF2B5EF4-FFF2-40B4-BE49-F238E27FC236}">
-                <a16:creationId xmlns:a16="http://schemas.microsoft.com/office/drawing/2014/main" id="{5DAE8E6C-A32E-431E-A364-0D98ABCE99F3}"/>
+                <a16:creationId xmlns:a16="http://schemas.microsoft.com/office/drawing/2014/main" id="{F893F621-3E2B-4684-83FC-E6BD0CC5E2BF}"/>
               </a:ext>
             </a:extLst>
           </p:cNvPr>
@@ -9836,7 +9836,7 @@
           <p:cNvPr id="16" name="">
             <a:extLst xmlns:a="http://schemas.openxmlformats.org/drawingml/2006/main">
               <a:ext uri="{FF2B5EF4-FFF2-40B4-BE49-F238E27FC236}">
-                <a16:creationId xmlns:a16="http://schemas.microsoft.com/office/drawing/2014/main" id="{BCCBAA13-A561-4AE3-828B-6D1DE5CE895F}"/>
+                <a16:creationId xmlns:a16="http://schemas.microsoft.com/office/drawing/2014/main" id="{93E2B6E5-4BA5-4C23-A689-05B3862B5D4B}"/>
               </a:ext>
             </a:extLst>
           </p:cNvPr>
@@ -9881,7 +9881,7 @@
           <p:cNvPr id="17" name="">
             <a:extLst xmlns:a="http://schemas.openxmlformats.org/drawingml/2006/main">
               <a:ext uri="{FF2B5EF4-FFF2-40B4-BE49-F238E27FC236}">
-                <a16:creationId xmlns:a16="http://schemas.microsoft.com/office/drawing/2014/main" id="{3E888AC2-BE81-4388-8FF9-6E70FAC03DE8}"/>
+                <a16:creationId xmlns:a16="http://schemas.microsoft.com/office/drawing/2014/main" id="{C9AACE88-484E-4255-AF41-4FC8CC2156DE}"/>
               </a:ext>
             </a:extLst>
           </p:cNvPr>
@@ -9914,7 +9914,7 @@
           <p:cNvPr id="18" name="">
             <a:extLst xmlns:a="http://schemas.openxmlformats.org/drawingml/2006/main">
               <a:ext uri="{FF2B5EF4-FFF2-40B4-BE49-F238E27FC236}">
-                <a16:creationId xmlns:a16="http://schemas.microsoft.com/office/drawing/2014/main" id="{DDE99271-C8A2-4D2B-A298-09868FA58E0C}"/>
+                <a16:creationId xmlns:a16="http://schemas.microsoft.com/office/drawing/2014/main" id="{DA1DE497-B22A-4462-99A3-17577B39E256}"/>
               </a:ext>
             </a:extLst>
           </p:cNvPr>
@@ -9959,7 +9959,7 @@
           <p:cNvPr id="19" name="">
             <a:extLst xmlns:a="http://schemas.openxmlformats.org/drawingml/2006/main">
               <a:ext uri="{FF2B5EF4-FFF2-40B4-BE49-F238E27FC236}">
-                <a16:creationId xmlns:a16="http://schemas.microsoft.com/office/drawing/2014/main" id="{E61AC9F9-65BC-4283-847E-67A52491D1B1}"/>
+                <a16:creationId xmlns:a16="http://schemas.microsoft.com/office/drawing/2014/main" id="{527873EC-D431-46B0-9AF2-4221E985DA3F}"/>
               </a:ext>
             </a:extLst>
           </p:cNvPr>
@@ -10004,7 +10004,7 @@
           <p:cNvPr id="20" name="">
             <a:extLst xmlns:a="http://schemas.openxmlformats.org/drawingml/2006/main">
               <a:ext uri="{FF2B5EF4-FFF2-40B4-BE49-F238E27FC236}">
-                <a16:creationId xmlns:a16="http://schemas.microsoft.com/office/drawing/2014/main" id="{E6AC91DF-54E8-4F69-B2C8-688A329226FB}"/>
+                <a16:creationId xmlns:a16="http://schemas.microsoft.com/office/drawing/2014/main" id="{CE5AA04B-D115-44A9-9E11-AA53EB142371}"/>
               </a:ext>
             </a:extLst>
           </p:cNvPr>
@@ -10049,7 +10049,7 @@
           <p:cNvPr id="21" name="">
             <a:extLst xmlns:a="http://schemas.openxmlformats.org/drawingml/2006/main">
               <a:ext uri="{FF2B5EF4-FFF2-40B4-BE49-F238E27FC236}">
-                <a16:creationId xmlns:a16="http://schemas.microsoft.com/office/drawing/2014/main" id="{01CD52E7-E3E8-4718-AAC8-CDA8CCBC2E2E}"/>
+                <a16:creationId xmlns:a16="http://schemas.microsoft.com/office/drawing/2014/main" id="{EBCB385F-0544-4BE1-8E9A-3F94FB2A93EC}"/>
               </a:ext>
             </a:extLst>
           </p:cNvPr>
@@ -10082,7 +10082,7 @@
           <p:cNvPr id="22" name="">
             <a:extLst xmlns:a="http://schemas.openxmlformats.org/drawingml/2006/main">
               <a:ext uri="{FF2B5EF4-FFF2-40B4-BE49-F238E27FC236}">
-                <a16:creationId xmlns:a16="http://schemas.microsoft.com/office/drawing/2014/main" id="{D1FBEFF0-4229-4316-AE9E-8E7FA977BBBC}"/>
+                <a16:creationId xmlns:a16="http://schemas.microsoft.com/office/drawing/2014/main" id="{52B8DB0C-FD2A-4761-A5AF-92FAE1E6904C}"/>
               </a:ext>
             </a:extLst>
           </p:cNvPr>
@@ -10127,7 +10127,7 @@
           <p:cNvPr id="23" name="">
             <a:extLst xmlns:a="http://schemas.openxmlformats.org/drawingml/2006/main">
               <a:ext uri="{FF2B5EF4-FFF2-40B4-BE49-F238E27FC236}">
-                <a16:creationId xmlns:a16="http://schemas.microsoft.com/office/drawing/2014/main" id="{94C89BBE-9663-4866-B931-C00FE105B9E5}"/>
+                <a16:creationId xmlns:a16="http://schemas.microsoft.com/office/drawing/2014/main" id="{D7E0E4E3-FC6C-4B27-81B9-C33AA924D3BA}"/>
               </a:ext>
             </a:extLst>
           </p:cNvPr>
@@ -10172,7 +10172,7 @@
           <p:cNvPr id="24" name="">
             <a:extLst xmlns:a="http://schemas.openxmlformats.org/drawingml/2006/main">
               <a:ext uri="{FF2B5EF4-FFF2-40B4-BE49-F238E27FC236}">
-                <a16:creationId xmlns:a16="http://schemas.microsoft.com/office/drawing/2014/main" id="{5C8C28F0-2263-49D0-8372-EC341F907A28}"/>
+                <a16:creationId xmlns:a16="http://schemas.microsoft.com/office/drawing/2014/main" id="{17E2B4A4-2BCF-4433-A8DC-0C03A3BDA90B}"/>
               </a:ext>
             </a:extLst>
           </p:cNvPr>
@@ -10217,7 +10217,7 @@
           <p:cNvPr id="25" name="">
             <a:extLst xmlns:a="http://schemas.openxmlformats.org/drawingml/2006/main">
               <a:ext uri="{FF2B5EF4-FFF2-40B4-BE49-F238E27FC236}">
-                <a16:creationId xmlns:a16="http://schemas.microsoft.com/office/drawing/2014/main" id="{48E89F73-1A61-4A90-86F7-39BE89682D43}"/>
+                <a16:creationId xmlns:a16="http://schemas.microsoft.com/office/drawing/2014/main" id="{30CAF1AF-50DB-4292-A6E5-066CC173F219}"/>
               </a:ext>
             </a:extLst>
           </p:cNvPr>
@@ -10250,7 +10250,7 @@
           <p:cNvPr id="26" name="">
             <a:extLst xmlns:a="http://schemas.openxmlformats.org/drawingml/2006/main">
               <a:ext uri="{FF2B5EF4-FFF2-40B4-BE49-F238E27FC236}">
-                <a16:creationId xmlns:a16="http://schemas.microsoft.com/office/drawing/2014/main" id="{572617BF-5DD5-4A17-9019-CDC6CCBC5A59}"/>
+                <a16:creationId xmlns:a16="http://schemas.microsoft.com/office/drawing/2014/main" id="{9D108112-E0E8-4E76-88B0-CAD1547A141A}"/>
               </a:ext>
             </a:extLst>
           </p:cNvPr>
@@ -10295,7 +10295,7 @@
           <p:cNvPr id="27" name="">
             <a:extLst xmlns:a="http://schemas.openxmlformats.org/drawingml/2006/main">
               <a:ext uri="{FF2B5EF4-FFF2-40B4-BE49-F238E27FC236}">
-                <a16:creationId xmlns:a16="http://schemas.microsoft.com/office/drawing/2014/main" id="{67B1AA6B-C010-40EA-B1F2-686763CFC008}"/>
+                <a16:creationId xmlns:a16="http://schemas.microsoft.com/office/drawing/2014/main" id="{79632BEB-3B30-4F07-B600-BAAFAB387210}"/>
               </a:ext>
             </a:extLst>
           </p:cNvPr>
@@ -10340,7 +10340,7 @@
           <p:cNvPr id="28" name="">
             <a:extLst xmlns:a="http://schemas.openxmlformats.org/drawingml/2006/main">
               <a:ext uri="{FF2B5EF4-FFF2-40B4-BE49-F238E27FC236}">
-                <a16:creationId xmlns:a16="http://schemas.microsoft.com/office/drawing/2014/main" id="{31AE0B80-0DAD-4488-BC28-42DCB77DD365}"/>
+                <a16:creationId xmlns:a16="http://schemas.microsoft.com/office/drawing/2014/main" id="{A576BAFB-2771-4EDC-BFA0-553C0D681EF5}"/>
               </a:ext>
             </a:extLst>
           </p:cNvPr>
@@ -10385,7 +10385,7 @@
           <p:cNvPr id="29" name="">
             <a:extLst xmlns:a="http://schemas.openxmlformats.org/drawingml/2006/main">
               <a:ext uri="{FF2B5EF4-FFF2-40B4-BE49-F238E27FC236}">
-                <a16:creationId xmlns:a16="http://schemas.microsoft.com/office/drawing/2014/main" id="{02D1BD84-EA0B-4D41-80E1-C92FB60C41C3}"/>
+                <a16:creationId xmlns:a16="http://schemas.microsoft.com/office/drawing/2014/main" id="{D9440ADF-2035-433A-82A4-E3591E2ABED7}"/>
               </a:ext>
             </a:extLst>
           </p:cNvPr>
@@ -10418,7 +10418,7 @@
           <p:cNvPr id="30" name="">
             <a:extLst xmlns:a="http://schemas.openxmlformats.org/drawingml/2006/main">
               <a:ext uri="{FF2B5EF4-FFF2-40B4-BE49-F238E27FC236}">
-                <a16:creationId xmlns:a16="http://schemas.microsoft.com/office/drawing/2014/main" id="{67439C83-479C-4E50-9D36-8CE0918F38F1}"/>
+                <a16:creationId xmlns:a16="http://schemas.microsoft.com/office/drawing/2014/main" id="{D4DBE5C5-D316-4937-9B1D-F085C1A05364}"/>
               </a:ext>
             </a:extLst>
           </p:cNvPr>
@@ -10463,7 +10463,7 @@
           <p:cNvPr id="31" name="">
             <a:extLst xmlns:a="http://schemas.openxmlformats.org/drawingml/2006/main">
               <a:ext uri="{FF2B5EF4-FFF2-40B4-BE49-F238E27FC236}">
-                <a16:creationId xmlns:a16="http://schemas.microsoft.com/office/drawing/2014/main" id="{6BADBACA-2C65-4E76-A15D-5662F9042A46}"/>
+                <a16:creationId xmlns:a16="http://schemas.microsoft.com/office/drawing/2014/main" id="{B4A8A03A-0225-4A18-B468-68F45812DB79}"/>
               </a:ext>
             </a:extLst>
           </p:cNvPr>
@@ -10508,7 +10508,7 @@
           <p:cNvPr id="32" name="">
             <a:extLst xmlns:a="http://schemas.openxmlformats.org/drawingml/2006/main">
               <a:ext uri="{FF2B5EF4-FFF2-40B4-BE49-F238E27FC236}">
-                <a16:creationId xmlns:a16="http://schemas.microsoft.com/office/drawing/2014/main" id="{1F055A4C-4D55-4F98-B386-5424D038E803}"/>
+                <a16:creationId xmlns:a16="http://schemas.microsoft.com/office/drawing/2014/main" id="{FB640D1C-CD8C-48FC-83A8-EB3C3FB00F7B}"/>
               </a:ext>
             </a:extLst>
           </p:cNvPr>
@@ -10553,7 +10553,7 @@
           <p:cNvPr id="33" name="">
             <a:extLst xmlns:a="http://schemas.openxmlformats.org/drawingml/2006/main">
               <a:ext uri="{FF2B5EF4-FFF2-40B4-BE49-F238E27FC236}">
-                <a16:creationId xmlns:a16="http://schemas.microsoft.com/office/drawing/2014/main" id="{023607A2-78D2-41D8-AC72-D717B3D5B46C}"/>
+                <a16:creationId xmlns:a16="http://schemas.microsoft.com/office/drawing/2014/main" id="{E07902E8-4CD1-4F1D-90A2-ECD5D87F9545}"/>
               </a:ext>
             </a:extLst>
           </p:cNvPr>
@@ -10586,7 +10586,7 @@
           <p:cNvPr id="34" name="">
             <a:extLst xmlns:a="http://schemas.openxmlformats.org/drawingml/2006/main">
               <a:ext uri="{FF2B5EF4-FFF2-40B4-BE49-F238E27FC236}">
-                <a16:creationId xmlns:a16="http://schemas.microsoft.com/office/drawing/2014/main" id="{3AEA1358-D21C-45C1-BB3B-15338F6AE674}"/>
+                <a16:creationId xmlns:a16="http://schemas.microsoft.com/office/drawing/2014/main" id="{51B62429-C2C4-4034-83AC-15D6E9822D1F}"/>
               </a:ext>
             </a:extLst>
           </p:cNvPr>
@@ -10631,7 +10631,7 @@
           <p:cNvPr id="35" name="">
             <a:extLst xmlns:a="http://schemas.openxmlformats.org/drawingml/2006/main">
               <a:ext uri="{FF2B5EF4-FFF2-40B4-BE49-F238E27FC236}">
-                <a16:creationId xmlns:a16="http://schemas.microsoft.com/office/drawing/2014/main" id="{4AC3FE0B-3B6B-4852-A361-526E8DC1F8B3}"/>
+                <a16:creationId xmlns:a16="http://schemas.microsoft.com/office/drawing/2014/main" id="{F0C54C17-882E-4CD5-9E2C-1F8F86190226}"/>
               </a:ext>
             </a:extLst>
           </p:cNvPr>
@@ -10676,7 +10676,7 @@
           <p:cNvPr id="36" name="">
             <a:extLst xmlns:a="http://schemas.openxmlformats.org/drawingml/2006/main">
               <a:ext uri="{FF2B5EF4-FFF2-40B4-BE49-F238E27FC236}">
-                <a16:creationId xmlns:a16="http://schemas.microsoft.com/office/drawing/2014/main" id="{8FCCCC98-5CFC-4563-854D-82BB1862B99F}"/>
+                <a16:creationId xmlns:a16="http://schemas.microsoft.com/office/drawing/2014/main" id="{325059D4-92E4-4F5B-A7BF-EC798415F58F}"/>
               </a:ext>
             </a:extLst>
           </p:cNvPr>
@@ -10721,7 +10721,7 @@
           <p:cNvPr id="37" name="">
             <a:extLst xmlns:a="http://schemas.openxmlformats.org/drawingml/2006/main">
               <a:ext uri="{FF2B5EF4-FFF2-40B4-BE49-F238E27FC236}">
-                <a16:creationId xmlns:a16="http://schemas.microsoft.com/office/drawing/2014/main" id="{34887080-91CA-425A-9959-F81DA5C31BF8}"/>
+                <a16:creationId xmlns:a16="http://schemas.microsoft.com/office/drawing/2014/main" id="{5B8B8D10-B28A-458C-882B-967E2D9B409B}"/>
               </a:ext>
             </a:extLst>
           </p:cNvPr>
@@ -10754,7 +10754,7 @@
           <p:cNvPr id="38" name="">
             <a:extLst xmlns:a="http://schemas.openxmlformats.org/drawingml/2006/main">
               <a:ext uri="{FF2B5EF4-FFF2-40B4-BE49-F238E27FC236}">
-                <a16:creationId xmlns:a16="http://schemas.microsoft.com/office/drawing/2014/main" id="{0759E62E-7116-4AC8-89E9-1C6366F4EB75}"/>
+                <a16:creationId xmlns:a16="http://schemas.microsoft.com/office/drawing/2014/main" id="{26853B7B-9081-4CA6-BB15-A9FA101BF0B9}"/>
               </a:ext>
             </a:extLst>
           </p:cNvPr>
@@ -10799,7 +10799,7 @@
           <p:cNvPr id="39" name="">
             <a:extLst xmlns:a="http://schemas.openxmlformats.org/drawingml/2006/main">
               <a:ext uri="{FF2B5EF4-FFF2-40B4-BE49-F238E27FC236}">
-                <a16:creationId xmlns:a16="http://schemas.microsoft.com/office/drawing/2014/main" id="{86C116B4-9474-4EC0-B477-4B904B1897FA}"/>
+                <a16:creationId xmlns:a16="http://schemas.microsoft.com/office/drawing/2014/main" id="{798421FB-7645-4958-ACEB-78C6F1CE1421}"/>
               </a:ext>
             </a:extLst>
           </p:cNvPr>
@@ -10844,7 +10844,7 @@
           <p:cNvPr id="40" name="">
             <a:extLst xmlns:a="http://schemas.openxmlformats.org/drawingml/2006/main">
               <a:ext uri="{FF2B5EF4-FFF2-40B4-BE49-F238E27FC236}">
-                <a16:creationId xmlns:a16="http://schemas.microsoft.com/office/drawing/2014/main" id="{CDCBAB67-63BB-43BB-BB8F-FF506B116E16}"/>
+                <a16:creationId xmlns:a16="http://schemas.microsoft.com/office/drawing/2014/main" id="{A3AF8D6A-C80E-4FF8-AACA-242AF10BD896}"/>
               </a:ext>
             </a:extLst>
           </p:cNvPr>
@@ -10889,7 +10889,7 @@
           <p:cNvPr id="41" name="">
             <a:extLst xmlns:a="http://schemas.openxmlformats.org/drawingml/2006/main">
               <a:ext uri="{FF2B5EF4-FFF2-40B4-BE49-F238E27FC236}">
-                <a16:creationId xmlns:a16="http://schemas.microsoft.com/office/drawing/2014/main" id="{ED60E9FB-4C70-4AA8-97CB-52F6DC935658}"/>
+                <a16:creationId xmlns:a16="http://schemas.microsoft.com/office/drawing/2014/main" id="{52629D9F-E594-43AB-8BF9-4453D5E976C3}"/>
               </a:ext>
             </a:extLst>
           </p:cNvPr>
@@ -10922,7 +10922,7 @@
           <p:cNvPr id="42" name="">
             <a:extLst xmlns:a="http://schemas.openxmlformats.org/drawingml/2006/main">
               <a:ext uri="{FF2B5EF4-FFF2-40B4-BE49-F238E27FC236}">
-                <a16:creationId xmlns:a16="http://schemas.microsoft.com/office/drawing/2014/main" id="{A7962F84-70CA-47ED-84D5-B2E7DA55D091}"/>
+                <a16:creationId xmlns:a16="http://schemas.microsoft.com/office/drawing/2014/main" id="{490F1292-5BEF-4100-B2D3-8FE21D505CE2}"/>
               </a:ext>
             </a:extLst>
           </p:cNvPr>
@@ -10967,7 +10967,7 @@
           <p:cNvPr id="43" name="">
             <a:extLst xmlns:a="http://schemas.openxmlformats.org/drawingml/2006/main">
               <a:ext uri="{FF2B5EF4-FFF2-40B4-BE49-F238E27FC236}">
-                <a16:creationId xmlns:a16="http://schemas.microsoft.com/office/drawing/2014/main" id="{DD425821-7EC0-488C-8AEC-60B9FDAB7935}"/>
+                <a16:creationId xmlns:a16="http://schemas.microsoft.com/office/drawing/2014/main" id="{9EE16FE4-32C8-4D63-91CB-D282847E915D}"/>
               </a:ext>
             </a:extLst>
           </p:cNvPr>
@@ -11012,7 +11012,7 @@
           <p:cNvPr id="44" name="">
             <a:extLst xmlns:a="http://schemas.openxmlformats.org/drawingml/2006/main">
               <a:ext uri="{FF2B5EF4-FFF2-40B4-BE49-F238E27FC236}">
-                <a16:creationId xmlns:a16="http://schemas.microsoft.com/office/drawing/2014/main" id="{A5C618F6-DBD3-48C5-98B4-F256D73E9DE2}"/>
+                <a16:creationId xmlns:a16="http://schemas.microsoft.com/office/drawing/2014/main" id="{69B89244-EEC7-4B2E-BF3B-F718A6155AF8}"/>
               </a:ext>
             </a:extLst>
           </p:cNvPr>
@@ -11057,7 +11057,7 @@
           <p:cNvPr id="45" name="">
             <a:extLst xmlns:a="http://schemas.openxmlformats.org/drawingml/2006/main">
               <a:ext uri="{FF2B5EF4-FFF2-40B4-BE49-F238E27FC236}">
-                <a16:creationId xmlns:a16="http://schemas.microsoft.com/office/drawing/2014/main" id="{5F8F7405-BF20-46B9-9B5D-58205E2FDEDA}"/>
+                <a16:creationId xmlns:a16="http://schemas.microsoft.com/office/drawing/2014/main" id="{7D6C75D8-C632-4456-93E4-C8EF2BA0C7D8}"/>
               </a:ext>
             </a:extLst>
           </p:cNvPr>
@@ -11090,7 +11090,7 @@
           <p:cNvPr id="46" name="">
             <a:extLst xmlns:a="http://schemas.openxmlformats.org/drawingml/2006/main">
               <a:ext uri="{FF2B5EF4-FFF2-40B4-BE49-F238E27FC236}">
-                <a16:creationId xmlns:a16="http://schemas.microsoft.com/office/drawing/2014/main" id="{6AE7DEE8-C518-4F0E-84FB-2DCDDD6954B1}"/>
+                <a16:creationId xmlns:a16="http://schemas.microsoft.com/office/drawing/2014/main" id="{21973597-06C4-4B0A-931F-FF72C8F64541}"/>
               </a:ext>
             </a:extLst>
           </p:cNvPr>
@@ -11121,7 +11121,7 @@
           <p:cNvPr id="47" name="">
             <a:extLst xmlns:a="http://schemas.openxmlformats.org/drawingml/2006/main">
               <a:ext uri="{FF2B5EF4-FFF2-40B4-BE49-F238E27FC236}">
-                <a16:creationId xmlns:a16="http://schemas.microsoft.com/office/drawing/2014/main" id="{2CD0035F-6FAE-4FAF-BDC9-4CAD95B10FA2}"/>
+                <a16:creationId xmlns:a16="http://schemas.microsoft.com/office/drawing/2014/main" id="{EDDBA557-8FDB-4D35-BD03-F00F97E5B66B}"/>
               </a:ext>
             </a:extLst>
           </p:cNvPr>
@@ -11166,7 +11166,7 @@
           <p:cNvPr id="48" name="">
             <a:extLst xmlns:a="http://schemas.openxmlformats.org/drawingml/2006/main">
               <a:ext uri="{FF2B5EF4-FFF2-40B4-BE49-F238E27FC236}">
-                <a16:creationId xmlns:a16="http://schemas.microsoft.com/office/drawing/2014/main" id="{5BD4FD3E-6A3A-413B-AA80-F9F48FDBABAD}"/>
+                <a16:creationId xmlns:a16="http://schemas.microsoft.com/office/drawing/2014/main" id="{2E323563-9242-4252-956B-FB6DF06D42E6}"/>
               </a:ext>
             </a:extLst>
           </p:cNvPr>
@@ -11211,7 +11211,7 @@
           <p:cNvPr id="49" name="">
             <a:extLst xmlns:a="http://schemas.openxmlformats.org/drawingml/2006/main">
               <a:ext uri="{FF2B5EF4-FFF2-40B4-BE49-F238E27FC236}">
-                <a16:creationId xmlns:a16="http://schemas.microsoft.com/office/drawing/2014/main" id="{111B72EA-27E4-43EC-8D6E-1D69837E59DF}"/>
+                <a16:creationId xmlns:a16="http://schemas.microsoft.com/office/drawing/2014/main" id="{C1491C11-86DD-474B-856B-F05C2412E8FC}"/>
               </a:ext>
             </a:extLst>
           </p:cNvPr>
@@ -11256,7 +11256,7 @@
           <p:cNvPr id="50" name="">
             <a:extLst xmlns:a="http://schemas.openxmlformats.org/drawingml/2006/main">
               <a:ext uri="{FF2B5EF4-FFF2-40B4-BE49-F238E27FC236}">
-                <a16:creationId xmlns:a16="http://schemas.microsoft.com/office/drawing/2014/main" id="{E65E8B50-4461-4555-921B-7F6D487DFF6A}"/>
+                <a16:creationId xmlns:a16="http://schemas.microsoft.com/office/drawing/2014/main" id="{C005A341-E368-45FA-AA5B-D111E8AD4B95}"/>
               </a:ext>
             </a:extLst>
           </p:cNvPr>
@@ -11289,7 +11289,7 @@
           <p:cNvPr id="51" name="">
             <a:extLst xmlns:a="http://schemas.openxmlformats.org/drawingml/2006/main">
               <a:ext uri="{FF2B5EF4-FFF2-40B4-BE49-F238E27FC236}">
-                <a16:creationId xmlns:a16="http://schemas.microsoft.com/office/drawing/2014/main" id="{89130272-33C1-4507-835E-7B128A0DDE4C}"/>
+                <a16:creationId xmlns:a16="http://schemas.microsoft.com/office/drawing/2014/main" id="{6F16A6DD-9C9B-4C1C-97F0-5CE7695A69B9}"/>
               </a:ext>
             </a:extLst>
           </p:cNvPr>
@@ -11334,7 +11334,7 @@
           <p:cNvPr id="52" name="">
             <a:extLst xmlns:a="http://schemas.openxmlformats.org/drawingml/2006/main">
               <a:ext uri="{FF2B5EF4-FFF2-40B4-BE49-F238E27FC236}">
-                <a16:creationId xmlns:a16="http://schemas.microsoft.com/office/drawing/2014/main" id="{A7AD3950-74AD-49D0-BC60-9A34995028C3}"/>
+                <a16:creationId xmlns:a16="http://schemas.microsoft.com/office/drawing/2014/main" id="{F4F7989C-9721-4E77-BA2B-E3B18F1E371E}"/>
               </a:ext>
             </a:extLst>
           </p:cNvPr>
@@ -11379,7 +11379,7 @@
           <p:cNvPr id="53" name="">
             <a:extLst xmlns:a="http://schemas.openxmlformats.org/drawingml/2006/main">
               <a:ext uri="{FF2B5EF4-FFF2-40B4-BE49-F238E27FC236}">
-                <a16:creationId xmlns:a16="http://schemas.microsoft.com/office/drawing/2014/main" id="{03F167A5-AED5-4CD7-9715-B73262C01174}"/>
+                <a16:creationId xmlns:a16="http://schemas.microsoft.com/office/drawing/2014/main" id="{F65107C1-8654-4657-B09D-904BBC112880}"/>
               </a:ext>
             </a:extLst>
           </p:cNvPr>
@@ -11424,7 +11424,7 @@
           <p:cNvPr id="54" name="">
             <a:extLst xmlns:a="http://schemas.openxmlformats.org/drawingml/2006/main">
               <a:ext uri="{FF2B5EF4-FFF2-40B4-BE49-F238E27FC236}">
-                <a16:creationId xmlns:a16="http://schemas.microsoft.com/office/drawing/2014/main" id="{E145F76F-99ED-4D44-8B4B-5E7EC704658B}"/>
+                <a16:creationId xmlns:a16="http://schemas.microsoft.com/office/drawing/2014/main" id="{28071A73-F330-458C-819F-040B8B12FC13}"/>
               </a:ext>
             </a:extLst>
           </p:cNvPr>
@@ -11457,7 +11457,7 @@
           <p:cNvPr id="55" name="">
             <a:extLst xmlns:a="http://schemas.openxmlformats.org/drawingml/2006/main">
               <a:ext uri="{FF2B5EF4-FFF2-40B4-BE49-F238E27FC236}">
-                <a16:creationId xmlns:a16="http://schemas.microsoft.com/office/drawing/2014/main" id="{2417EA74-63AF-424D-814C-1DFAE46C3D01}"/>
+                <a16:creationId xmlns:a16="http://schemas.microsoft.com/office/drawing/2014/main" id="{C4C0CDCB-696A-47E9-9117-2EEE016D04C2}"/>
               </a:ext>
             </a:extLst>
           </p:cNvPr>
@@ -11502,7 +11502,7 @@
           <p:cNvPr id="56" name="">
             <a:extLst xmlns:a="http://schemas.openxmlformats.org/drawingml/2006/main">
               <a:ext uri="{FF2B5EF4-FFF2-40B4-BE49-F238E27FC236}">
-                <a16:creationId xmlns:a16="http://schemas.microsoft.com/office/drawing/2014/main" id="{3FAC0352-EE60-4209-90DF-23C8754A5B71}"/>
+                <a16:creationId xmlns:a16="http://schemas.microsoft.com/office/drawing/2014/main" id="{21C07D79-6952-4603-8447-B245F00F4F67}"/>
               </a:ext>
             </a:extLst>
           </p:cNvPr>
@@ -11547,7 +11547,7 @@
           <p:cNvPr id="57" name="">
             <a:extLst xmlns:a="http://schemas.openxmlformats.org/drawingml/2006/main">
               <a:ext uri="{FF2B5EF4-FFF2-40B4-BE49-F238E27FC236}">
-                <a16:creationId xmlns:a16="http://schemas.microsoft.com/office/drawing/2014/main" id="{A7E89025-ED55-46B0-94C6-7BA65F4370ED}"/>
+                <a16:creationId xmlns:a16="http://schemas.microsoft.com/office/drawing/2014/main" id="{4FE77D90-8D81-4E40-87F2-46D5A7DF8477}"/>
               </a:ext>
             </a:extLst>
           </p:cNvPr>
@@ -11592,7 +11592,7 @@
           <p:cNvPr id="58" name="">
             <a:extLst xmlns:a="http://schemas.openxmlformats.org/drawingml/2006/main">
               <a:ext uri="{FF2B5EF4-FFF2-40B4-BE49-F238E27FC236}">
-                <a16:creationId xmlns:a16="http://schemas.microsoft.com/office/drawing/2014/main" id="{2D22ABB1-65DF-4D08-9C9D-BCD850956B22}"/>
+                <a16:creationId xmlns:a16="http://schemas.microsoft.com/office/drawing/2014/main" id="{21660039-A234-490D-B899-457DDB6BCF00}"/>
               </a:ext>
             </a:extLst>
           </p:cNvPr>
@@ -11627,7 +11627,7 @@
           <p:cNvPr id="59" name="">
             <a:extLst xmlns:a="http://schemas.openxmlformats.org/drawingml/2006/main">
               <a:ext uri="{FF2B5EF4-FFF2-40B4-BE49-F238E27FC236}">
-                <a16:creationId xmlns:a16="http://schemas.microsoft.com/office/drawing/2014/main" id="{24E37B95-4C4D-4A57-ABAA-FCC8557362DB}"/>
+                <a16:creationId xmlns:a16="http://schemas.microsoft.com/office/drawing/2014/main" id="{8271E540-206C-4F6E-91C9-F8053793E65C}"/>
               </a:ext>
             </a:extLst>
           </p:cNvPr>
@@ -11672,7 +11672,7 @@
           <p:cNvPr id="60" name="">
             <a:extLst xmlns:a="http://schemas.openxmlformats.org/drawingml/2006/main">
               <a:ext uri="{FF2B5EF4-FFF2-40B4-BE49-F238E27FC236}">
-                <a16:creationId xmlns:a16="http://schemas.microsoft.com/office/drawing/2014/main" id="{A51F805A-2065-4EE1-9278-23212B133F5A}"/>
+                <a16:creationId xmlns:a16="http://schemas.microsoft.com/office/drawing/2014/main" id="{4E7C0DB7-7956-4C04-8290-319142BAD024}"/>
               </a:ext>
             </a:extLst>
           </p:cNvPr>
@@ -11717,7 +11717,7 @@
           <p:cNvPr id="61" name="">
             <a:extLst xmlns:a="http://schemas.openxmlformats.org/drawingml/2006/main">
               <a:ext uri="{FF2B5EF4-FFF2-40B4-BE49-F238E27FC236}">
-                <a16:creationId xmlns:a16="http://schemas.microsoft.com/office/drawing/2014/main" id="{235A45B2-EE5E-414D-8EFF-A356C7AED8B0}"/>
+                <a16:creationId xmlns:a16="http://schemas.microsoft.com/office/drawing/2014/main" id="{B755109B-C7CF-4DA9-9CCA-7420E866E1DC}"/>
               </a:ext>
             </a:extLst>
           </p:cNvPr>
@@ -11762,7 +11762,7 @@
           <p:cNvPr id="62" name="">
             <a:extLst xmlns:a="http://schemas.openxmlformats.org/drawingml/2006/main">
               <a:ext uri="{FF2B5EF4-FFF2-40B4-BE49-F238E27FC236}">
-                <a16:creationId xmlns:a16="http://schemas.microsoft.com/office/drawing/2014/main" id="{F1D6DB3C-3572-4F3A-9A90-91038A9D1111}"/>
+                <a16:creationId xmlns:a16="http://schemas.microsoft.com/office/drawing/2014/main" id="{6F1FFF01-E92E-4BD4-9D82-24DE3955694E}"/>
               </a:ext>
             </a:extLst>
           </p:cNvPr>
@@ -11797,7 +11797,7 @@
           <p:cNvPr id="63" name="">
             <a:extLst xmlns:a="http://schemas.openxmlformats.org/drawingml/2006/main">
               <a:ext uri="{FF2B5EF4-FFF2-40B4-BE49-F238E27FC236}">
-                <a16:creationId xmlns:a16="http://schemas.microsoft.com/office/drawing/2014/main" id="{8BA74C58-5687-451C-B58B-9636C8E9E728}"/>
+                <a16:creationId xmlns:a16="http://schemas.microsoft.com/office/drawing/2014/main" id="{D90FDB30-63AF-4E72-926E-2847E8FB36E3}"/>
               </a:ext>
             </a:extLst>
           </p:cNvPr>
@@ -11842,7 +11842,7 @@
           <p:cNvPr id="64" name="">
             <a:extLst xmlns:a="http://schemas.openxmlformats.org/drawingml/2006/main">
               <a:ext uri="{FF2B5EF4-FFF2-40B4-BE49-F238E27FC236}">
-                <a16:creationId xmlns:a16="http://schemas.microsoft.com/office/drawing/2014/main" id="{68ABA1A2-E022-46EE-851F-0741C7A377AD}"/>
+                <a16:creationId xmlns:a16="http://schemas.microsoft.com/office/drawing/2014/main" id="{4A6C9E9A-6170-4DB3-84D1-98C64AE41E62}"/>
               </a:ext>
             </a:extLst>
           </p:cNvPr>
@@ -11887,7 +11887,7 @@
           <p:cNvPr id="65" name="">
             <a:extLst xmlns:a="http://schemas.openxmlformats.org/drawingml/2006/main">
               <a:ext uri="{FF2B5EF4-FFF2-40B4-BE49-F238E27FC236}">
-                <a16:creationId xmlns:a16="http://schemas.microsoft.com/office/drawing/2014/main" id="{973045B8-0BA0-4224-B38B-492F9759F3D6}"/>
+                <a16:creationId xmlns:a16="http://schemas.microsoft.com/office/drawing/2014/main" id="{9DA16BBC-8C53-43BB-BE76-EF4E16C7ABAA}"/>
               </a:ext>
             </a:extLst>
           </p:cNvPr>
@@ -11932,7 +11932,7 @@
           <p:cNvPr id="66" name="">
             <a:extLst xmlns:a="http://schemas.openxmlformats.org/drawingml/2006/main">
               <a:ext uri="{FF2B5EF4-FFF2-40B4-BE49-F238E27FC236}">
-                <a16:creationId xmlns:a16="http://schemas.microsoft.com/office/drawing/2014/main" id="{835D5127-9049-4615-91A9-4F38E0F0203F}"/>
+                <a16:creationId xmlns:a16="http://schemas.microsoft.com/office/drawing/2014/main" id="{62FE79B6-8909-4B47-8A31-C2B578019A58}"/>
               </a:ext>
             </a:extLst>
           </p:cNvPr>
@@ -11967,7 +11967,7 @@
           <p:cNvPr id="67" name="">
             <a:extLst xmlns:a="http://schemas.openxmlformats.org/drawingml/2006/main">
               <a:ext uri="{FF2B5EF4-FFF2-40B4-BE49-F238E27FC236}">
-                <a16:creationId xmlns:a16="http://schemas.microsoft.com/office/drawing/2014/main" id="{4D18C0C6-7E08-47EC-B97D-E1AA49ADC24F}"/>
+                <a16:creationId xmlns:a16="http://schemas.microsoft.com/office/drawing/2014/main" id="{8D4A0137-0FAD-4527-B918-B8C94067D38F}"/>
               </a:ext>
             </a:extLst>
           </p:cNvPr>
@@ -12012,7 +12012,7 @@
           <p:cNvPr id="68" name="">
             <a:extLst xmlns:a="http://schemas.openxmlformats.org/drawingml/2006/main">
               <a:ext uri="{FF2B5EF4-FFF2-40B4-BE49-F238E27FC236}">
-                <a16:creationId xmlns:a16="http://schemas.microsoft.com/office/drawing/2014/main" id="{E4693B06-9BB8-475F-9621-116734AEEC2C}"/>
+                <a16:creationId xmlns:a16="http://schemas.microsoft.com/office/drawing/2014/main" id="{7ADC1284-CA11-4EDC-9E67-C9738F89275F}"/>
               </a:ext>
             </a:extLst>
           </p:cNvPr>
@@ -12057,7 +12057,7 @@
           <p:cNvPr id="69" name="">
             <a:extLst xmlns:a="http://schemas.openxmlformats.org/drawingml/2006/main">
               <a:ext uri="{FF2B5EF4-FFF2-40B4-BE49-F238E27FC236}">
-                <a16:creationId xmlns:a16="http://schemas.microsoft.com/office/drawing/2014/main" id="{0DD345A9-C1B6-4160-AA26-CA0F94E047C6}"/>
+                <a16:creationId xmlns:a16="http://schemas.microsoft.com/office/drawing/2014/main" id="{BA43500F-F8C2-467E-96FE-92AA63638CDF}"/>
               </a:ext>
             </a:extLst>
           </p:cNvPr>
@@ -12102,7 +12102,7 @@
           <p:cNvPr id="70" name="">
             <a:extLst xmlns:a="http://schemas.openxmlformats.org/drawingml/2006/main">
               <a:ext uri="{FF2B5EF4-FFF2-40B4-BE49-F238E27FC236}">
-                <a16:creationId xmlns:a16="http://schemas.microsoft.com/office/drawing/2014/main" id="{E56C3C03-E546-4756-BEFD-4AB198B87649}"/>
+                <a16:creationId xmlns:a16="http://schemas.microsoft.com/office/drawing/2014/main" id="{969FACB4-E7C0-4AA2-AEC2-1A47FBCFF450}"/>
               </a:ext>
             </a:extLst>
           </p:cNvPr>
@@ -12137,7 +12137,7 @@
           <p:cNvPr id="71" name="">
             <a:extLst xmlns:a="http://schemas.openxmlformats.org/drawingml/2006/main">
               <a:ext uri="{FF2B5EF4-FFF2-40B4-BE49-F238E27FC236}">
-                <a16:creationId xmlns:a16="http://schemas.microsoft.com/office/drawing/2014/main" id="{D959F91F-1543-4D02-AFAD-C7B9F9BEDCFB}"/>
+                <a16:creationId xmlns:a16="http://schemas.microsoft.com/office/drawing/2014/main" id="{7D28F007-8D51-43CB-983B-B8B7A172CE79}"/>
               </a:ext>
             </a:extLst>
           </p:cNvPr>
@@ -12182,7 +12182,7 @@
           <p:cNvPr id="72" name="">
             <a:extLst xmlns:a="http://schemas.openxmlformats.org/drawingml/2006/main">
               <a:ext uri="{FF2B5EF4-FFF2-40B4-BE49-F238E27FC236}">
-                <a16:creationId xmlns:a16="http://schemas.microsoft.com/office/drawing/2014/main" id="{1394AD27-43BF-4B61-B489-591B7198152F}"/>
+                <a16:creationId xmlns:a16="http://schemas.microsoft.com/office/drawing/2014/main" id="{D057CC77-6CA6-48C0-A8D1-D5D6F4D6B3E2}"/>
               </a:ext>
             </a:extLst>
           </p:cNvPr>
@@ -12227,7 +12227,7 @@
           <p:cNvPr id="73" name="">
             <a:extLst xmlns:a="http://schemas.openxmlformats.org/drawingml/2006/main">
               <a:ext uri="{FF2B5EF4-FFF2-40B4-BE49-F238E27FC236}">
-                <a16:creationId xmlns:a16="http://schemas.microsoft.com/office/drawing/2014/main" id="{86ECB4BB-A66A-4F4B-8B9D-33C2FB35CAE1}"/>
+                <a16:creationId xmlns:a16="http://schemas.microsoft.com/office/drawing/2014/main" id="{CF8878D6-30FF-4BAC-9D4A-A6FFB7B7C35D}"/>
               </a:ext>
             </a:extLst>
           </p:cNvPr>
@@ -12272,7 +12272,7 @@
           <p:cNvPr id="74" name="">
             <a:extLst xmlns:a="http://schemas.openxmlformats.org/drawingml/2006/main">
               <a:ext uri="{FF2B5EF4-FFF2-40B4-BE49-F238E27FC236}">
-                <a16:creationId xmlns:a16="http://schemas.microsoft.com/office/drawing/2014/main" id="{3662669A-AA40-491C-89BD-A0484699528E}"/>
+                <a16:creationId xmlns:a16="http://schemas.microsoft.com/office/drawing/2014/main" id="{247597CA-73C1-47F1-8556-C78D4CD545C2}"/>
               </a:ext>
             </a:extLst>
           </p:cNvPr>
@@ -12307,7 +12307,7 @@
           <p:cNvPr id="75" name="">
             <a:extLst xmlns:a="http://schemas.openxmlformats.org/drawingml/2006/main">
               <a:ext uri="{FF2B5EF4-FFF2-40B4-BE49-F238E27FC236}">
-                <a16:creationId xmlns:a16="http://schemas.microsoft.com/office/drawing/2014/main" id="{E61513F8-78BD-40FB-BFED-85CF74E6C532}"/>
+                <a16:creationId xmlns:a16="http://schemas.microsoft.com/office/drawing/2014/main" id="{6130395A-5995-43CC-A629-465D6D5DC6AB}"/>
               </a:ext>
             </a:extLst>
           </p:cNvPr>
@@ -12338,7 +12338,7 @@
           <p:cNvPr id="76" name="">
             <a:extLst xmlns:a="http://schemas.openxmlformats.org/drawingml/2006/main">
               <a:ext uri="{FF2B5EF4-FFF2-40B4-BE49-F238E27FC236}">
-                <a16:creationId xmlns:a16="http://schemas.microsoft.com/office/drawing/2014/main" id="{DF4A9549-0DDF-492F-981C-23D6E9BF4422}"/>
+                <a16:creationId xmlns:a16="http://schemas.microsoft.com/office/drawing/2014/main" id="{FF322E27-837F-448F-B992-5B29EDF0701A}"/>
               </a:ext>
             </a:extLst>
           </p:cNvPr>
@@ -12383,7 +12383,7 @@
           <p:cNvPr id="77" name="">
             <a:extLst xmlns:a="http://schemas.openxmlformats.org/drawingml/2006/main">
               <a:ext uri="{FF2B5EF4-FFF2-40B4-BE49-F238E27FC236}">
-                <a16:creationId xmlns:a16="http://schemas.microsoft.com/office/drawing/2014/main" id="{59DAF21A-9087-48BF-B0FF-2D73C056E7AF}"/>
+                <a16:creationId xmlns:a16="http://schemas.microsoft.com/office/drawing/2014/main" id="{B27E684D-5043-4116-AFD6-E09E7E212570}"/>
               </a:ext>
             </a:extLst>
           </p:cNvPr>
@@ -12428,7 +12428,7 @@
           <p:cNvPr id="78" name="">
             <a:extLst xmlns:a="http://schemas.openxmlformats.org/drawingml/2006/main">
               <a:ext uri="{FF2B5EF4-FFF2-40B4-BE49-F238E27FC236}">
-                <a16:creationId xmlns:a16="http://schemas.microsoft.com/office/drawing/2014/main" id="{A6C85FD0-D239-4D87-BA89-EA64BD114AC3}"/>
+                <a16:creationId xmlns:a16="http://schemas.microsoft.com/office/drawing/2014/main" id="{A6D9E769-5E34-4669-94B0-3F81424FD03A}"/>
               </a:ext>
             </a:extLst>
           </p:cNvPr>
@@ -12471,7 +12471,7 @@
     </p:spTree>
     <p:extLst>
       <p:ext uri="{BB962C8B-B14F-4D97-AF65-F5344CB8AC3E}">
-        <p14:creationId xmlns:p14="http://schemas.microsoft.com/office/powerpoint/2010/main" val="2132824523"/>
+        <p14:creationId xmlns:p14="http://schemas.microsoft.com/office/powerpoint/2010/main" val="1826471261"/>
       </p:ext>
     </p:extLst>
   </p:cSld>
@@ -12495,7 +12495,7 @@
           <p:cNvPr id="44" name="">
             <a:extLst xmlns:a="http://schemas.openxmlformats.org/drawingml/2006/main">
               <a:ext uri="{FF2B5EF4-FFF2-40B4-BE49-F238E27FC236}">
-                <a16:creationId xmlns:a16="http://schemas.microsoft.com/office/drawing/2014/main" id="{09D70772-F29C-49BD-AD5B-B5F0601A783F}"/>
+                <a16:creationId xmlns:a16="http://schemas.microsoft.com/office/drawing/2014/main" id="{6F2D19A3-D059-4012-9E5D-0BECC095A125}"/>
               </a:ext>
             </a:extLst>
           </p:cNvPr>
@@ -12526,7 +12526,7 @@
           <p:cNvPr id="2" name="">
             <a:extLst xmlns:a="http://schemas.openxmlformats.org/drawingml/2006/main">
               <a:ext uri="{FF2B5EF4-FFF2-40B4-BE49-F238E27FC236}">
-                <a16:creationId xmlns:a16="http://schemas.microsoft.com/office/drawing/2014/main" id="{DA44FB66-7873-4371-8A45-D98425EEA3A0}"/>
+                <a16:creationId xmlns:a16="http://schemas.microsoft.com/office/drawing/2014/main" id="{C9091616-F123-4669-BE46-8EBE0BEEEA6C}"/>
               </a:ext>
             </a:extLst>
           </p:cNvPr>
@@ -12571,7 +12571,7 @@
           <p:cNvPr id="3" name="">
             <a:extLst xmlns:a="http://schemas.openxmlformats.org/drawingml/2006/main">
               <a:ext uri="{FF2B5EF4-FFF2-40B4-BE49-F238E27FC236}">
-                <a16:creationId xmlns:a16="http://schemas.microsoft.com/office/drawing/2014/main" id="{B6868849-A6DB-4840-8DD0-CC1F874F209B}"/>
+                <a16:creationId xmlns:a16="http://schemas.microsoft.com/office/drawing/2014/main" id="{2D56AB40-9A03-450B-8540-C10D793303AE}"/>
               </a:ext>
             </a:extLst>
           </p:cNvPr>
@@ -12616,7 +12616,7 @@
           <p:cNvPr id="4" name="">
             <a:extLst xmlns:a="http://schemas.openxmlformats.org/drawingml/2006/main">
               <a:ext uri="{FF2B5EF4-FFF2-40B4-BE49-F238E27FC236}">
-                <a16:creationId xmlns:a16="http://schemas.microsoft.com/office/drawing/2014/main" id="{178A4D93-62EA-4838-99B6-EE226E967244}"/>
+                <a16:creationId xmlns:a16="http://schemas.microsoft.com/office/drawing/2014/main" id="{EB8F39DC-6195-4AC4-B667-DB82EA3B5905}"/>
               </a:ext>
             </a:extLst>
           </p:cNvPr>
@@ -12661,7 +12661,7 @@
           <p:cNvPr id="5" name="">
             <a:extLst xmlns:a="http://schemas.openxmlformats.org/drawingml/2006/main">
               <a:ext uri="{FF2B5EF4-FFF2-40B4-BE49-F238E27FC236}">
-                <a16:creationId xmlns:a16="http://schemas.microsoft.com/office/drawing/2014/main" id="{75D986BB-A78B-451B-8337-EF4DA756455B}"/>
+                <a16:creationId xmlns:a16="http://schemas.microsoft.com/office/drawing/2014/main" id="{091F134C-12C9-411B-BFDF-A518C4FE4C28}"/>
               </a:ext>
             </a:extLst>
           </p:cNvPr>
@@ -12692,7 +12692,7 @@
           <p:cNvPr id="6" name="">
             <a:extLst xmlns:a="http://schemas.openxmlformats.org/drawingml/2006/main">
               <a:ext uri="{FF2B5EF4-FFF2-40B4-BE49-F238E27FC236}">
-                <a16:creationId xmlns:a16="http://schemas.microsoft.com/office/drawing/2014/main" id="{667B94FA-30F0-4665-A261-17734797238D}"/>
+                <a16:creationId xmlns:a16="http://schemas.microsoft.com/office/drawing/2014/main" id="{4E6EBFE1-CC52-4339-838C-60A7A87257E1}"/>
               </a:ext>
             </a:extLst>
           </p:cNvPr>
@@ -12723,7 +12723,7 @@
           <p:cNvPr id="7" name="">
             <a:extLst xmlns:a="http://schemas.openxmlformats.org/drawingml/2006/main">
               <a:ext uri="{FF2B5EF4-FFF2-40B4-BE49-F238E27FC236}">
-                <a16:creationId xmlns:a16="http://schemas.microsoft.com/office/drawing/2014/main" id="{0CF8B613-7CF9-40CA-9C5E-44D16CEF61E7}"/>
+                <a16:creationId xmlns:a16="http://schemas.microsoft.com/office/drawing/2014/main" id="{1A8B6F06-A420-42CA-86F0-531F85C03293}"/>
               </a:ext>
             </a:extLst>
           </p:cNvPr>
@@ -12768,7 +12768,7 @@
           <p:cNvPr id="8" name="">
             <a:extLst xmlns:a="http://schemas.openxmlformats.org/drawingml/2006/main">
               <a:ext uri="{FF2B5EF4-FFF2-40B4-BE49-F238E27FC236}">
-                <a16:creationId xmlns:a16="http://schemas.microsoft.com/office/drawing/2014/main" id="{645D2725-E76E-4399-99B2-FE73477C3223}"/>
+                <a16:creationId xmlns:a16="http://schemas.microsoft.com/office/drawing/2014/main" id="{6E22CFB3-677D-41F5-86EE-BBB48997102D}"/>
               </a:ext>
             </a:extLst>
           </p:cNvPr>
@@ -12813,7 +12813,7 @@
           <p:cNvPr id="9" name="">
             <a:extLst xmlns:a="http://schemas.openxmlformats.org/drawingml/2006/main">
               <a:ext uri="{FF2B5EF4-FFF2-40B4-BE49-F238E27FC236}">
-                <a16:creationId xmlns:a16="http://schemas.microsoft.com/office/drawing/2014/main" id="{CF410F5C-F0B7-4AF7-BF12-228EA04AAAA7}"/>
+                <a16:creationId xmlns:a16="http://schemas.microsoft.com/office/drawing/2014/main" id="{A97FCB29-3D9F-4C79-A7D7-6080A5C38DAD}"/>
               </a:ext>
             </a:extLst>
           </p:cNvPr>
@@ -12846,7 +12846,7 @@
           <p:cNvPr id="10" name="">
             <a:extLst xmlns:a="http://schemas.openxmlformats.org/drawingml/2006/main">
               <a:ext uri="{FF2B5EF4-FFF2-40B4-BE49-F238E27FC236}">
-                <a16:creationId xmlns:a16="http://schemas.microsoft.com/office/drawing/2014/main" id="{AD2FA995-A6BC-43ED-BEE1-D6051C998193}"/>
+                <a16:creationId xmlns:a16="http://schemas.microsoft.com/office/drawing/2014/main" id="{73E6FA02-2570-4911-A1DF-42AC7F1F8DB6}"/>
               </a:ext>
             </a:extLst>
           </p:cNvPr>
@@ -12877,7 +12877,7 @@
           <p:cNvPr id="11" name="">
             <a:extLst xmlns:a="http://schemas.openxmlformats.org/drawingml/2006/main">
               <a:ext uri="{FF2B5EF4-FFF2-40B4-BE49-F238E27FC236}">
-                <a16:creationId xmlns:a16="http://schemas.microsoft.com/office/drawing/2014/main" id="{EC502F6E-F14C-414A-AFDB-258A8BA9D21A}"/>
+                <a16:creationId xmlns:a16="http://schemas.microsoft.com/office/drawing/2014/main" id="{0C39107D-1265-4C12-8416-E57BECF6872C}"/>
               </a:ext>
             </a:extLst>
           </p:cNvPr>
@@ -12922,7 +12922,7 @@
           <p:cNvPr id="12" name="">
             <a:extLst xmlns:a="http://schemas.openxmlformats.org/drawingml/2006/main">
               <a:ext uri="{FF2B5EF4-FFF2-40B4-BE49-F238E27FC236}">
-                <a16:creationId xmlns:a16="http://schemas.microsoft.com/office/drawing/2014/main" id="{CE32136D-1F02-45E2-9886-CD4AA96B6690}"/>
+                <a16:creationId xmlns:a16="http://schemas.microsoft.com/office/drawing/2014/main" id="{BB8FE3F3-174A-4DD9-9691-56DA76949660}"/>
               </a:ext>
             </a:extLst>
           </p:cNvPr>
@@ -12957,7 +12957,7 @@
           <p:cNvPr id="13" name="">
             <a:extLst xmlns:a="http://schemas.openxmlformats.org/drawingml/2006/main">
               <a:ext uri="{FF2B5EF4-FFF2-40B4-BE49-F238E27FC236}">
-                <a16:creationId xmlns:a16="http://schemas.microsoft.com/office/drawing/2014/main" id="{B6620614-1A9B-46BD-9C7D-9198F37DA656}"/>
+                <a16:creationId xmlns:a16="http://schemas.microsoft.com/office/drawing/2014/main" id="{BF094150-4336-4F52-AD41-3C91C1B2EB0F}"/>
               </a:ext>
             </a:extLst>
           </p:cNvPr>
@@ -13002,7 +13002,7 @@
           <p:cNvPr id="14" name="">
             <a:extLst xmlns:a="http://schemas.openxmlformats.org/drawingml/2006/main">
               <a:ext uri="{FF2B5EF4-FFF2-40B4-BE49-F238E27FC236}">
-                <a16:creationId xmlns:a16="http://schemas.microsoft.com/office/drawing/2014/main" id="{62C0BE73-87D7-4F50-B6DA-606DC41AE3B2}"/>
+                <a16:creationId xmlns:a16="http://schemas.microsoft.com/office/drawing/2014/main" id="{A69B8F05-952B-485C-B299-34759CC6C02D}"/>
               </a:ext>
             </a:extLst>
           </p:cNvPr>
@@ -13037,7 +13037,7 @@
           <p:cNvPr id="15" name="">
             <a:extLst xmlns:a="http://schemas.openxmlformats.org/drawingml/2006/main">
               <a:ext uri="{FF2B5EF4-FFF2-40B4-BE49-F238E27FC236}">
-                <a16:creationId xmlns:a16="http://schemas.microsoft.com/office/drawing/2014/main" id="{00957D03-ADFA-4B94-B3FD-CA8FB503A179}"/>
+                <a16:creationId xmlns:a16="http://schemas.microsoft.com/office/drawing/2014/main" id="{3DCDE87A-10A7-40DD-9A81-70017A1D7786}"/>
               </a:ext>
             </a:extLst>
           </p:cNvPr>
@@ -13082,7 +13082,7 @@
           <p:cNvPr id="16" name="">
             <a:extLst xmlns:a="http://schemas.openxmlformats.org/drawingml/2006/main">
               <a:ext uri="{FF2B5EF4-FFF2-40B4-BE49-F238E27FC236}">
-                <a16:creationId xmlns:a16="http://schemas.microsoft.com/office/drawing/2014/main" id="{BA59E7D3-8A66-4410-979E-380FA6B24E1A}"/>
+                <a16:creationId xmlns:a16="http://schemas.microsoft.com/office/drawing/2014/main" id="{40E69233-8748-4124-827F-E773FB94ED4A}"/>
               </a:ext>
             </a:extLst>
           </p:cNvPr>
@@ -13117,7 +13117,7 @@
           <p:cNvPr id="17" name="">
             <a:extLst xmlns:a="http://schemas.openxmlformats.org/drawingml/2006/main">
               <a:ext uri="{FF2B5EF4-FFF2-40B4-BE49-F238E27FC236}">
-                <a16:creationId xmlns:a16="http://schemas.microsoft.com/office/drawing/2014/main" id="{8CD63F06-AA36-4D07-BDFF-95C1F00C85D7}"/>
+                <a16:creationId xmlns:a16="http://schemas.microsoft.com/office/drawing/2014/main" id="{3204336A-D2FA-468E-AF67-52E91997EBCC}"/>
               </a:ext>
             </a:extLst>
           </p:cNvPr>
@@ -13162,7 +13162,7 @@
           <p:cNvPr id="18" name="">
             <a:extLst xmlns:a="http://schemas.openxmlformats.org/drawingml/2006/main">
               <a:ext uri="{FF2B5EF4-FFF2-40B4-BE49-F238E27FC236}">
-                <a16:creationId xmlns:a16="http://schemas.microsoft.com/office/drawing/2014/main" id="{BE7A000C-3486-4096-9A21-7D0E34E62F73}"/>
+                <a16:creationId xmlns:a16="http://schemas.microsoft.com/office/drawing/2014/main" id="{A58C17AD-4BE8-401A-86FB-E5197852D60A}"/>
               </a:ext>
             </a:extLst>
           </p:cNvPr>
@@ -13195,7 +13195,7 @@
           <p:cNvPr id="19" name="">
             <a:extLst xmlns:a="http://schemas.openxmlformats.org/drawingml/2006/main">
               <a:ext uri="{FF2B5EF4-FFF2-40B4-BE49-F238E27FC236}">
-                <a16:creationId xmlns:a16="http://schemas.microsoft.com/office/drawing/2014/main" id="{84065AD8-A5E0-4475-8F16-6243EE0B4471}"/>
+                <a16:creationId xmlns:a16="http://schemas.microsoft.com/office/drawing/2014/main" id="{3DCB242D-74E2-4DE9-A96A-0D21AD58223A}"/>
               </a:ext>
             </a:extLst>
           </p:cNvPr>
@@ -13240,7 +13240,7 @@
           <p:cNvPr id="20" name="">
             <a:extLst xmlns:a="http://schemas.openxmlformats.org/drawingml/2006/main">
               <a:ext uri="{FF2B5EF4-FFF2-40B4-BE49-F238E27FC236}">
-                <a16:creationId xmlns:a16="http://schemas.microsoft.com/office/drawing/2014/main" id="{BB9F13FF-2AD9-45DC-8676-83A0229C5546}"/>
+                <a16:creationId xmlns:a16="http://schemas.microsoft.com/office/drawing/2014/main" id="{D6C99FAF-2222-4066-9FF7-8ADA46FC2F42}"/>
               </a:ext>
             </a:extLst>
           </p:cNvPr>
@@ -13273,7 +13273,7 @@
           <p:cNvPr id="21" name="">
             <a:extLst xmlns:a="http://schemas.openxmlformats.org/drawingml/2006/main">
               <a:ext uri="{FF2B5EF4-FFF2-40B4-BE49-F238E27FC236}">
-                <a16:creationId xmlns:a16="http://schemas.microsoft.com/office/drawing/2014/main" id="{C51D04B3-A37B-4324-B50D-4EA8E4AB0654}"/>
+                <a16:creationId xmlns:a16="http://schemas.microsoft.com/office/drawing/2014/main" id="{97017564-5295-4130-882D-58B37905C837}"/>
               </a:ext>
             </a:extLst>
           </p:cNvPr>
@@ -13304,7 +13304,7 @@
           <p:cNvPr id="22" name="">
             <a:extLst xmlns:a="http://schemas.openxmlformats.org/drawingml/2006/main">
               <a:ext uri="{FF2B5EF4-FFF2-40B4-BE49-F238E27FC236}">
-                <a16:creationId xmlns:a16="http://schemas.microsoft.com/office/drawing/2014/main" id="{01B1EBF2-4AB6-46FE-8500-B9A9CEDD2ED8}"/>
+                <a16:creationId xmlns:a16="http://schemas.microsoft.com/office/drawing/2014/main" id="{8B1D20CA-4378-4D92-BD24-645A51CB4CD9}"/>
               </a:ext>
             </a:extLst>
           </p:cNvPr>
@@ -13349,7 +13349,7 @@
           <p:cNvPr id="23" name="">
             <a:extLst xmlns:a="http://schemas.openxmlformats.org/drawingml/2006/main">
               <a:ext uri="{FF2B5EF4-FFF2-40B4-BE49-F238E27FC236}">
-                <a16:creationId xmlns:a16="http://schemas.microsoft.com/office/drawing/2014/main" id="{CAD5F83B-5D72-478E-A42C-0D5F8FFF6888}"/>
+                <a16:creationId xmlns:a16="http://schemas.microsoft.com/office/drawing/2014/main" id="{660E68C9-A893-4B25-9ADF-6BFAC03ADDF1}"/>
               </a:ext>
             </a:extLst>
           </p:cNvPr>
@@ -13384,7 +13384,7 @@
           <p:cNvPr id="24" name="">
             <a:extLst xmlns:a="http://schemas.openxmlformats.org/drawingml/2006/main">
               <a:ext uri="{FF2B5EF4-FFF2-40B4-BE49-F238E27FC236}">
-                <a16:creationId xmlns:a16="http://schemas.microsoft.com/office/drawing/2014/main" id="{63503F32-2DF2-479D-84E7-188B3928F470}"/>
+                <a16:creationId xmlns:a16="http://schemas.microsoft.com/office/drawing/2014/main" id="{B41DBE40-7720-4925-958A-68C624ED09B9}"/>
               </a:ext>
             </a:extLst>
           </p:cNvPr>
@@ -13429,7 +13429,7 @@
           <p:cNvPr id="25" name="">
             <a:extLst xmlns:a="http://schemas.openxmlformats.org/drawingml/2006/main">
               <a:ext uri="{FF2B5EF4-FFF2-40B4-BE49-F238E27FC236}">
-                <a16:creationId xmlns:a16="http://schemas.microsoft.com/office/drawing/2014/main" id="{DACACD11-4741-4D85-8026-BC934F48A35B}"/>
+                <a16:creationId xmlns:a16="http://schemas.microsoft.com/office/drawing/2014/main" id="{78AD3053-E76B-479E-9863-EE5BA7419478}"/>
               </a:ext>
             </a:extLst>
           </p:cNvPr>
@@ -13464,7 +13464,7 @@
           <p:cNvPr id="26" name="">
             <a:extLst xmlns:a="http://schemas.openxmlformats.org/drawingml/2006/main">
               <a:ext uri="{FF2B5EF4-FFF2-40B4-BE49-F238E27FC236}">
-                <a16:creationId xmlns:a16="http://schemas.microsoft.com/office/drawing/2014/main" id="{AB389EAA-A137-4BCD-81A3-377F4E6F09C9}"/>
+                <a16:creationId xmlns:a16="http://schemas.microsoft.com/office/drawing/2014/main" id="{60F656D5-E14D-4DFB-8615-D6BF6B55687D}"/>
               </a:ext>
             </a:extLst>
           </p:cNvPr>
@@ -13509,7 +13509,7 @@
           <p:cNvPr id="27" name="">
             <a:extLst xmlns:a="http://schemas.openxmlformats.org/drawingml/2006/main">
               <a:ext uri="{FF2B5EF4-FFF2-40B4-BE49-F238E27FC236}">
-                <a16:creationId xmlns:a16="http://schemas.microsoft.com/office/drawing/2014/main" id="{2BB71825-1C49-46FF-B198-762BD6E99493}"/>
+                <a16:creationId xmlns:a16="http://schemas.microsoft.com/office/drawing/2014/main" id="{C4E9912F-82C3-49F5-A4AB-EDA5A3E7F182}"/>
               </a:ext>
             </a:extLst>
           </p:cNvPr>
@@ -13544,7 +13544,7 @@
           <p:cNvPr id="28" name="">
             <a:extLst xmlns:a="http://schemas.openxmlformats.org/drawingml/2006/main">
               <a:ext uri="{FF2B5EF4-FFF2-40B4-BE49-F238E27FC236}">
-                <a16:creationId xmlns:a16="http://schemas.microsoft.com/office/drawing/2014/main" id="{C3D079E1-9E58-4D86-A6B8-69B3E404F46A}"/>
+                <a16:creationId xmlns:a16="http://schemas.microsoft.com/office/drawing/2014/main" id="{CE7C2963-A4BE-4F6D-8AF6-AAA095B20A98}"/>
               </a:ext>
             </a:extLst>
           </p:cNvPr>
@@ -13589,7 +13589,7 @@
           <p:cNvPr id="29" name="">
             <a:extLst xmlns:a="http://schemas.openxmlformats.org/drawingml/2006/main">
               <a:ext uri="{FF2B5EF4-FFF2-40B4-BE49-F238E27FC236}">
-                <a16:creationId xmlns:a16="http://schemas.microsoft.com/office/drawing/2014/main" id="{9F936FA1-9496-4D6C-A5E5-70F2B377FA35}"/>
+                <a16:creationId xmlns:a16="http://schemas.microsoft.com/office/drawing/2014/main" id="{1C40F925-8315-4667-9DBB-EAF5EEBC3E40}"/>
               </a:ext>
             </a:extLst>
           </p:cNvPr>
@@ -13634,7 +13634,7 @@
           <p:cNvPr id="30" name="">
             <a:extLst xmlns:a="http://schemas.openxmlformats.org/drawingml/2006/main">
               <a:ext uri="{FF2B5EF4-FFF2-40B4-BE49-F238E27FC236}">
-                <a16:creationId xmlns:a16="http://schemas.microsoft.com/office/drawing/2014/main" id="{0BBE1148-8EBE-4946-9E23-9D05913A2D81}"/>
+                <a16:creationId xmlns:a16="http://schemas.microsoft.com/office/drawing/2014/main" id="{1D7633DA-B4C1-49E3-B037-B58CAACA9626}"/>
               </a:ext>
             </a:extLst>
           </p:cNvPr>
@@ -13679,7 +13679,7 @@
           <p:cNvPr id="31" name="">
             <a:extLst xmlns:a="http://schemas.openxmlformats.org/drawingml/2006/main">
               <a:ext uri="{FF2B5EF4-FFF2-40B4-BE49-F238E27FC236}">
-                <a16:creationId xmlns:a16="http://schemas.microsoft.com/office/drawing/2014/main" id="{9CF96A33-6D65-46BE-A24D-1988CB8D20A8}"/>
+                <a16:creationId xmlns:a16="http://schemas.microsoft.com/office/drawing/2014/main" id="{A35684C9-0D48-4BB7-8200-4BA9A0F0C728}"/>
               </a:ext>
             </a:extLst>
           </p:cNvPr>
@@ -13714,7 +13714,7 @@
           <p:cNvPr id="32" name="">
             <a:extLst xmlns:a="http://schemas.openxmlformats.org/drawingml/2006/main">
               <a:ext uri="{FF2B5EF4-FFF2-40B4-BE49-F238E27FC236}">
-                <a16:creationId xmlns:a16="http://schemas.microsoft.com/office/drawing/2014/main" id="{CA6A15CF-FF0E-4DC1-AAC3-19A419D81005}"/>
+                <a16:creationId xmlns:a16="http://schemas.microsoft.com/office/drawing/2014/main" id="{566FCFB3-CDD8-4231-8FA0-0336E06DEEB9}"/>
               </a:ext>
             </a:extLst>
           </p:cNvPr>
@@ -13745,7 +13745,7 @@
           <p:cNvPr id="33" name="">
             <a:extLst xmlns:a="http://schemas.openxmlformats.org/drawingml/2006/main">
               <a:ext uri="{FF2B5EF4-FFF2-40B4-BE49-F238E27FC236}">
-                <a16:creationId xmlns:a16="http://schemas.microsoft.com/office/drawing/2014/main" id="{CBF745CE-555B-4792-A3F2-8B6453BB88B2}"/>
+                <a16:creationId xmlns:a16="http://schemas.microsoft.com/office/drawing/2014/main" id="{870DB9DC-D801-41ED-804B-84D1D900F471}"/>
               </a:ext>
             </a:extLst>
           </p:cNvPr>
@@ -13790,7 +13790,7 @@
           <p:cNvPr id="34" name="">
             <a:extLst xmlns:a="http://schemas.openxmlformats.org/drawingml/2006/main">
               <a:ext uri="{FF2B5EF4-FFF2-40B4-BE49-F238E27FC236}">
-                <a16:creationId xmlns:a16="http://schemas.microsoft.com/office/drawing/2014/main" id="{287966EC-0CDF-4B67-9C9E-2B64D83E68ED}"/>
+                <a16:creationId xmlns:a16="http://schemas.microsoft.com/office/drawing/2014/main" id="{873098FE-7525-41A4-A395-7484374B798E}"/>
               </a:ext>
             </a:extLst>
           </p:cNvPr>
@@ -13835,7 +13835,7 @@
           <p:cNvPr id="35" name="">
             <a:extLst xmlns:a="http://schemas.openxmlformats.org/drawingml/2006/main">
               <a:ext uri="{FF2B5EF4-FFF2-40B4-BE49-F238E27FC236}">
-                <a16:creationId xmlns:a16="http://schemas.microsoft.com/office/drawing/2014/main" id="{DFC17A2A-DE46-4386-AD95-7E5F350C0BEA}"/>
+                <a16:creationId xmlns:a16="http://schemas.microsoft.com/office/drawing/2014/main" id="{C7C4CF8D-BB6E-4982-8742-B64446D00E0E}"/>
               </a:ext>
             </a:extLst>
           </p:cNvPr>
@@ -13870,7 +13870,7 @@
           <p:cNvPr id="36" name="">
             <a:extLst xmlns:a="http://schemas.openxmlformats.org/drawingml/2006/main">
               <a:ext uri="{FF2B5EF4-FFF2-40B4-BE49-F238E27FC236}">
-                <a16:creationId xmlns:a16="http://schemas.microsoft.com/office/drawing/2014/main" id="{387373B0-A46B-43FA-857A-F4E035801EB3}"/>
+                <a16:creationId xmlns:a16="http://schemas.microsoft.com/office/drawing/2014/main" id="{F803010B-8C27-4802-8E70-D4CE7098FEFC}"/>
               </a:ext>
             </a:extLst>
           </p:cNvPr>
@@ -13901,7 +13901,7 @@
           <p:cNvPr id="37" name="">
             <a:extLst xmlns:a="http://schemas.openxmlformats.org/drawingml/2006/main">
               <a:ext uri="{FF2B5EF4-FFF2-40B4-BE49-F238E27FC236}">
-                <a16:creationId xmlns:a16="http://schemas.microsoft.com/office/drawing/2014/main" id="{81D0540B-A334-400F-A648-21B4E157E2AE}"/>
+                <a16:creationId xmlns:a16="http://schemas.microsoft.com/office/drawing/2014/main" id="{D82B7E57-69E4-4A9A-AEED-A11F7A26F27B}"/>
               </a:ext>
             </a:extLst>
           </p:cNvPr>
@@ -13946,7 +13946,7 @@
           <p:cNvPr id="38" name="">
             <a:extLst xmlns:a="http://schemas.openxmlformats.org/drawingml/2006/main">
               <a:ext uri="{FF2B5EF4-FFF2-40B4-BE49-F238E27FC236}">
-                <a16:creationId xmlns:a16="http://schemas.microsoft.com/office/drawing/2014/main" id="{83BFFAED-2D4E-4477-8876-542EF6240DC7}"/>
+                <a16:creationId xmlns:a16="http://schemas.microsoft.com/office/drawing/2014/main" id="{0EEEB203-F7B4-40AC-BDCF-0B8C6048DFED}"/>
               </a:ext>
             </a:extLst>
           </p:cNvPr>
@@ -13991,7 +13991,7 @@
           <p:cNvPr id="39" name="">
             <a:extLst xmlns:a="http://schemas.openxmlformats.org/drawingml/2006/main">
               <a:ext uri="{FF2B5EF4-FFF2-40B4-BE49-F238E27FC236}">
-                <a16:creationId xmlns:a16="http://schemas.microsoft.com/office/drawing/2014/main" id="{B539D4F7-BCFC-4F96-9E1A-2573F49F4C82}"/>
+                <a16:creationId xmlns:a16="http://schemas.microsoft.com/office/drawing/2014/main" id="{6F8CAC6A-6692-4298-BFC9-69D2F16F0EBB}"/>
               </a:ext>
             </a:extLst>
           </p:cNvPr>
@@ -14026,7 +14026,7 @@
           <p:cNvPr id="40" name="">
             <a:extLst xmlns:a="http://schemas.openxmlformats.org/drawingml/2006/main">
               <a:ext uri="{FF2B5EF4-FFF2-40B4-BE49-F238E27FC236}">
-                <a16:creationId xmlns:a16="http://schemas.microsoft.com/office/drawing/2014/main" id="{B00E83A1-F9AE-4CEC-A3CB-36D2F4C4E866}"/>
+                <a16:creationId xmlns:a16="http://schemas.microsoft.com/office/drawing/2014/main" id="{0FD27ACC-4DE0-4340-9735-8DDD04F550CE}"/>
               </a:ext>
             </a:extLst>
           </p:cNvPr>
@@ -14057,7 +14057,7 @@
           <p:cNvPr id="41" name="">
             <a:extLst xmlns:a="http://schemas.openxmlformats.org/drawingml/2006/main">
               <a:ext uri="{FF2B5EF4-FFF2-40B4-BE49-F238E27FC236}">
-                <a16:creationId xmlns:a16="http://schemas.microsoft.com/office/drawing/2014/main" id="{A1B5FBD5-468C-4EE5-B891-92C5FD24C60F}"/>
+                <a16:creationId xmlns:a16="http://schemas.microsoft.com/office/drawing/2014/main" id="{688B52A6-CBB3-4005-B57D-9ACD58EB6C43}"/>
               </a:ext>
             </a:extLst>
           </p:cNvPr>
@@ -14102,7 +14102,7 @@
           <p:cNvPr id="42" name="">
             <a:extLst xmlns:a="http://schemas.openxmlformats.org/drawingml/2006/main">
               <a:ext uri="{FF2B5EF4-FFF2-40B4-BE49-F238E27FC236}">
-                <a16:creationId xmlns:a16="http://schemas.microsoft.com/office/drawing/2014/main" id="{FC718E53-04A5-416E-9A76-7C973C0FF00D}"/>
+                <a16:creationId xmlns:a16="http://schemas.microsoft.com/office/drawing/2014/main" id="{75C720DC-960D-4A50-98AF-43FF08891953}"/>
               </a:ext>
             </a:extLst>
           </p:cNvPr>
@@ -14147,7 +14147,7 @@
           <p:cNvPr id="43" name="">
             <a:extLst xmlns:a="http://schemas.openxmlformats.org/drawingml/2006/main">
               <a:ext uri="{FF2B5EF4-FFF2-40B4-BE49-F238E27FC236}">
-                <a16:creationId xmlns:a16="http://schemas.microsoft.com/office/drawing/2014/main" id="{D6DA4A11-4A3D-4C30-AE4B-3E77E8383C09}"/>
+                <a16:creationId xmlns:a16="http://schemas.microsoft.com/office/drawing/2014/main" id="{0AE42506-3835-4044-BF8B-8B1215E67CFE}"/>
               </a:ext>
             </a:extLst>
           </p:cNvPr>
@@ -14190,7 +14190,7 @@
     </p:spTree>
     <p:extLst>
       <p:ext uri="{BB962C8B-B14F-4D97-AF65-F5344CB8AC3E}">
-        <p14:creationId xmlns:p14="http://schemas.microsoft.com/office/powerpoint/2010/main" val="1146470490"/>
+        <p14:creationId xmlns:p14="http://schemas.microsoft.com/office/powerpoint/2010/main" val="1406316315"/>
       </p:ext>
     </p:extLst>
   </p:cSld>
@@ -14214,7 +14214,7 @@
           <p:cNvPr id="64" name="">
             <a:extLst xmlns:a="http://schemas.openxmlformats.org/drawingml/2006/main">
               <a:ext uri="{FF2B5EF4-FFF2-40B4-BE49-F238E27FC236}">
-                <a16:creationId xmlns:a16="http://schemas.microsoft.com/office/drawing/2014/main" id="{C53F04FB-1CBF-48DC-97E5-6B5A7AB14695}"/>
+                <a16:creationId xmlns:a16="http://schemas.microsoft.com/office/drawing/2014/main" id="{8A96CAB2-8506-4585-8D75-3A70A75D84D7}"/>
               </a:ext>
             </a:extLst>
           </p:cNvPr>
@@ -14245,7 +14245,7 @@
           <p:cNvPr id="2" name="">
             <a:extLst xmlns:a="http://schemas.openxmlformats.org/drawingml/2006/main">
               <a:ext uri="{FF2B5EF4-FFF2-40B4-BE49-F238E27FC236}">
-                <a16:creationId xmlns:a16="http://schemas.microsoft.com/office/drawing/2014/main" id="{48618879-54E9-4680-BD01-49AB0FC3FD6E}"/>
+                <a16:creationId xmlns:a16="http://schemas.microsoft.com/office/drawing/2014/main" id="{A22A14C0-950D-47C3-A97E-C776FDB01128}"/>
               </a:ext>
             </a:extLst>
           </p:cNvPr>
@@ -14290,7 +14290,7 @@
           <p:cNvPr id="3" name="">
             <a:extLst xmlns:a="http://schemas.openxmlformats.org/drawingml/2006/main">
               <a:ext uri="{FF2B5EF4-FFF2-40B4-BE49-F238E27FC236}">
-                <a16:creationId xmlns:a16="http://schemas.microsoft.com/office/drawing/2014/main" id="{6F01C6FF-6FD0-4251-B54F-72090AE39BD5}"/>
+                <a16:creationId xmlns:a16="http://schemas.microsoft.com/office/drawing/2014/main" id="{B8FF7F03-7329-458E-81DA-DB2169F033AE}"/>
               </a:ext>
             </a:extLst>
           </p:cNvPr>
@@ -14335,7 +14335,7 @@
           <p:cNvPr id="4" name="">
             <a:extLst xmlns:a="http://schemas.openxmlformats.org/drawingml/2006/main">
               <a:ext uri="{FF2B5EF4-FFF2-40B4-BE49-F238E27FC236}">
-                <a16:creationId xmlns:a16="http://schemas.microsoft.com/office/drawing/2014/main" id="{801171FE-4254-4D10-86C9-8CCD37759547}"/>
+                <a16:creationId xmlns:a16="http://schemas.microsoft.com/office/drawing/2014/main" id="{9B9EE03C-64F5-4FD3-BD90-A0ADC89D649B}"/>
               </a:ext>
             </a:extLst>
           </p:cNvPr>
@@ -14380,7 +14380,7 @@
           <p:cNvPr id="5" name="">
             <a:extLst xmlns:a="http://schemas.openxmlformats.org/drawingml/2006/main">
               <a:ext uri="{FF2B5EF4-FFF2-40B4-BE49-F238E27FC236}">
-                <a16:creationId xmlns:a16="http://schemas.microsoft.com/office/drawing/2014/main" id="{BA616DD9-30EB-4AD9-8053-081C51729233}"/>
+                <a16:creationId xmlns:a16="http://schemas.microsoft.com/office/drawing/2014/main" id="{92B9D7CD-48D6-4DD5-96F0-142EC4984CE3}"/>
               </a:ext>
             </a:extLst>
           </p:cNvPr>
@@ -14411,7 +14411,7 @@
           <p:cNvPr id="6" name="">
             <a:extLst xmlns:a="http://schemas.openxmlformats.org/drawingml/2006/main">
               <a:ext uri="{FF2B5EF4-FFF2-40B4-BE49-F238E27FC236}">
-                <a16:creationId xmlns:a16="http://schemas.microsoft.com/office/drawing/2014/main" id="{8817B47E-7549-4C79-9692-8AFC035E55DC}"/>
+                <a16:creationId xmlns:a16="http://schemas.microsoft.com/office/drawing/2014/main" id="{D353BE55-2C83-476E-BC64-DF9A1EB3A1E4}"/>
               </a:ext>
             </a:extLst>
           </p:cNvPr>
@@ -14442,7 +14442,7 @@
           <p:cNvPr id="7" name="">
             <a:extLst xmlns:a="http://schemas.openxmlformats.org/drawingml/2006/main">
               <a:ext uri="{FF2B5EF4-FFF2-40B4-BE49-F238E27FC236}">
-                <a16:creationId xmlns:a16="http://schemas.microsoft.com/office/drawing/2014/main" id="{5880797D-E2D0-4AAB-8527-0FDC33A6872D}"/>
+                <a16:creationId xmlns:a16="http://schemas.microsoft.com/office/drawing/2014/main" id="{2A287047-BB33-4257-9386-52CC6FDB38D7}"/>
               </a:ext>
             </a:extLst>
           </p:cNvPr>
@@ -14487,7 +14487,7 @@
           <p:cNvPr id="8" name="">
             <a:extLst xmlns:a="http://schemas.openxmlformats.org/drawingml/2006/main">
               <a:ext uri="{FF2B5EF4-FFF2-40B4-BE49-F238E27FC236}">
-                <a16:creationId xmlns:a16="http://schemas.microsoft.com/office/drawing/2014/main" id="{9E4F27A3-B452-443A-A92C-4E471FFC832B}"/>
+                <a16:creationId xmlns:a16="http://schemas.microsoft.com/office/drawing/2014/main" id="{3995697E-C601-4EAC-B1F4-15CAFDEB638E}"/>
               </a:ext>
             </a:extLst>
           </p:cNvPr>
@@ -14532,7 +14532,7 @@
           <p:cNvPr id="9" name="">
             <a:extLst xmlns:a="http://schemas.openxmlformats.org/drawingml/2006/main">
               <a:ext uri="{FF2B5EF4-FFF2-40B4-BE49-F238E27FC236}">
-                <a16:creationId xmlns:a16="http://schemas.microsoft.com/office/drawing/2014/main" id="{5226BB0E-DDC1-4217-832C-01490F3FBBD3}"/>
+                <a16:creationId xmlns:a16="http://schemas.microsoft.com/office/drawing/2014/main" id="{579884AA-9B9D-4975-813A-89097FD920EC}"/>
               </a:ext>
             </a:extLst>
           </p:cNvPr>
@@ -14563,7 +14563,7 @@
           <p:cNvPr id="10" name="">
             <a:extLst xmlns:a="http://schemas.openxmlformats.org/drawingml/2006/main">
               <a:ext uri="{FF2B5EF4-FFF2-40B4-BE49-F238E27FC236}">
-                <a16:creationId xmlns:a16="http://schemas.microsoft.com/office/drawing/2014/main" id="{30F1E510-0CFF-42B1-8A87-9C9EC1F6EB6A}"/>
+                <a16:creationId xmlns:a16="http://schemas.microsoft.com/office/drawing/2014/main" id="{4DE0C26E-2237-4488-A95B-EEB65B7EDC45}"/>
               </a:ext>
             </a:extLst>
           </p:cNvPr>
@@ -14608,7 +14608,7 @@
           <p:cNvPr id="11" name="">
             <a:extLst xmlns:a="http://schemas.openxmlformats.org/drawingml/2006/main">
               <a:ext uri="{FF2B5EF4-FFF2-40B4-BE49-F238E27FC236}">
-                <a16:creationId xmlns:a16="http://schemas.microsoft.com/office/drawing/2014/main" id="{8BBC1B81-AC5B-4F6E-9BB9-5D53382300AB}"/>
+                <a16:creationId xmlns:a16="http://schemas.microsoft.com/office/drawing/2014/main" id="{BCA013C8-FEB0-4061-AFA6-2A75D94A04EA}"/>
               </a:ext>
             </a:extLst>
           </p:cNvPr>
@@ -14639,7 +14639,7 @@
           <p:cNvPr id="12" name="">
             <a:extLst xmlns:a="http://schemas.openxmlformats.org/drawingml/2006/main">
               <a:ext uri="{FF2B5EF4-FFF2-40B4-BE49-F238E27FC236}">
-                <a16:creationId xmlns:a16="http://schemas.microsoft.com/office/drawing/2014/main" id="{2FDDA56B-9D21-46A9-9D7A-7CD16FB0683C}"/>
+                <a16:creationId xmlns:a16="http://schemas.microsoft.com/office/drawing/2014/main" id="{B3D94D1A-A7CE-4A4F-940E-F7CDB6FF6A6B}"/>
               </a:ext>
             </a:extLst>
           </p:cNvPr>
@@ -14684,7 +14684,7 @@
           <p:cNvPr id="13" name="">
             <a:extLst xmlns:a="http://schemas.openxmlformats.org/drawingml/2006/main">
               <a:ext uri="{FF2B5EF4-FFF2-40B4-BE49-F238E27FC236}">
-                <a16:creationId xmlns:a16="http://schemas.microsoft.com/office/drawing/2014/main" id="{5D2F8EDF-437F-46A0-8568-A2D7F4035DB2}"/>
+                <a16:creationId xmlns:a16="http://schemas.microsoft.com/office/drawing/2014/main" id="{EF569BD7-3390-4F13-B53B-B660716575E1}"/>
               </a:ext>
             </a:extLst>
           </p:cNvPr>
@@ -14729,7 +14729,7 @@
           <p:cNvPr id="14" name="">
             <a:extLst xmlns:a="http://schemas.openxmlformats.org/drawingml/2006/main">
               <a:ext uri="{FF2B5EF4-FFF2-40B4-BE49-F238E27FC236}">
-                <a16:creationId xmlns:a16="http://schemas.microsoft.com/office/drawing/2014/main" id="{44ABF692-373E-4311-BA8E-57E55ED7E131}"/>
+                <a16:creationId xmlns:a16="http://schemas.microsoft.com/office/drawing/2014/main" id="{9B894B26-5861-474D-899D-6BDF1A31F5E9}"/>
               </a:ext>
             </a:extLst>
           </p:cNvPr>
@@ -14774,7 +14774,7 @@
           <p:cNvPr id="15" name="">
             <a:extLst xmlns:a="http://schemas.openxmlformats.org/drawingml/2006/main">
               <a:ext uri="{FF2B5EF4-FFF2-40B4-BE49-F238E27FC236}">
-                <a16:creationId xmlns:a16="http://schemas.microsoft.com/office/drawing/2014/main" id="{1661CE13-B3D1-4285-BF4C-98DC43F189C8}"/>
+                <a16:creationId xmlns:a16="http://schemas.microsoft.com/office/drawing/2014/main" id="{5F2780A2-8F45-4A23-B4CB-0EEAEA9CF7B4}"/>
               </a:ext>
             </a:extLst>
           </p:cNvPr>
@@ -14807,7 +14807,7 @@
           <p:cNvPr id="16" name="">
             <a:extLst xmlns:a="http://schemas.openxmlformats.org/drawingml/2006/main">
               <a:ext uri="{FF2B5EF4-FFF2-40B4-BE49-F238E27FC236}">
-                <a16:creationId xmlns:a16="http://schemas.microsoft.com/office/drawing/2014/main" id="{DE17803A-5822-4D77-85BC-4EE08330B0FE}"/>
+                <a16:creationId xmlns:a16="http://schemas.microsoft.com/office/drawing/2014/main" id="{357371B3-DE15-4422-AB5D-5565697D9694}"/>
               </a:ext>
             </a:extLst>
           </p:cNvPr>
@@ -14852,7 +14852,7 @@
           <p:cNvPr id="17" name="">
             <a:extLst xmlns:a="http://schemas.openxmlformats.org/drawingml/2006/main">
               <a:ext uri="{FF2B5EF4-FFF2-40B4-BE49-F238E27FC236}">
-                <a16:creationId xmlns:a16="http://schemas.microsoft.com/office/drawing/2014/main" id="{12F31717-7365-4AC5-8EA0-F8A4F89E0C63}"/>
+                <a16:creationId xmlns:a16="http://schemas.microsoft.com/office/drawing/2014/main" id="{9E510B9D-C262-43DE-9D75-C9FCC515F467}"/>
               </a:ext>
             </a:extLst>
           </p:cNvPr>
@@ -14885,7 +14885,7 @@
           <p:cNvPr id="18" name="">
             <a:extLst xmlns:a="http://schemas.openxmlformats.org/drawingml/2006/main">
               <a:ext uri="{FF2B5EF4-FFF2-40B4-BE49-F238E27FC236}">
-                <a16:creationId xmlns:a16="http://schemas.microsoft.com/office/drawing/2014/main" id="{C7BBBF4F-3652-438A-B4F2-D73615CAABF6}"/>
+                <a16:creationId xmlns:a16="http://schemas.microsoft.com/office/drawing/2014/main" id="{480BB431-BD92-40B0-A188-E2D16CECE4CD}"/>
               </a:ext>
             </a:extLst>
           </p:cNvPr>
@@ -14930,7 +14930,7 @@
           <p:cNvPr id="19" name="">
             <a:extLst xmlns:a="http://schemas.openxmlformats.org/drawingml/2006/main">
               <a:ext uri="{FF2B5EF4-FFF2-40B4-BE49-F238E27FC236}">
-                <a16:creationId xmlns:a16="http://schemas.microsoft.com/office/drawing/2014/main" id="{2ED3C44A-B096-412B-A8C2-74C5925BAD65}"/>
+                <a16:creationId xmlns:a16="http://schemas.microsoft.com/office/drawing/2014/main" id="{72A0AB6B-EC0E-4F77-A8E2-CB8513544F9A}"/>
               </a:ext>
             </a:extLst>
           </p:cNvPr>
@@ -14975,7 +14975,7 @@
           <p:cNvPr id="20" name="">
             <a:extLst xmlns:a="http://schemas.openxmlformats.org/drawingml/2006/main">
               <a:ext uri="{FF2B5EF4-FFF2-40B4-BE49-F238E27FC236}">
-                <a16:creationId xmlns:a16="http://schemas.microsoft.com/office/drawing/2014/main" id="{D1CF6004-E3F8-4FF7-B069-1FEE2F3A2EF8}"/>
+                <a16:creationId xmlns:a16="http://schemas.microsoft.com/office/drawing/2014/main" id="{9A6C4065-DB38-49D2-A755-162AC801B657}"/>
               </a:ext>
             </a:extLst>
           </p:cNvPr>
@@ -15020,7 +15020,7 @@
           <p:cNvPr id="21" name="">
             <a:extLst xmlns:a="http://schemas.openxmlformats.org/drawingml/2006/main">
               <a:ext uri="{FF2B5EF4-FFF2-40B4-BE49-F238E27FC236}">
-                <a16:creationId xmlns:a16="http://schemas.microsoft.com/office/drawing/2014/main" id="{1EE44E31-E96B-4026-A8C2-F81812802FF1}"/>
+                <a16:creationId xmlns:a16="http://schemas.microsoft.com/office/drawing/2014/main" id="{40AD543D-DFF5-4ADF-8C82-76361A4AEF57}"/>
               </a:ext>
             </a:extLst>
           </p:cNvPr>
@@ -15053,7 +15053,7 @@
           <p:cNvPr id="22" name="">
             <a:extLst xmlns:a="http://schemas.openxmlformats.org/drawingml/2006/main">
               <a:ext uri="{FF2B5EF4-FFF2-40B4-BE49-F238E27FC236}">
-                <a16:creationId xmlns:a16="http://schemas.microsoft.com/office/drawing/2014/main" id="{199A6520-101E-4046-A31D-FD95F0C352E7}"/>
+                <a16:creationId xmlns:a16="http://schemas.microsoft.com/office/drawing/2014/main" id="{E84C59C2-6948-4F1F-A908-8A0AB8F55675}"/>
               </a:ext>
             </a:extLst>
           </p:cNvPr>
@@ -15098,7 +15098,7 @@
           <p:cNvPr id="23" name="">
             <a:extLst xmlns:a="http://schemas.openxmlformats.org/drawingml/2006/main">
               <a:ext uri="{FF2B5EF4-FFF2-40B4-BE49-F238E27FC236}">
-                <a16:creationId xmlns:a16="http://schemas.microsoft.com/office/drawing/2014/main" id="{5877F6BF-CE94-420E-B419-8ECD2557C594}"/>
+                <a16:creationId xmlns:a16="http://schemas.microsoft.com/office/drawing/2014/main" id="{7FC123C2-3D9E-4C3F-9147-604CEC1DB654}"/>
               </a:ext>
             </a:extLst>
           </p:cNvPr>
@@ -15131,7 +15131,7 @@
           <p:cNvPr id="24" name="">
             <a:extLst xmlns:a="http://schemas.openxmlformats.org/drawingml/2006/main">
               <a:ext uri="{FF2B5EF4-FFF2-40B4-BE49-F238E27FC236}">
-                <a16:creationId xmlns:a16="http://schemas.microsoft.com/office/drawing/2014/main" id="{FB2BF8C4-8FD2-4E55-AD31-C46855EBB376}"/>
+                <a16:creationId xmlns:a16="http://schemas.microsoft.com/office/drawing/2014/main" id="{67DEB2A5-703F-4A6F-9BF7-93B0EED4D5AD}"/>
               </a:ext>
             </a:extLst>
           </p:cNvPr>
@@ -15176,7 +15176,7 @@
           <p:cNvPr id="25" name="">
             <a:extLst xmlns:a="http://schemas.openxmlformats.org/drawingml/2006/main">
               <a:ext uri="{FF2B5EF4-FFF2-40B4-BE49-F238E27FC236}">
-                <a16:creationId xmlns:a16="http://schemas.microsoft.com/office/drawing/2014/main" id="{72186BDF-C034-4CF7-8F72-44B602676EC1}"/>
+                <a16:creationId xmlns:a16="http://schemas.microsoft.com/office/drawing/2014/main" id="{2180D9A1-44F4-4464-949E-B0F76627DC2E}"/>
               </a:ext>
             </a:extLst>
           </p:cNvPr>
@@ -15221,7 +15221,7 @@
           <p:cNvPr id="26" name="">
             <a:extLst xmlns:a="http://schemas.openxmlformats.org/drawingml/2006/main">
               <a:ext uri="{FF2B5EF4-FFF2-40B4-BE49-F238E27FC236}">
-                <a16:creationId xmlns:a16="http://schemas.microsoft.com/office/drawing/2014/main" id="{B76E2A04-32AC-4DD7-963A-436650462568}"/>
+                <a16:creationId xmlns:a16="http://schemas.microsoft.com/office/drawing/2014/main" id="{20570187-6917-4873-ADCA-65F61F8B1D5A}"/>
               </a:ext>
             </a:extLst>
           </p:cNvPr>
@@ -15266,7 +15266,7 @@
           <p:cNvPr id="27" name="">
             <a:extLst xmlns:a="http://schemas.openxmlformats.org/drawingml/2006/main">
               <a:ext uri="{FF2B5EF4-FFF2-40B4-BE49-F238E27FC236}">
-                <a16:creationId xmlns:a16="http://schemas.microsoft.com/office/drawing/2014/main" id="{E132FDC6-5F87-4411-8258-CD741210B2CF}"/>
+                <a16:creationId xmlns:a16="http://schemas.microsoft.com/office/drawing/2014/main" id="{CA3D1CAD-10E4-4069-9EFD-BB99BCA14DF4}"/>
               </a:ext>
             </a:extLst>
           </p:cNvPr>
@@ -15299,7 +15299,7 @@
           <p:cNvPr id="28" name="">
             <a:extLst xmlns:a="http://schemas.openxmlformats.org/drawingml/2006/main">
               <a:ext uri="{FF2B5EF4-FFF2-40B4-BE49-F238E27FC236}">
-                <a16:creationId xmlns:a16="http://schemas.microsoft.com/office/drawing/2014/main" id="{51097E58-D1DE-4A22-A512-363DED3BA3DA}"/>
+                <a16:creationId xmlns:a16="http://schemas.microsoft.com/office/drawing/2014/main" id="{E9DB4B30-6A05-4302-A21C-C31DDB7E2141}"/>
               </a:ext>
             </a:extLst>
           </p:cNvPr>
@@ -15344,7 +15344,7 @@
           <p:cNvPr id="29" name="">
             <a:extLst xmlns:a="http://schemas.openxmlformats.org/drawingml/2006/main">
               <a:ext uri="{FF2B5EF4-FFF2-40B4-BE49-F238E27FC236}">
-                <a16:creationId xmlns:a16="http://schemas.microsoft.com/office/drawing/2014/main" id="{3BEA18FB-3495-4882-A054-5042E2850834}"/>
+                <a16:creationId xmlns:a16="http://schemas.microsoft.com/office/drawing/2014/main" id="{CF233A5B-B2E3-43B8-9555-FC575099A921}"/>
               </a:ext>
             </a:extLst>
           </p:cNvPr>
@@ -15377,7 +15377,7 @@
           <p:cNvPr id="30" name="">
             <a:extLst xmlns:a="http://schemas.openxmlformats.org/drawingml/2006/main">
               <a:ext uri="{FF2B5EF4-FFF2-40B4-BE49-F238E27FC236}">
-                <a16:creationId xmlns:a16="http://schemas.microsoft.com/office/drawing/2014/main" id="{F5BCDF46-60F5-41AC-9B92-83D4484FEC93}"/>
+                <a16:creationId xmlns:a16="http://schemas.microsoft.com/office/drawing/2014/main" id="{C900610D-84D2-49FB-9CE0-D745D967626B}"/>
               </a:ext>
             </a:extLst>
           </p:cNvPr>
@@ -15422,7 +15422,7 @@
           <p:cNvPr id="31" name="">
             <a:extLst xmlns:a="http://schemas.openxmlformats.org/drawingml/2006/main">
               <a:ext uri="{FF2B5EF4-FFF2-40B4-BE49-F238E27FC236}">
-                <a16:creationId xmlns:a16="http://schemas.microsoft.com/office/drawing/2014/main" id="{7311366B-C2AB-413A-9B15-FA11D1EA5063}"/>
+                <a16:creationId xmlns:a16="http://schemas.microsoft.com/office/drawing/2014/main" id="{568266CA-2450-4AFB-A562-BF1618B772CF}"/>
               </a:ext>
             </a:extLst>
           </p:cNvPr>
@@ -15467,7 +15467,7 @@
           <p:cNvPr id="32" name="">
             <a:extLst xmlns:a="http://schemas.openxmlformats.org/drawingml/2006/main">
               <a:ext uri="{FF2B5EF4-FFF2-40B4-BE49-F238E27FC236}">
-                <a16:creationId xmlns:a16="http://schemas.microsoft.com/office/drawing/2014/main" id="{005740F3-A621-440D-AB01-013EB175E75B}"/>
+                <a16:creationId xmlns:a16="http://schemas.microsoft.com/office/drawing/2014/main" id="{777F2DE5-3E70-4A00-AB8F-C7B6B717FD7C}"/>
               </a:ext>
             </a:extLst>
           </p:cNvPr>
@@ -15512,7 +15512,7 @@
           <p:cNvPr id="33" name="">
             <a:extLst xmlns:a="http://schemas.openxmlformats.org/drawingml/2006/main">
               <a:ext uri="{FF2B5EF4-FFF2-40B4-BE49-F238E27FC236}">
-                <a16:creationId xmlns:a16="http://schemas.microsoft.com/office/drawing/2014/main" id="{BB7D46E3-47F4-4B0C-9930-6C92E0028929}"/>
+                <a16:creationId xmlns:a16="http://schemas.microsoft.com/office/drawing/2014/main" id="{3DD044DA-8174-4C9C-AAC1-AE837295A970}"/>
               </a:ext>
             </a:extLst>
           </p:cNvPr>
@@ -15545,7 +15545,7 @@
           <p:cNvPr id="34" name="">
             <a:extLst xmlns:a="http://schemas.openxmlformats.org/drawingml/2006/main">
               <a:ext uri="{FF2B5EF4-FFF2-40B4-BE49-F238E27FC236}">
-                <a16:creationId xmlns:a16="http://schemas.microsoft.com/office/drawing/2014/main" id="{30CA940A-924C-4F07-ABC0-9B8ACF8FE5C2}"/>
+                <a16:creationId xmlns:a16="http://schemas.microsoft.com/office/drawing/2014/main" id="{D7496B53-867E-4E4C-BC80-C8717775002B}"/>
               </a:ext>
             </a:extLst>
           </p:cNvPr>
@@ -15590,7 +15590,7 @@
           <p:cNvPr id="35" name="">
             <a:extLst xmlns:a="http://schemas.openxmlformats.org/drawingml/2006/main">
               <a:ext uri="{FF2B5EF4-FFF2-40B4-BE49-F238E27FC236}">
-                <a16:creationId xmlns:a16="http://schemas.microsoft.com/office/drawing/2014/main" id="{905DE00B-C790-4E6A-993B-1E4491250E4C}"/>
+                <a16:creationId xmlns:a16="http://schemas.microsoft.com/office/drawing/2014/main" id="{4BFAF56D-4B58-4362-B3DE-FC4CA46E1605}"/>
               </a:ext>
             </a:extLst>
           </p:cNvPr>
@@ -15623,7 +15623,7 @@
           <p:cNvPr id="36" name="">
             <a:extLst xmlns:a="http://schemas.openxmlformats.org/drawingml/2006/main">
               <a:ext uri="{FF2B5EF4-FFF2-40B4-BE49-F238E27FC236}">
-                <a16:creationId xmlns:a16="http://schemas.microsoft.com/office/drawing/2014/main" id="{3918EDC1-0C59-47C9-AE8C-055301F71B38}"/>
+                <a16:creationId xmlns:a16="http://schemas.microsoft.com/office/drawing/2014/main" id="{CE05549F-587B-49B6-93F7-72ECB05164CE}"/>
               </a:ext>
             </a:extLst>
           </p:cNvPr>
@@ -15668,7 +15668,7 @@
           <p:cNvPr id="37" name="">
             <a:extLst xmlns:a="http://schemas.openxmlformats.org/drawingml/2006/main">
               <a:ext uri="{FF2B5EF4-FFF2-40B4-BE49-F238E27FC236}">
-                <a16:creationId xmlns:a16="http://schemas.microsoft.com/office/drawing/2014/main" id="{E2C04E26-465B-486F-B4DC-5F7FFBAF7CC2}"/>
+                <a16:creationId xmlns:a16="http://schemas.microsoft.com/office/drawing/2014/main" id="{88519815-A146-4429-9E6E-AEBFE8C5EAEC}"/>
               </a:ext>
             </a:extLst>
           </p:cNvPr>
@@ -15713,7 +15713,7 @@
           <p:cNvPr id="38" name="">
             <a:extLst xmlns:a="http://schemas.openxmlformats.org/drawingml/2006/main">
               <a:ext uri="{FF2B5EF4-FFF2-40B4-BE49-F238E27FC236}">
-                <a16:creationId xmlns:a16="http://schemas.microsoft.com/office/drawing/2014/main" id="{2ADB28F0-7643-4CF6-BAC6-482C919181EC}"/>
+                <a16:creationId xmlns:a16="http://schemas.microsoft.com/office/drawing/2014/main" id="{B7436863-32B2-402D-ACFF-A36AF11033EB}"/>
               </a:ext>
             </a:extLst>
           </p:cNvPr>
@@ -15758,7 +15758,7 @@
           <p:cNvPr id="39" name="">
             <a:extLst xmlns:a="http://schemas.openxmlformats.org/drawingml/2006/main">
               <a:ext uri="{FF2B5EF4-FFF2-40B4-BE49-F238E27FC236}">
-                <a16:creationId xmlns:a16="http://schemas.microsoft.com/office/drawing/2014/main" id="{275DCC2F-77AF-49FE-8BFC-9B705E70160F}"/>
+                <a16:creationId xmlns:a16="http://schemas.microsoft.com/office/drawing/2014/main" id="{655A71C8-D798-42B5-8160-C81DA3DCAAFC}"/>
               </a:ext>
             </a:extLst>
           </p:cNvPr>
@@ -15791,7 +15791,7 @@
           <p:cNvPr id="40" name="">
             <a:extLst xmlns:a="http://schemas.openxmlformats.org/drawingml/2006/main">
               <a:ext uri="{FF2B5EF4-FFF2-40B4-BE49-F238E27FC236}">
-                <a16:creationId xmlns:a16="http://schemas.microsoft.com/office/drawing/2014/main" id="{461897A3-5D2A-4181-BECB-6D85B435D623}"/>
+                <a16:creationId xmlns:a16="http://schemas.microsoft.com/office/drawing/2014/main" id="{5F03C52C-951B-47EC-ACFB-CBF2D4CECDBF}"/>
               </a:ext>
             </a:extLst>
           </p:cNvPr>
@@ -15836,7 +15836,7 @@
           <p:cNvPr id="41" name="">
             <a:extLst xmlns:a="http://schemas.openxmlformats.org/drawingml/2006/main">
               <a:ext uri="{FF2B5EF4-FFF2-40B4-BE49-F238E27FC236}">
-                <a16:creationId xmlns:a16="http://schemas.microsoft.com/office/drawing/2014/main" id="{F11B2B06-E786-44B1-8322-132569C042F4}"/>
+                <a16:creationId xmlns:a16="http://schemas.microsoft.com/office/drawing/2014/main" id="{1F5195F3-C386-415E-9C25-A836C48AA36E}"/>
               </a:ext>
             </a:extLst>
           </p:cNvPr>
@@ -15869,7 +15869,7 @@
           <p:cNvPr id="42" name="">
             <a:extLst xmlns:a="http://schemas.openxmlformats.org/drawingml/2006/main">
               <a:ext uri="{FF2B5EF4-FFF2-40B4-BE49-F238E27FC236}">
-                <a16:creationId xmlns:a16="http://schemas.microsoft.com/office/drawing/2014/main" id="{77C95B48-3BDD-4B52-8FFE-2E645D8B1BF6}"/>
+                <a16:creationId xmlns:a16="http://schemas.microsoft.com/office/drawing/2014/main" id="{78DC0D74-0D2E-48DF-A799-26FEC3DE0DE2}"/>
               </a:ext>
             </a:extLst>
           </p:cNvPr>
@@ -15914,7 +15914,7 @@
           <p:cNvPr id="43" name="">
             <a:extLst xmlns:a="http://schemas.openxmlformats.org/drawingml/2006/main">
               <a:ext uri="{FF2B5EF4-FFF2-40B4-BE49-F238E27FC236}">
-                <a16:creationId xmlns:a16="http://schemas.microsoft.com/office/drawing/2014/main" id="{2AF75AAC-244E-49C8-9735-683A478B67C0}"/>
+                <a16:creationId xmlns:a16="http://schemas.microsoft.com/office/drawing/2014/main" id="{E6412DC7-C0D0-4841-9DE3-BAECC189B034}"/>
               </a:ext>
             </a:extLst>
           </p:cNvPr>
@@ -15959,7 +15959,7 @@
           <p:cNvPr id="44" name="">
             <a:extLst xmlns:a="http://schemas.openxmlformats.org/drawingml/2006/main">
               <a:ext uri="{FF2B5EF4-FFF2-40B4-BE49-F238E27FC236}">
-                <a16:creationId xmlns:a16="http://schemas.microsoft.com/office/drawing/2014/main" id="{8BF6F494-21C6-4EBB-9E05-B6EF51663203}"/>
+                <a16:creationId xmlns:a16="http://schemas.microsoft.com/office/drawing/2014/main" id="{5C9AA265-E27A-485B-95C3-FF9EB019F478}"/>
               </a:ext>
             </a:extLst>
           </p:cNvPr>
@@ -16004,7 +16004,7 @@
           <p:cNvPr id="45" name="">
             <a:extLst xmlns:a="http://schemas.openxmlformats.org/drawingml/2006/main">
               <a:ext uri="{FF2B5EF4-FFF2-40B4-BE49-F238E27FC236}">
-                <a16:creationId xmlns:a16="http://schemas.microsoft.com/office/drawing/2014/main" id="{8F13A656-7EE4-4971-BC5F-27C4A7F40240}"/>
+                <a16:creationId xmlns:a16="http://schemas.microsoft.com/office/drawing/2014/main" id="{1DE00F8B-4DE3-48F7-AD47-6E822257D89D}"/>
               </a:ext>
             </a:extLst>
           </p:cNvPr>
@@ -16037,7 +16037,7 @@
           <p:cNvPr id="46" name="">
             <a:extLst xmlns:a="http://schemas.openxmlformats.org/drawingml/2006/main">
               <a:ext uri="{FF2B5EF4-FFF2-40B4-BE49-F238E27FC236}">
-                <a16:creationId xmlns:a16="http://schemas.microsoft.com/office/drawing/2014/main" id="{A43895A9-C9FB-4C6D-BEBD-4AEFF4187AD9}"/>
+                <a16:creationId xmlns:a16="http://schemas.microsoft.com/office/drawing/2014/main" id="{431DDFAE-4A6A-4317-B13D-3418EEAD6F9E}"/>
               </a:ext>
             </a:extLst>
           </p:cNvPr>
@@ -16082,7 +16082,7 @@
           <p:cNvPr id="47" name="">
             <a:extLst xmlns:a="http://schemas.openxmlformats.org/drawingml/2006/main">
               <a:ext uri="{FF2B5EF4-FFF2-40B4-BE49-F238E27FC236}">
-                <a16:creationId xmlns:a16="http://schemas.microsoft.com/office/drawing/2014/main" id="{02D3804A-D9A1-441B-95BD-8B272B4A37AE}"/>
+                <a16:creationId xmlns:a16="http://schemas.microsoft.com/office/drawing/2014/main" id="{E0EF3696-B259-46A4-945A-D3AF3ED6C12C}"/>
               </a:ext>
             </a:extLst>
           </p:cNvPr>
@@ -16115,7 +16115,7 @@
           <p:cNvPr id="48" name="">
             <a:extLst xmlns:a="http://schemas.openxmlformats.org/drawingml/2006/main">
               <a:ext uri="{FF2B5EF4-FFF2-40B4-BE49-F238E27FC236}">
-                <a16:creationId xmlns:a16="http://schemas.microsoft.com/office/drawing/2014/main" id="{A2F5D27F-BC64-4732-8B4F-34C84570D946}"/>
+                <a16:creationId xmlns:a16="http://schemas.microsoft.com/office/drawing/2014/main" id="{C7DAF56A-23B7-4541-AC92-608D27EA255C}"/>
               </a:ext>
             </a:extLst>
           </p:cNvPr>
@@ -16160,7 +16160,7 @@
           <p:cNvPr id="49" name="">
             <a:extLst xmlns:a="http://schemas.openxmlformats.org/drawingml/2006/main">
               <a:ext uri="{FF2B5EF4-FFF2-40B4-BE49-F238E27FC236}">
-                <a16:creationId xmlns:a16="http://schemas.microsoft.com/office/drawing/2014/main" id="{F936D337-73FC-435C-97E9-A9A8E731FF21}"/>
+                <a16:creationId xmlns:a16="http://schemas.microsoft.com/office/drawing/2014/main" id="{4EF1C611-340C-4549-96EC-916A69B75B72}"/>
               </a:ext>
             </a:extLst>
           </p:cNvPr>
@@ -16205,7 +16205,7 @@
           <p:cNvPr id="50" name="">
             <a:extLst xmlns:a="http://schemas.openxmlformats.org/drawingml/2006/main">
               <a:ext uri="{FF2B5EF4-FFF2-40B4-BE49-F238E27FC236}">
-                <a16:creationId xmlns:a16="http://schemas.microsoft.com/office/drawing/2014/main" id="{4D6F69AD-8A09-4B41-9C05-DF905FBA16C9}"/>
+                <a16:creationId xmlns:a16="http://schemas.microsoft.com/office/drawing/2014/main" id="{C2B08933-7A5B-41AD-8195-B48D09293339}"/>
               </a:ext>
             </a:extLst>
           </p:cNvPr>
@@ -16250,7 +16250,7 @@
           <p:cNvPr id="51" name="">
             <a:extLst xmlns:a="http://schemas.openxmlformats.org/drawingml/2006/main">
               <a:ext uri="{FF2B5EF4-FFF2-40B4-BE49-F238E27FC236}">
-                <a16:creationId xmlns:a16="http://schemas.microsoft.com/office/drawing/2014/main" id="{2FDE567E-ACF5-46C3-9B50-8884F9ED350A}"/>
+                <a16:creationId xmlns:a16="http://schemas.microsoft.com/office/drawing/2014/main" id="{5AB9C6A8-7A42-4B0D-8347-334D3ACDCFE2}"/>
               </a:ext>
             </a:extLst>
           </p:cNvPr>
@@ -16283,7 +16283,7 @@
           <p:cNvPr id="52" name="">
             <a:extLst xmlns:a="http://schemas.openxmlformats.org/drawingml/2006/main">
               <a:ext uri="{FF2B5EF4-FFF2-40B4-BE49-F238E27FC236}">
-                <a16:creationId xmlns:a16="http://schemas.microsoft.com/office/drawing/2014/main" id="{BAF0EE2D-D34C-4D81-908D-BA6C0F4B4265}"/>
+                <a16:creationId xmlns:a16="http://schemas.microsoft.com/office/drawing/2014/main" id="{B1A965E7-0639-4F25-B1BA-B3BDC36F3C7C}"/>
               </a:ext>
             </a:extLst>
           </p:cNvPr>
@@ -16328,7 +16328,7 @@
           <p:cNvPr id="53" name="">
             <a:extLst xmlns:a="http://schemas.openxmlformats.org/drawingml/2006/main">
               <a:ext uri="{FF2B5EF4-FFF2-40B4-BE49-F238E27FC236}">
-                <a16:creationId xmlns:a16="http://schemas.microsoft.com/office/drawing/2014/main" id="{46D1BF05-02E2-4130-AD58-EDDD4F74DF0B}"/>
+                <a16:creationId xmlns:a16="http://schemas.microsoft.com/office/drawing/2014/main" id="{52BB31EE-C3D9-4162-AB9E-208B6CDC8019}"/>
               </a:ext>
             </a:extLst>
           </p:cNvPr>
@@ -16361,7 +16361,7 @@
           <p:cNvPr id="54" name="">
             <a:extLst xmlns:a="http://schemas.openxmlformats.org/drawingml/2006/main">
               <a:ext uri="{FF2B5EF4-FFF2-40B4-BE49-F238E27FC236}">
-                <a16:creationId xmlns:a16="http://schemas.microsoft.com/office/drawing/2014/main" id="{FEF6E2BD-E942-41B8-B826-F41BBA590823}"/>
+                <a16:creationId xmlns:a16="http://schemas.microsoft.com/office/drawing/2014/main" id="{4F0F30FE-A9A8-4569-AB81-4AE2D8B20079}"/>
               </a:ext>
             </a:extLst>
           </p:cNvPr>
@@ -16406,7 +16406,7 @@
           <p:cNvPr id="55" name="">
             <a:extLst xmlns:a="http://schemas.openxmlformats.org/drawingml/2006/main">
               <a:ext uri="{FF2B5EF4-FFF2-40B4-BE49-F238E27FC236}">
-                <a16:creationId xmlns:a16="http://schemas.microsoft.com/office/drawing/2014/main" id="{EBB60D9D-6671-4DE6-AC41-19574A164108}"/>
+                <a16:creationId xmlns:a16="http://schemas.microsoft.com/office/drawing/2014/main" id="{4A663A34-7709-4C68-9E05-84CB99A4B4FE}"/>
               </a:ext>
             </a:extLst>
           </p:cNvPr>
@@ -16451,7 +16451,7 @@
           <p:cNvPr id="56" name="">
             <a:extLst xmlns:a="http://schemas.openxmlformats.org/drawingml/2006/main">
               <a:ext uri="{FF2B5EF4-FFF2-40B4-BE49-F238E27FC236}">
-                <a16:creationId xmlns:a16="http://schemas.microsoft.com/office/drawing/2014/main" id="{D2B88EB3-2BE2-4436-ABE6-C68634AE6D71}"/>
+                <a16:creationId xmlns:a16="http://schemas.microsoft.com/office/drawing/2014/main" id="{E0759A83-ACB5-47F0-8A8D-8A8DDCB4501D}"/>
               </a:ext>
             </a:extLst>
           </p:cNvPr>
@@ -16496,7 +16496,7 @@
           <p:cNvPr id="57" name="">
             <a:extLst xmlns:a="http://schemas.openxmlformats.org/drawingml/2006/main">
               <a:ext uri="{FF2B5EF4-FFF2-40B4-BE49-F238E27FC236}">
-                <a16:creationId xmlns:a16="http://schemas.microsoft.com/office/drawing/2014/main" id="{723DDE91-2F8D-4B29-9B95-BC84E51BAB28}"/>
+                <a16:creationId xmlns:a16="http://schemas.microsoft.com/office/drawing/2014/main" id="{6B502B74-A356-4681-A959-9A8651311E46}"/>
               </a:ext>
             </a:extLst>
           </p:cNvPr>
@@ -16529,7 +16529,7 @@
           <p:cNvPr id="58" name="">
             <a:extLst xmlns:a="http://schemas.openxmlformats.org/drawingml/2006/main">
               <a:ext uri="{FF2B5EF4-FFF2-40B4-BE49-F238E27FC236}">
-                <a16:creationId xmlns:a16="http://schemas.microsoft.com/office/drawing/2014/main" id="{5B2BE8EA-5672-4AA2-942A-232CF12AE5B1}"/>
+                <a16:creationId xmlns:a16="http://schemas.microsoft.com/office/drawing/2014/main" id="{6ECDE097-11FD-40A8-A47B-3CA39F013EAC}"/>
               </a:ext>
             </a:extLst>
           </p:cNvPr>
@@ -16574,7 +16574,7 @@
           <p:cNvPr id="59" name="">
             <a:extLst xmlns:a="http://schemas.openxmlformats.org/drawingml/2006/main">
               <a:ext uri="{FF2B5EF4-FFF2-40B4-BE49-F238E27FC236}">
-                <a16:creationId xmlns:a16="http://schemas.microsoft.com/office/drawing/2014/main" id="{E3DE9BE0-18E7-49F6-B271-7A9F09D603E2}"/>
+                <a16:creationId xmlns:a16="http://schemas.microsoft.com/office/drawing/2014/main" id="{B17413AD-5538-4C4E-9154-B81EC8A5F06F}"/>
               </a:ext>
             </a:extLst>
           </p:cNvPr>
@@ -16607,7 +16607,7 @@
           <p:cNvPr id="60" name="">
             <a:extLst xmlns:a="http://schemas.openxmlformats.org/drawingml/2006/main">
               <a:ext uri="{FF2B5EF4-FFF2-40B4-BE49-F238E27FC236}">
-                <a16:creationId xmlns:a16="http://schemas.microsoft.com/office/drawing/2014/main" id="{F625E13E-AA7A-4831-9BCD-08C1391C6DB6}"/>
+                <a16:creationId xmlns:a16="http://schemas.microsoft.com/office/drawing/2014/main" id="{3FEA0493-F317-4A0A-B5E8-F6264444B7D7}"/>
               </a:ext>
             </a:extLst>
           </p:cNvPr>
@@ -16652,7 +16652,7 @@
           <p:cNvPr id="61" name="">
             <a:extLst xmlns:a="http://schemas.openxmlformats.org/drawingml/2006/main">
               <a:ext uri="{FF2B5EF4-FFF2-40B4-BE49-F238E27FC236}">
-                <a16:creationId xmlns:a16="http://schemas.microsoft.com/office/drawing/2014/main" id="{FA55A0CC-0CF8-4A45-BCF3-1D51C8E42483}"/>
+                <a16:creationId xmlns:a16="http://schemas.microsoft.com/office/drawing/2014/main" id="{FF7DE399-326D-458D-ABB1-7FA2D605FFE4}"/>
               </a:ext>
             </a:extLst>
           </p:cNvPr>
@@ -16697,7 +16697,7 @@
           <p:cNvPr id="62" name="">
             <a:extLst xmlns:a="http://schemas.openxmlformats.org/drawingml/2006/main">
               <a:ext uri="{FF2B5EF4-FFF2-40B4-BE49-F238E27FC236}">
-                <a16:creationId xmlns:a16="http://schemas.microsoft.com/office/drawing/2014/main" id="{E86875E6-7474-4846-A4EF-0BFF5C2522D2}"/>
+                <a16:creationId xmlns:a16="http://schemas.microsoft.com/office/drawing/2014/main" id="{713CA29D-5805-4594-B692-1DE92A3CC5E9}"/>
               </a:ext>
             </a:extLst>
           </p:cNvPr>
@@ -16742,7 +16742,7 @@
           <p:cNvPr id="63" name="">
             <a:extLst xmlns:a="http://schemas.openxmlformats.org/drawingml/2006/main">
               <a:ext uri="{FF2B5EF4-FFF2-40B4-BE49-F238E27FC236}">
-                <a16:creationId xmlns:a16="http://schemas.microsoft.com/office/drawing/2014/main" id="{35F83394-B9C2-4340-A362-01B566F7A293}"/>
+                <a16:creationId xmlns:a16="http://schemas.microsoft.com/office/drawing/2014/main" id="{9C6B85EA-6019-482F-985F-3FC4DF0367F1}"/>
               </a:ext>
             </a:extLst>
           </p:cNvPr>
@@ -16785,7 +16785,7 @@
     </p:spTree>
     <p:extLst>
       <p:ext uri="{BB962C8B-B14F-4D97-AF65-F5344CB8AC3E}">
-        <p14:creationId xmlns:p14="http://schemas.microsoft.com/office/powerpoint/2010/main" val="2016216965"/>
+        <p14:creationId xmlns:p14="http://schemas.microsoft.com/office/powerpoint/2010/main" val="796757280"/>
       </p:ext>
     </p:extLst>
   </p:cSld>
@@ -16809,7 +16809,7 @@
           <p:cNvPr id="39" name="">
             <a:extLst xmlns:a="http://schemas.openxmlformats.org/drawingml/2006/main">
               <a:ext uri="{FF2B5EF4-FFF2-40B4-BE49-F238E27FC236}">
-                <a16:creationId xmlns:a16="http://schemas.microsoft.com/office/drawing/2014/main" id="{DCFC1AC3-2820-4562-9AB7-EFF42AFAD099}"/>
+                <a16:creationId xmlns:a16="http://schemas.microsoft.com/office/drawing/2014/main" id="{2FB6F608-231B-4E8E-91EF-831248812A24}"/>
               </a:ext>
             </a:extLst>
           </p:cNvPr>
@@ -16840,7 +16840,7 @@
           <p:cNvPr id="2" name="">
             <a:extLst xmlns:a="http://schemas.openxmlformats.org/drawingml/2006/main">
               <a:ext uri="{FF2B5EF4-FFF2-40B4-BE49-F238E27FC236}">
-                <a16:creationId xmlns:a16="http://schemas.microsoft.com/office/drawing/2014/main" id="{71DA9624-77B6-4C74-97E7-7177C7E5B2C5}"/>
+                <a16:creationId xmlns:a16="http://schemas.microsoft.com/office/drawing/2014/main" id="{67E72F65-1525-4070-806B-AB2E7F8759E2}"/>
               </a:ext>
             </a:extLst>
           </p:cNvPr>
@@ -16885,7 +16885,7 @@
           <p:cNvPr id="3" name="">
             <a:extLst xmlns:a="http://schemas.openxmlformats.org/drawingml/2006/main">
               <a:ext uri="{FF2B5EF4-FFF2-40B4-BE49-F238E27FC236}">
-                <a16:creationId xmlns:a16="http://schemas.microsoft.com/office/drawing/2014/main" id="{461A5ED3-D496-4262-BBB6-46802D599810}"/>
+                <a16:creationId xmlns:a16="http://schemas.microsoft.com/office/drawing/2014/main" id="{7792F3EA-509A-49FF-9E2E-5F3BE3487DCF}"/>
               </a:ext>
             </a:extLst>
           </p:cNvPr>
@@ -16930,7 +16930,7 @@
           <p:cNvPr id="4" name="">
             <a:extLst xmlns:a="http://schemas.openxmlformats.org/drawingml/2006/main">
               <a:ext uri="{FF2B5EF4-FFF2-40B4-BE49-F238E27FC236}">
-                <a16:creationId xmlns:a16="http://schemas.microsoft.com/office/drawing/2014/main" id="{EED898DF-0735-4975-8D99-47D7DE99C283}"/>
+                <a16:creationId xmlns:a16="http://schemas.microsoft.com/office/drawing/2014/main" id="{BD39B409-8E33-448F-AED6-F9F9EE9A5F85}"/>
               </a:ext>
             </a:extLst>
           </p:cNvPr>
@@ -16975,7 +16975,7 @@
           <p:cNvPr id="5" name="">
             <a:extLst xmlns:a="http://schemas.openxmlformats.org/drawingml/2006/main">
               <a:ext uri="{FF2B5EF4-FFF2-40B4-BE49-F238E27FC236}">
-                <a16:creationId xmlns:a16="http://schemas.microsoft.com/office/drawing/2014/main" id="{6E3DE964-CD5E-454E-B608-A8BE565DDA40}"/>
+                <a16:creationId xmlns:a16="http://schemas.microsoft.com/office/drawing/2014/main" id="{A167574B-D87D-44E9-8B04-1A44F5E2FC8F}"/>
               </a:ext>
             </a:extLst>
           </p:cNvPr>
@@ -17006,7 +17006,7 @@
           <p:cNvPr id="6" name="">
             <a:extLst xmlns:a="http://schemas.openxmlformats.org/drawingml/2006/main">
               <a:ext uri="{FF2B5EF4-FFF2-40B4-BE49-F238E27FC236}">
-                <a16:creationId xmlns:a16="http://schemas.microsoft.com/office/drawing/2014/main" id="{2ACDB217-E74A-4E4B-8C89-A0A6FA9EB417}"/>
+                <a16:creationId xmlns:a16="http://schemas.microsoft.com/office/drawing/2014/main" id="{D87B872A-E5B6-49CA-BD72-B1423B6C050E}"/>
               </a:ext>
             </a:extLst>
           </p:cNvPr>
@@ -17037,7 +17037,7 @@
           <p:cNvPr id="7" name="">
             <a:extLst xmlns:a="http://schemas.openxmlformats.org/drawingml/2006/main">
               <a:ext uri="{FF2B5EF4-FFF2-40B4-BE49-F238E27FC236}">
-                <a16:creationId xmlns:a16="http://schemas.microsoft.com/office/drawing/2014/main" id="{0DF6F2CD-1C75-40A8-9B1E-CA7FF0DE8D11}"/>
+                <a16:creationId xmlns:a16="http://schemas.microsoft.com/office/drawing/2014/main" id="{C8A69577-1AF7-4056-A0CB-C3CBBA9DFCD8}"/>
               </a:ext>
             </a:extLst>
           </p:cNvPr>
@@ -17082,7 +17082,7 @@
           <p:cNvPr id="8" name="">
             <a:extLst xmlns:a="http://schemas.openxmlformats.org/drawingml/2006/main">
               <a:ext uri="{FF2B5EF4-FFF2-40B4-BE49-F238E27FC236}">
-                <a16:creationId xmlns:a16="http://schemas.microsoft.com/office/drawing/2014/main" id="{1CBC847B-91AE-4AFC-8309-4D656D560810}"/>
+                <a16:creationId xmlns:a16="http://schemas.microsoft.com/office/drawing/2014/main" id="{50E7873F-A31A-45BA-BFB7-03C91427BFA5}"/>
               </a:ext>
             </a:extLst>
           </p:cNvPr>
@@ -17127,7 +17127,7 @@
           <p:cNvPr id="9" name="">
             <a:extLst xmlns:a="http://schemas.openxmlformats.org/drawingml/2006/main">
               <a:ext uri="{FF2B5EF4-FFF2-40B4-BE49-F238E27FC236}">
-                <a16:creationId xmlns:a16="http://schemas.microsoft.com/office/drawing/2014/main" id="{C04710EA-6BEE-43B7-9177-5ABF4BD595C4}"/>
+                <a16:creationId xmlns:a16="http://schemas.microsoft.com/office/drawing/2014/main" id="{10B30264-0CE5-4AEC-A500-53983DCF9C92}"/>
               </a:ext>
             </a:extLst>
           </p:cNvPr>
@@ -17158,7 +17158,7 @@
           <p:cNvPr id="10" name="">
             <a:extLst xmlns:a="http://schemas.openxmlformats.org/drawingml/2006/main">
               <a:ext uri="{FF2B5EF4-FFF2-40B4-BE49-F238E27FC236}">
-                <a16:creationId xmlns:a16="http://schemas.microsoft.com/office/drawing/2014/main" id="{0574762E-D239-4607-9F17-6E9CDC0787FC}"/>
+                <a16:creationId xmlns:a16="http://schemas.microsoft.com/office/drawing/2014/main" id="{E708EF20-60A6-45F9-B735-3AF5ED3BE530}"/>
               </a:ext>
             </a:extLst>
           </p:cNvPr>
@@ -17191,7 +17191,7 @@
           <p:cNvPr id="11" name="">
             <a:extLst xmlns:a="http://schemas.openxmlformats.org/drawingml/2006/main">
               <a:ext uri="{FF2B5EF4-FFF2-40B4-BE49-F238E27FC236}">
-                <a16:creationId xmlns:a16="http://schemas.microsoft.com/office/drawing/2014/main" id="{D604D75F-D90F-4A4C-A6D3-5E595678A5E0}"/>
+                <a16:creationId xmlns:a16="http://schemas.microsoft.com/office/drawing/2014/main" id="{9424FF7D-8C50-4025-888E-5835CD52C54C}"/>
               </a:ext>
             </a:extLst>
           </p:cNvPr>
@@ -17236,7 +17236,7 @@
           <p:cNvPr id="12" name="">
             <a:extLst xmlns:a="http://schemas.openxmlformats.org/drawingml/2006/main">
               <a:ext uri="{FF2B5EF4-FFF2-40B4-BE49-F238E27FC236}">
-                <a16:creationId xmlns:a16="http://schemas.microsoft.com/office/drawing/2014/main" id="{007EEDB0-3AB3-4CEF-A76D-8F667E3B3F82}"/>
+                <a16:creationId xmlns:a16="http://schemas.microsoft.com/office/drawing/2014/main" id="{47B4739C-A2EE-4943-A25B-3446328FC542}"/>
               </a:ext>
             </a:extLst>
           </p:cNvPr>
@@ -17269,7 +17269,7 @@
           <p:cNvPr id="13" name="">
             <a:extLst xmlns:a="http://schemas.openxmlformats.org/drawingml/2006/main">
               <a:ext uri="{FF2B5EF4-FFF2-40B4-BE49-F238E27FC236}">
-                <a16:creationId xmlns:a16="http://schemas.microsoft.com/office/drawing/2014/main" id="{F4DEAD39-AAC9-4FFD-BC13-BAFEDEC69D17}"/>
+                <a16:creationId xmlns:a16="http://schemas.microsoft.com/office/drawing/2014/main" id="{A3710A8B-1721-4812-82D3-6C4C48E04705}"/>
               </a:ext>
             </a:extLst>
           </p:cNvPr>
@@ -17314,7 +17314,7 @@
           <p:cNvPr id="14" name="">
             <a:extLst xmlns:a="http://schemas.openxmlformats.org/drawingml/2006/main">
               <a:ext uri="{FF2B5EF4-FFF2-40B4-BE49-F238E27FC236}">
-                <a16:creationId xmlns:a16="http://schemas.microsoft.com/office/drawing/2014/main" id="{8E54F42C-2736-40C8-83AE-106C59ABA451}"/>
+                <a16:creationId xmlns:a16="http://schemas.microsoft.com/office/drawing/2014/main" id="{25986E83-5BF7-4AC7-8A49-2EC74EC366ED}"/>
               </a:ext>
             </a:extLst>
           </p:cNvPr>
@@ -17359,7 +17359,7 @@
           <p:cNvPr id="15" name="">
             <a:extLst xmlns:a="http://schemas.openxmlformats.org/drawingml/2006/main">
               <a:ext uri="{FF2B5EF4-FFF2-40B4-BE49-F238E27FC236}">
-                <a16:creationId xmlns:a16="http://schemas.microsoft.com/office/drawing/2014/main" id="{21946252-9954-44ED-BBA3-1C9899D95E62}"/>
+                <a16:creationId xmlns:a16="http://schemas.microsoft.com/office/drawing/2014/main" id="{72EEDA04-1801-4333-977D-DC729E2BE038}"/>
               </a:ext>
             </a:extLst>
           </p:cNvPr>
@@ -17392,7 +17392,7 @@
           <p:cNvPr id="16" name="">
             <a:extLst xmlns:a="http://schemas.openxmlformats.org/drawingml/2006/main">
               <a:ext uri="{FF2B5EF4-FFF2-40B4-BE49-F238E27FC236}">
-                <a16:creationId xmlns:a16="http://schemas.microsoft.com/office/drawing/2014/main" id="{97BCB63E-D4E3-4E78-A16A-1C233BE9D4FA}"/>
+                <a16:creationId xmlns:a16="http://schemas.microsoft.com/office/drawing/2014/main" id="{DD822F77-EB78-4731-8C7E-38F705DD3945}"/>
               </a:ext>
             </a:extLst>
           </p:cNvPr>
@@ -17437,7 +17437,7 @@
           <p:cNvPr id="17" name="">
             <a:extLst xmlns:a="http://schemas.openxmlformats.org/drawingml/2006/main">
               <a:ext uri="{FF2B5EF4-FFF2-40B4-BE49-F238E27FC236}">
-                <a16:creationId xmlns:a16="http://schemas.microsoft.com/office/drawing/2014/main" id="{64ADE4B4-9C7F-4463-8486-52B12B95F2FC}"/>
+                <a16:creationId xmlns:a16="http://schemas.microsoft.com/office/drawing/2014/main" id="{762ED6DE-3705-4F87-812A-5E7B69C5E450}"/>
               </a:ext>
             </a:extLst>
           </p:cNvPr>
@@ -17470,7 +17470,7 @@
           <p:cNvPr id="18" name="">
             <a:extLst xmlns:a="http://schemas.openxmlformats.org/drawingml/2006/main">
               <a:ext uri="{FF2B5EF4-FFF2-40B4-BE49-F238E27FC236}">
-                <a16:creationId xmlns:a16="http://schemas.microsoft.com/office/drawing/2014/main" id="{62B68D25-0277-4A2B-BD8D-3D3002404AA4}"/>
+                <a16:creationId xmlns:a16="http://schemas.microsoft.com/office/drawing/2014/main" id="{26A6A38A-6F92-4817-899F-1DA6BDAFBCE6}"/>
               </a:ext>
             </a:extLst>
           </p:cNvPr>
@@ -17515,7 +17515,7 @@
           <p:cNvPr id="19" name="">
             <a:extLst xmlns:a="http://schemas.openxmlformats.org/drawingml/2006/main">
               <a:ext uri="{FF2B5EF4-FFF2-40B4-BE49-F238E27FC236}">
-                <a16:creationId xmlns:a16="http://schemas.microsoft.com/office/drawing/2014/main" id="{A311579B-7C71-41AD-B1B2-7C4D4EA782B1}"/>
+                <a16:creationId xmlns:a16="http://schemas.microsoft.com/office/drawing/2014/main" id="{F90529FF-B83A-4FDE-9B49-4509FC79B34A}"/>
               </a:ext>
             </a:extLst>
           </p:cNvPr>
@@ -17560,7 +17560,7 @@
           <p:cNvPr id="20" name="">
             <a:extLst xmlns:a="http://schemas.openxmlformats.org/drawingml/2006/main">
               <a:ext uri="{FF2B5EF4-FFF2-40B4-BE49-F238E27FC236}">
-                <a16:creationId xmlns:a16="http://schemas.microsoft.com/office/drawing/2014/main" id="{23747A4E-B61E-46A3-8BA6-52D263C868D0}"/>
+                <a16:creationId xmlns:a16="http://schemas.microsoft.com/office/drawing/2014/main" id="{88F1B396-ED00-4363-806B-DBF8D64E9C21}"/>
               </a:ext>
             </a:extLst>
           </p:cNvPr>
@@ -17593,7 +17593,7 @@
           <p:cNvPr id="21" name="">
             <a:extLst xmlns:a="http://schemas.openxmlformats.org/drawingml/2006/main">
               <a:ext uri="{FF2B5EF4-FFF2-40B4-BE49-F238E27FC236}">
-                <a16:creationId xmlns:a16="http://schemas.microsoft.com/office/drawing/2014/main" id="{33B0D68C-2067-41F6-8F08-352C7B27E926}"/>
+                <a16:creationId xmlns:a16="http://schemas.microsoft.com/office/drawing/2014/main" id="{D9210CFD-ACEF-4B61-A05A-8CBD0A88841F}"/>
               </a:ext>
             </a:extLst>
           </p:cNvPr>
@@ -17638,7 +17638,7 @@
           <p:cNvPr id="22" name="">
             <a:extLst xmlns:a="http://schemas.openxmlformats.org/drawingml/2006/main">
               <a:ext uri="{FF2B5EF4-FFF2-40B4-BE49-F238E27FC236}">
-                <a16:creationId xmlns:a16="http://schemas.microsoft.com/office/drawing/2014/main" id="{0CDAD148-8F3D-4C79-9746-2793C78D0180}"/>
+                <a16:creationId xmlns:a16="http://schemas.microsoft.com/office/drawing/2014/main" id="{7C245194-E723-44D9-B5FD-BD37107AE529}"/>
               </a:ext>
             </a:extLst>
           </p:cNvPr>
@@ -17671,7 +17671,7 @@
           <p:cNvPr id="23" name="">
             <a:extLst xmlns:a="http://schemas.openxmlformats.org/drawingml/2006/main">
               <a:ext uri="{FF2B5EF4-FFF2-40B4-BE49-F238E27FC236}">
-                <a16:creationId xmlns:a16="http://schemas.microsoft.com/office/drawing/2014/main" id="{C32CE201-C7FD-4E3D-85B9-9FC0A2079E6A}"/>
+                <a16:creationId xmlns:a16="http://schemas.microsoft.com/office/drawing/2014/main" id="{A3959775-5241-46E6-9E0C-409BE3596C04}"/>
               </a:ext>
             </a:extLst>
           </p:cNvPr>
@@ -17716,7 +17716,7 @@
           <p:cNvPr id="24" name="">
             <a:extLst xmlns:a="http://schemas.openxmlformats.org/drawingml/2006/main">
               <a:ext uri="{FF2B5EF4-FFF2-40B4-BE49-F238E27FC236}">
-                <a16:creationId xmlns:a16="http://schemas.microsoft.com/office/drawing/2014/main" id="{9DB7EBB3-1B66-43DE-A971-233E69906EB6}"/>
+                <a16:creationId xmlns:a16="http://schemas.microsoft.com/office/drawing/2014/main" id="{6AC6A562-7994-4DE3-B847-2FE6D2D80EDB}"/>
               </a:ext>
             </a:extLst>
           </p:cNvPr>
@@ -17761,7 +17761,7 @@
           <p:cNvPr id="25" name="">
             <a:extLst xmlns:a="http://schemas.openxmlformats.org/drawingml/2006/main">
               <a:ext uri="{FF2B5EF4-FFF2-40B4-BE49-F238E27FC236}">
-                <a16:creationId xmlns:a16="http://schemas.microsoft.com/office/drawing/2014/main" id="{FEED4890-EFD1-4FE9-B6C8-6C46DA0F264A}"/>
+                <a16:creationId xmlns:a16="http://schemas.microsoft.com/office/drawing/2014/main" id="{C50E657D-8D5C-4BB2-97B3-D80C2119443D}"/>
               </a:ext>
             </a:extLst>
           </p:cNvPr>
@@ -17794,7 +17794,7 @@
           <p:cNvPr id="26" name="">
             <a:extLst xmlns:a="http://schemas.openxmlformats.org/drawingml/2006/main">
               <a:ext uri="{FF2B5EF4-FFF2-40B4-BE49-F238E27FC236}">
-                <a16:creationId xmlns:a16="http://schemas.microsoft.com/office/drawing/2014/main" id="{D891BFBF-F7C0-4CA8-A283-B38AC0DA0575}"/>
+                <a16:creationId xmlns:a16="http://schemas.microsoft.com/office/drawing/2014/main" id="{BECC663C-D2A9-4CFC-96CD-6FF86B5B3FAC}"/>
               </a:ext>
             </a:extLst>
           </p:cNvPr>
@@ -17839,7 +17839,7 @@
           <p:cNvPr id="27" name="">
             <a:extLst xmlns:a="http://schemas.openxmlformats.org/drawingml/2006/main">
               <a:ext uri="{FF2B5EF4-FFF2-40B4-BE49-F238E27FC236}">
-                <a16:creationId xmlns:a16="http://schemas.microsoft.com/office/drawing/2014/main" id="{CB4C18FD-88E0-4537-BBA1-3009FD6B4E31}"/>
+                <a16:creationId xmlns:a16="http://schemas.microsoft.com/office/drawing/2014/main" id="{E8947C07-2102-422F-A65E-82EC0D26570A}"/>
               </a:ext>
             </a:extLst>
           </p:cNvPr>
@@ -17872,7 +17872,7 @@
           <p:cNvPr id="28" name="">
             <a:extLst xmlns:a="http://schemas.openxmlformats.org/drawingml/2006/main">
               <a:ext uri="{FF2B5EF4-FFF2-40B4-BE49-F238E27FC236}">
-                <a16:creationId xmlns:a16="http://schemas.microsoft.com/office/drawing/2014/main" id="{51F4A298-EADF-40AC-833A-D714CE4997B0}"/>
+                <a16:creationId xmlns:a16="http://schemas.microsoft.com/office/drawing/2014/main" id="{CFCDF543-8A7D-4296-9C4E-D08C5CECC5DC}"/>
               </a:ext>
             </a:extLst>
           </p:cNvPr>
@@ -17917,7 +17917,7 @@
           <p:cNvPr id="29" name="">
             <a:extLst xmlns:a="http://schemas.openxmlformats.org/drawingml/2006/main">
               <a:ext uri="{FF2B5EF4-FFF2-40B4-BE49-F238E27FC236}">
-                <a16:creationId xmlns:a16="http://schemas.microsoft.com/office/drawing/2014/main" id="{7F83DBBF-556B-4139-90D1-75760537812F}"/>
+                <a16:creationId xmlns:a16="http://schemas.microsoft.com/office/drawing/2014/main" id="{E53BED93-F2C5-485C-B8C8-129B2C5D7D01}"/>
               </a:ext>
             </a:extLst>
           </p:cNvPr>
@@ -17962,7 +17962,7 @@
           <p:cNvPr id="30" name="">
             <a:extLst xmlns:a="http://schemas.openxmlformats.org/drawingml/2006/main">
               <a:ext uri="{FF2B5EF4-FFF2-40B4-BE49-F238E27FC236}">
-                <a16:creationId xmlns:a16="http://schemas.microsoft.com/office/drawing/2014/main" id="{23593DBC-0C86-4915-9EA8-5B5D0FBF1B8A}"/>
+                <a16:creationId xmlns:a16="http://schemas.microsoft.com/office/drawing/2014/main" id="{67975E02-6460-40F3-BA05-9DD34F5E0954}"/>
               </a:ext>
             </a:extLst>
           </p:cNvPr>
@@ -17997,7 +17997,7 @@
           <p:cNvPr id="31" name="">
             <a:extLst xmlns:a="http://schemas.openxmlformats.org/drawingml/2006/main">
               <a:ext uri="{FF2B5EF4-FFF2-40B4-BE49-F238E27FC236}">
-                <a16:creationId xmlns:a16="http://schemas.microsoft.com/office/drawing/2014/main" id="{B4CB95DF-9530-4317-A148-0ADB84A36BDD}"/>
+                <a16:creationId xmlns:a16="http://schemas.microsoft.com/office/drawing/2014/main" id="{05980E81-5E7B-4A27-AC9B-D259115E3D19}"/>
               </a:ext>
             </a:extLst>
           </p:cNvPr>
@@ -18028,7 +18028,7 @@
           <p:cNvPr id="32" name="">
             <a:extLst xmlns:a="http://schemas.openxmlformats.org/drawingml/2006/main">
               <a:ext uri="{FF2B5EF4-FFF2-40B4-BE49-F238E27FC236}">
-                <a16:creationId xmlns:a16="http://schemas.microsoft.com/office/drawing/2014/main" id="{0B68EF79-7C2E-48E2-A5EA-CE5BC36E8A3A}"/>
+                <a16:creationId xmlns:a16="http://schemas.microsoft.com/office/drawing/2014/main" id="{FC1E2EA2-1581-442C-AFCC-3B840DA86ACB}"/>
               </a:ext>
             </a:extLst>
           </p:cNvPr>
@@ -18073,7 +18073,7 @@
           <p:cNvPr id="33" name="">
             <a:extLst xmlns:a="http://schemas.openxmlformats.org/drawingml/2006/main">
               <a:ext uri="{FF2B5EF4-FFF2-40B4-BE49-F238E27FC236}">
-                <a16:creationId xmlns:a16="http://schemas.microsoft.com/office/drawing/2014/main" id="{0E0DEC00-1909-4CB2-B72A-63A196EB7DED}"/>
+                <a16:creationId xmlns:a16="http://schemas.microsoft.com/office/drawing/2014/main" id="{77B98B69-B73D-41C2-8F9E-99069CB71150}"/>
               </a:ext>
             </a:extLst>
           </p:cNvPr>
@@ -18118,7 +18118,7 @@
           <p:cNvPr id="34" name="">
             <a:extLst xmlns:a="http://schemas.openxmlformats.org/drawingml/2006/main">
               <a:ext uri="{FF2B5EF4-FFF2-40B4-BE49-F238E27FC236}">
-                <a16:creationId xmlns:a16="http://schemas.microsoft.com/office/drawing/2014/main" id="{D37E75C6-165E-4E50-83BF-84DA6C2D37C2}"/>
+                <a16:creationId xmlns:a16="http://schemas.microsoft.com/office/drawing/2014/main" id="{FD4715C0-C8E0-4F26-BB22-C07EE54DF7B6}"/>
               </a:ext>
             </a:extLst>
           </p:cNvPr>
@@ -18153,7 +18153,7 @@
           <p:cNvPr id="35" name="">
             <a:extLst xmlns:a="http://schemas.openxmlformats.org/drawingml/2006/main">
               <a:ext uri="{FF2B5EF4-FFF2-40B4-BE49-F238E27FC236}">
-                <a16:creationId xmlns:a16="http://schemas.microsoft.com/office/drawing/2014/main" id="{31EA2236-3E9E-4051-9993-0F6ED43F82BC}"/>
+                <a16:creationId xmlns:a16="http://schemas.microsoft.com/office/drawing/2014/main" id="{1D511236-9598-434B-A62B-23C7FF7304F2}"/>
               </a:ext>
             </a:extLst>
           </p:cNvPr>
@@ -18184,7 +18184,7 @@
           <p:cNvPr id="36" name="">
             <a:extLst xmlns:a="http://schemas.openxmlformats.org/drawingml/2006/main">
               <a:ext uri="{FF2B5EF4-FFF2-40B4-BE49-F238E27FC236}">
-                <a16:creationId xmlns:a16="http://schemas.microsoft.com/office/drawing/2014/main" id="{9DA18581-A1E8-4D8A-B48A-538446BD6C47}"/>
+                <a16:creationId xmlns:a16="http://schemas.microsoft.com/office/drawing/2014/main" id="{B0903CF6-B3E7-40B9-83D1-59B8441D03F1}"/>
               </a:ext>
             </a:extLst>
           </p:cNvPr>
@@ -18229,7 +18229,7 @@
           <p:cNvPr id="37" name="">
             <a:extLst xmlns:a="http://schemas.openxmlformats.org/drawingml/2006/main">
               <a:ext uri="{FF2B5EF4-FFF2-40B4-BE49-F238E27FC236}">
-                <a16:creationId xmlns:a16="http://schemas.microsoft.com/office/drawing/2014/main" id="{34645370-EFA2-4545-966C-5C457BB08C39}"/>
+                <a16:creationId xmlns:a16="http://schemas.microsoft.com/office/drawing/2014/main" id="{2E99BAC2-2EBB-48DD-82CA-6C272FC156DF}"/>
               </a:ext>
             </a:extLst>
           </p:cNvPr>
@@ -18274,7 +18274,7 @@
           <p:cNvPr id="38" name="">
             <a:extLst xmlns:a="http://schemas.openxmlformats.org/drawingml/2006/main">
               <a:ext uri="{FF2B5EF4-FFF2-40B4-BE49-F238E27FC236}">
-                <a16:creationId xmlns:a16="http://schemas.microsoft.com/office/drawing/2014/main" id="{BBFA66E8-FE78-4D29-8E9B-18AD832D0D62}"/>
+                <a16:creationId xmlns:a16="http://schemas.microsoft.com/office/drawing/2014/main" id="{D3CF5710-B67D-4CE8-9411-6516A3B47143}"/>
               </a:ext>
             </a:extLst>
           </p:cNvPr>
@@ -18317,7 +18317,7 @@
     </p:spTree>
     <p:extLst>
       <p:ext uri="{BB962C8B-B14F-4D97-AF65-F5344CB8AC3E}">
-        <p14:creationId xmlns:p14="http://schemas.microsoft.com/office/powerpoint/2010/main" val="378119253"/>
+        <p14:creationId xmlns:p14="http://schemas.microsoft.com/office/powerpoint/2010/main" val="1444283220"/>
       </p:ext>
     </p:extLst>
   </p:cSld>
@@ -18341,7 +18341,7 @@
           <p:cNvPr id="24" name="">
             <a:extLst xmlns:a="http://schemas.openxmlformats.org/drawingml/2006/main">
               <a:ext uri="{FF2B5EF4-FFF2-40B4-BE49-F238E27FC236}">
-                <a16:creationId xmlns:a16="http://schemas.microsoft.com/office/drawing/2014/main" id="{9C9353DC-1C32-4235-84CA-E64F5029AD40}"/>
+                <a16:creationId xmlns:a16="http://schemas.microsoft.com/office/drawing/2014/main" id="{35BCA625-C63D-443B-92A6-5D4CC5892E77}"/>
               </a:ext>
             </a:extLst>
           </p:cNvPr>
@@ -18372,7 +18372,7 @@
           <p:cNvPr id="2" name="">
             <a:extLst xmlns:a="http://schemas.openxmlformats.org/drawingml/2006/main">
               <a:ext uri="{FF2B5EF4-FFF2-40B4-BE49-F238E27FC236}">
-                <a16:creationId xmlns:a16="http://schemas.microsoft.com/office/drawing/2014/main" id="{30C63794-08DD-4B96-BF09-73EB09372310}"/>
+                <a16:creationId xmlns:a16="http://schemas.microsoft.com/office/drawing/2014/main" id="{8F00718A-E7E8-4611-8B7F-861400A8C883}"/>
               </a:ext>
             </a:extLst>
           </p:cNvPr>
@@ -18403,7 +18403,7 @@
           <p:cNvPr id="3" name="">
             <a:extLst xmlns:a="http://schemas.openxmlformats.org/drawingml/2006/main">
               <a:ext uri="{FF2B5EF4-FFF2-40B4-BE49-F238E27FC236}">
-                <a16:creationId xmlns:a16="http://schemas.microsoft.com/office/drawing/2014/main" id="{65A51F7B-2475-416D-AF3B-ED4754071D89}"/>
+                <a16:creationId xmlns:a16="http://schemas.microsoft.com/office/drawing/2014/main" id="{C34EC765-3A53-4BEA-AC59-362D3F43F117}"/>
               </a:ext>
             </a:extLst>
           </p:cNvPr>
@@ -18448,7 +18448,7 @@
           <p:cNvPr id="4" name="">
             <a:extLst xmlns:a="http://schemas.openxmlformats.org/drawingml/2006/main">
               <a:ext uri="{FF2B5EF4-FFF2-40B4-BE49-F238E27FC236}">
-                <a16:creationId xmlns:a16="http://schemas.microsoft.com/office/drawing/2014/main" id="{3AD7C0B2-B7AE-4122-A4A1-9BB3F290FDEA}"/>
+                <a16:creationId xmlns:a16="http://schemas.microsoft.com/office/drawing/2014/main" id="{14EF530F-DE4E-4E57-A01A-506E754FB368}"/>
               </a:ext>
             </a:extLst>
           </p:cNvPr>
@@ -18493,7 +18493,7 @@
           <p:cNvPr id="5" name="">
             <a:extLst xmlns:a="http://schemas.openxmlformats.org/drawingml/2006/main">
               <a:ext uri="{FF2B5EF4-FFF2-40B4-BE49-F238E27FC236}">
-                <a16:creationId xmlns:a16="http://schemas.microsoft.com/office/drawing/2014/main" id="{1B8FD009-D9A4-4F41-BE96-FD61BBC35423}"/>
+                <a16:creationId xmlns:a16="http://schemas.microsoft.com/office/drawing/2014/main" id="{362AA375-7727-45BC-A3BE-FCF0A85FD68A}"/>
               </a:ext>
             </a:extLst>
           </p:cNvPr>
@@ -18524,7 +18524,7 @@
           <p:cNvPr id="6" name="">
             <a:extLst xmlns:a="http://schemas.openxmlformats.org/drawingml/2006/main">
               <a:ext uri="{FF2B5EF4-FFF2-40B4-BE49-F238E27FC236}">
-                <a16:creationId xmlns:a16="http://schemas.microsoft.com/office/drawing/2014/main" id="{47069B80-0B1F-4FD5-B3E3-FA0D6D015819}"/>
+                <a16:creationId xmlns:a16="http://schemas.microsoft.com/office/drawing/2014/main" id="{6BACFFC1-CD85-45E2-8CCC-9EA107C81A78}"/>
               </a:ext>
             </a:extLst>
           </p:cNvPr>
@@ -18569,7 +18569,7 @@
           <p:cNvPr id="7" name="">
             <a:extLst xmlns:a="http://schemas.openxmlformats.org/drawingml/2006/main">
               <a:ext uri="{FF2B5EF4-FFF2-40B4-BE49-F238E27FC236}">
-                <a16:creationId xmlns:a16="http://schemas.microsoft.com/office/drawing/2014/main" id="{9CFED6FC-E390-4579-896C-0B9416C05B33}"/>
+                <a16:creationId xmlns:a16="http://schemas.microsoft.com/office/drawing/2014/main" id="{9C02C40D-478E-434B-A148-45C8456D43EF}"/>
               </a:ext>
             </a:extLst>
           </p:cNvPr>
@@ -18614,7 +18614,7 @@
           <p:cNvPr id="8" name="">
             <a:extLst xmlns:a="http://schemas.openxmlformats.org/drawingml/2006/main">
               <a:ext uri="{FF2B5EF4-FFF2-40B4-BE49-F238E27FC236}">
-                <a16:creationId xmlns:a16="http://schemas.microsoft.com/office/drawing/2014/main" id="{F1DD2A1A-9540-4BBF-BD2D-365921775F5D}"/>
+                <a16:creationId xmlns:a16="http://schemas.microsoft.com/office/drawing/2014/main" id="{4959E48F-38C4-47C3-9E06-5E4E8662A82A}"/>
               </a:ext>
             </a:extLst>
           </p:cNvPr>
@@ -18649,7 +18649,7 @@
           <p:cNvPr id="9" name="">
             <a:extLst xmlns:a="http://schemas.openxmlformats.org/drawingml/2006/main">
               <a:ext uri="{FF2B5EF4-FFF2-40B4-BE49-F238E27FC236}">
-                <a16:creationId xmlns:a16="http://schemas.microsoft.com/office/drawing/2014/main" id="{87FC1884-7293-4C75-9858-F24F69570A8E}"/>
+                <a16:creationId xmlns:a16="http://schemas.microsoft.com/office/drawing/2014/main" id="{77959C9A-5C8C-402B-AAEF-83CC47A71C17}"/>
               </a:ext>
             </a:extLst>
           </p:cNvPr>
@@ -18680,7 +18680,7 @@
           <p:cNvPr id="10" name="">
             <a:extLst xmlns:a="http://schemas.openxmlformats.org/drawingml/2006/main">
               <a:ext uri="{FF2B5EF4-FFF2-40B4-BE49-F238E27FC236}">
-                <a16:creationId xmlns:a16="http://schemas.microsoft.com/office/drawing/2014/main" id="{3CF4426F-A3A1-4315-B251-EE50BE48EB8C}"/>
+                <a16:creationId xmlns:a16="http://schemas.microsoft.com/office/drawing/2014/main" id="{F3CDBFB6-E613-4D31-B588-4C196510896D}"/>
               </a:ext>
             </a:extLst>
           </p:cNvPr>
@@ -18725,7 +18725,7 @@
           <p:cNvPr id="11" name="">
             <a:extLst xmlns:a="http://schemas.openxmlformats.org/drawingml/2006/main">
               <a:ext uri="{FF2B5EF4-FFF2-40B4-BE49-F238E27FC236}">
-                <a16:creationId xmlns:a16="http://schemas.microsoft.com/office/drawing/2014/main" id="{CABCC475-61D9-4EAF-BF8A-25F5695DFBBA}"/>
+                <a16:creationId xmlns:a16="http://schemas.microsoft.com/office/drawing/2014/main" id="{C14662F5-1B03-4837-832F-1D26A02F4656}"/>
               </a:ext>
             </a:extLst>
           </p:cNvPr>
@@ -18770,7 +18770,7 @@
           <p:cNvPr id="12" name="">
             <a:extLst xmlns:a="http://schemas.openxmlformats.org/drawingml/2006/main">
               <a:ext uri="{FF2B5EF4-FFF2-40B4-BE49-F238E27FC236}">
-                <a16:creationId xmlns:a16="http://schemas.microsoft.com/office/drawing/2014/main" id="{89449A2D-2143-40B9-9FAB-459AE10E334A}"/>
+                <a16:creationId xmlns:a16="http://schemas.microsoft.com/office/drawing/2014/main" id="{D59B05A6-C776-42F9-A1CD-20AF85ECF5FD}"/>
               </a:ext>
             </a:extLst>
           </p:cNvPr>
@@ -18805,7 +18805,7 @@
           <p:cNvPr id="13" name="">
             <a:extLst xmlns:a="http://schemas.openxmlformats.org/drawingml/2006/main">
               <a:ext uri="{FF2B5EF4-FFF2-40B4-BE49-F238E27FC236}">
-                <a16:creationId xmlns:a16="http://schemas.microsoft.com/office/drawing/2014/main" id="{43D56ED6-503E-4B7A-9BBB-8B9570402ACC}"/>
+                <a16:creationId xmlns:a16="http://schemas.microsoft.com/office/drawing/2014/main" id="{2036C826-7E2E-4EAA-8829-5258FA1C450D}"/>
               </a:ext>
             </a:extLst>
           </p:cNvPr>
@@ -18836,7 +18836,7 @@
           <p:cNvPr id="14" name="">
             <a:extLst xmlns:a="http://schemas.openxmlformats.org/drawingml/2006/main">
               <a:ext uri="{FF2B5EF4-FFF2-40B4-BE49-F238E27FC236}">
-                <a16:creationId xmlns:a16="http://schemas.microsoft.com/office/drawing/2014/main" id="{4FB60032-41AB-4A11-A86C-AA42F745524A}"/>
+                <a16:creationId xmlns:a16="http://schemas.microsoft.com/office/drawing/2014/main" id="{57BA8693-35A0-4ECE-B7BC-09D92B3EDFBE}"/>
               </a:ext>
             </a:extLst>
           </p:cNvPr>
@@ -18881,7 +18881,7 @@
           <p:cNvPr id="15" name="">
             <a:extLst xmlns:a="http://schemas.openxmlformats.org/drawingml/2006/main">
               <a:ext uri="{FF2B5EF4-FFF2-40B4-BE49-F238E27FC236}">
-                <a16:creationId xmlns:a16="http://schemas.microsoft.com/office/drawing/2014/main" id="{6C816612-0D88-4770-B23F-E67673E85A53}"/>
+                <a16:creationId xmlns:a16="http://schemas.microsoft.com/office/drawing/2014/main" id="{EA72A5D8-2A46-4FAF-A1AC-79577A19ACA4}"/>
               </a:ext>
             </a:extLst>
           </p:cNvPr>
@@ -18926,7 +18926,7 @@
           <p:cNvPr id="16" name="">
             <a:extLst xmlns:a="http://schemas.openxmlformats.org/drawingml/2006/main">
               <a:ext uri="{FF2B5EF4-FFF2-40B4-BE49-F238E27FC236}">
-                <a16:creationId xmlns:a16="http://schemas.microsoft.com/office/drawing/2014/main" id="{FA3EC858-F648-4093-9465-3109CF1A6534}"/>
+                <a16:creationId xmlns:a16="http://schemas.microsoft.com/office/drawing/2014/main" id="{2A5BE16A-52AC-492F-9540-364EC0EBD34A}"/>
               </a:ext>
             </a:extLst>
           </p:cNvPr>
@@ -18961,7 +18961,7 @@
           <p:cNvPr id="17" name="">
             <a:extLst xmlns:a="http://schemas.openxmlformats.org/drawingml/2006/main">
               <a:ext uri="{FF2B5EF4-FFF2-40B4-BE49-F238E27FC236}">
-                <a16:creationId xmlns:a16="http://schemas.microsoft.com/office/drawing/2014/main" id="{7024C7D0-1A3E-4F00-B5AD-43D67E37CA98}"/>
+                <a16:creationId xmlns:a16="http://schemas.microsoft.com/office/drawing/2014/main" id="{9704B068-DA92-4B16-9529-7EA372A7944B}"/>
               </a:ext>
             </a:extLst>
           </p:cNvPr>
@@ -18992,7 +18992,7 @@
           <p:cNvPr id="18" name="">
             <a:extLst xmlns:a="http://schemas.openxmlformats.org/drawingml/2006/main">
               <a:ext uri="{FF2B5EF4-FFF2-40B4-BE49-F238E27FC236}">
-                <a16:creationId xmlns:a16="http://schemas.microsoft.com/office/drawing/2014/main" id="{A3AF1A00-3A33-42BB-93D2-CB6B9BEE2F5D}"/>
+                <a16:creationId xmlns:a16="http://schemas.microsoft.com/office/drawing/2014/main" id="{7A747106-7867-4733-A819-026126FBC4F7}"/>
               </a:ext>
             </a:extLst>
           </p:cNvPr>
@@ -19037,7 +19037,7 @@
           <p:cNvPr id="19" name="">
             <a:extLst xmlns:a="http://schemas.openxmlformats.org/drawingml/2006/main">
               <a:ext uri="{FF2B5EF4-FFF2-40B4-BE49-F238E27FC236}">
-                <a16:creationId xmlns:a16="http://schemas.microsoft.com/office/drawing/2014/main" id="{B7F1A8A9-F983-42C4-9454-4571DB9CA09A}"/>
+                <a16:creationId xmlns:a16="http://schemas.microsoft.com/office/drawing/2014/main" id="{DA018ADD-A7E7-4FE8-9071-34F7ADEDFD5C}"/>
               </a:ext>
             </a:extLst>
           </p:cNvPr>
@@ -19082,7 +19082,7 @@
           <p:cNvPr id="20" name="">
             <a:extLst xmlns:a="http://schemas.openxmlformats.org/drawingml/2006/main">
               <a:ext uri="{FF2B5EF4-FFF2-40B4-BE49-F238E27FC236}">
-                <a16:creationId xmlns:a16="http://schemas.microsoft.com/office/drawing/2014/main" id="{69346E85-91C4-4531-85C7-476D6075CA4D}"/>
+                <a16:creationId xmlns:a16="http://schemas.microsoft.com/office/drawing/2014/main" id="{528A374B-78F6-4BBB-BE1B-C7387600B52D}"/>
               </a:ext>
             </a:extLst>
           </p:cNvPr>
@@ -19113,7 +19113,7 @@
           <p:cNvPr id="21" name="">
             <a:extLst xmlns:a="http://schemas.openxmlformats.org/drawingml/2006/main">
               <a:ext uri="{FF2B5EF4-FFF2-40B4-BE49-F238E27FC236}">
-                <a16:creationId xmlns:a16="http://schemas.microsoft.com/office/drawing/2014/main" id="{D6D7CA4A-A00F-4D99-BAEE-D8B9CFA3796E}"/>
+                <a16:creationId xmlns:a16="http://schemas.microsoft.com/office/drawing/2014/main" id="{C870DC4B-7AAA-403E-9F75-0039EC81F989}"/>
               </a:ext>
             </a:extLst>
           </p:cNvPr>
@@ -19144,7 +19144,7 @@
           <p:cNvPr id="22" name="">
             <a:extLst xmlns:a="http://schemas.openxmlformats.org/drawingml/2006/main">
               <a:ext uri="{FF2B5EF4-FFF2-40B4-BE49-F238E27FC236}">
-                <a16:creationId xmlns:a16="http://schemas.microsoft.com/office/drawing/2014/main" id="{509E3262-8EDF-452F-AE6E-51CB5FAD9B32}"/>
+                <a16:creationId xmlns:a16="http://schemas.microsoft.com/office/drawing/2014/main" id="{3C448654-80B7-4195-86AB-3FF7AE26E926}"/>
               </a:ext>
             </a:extLst>
           </p:cNvPr>
@@ -19189,7 +19189,7 @@
           <p:cNvPr id="23" name="">
             <a:extLst xmlns:a="http://schemas.openxmlformats.org/drawingml/2006/main">
               <a:ext uri="{FF2B5EF4-FFF2-40B4-BE49-F238E27FC236}">
-                <a16:creationId xmlns:a16="http://schemas.microsoft.com/office/drawing/2014/main" id="{A3D864D7-B76D-4CDC-9353-327607E522D9}"/>
+                <a16:creationId xmlns:a16="http://schemas.microsoft.com/office/drawing/2014/main" id="{20768397-E19C-4183-BA70-3E3185526677}"/>
               </a:ext>
             </a:extLst>
           </p:cNvPr>
@@ -19232,7 +19232,7 @@
     </p:spTree>
     <p:extLst>
       <p:ext uri="{BB962C8B-B14F-4D97-AF65-F5344CB8AC3E}">
-        <p14:creationId xmlns:p14="http://schemas.microsoft.com/office/powerpoint/2010/main" val="1417504250"/>
+        <p14:creationId xmlns:p14="http://schemas.microsoft.com/office/powerpoint/2010/main" val="1737447271"/>
       </p:ext>
     </p:extLst>
   </p:cSld>
@@ -19256,7 +19256,7 @@
           <p:cNvPr id="31" name="">
             <a:extLst xmlns:a="http://schemas.openxmlformats.org/drawingml/2006/main">
               <a:ext uri="{FF2B5EF4-FFF2-40B4-BE49-F238E27FC236}">
-                <a16:creationId xmlns:a16="http://schemas.microsoft.com/office/drawing/2014/main" id="{1A144660-83BC-4937-9277-B49A1FFE7613}"/>
+                <a16:creationId xmlns:a16="http://schemas.microsoft.com/office/drawing/2014/main" id="{AB1DE63C-EC8F-4529-AE1C-A149A730AED1}"/>
               </a:ext>
             </a:extLst>
           </p:cNvPr>
@@ -19287,7 +19287,7 @@
           <p:cNvPr id="2" name="">
             <a:extLst xmlns:a="http://schemas.openxmlformats.org/drawingml/2006/main">
               <a:ext uri="{FF2B5EF4-FFF2-40B4-BE49-F238E27FC236}">
-                <a16:creationId xmlns:a16="http://schemas.microsoft.com/office/drawing/2014/main" id="{4875F417-2580-456D-929F-35994841182E}"/>
+                <a16:creationId xmlns:a16="http://schemas.microsoft.com/office/drawing/2014/main" id="{FE0FFA1A-14BE-423E-8F75-4673557AF611}"/>
               </a:ext>
             </a:extLst>
           </p:cNvPr>
@@ -19332,7 +19332,7 @@
           <p:cNvPr id="3" name="">
             <a:extLst xmlns:a="http://schemas.openxmlformats.org/drawingml/2006/main">
               <a:ext uri="{FF2B5EF4-FFF2-40B4-BE49-F238E27FC236}">
-                <a16:creationId xmlns:a16="http://schemas.microsoft.com/office/drawing/2014/main" id="{03665B49-2DFA-43C3-9F49-C0BC8F8F7D46}"/>
+                <a16:creationId xmlns:a16="http://schemas.microsoft.com/office/drawing/2014/main" id="{A035E130-5574-4D84-8410-D9CAA2A4FE19}"/>
               </a:ext>
             </a:extLst>
           </p:cNvPr>
@@ -19377,7 +19377,7 @@
           <p:cNvPr id="4" name="">
             <a:extLst xmlns:a="http://schemas.openxmlformats.org/drawingml/2006/main">
               <a:ext uri="{FF2B5EF4-FFF2-40B4-BE49-F238E27FC236}">
-                <a16:creationId xmlns:a16="http://schemas.microsoft.com/office/drawing/2014/main" id="{9E47584D-8601-4B32-B00C-513DAD785E32}"/>
+                <a16:creationId xmlns:a16="http://schemas.microsoft.com/office/drawing/2014/main" id="{9D43C9DC-F3E7-4E7F-AD29-599775746D8A}"/>
               </a:ext>
             </a:extLst>
           </p:cNvPr>
@@ -19422,7 +19422,7 @@
           <p:cNvPr id="5" name="">
             <a:extLst xmlns:a="http://schemas.openxmlformats.org/drawingml/2006/main">
               <a:ext uri="{FF2B5EF4-FFF2-40B4-BE49-F238E27FC236}">
-                <a16:creationId xmlns:a16="http://schemas.microsoft.com/office/drawing/2014/main" id="{8C5EDA3E-292E-4E60-90B0-AF998ADC07E8}"/>
+                <a16:creationId xmlns:a16="http://schemas.microsoft.com/office/drawing/2014/main" id="{3C28F6F6-6225-464E-85A0-B0B86D1505F0}"/>
               </a:ext>
             </a:extLst>
           </p:cNvPr>
@@ -19453,7 +19453,7 @@
           <p:cNvPr id="6" name="">
             <a:extLst xmlns:a="http://schemas.openxmlformats.org/drawingml/2006/main">
               <a:ext uri="{FF2B5EF4-FFF2-40B4-BE49-F238E27FC236}">
-                <a16:creationId xmlns:a16="http://schemas.microsoft.com/office/drawing/2014/main" id="{AAFF9B50-296C-46E2-947E-A6D5C6AA6CBC}"/>
+                <a16:creationId xmlns:a16="http://schemas.microsoft.com/office/drawing/2014/main" id="{7EF0CAA2-8B8D-4DD5-95D1-DF51CD4CD620}"/>
               </a:ext>
             </a:extLst>
           </p:cNvPr>
@@ -19484,7 +19484,7 @@
           <p:cNvPr id="7" name="">
             <a:extLst xmlns:a="http://schemas.openxmlformats.org/drawingml/2006/main">
               <a:ext uri="{FF2B5EF4-FFF2-40B4-BE49-F238E27FC236}">
-                <a16:creationId xmlns:a16="http://schemas.microsoft.com/office/drawing/2014/main" id="{AE5DDAE4-ED1C-4638-9286-BADE3FE13868}"/>
+                <a16:creationId xmlns:a16="http://schemas.microsoft.com/office/drawing/2014/main" id="{51841D87-4E29-4903-BD72-FBE0F041C3B9}"/>
               </a:ext>
             </a:extLst>
           </p:cNvPr>
@@ -19529,7 +19529,7 @@
           <p:cNvPr id="8" name="">
             <a:extLst xmlns:a="http://schemas.openxmlformats.org/drawingml/2006/main">
               <a:ext uri="{FF2B5EF4-FFF2-40B4-BE49-F238E27FC236}">
-                <a16:creationId xmlns:a16="http://schemas.microsoft.com/office/drawing/2014/main" id="{16140968-3981-4EB6-9637-AF2CFDE5646B}"/>
+                <a16:creationId xmlns:a16="http://schemas.microsoft.com/office/drawing/2014/main" id="{04088E4D-B6DB-41F0-9F80-E0B4F6958884}"/>
               </a:ext>
             </a:extLst>
           </p:cNvPr>
@@ -19574,7 +19574,7 @@
           <p:cNvPr id="9" name="">
             <a:extLst xmlns:a="http://schemas.openxmlformats.org/drawingml/2006/main">
               <a:ext uri="{FF2B5EF4-FFF2-40B4-BE49-F238E27FC236}">
-                <a16:creationId xmlns:a16="http://schemas.microsoft.com/office/drawing/2014/main" id="{6EBE9AD2-6257-42DD-9D68-FF39618C02F7}"/>
+                <a16:creationId xmlns:a16="http://schemas.microsoft.com/office/drawing/2014/main" id="{A43B9A05-4425-47C8-AAB2-8DC49A9CC9C0}"/>
               </a:ext>
             </a:extLst>
           </p:cNvPr>
@@ -19605,7 +19605,7 @@
           <p:cNvPr id="10" name="">
             <a:extLst xmlns:a="http://schemas.openxmlformats.org/drawingml/2006/main">
               <a:ext uri="{FF2B5EF4-FFF2-40B4-BE49-F238E27FC236}">
-                <a16:creationId xmlns:a16="http://schemas.microsoft.com/office/drawing/2014/main" id="{C4A89D2B-49D5-4E6D-9092-1A68E568F097}"/>
+                <a16:creationId xmlns:a16="http://schemas.microsoft.com/office/drawing/2014/main" id="{1005D35A-F506-4768-A953-6B03D0ABA58A}"/>
               </a:ext>
             </a:extLst>
           </p:cNvPr>
@@ -19650,7 +19650,7 @@
           <p:cNvPr id="11" name="">
             <a:extLst xmlns:a="http://schemas.openxmlformats.org/drawingml/2006/main">
               <a:ext uri="{FF2B5EF4-FFF2-40B4-BE49-F238E27FC236}">
-                <a16:creationId xmlns:a16="http://schemas.microsoft.com/office/drawing/2014/main" id="{E5761D33-137D-4360-A781-9165C3FD8946}"/>
+                <a16:creationId xmlns:a16="http://schemas.microsoft.com/office/drawing/2014/main" id="{68A93C7A-E7A3-4F43-85F9-ED438C780788}"/>
               </a:ext>
             </a:extLst>
           </p:cNvPr>
@@ -19695,7 +19695,7 @@
           <p:cNvPr id="12" name="">
             <a:extLst xmlns:a="http://schemas.openxmlformats.org/drawingml/2006/main">
               <a:ext uri="{FF2B5EF4-FFF2-40B4-BE49-F238E27FC236}">
-                <a16:creationId xmlns:a16="http://schemas.microsoft.com/office/drawing/2014/main" id="{00AFA053-742B-411C-92A4-7E04A818C11E}"/>
+                <a16:creationId xmlns:a16="http://schemas.microsoft.com/office/drawing/2014/main" id="{8269A310-426E-470A-8841-0FEB7D45D7B7}"/>
               </a:ext>
             </a:extLst>
           </p:cNvPr>
@@ -19740,7 +19740,7 @@
           <p:cNvPr id="13" name="">
             <a:extLst xmlns:a="http://schemas.openxmlformats.org/drawingml/2006/main">
               <a:ext uri="{FF2B5EF4-FFF2-40B4-BE49-F238E27FC236}">
-                <a16:creationId xmlns:a16="http://schemas.microsoft.com/office/drawing/2014/main" id="{C68C9E36-942D-499A-B843-519FB680ACC7}"/>
+                <a16:creationId xmlns:a16="http://schemas.microsoft.com/office/drawing/2014/main" id="{BAE04534-7F92-4EE4-922B-7A0BF7F7FD2D}"/>
               </a:ext>
             </a:extLst>
           </p:cNvPr>
@@ -19785,7 +19785,7 @@
           <p:cNvPr id="14" name="">
             <a:extLst xmlns:a="http://schemas.openxmlformats.org/drawingml/2006/main">
               <a:ext uri="{FF2B5EF4-FFF2-40B4-BE49-F238E27FC236}">
-                <a16:creationId xmlns:a16="http://schemas.microsoft.com/office/drawing/2014/main" id="{787A3042-BFA3-464C-A9C3-D2DB9BF857E0}"/>
+                <a16:creationId xmlns:a16="http://schemas.microsoft.com/office/drawing/2014/main" id="{CBB59C5A-1F00-4D01-8E4B-AE708E86C8C8}"/>
               </a:ext>
             </a:extLst>
           </p:cNvPr>
@@ -19820,7 +19820,7 @@
           <p:cNvPr id="15" name="">
             <a:extLst xmlns:a="http://schemas.openxmlformats.org/drawingml/2006/main">
               <a:ext uri="{FF2B5EF4-FFF2-40B4-BE49-F238E27FC236}">
-                <a16:creationId xmlns:a16="http://schemas.microsoft.com/office/drawing/2014/main" id="{68ABE4C4-D145-4A26-BDCF-A6396FB2BAE6}"/>
+                <a16:creationId xmlns:a16="http://schemas.microsoft.com/office/drawing/2014/main" id="{CDA3CBC0-9096-495B-A397-BF1CEE46CBC6}"/>
               </a:ext>
             </a:extLst>
           </p:cNvPr>
@@ -19865,7 +19865,7 @@
           <p:cNvPr id="16" name="">
             <a:extLst xmlns:a="http://schemas.openxmlformats.org/drawingml/2006/main">
               <a:ext uri="{FF2B5EF4-FFF2-40B4-BE49-F238E27FC236}">
-                <a16:creationId xmlns:a16="http://schemas.microsoft.com/office/drawing/2014/main" id="{741F613A-490D-4C04-838B-43A0AB24254E}"/>
+                <a16:creationId xmlns:a16="http://schemas.microsoft.com/office/drawing/2014/main" id="{57BA4F09-D000-43E5-B6D6-BF36FA201248}"/>
               </a:ext>
             </a:extLst>
           </p:cNvPr>
@@ -19910,7 +19910,7 @@
           <p:cNvPr id="17" name="">
             <a:extLst xmlns:a="http://schemas.openxmlformats.org/drawingml/2006/main">
               <a:ext uri="{FF2B5EF4-FFF2-40B4-BE49-F238E27FC236}">
-                <a16:creationId xmlns:a16="http://schemas.microsoft.com/office/drawing/2014/main" id="{1DE7B106-BFC3-47E6-B467-3A217CC50B9A}"/>
+                <a16:creationId xmlns:a16="http://schemas.microsoft.com/office/drawing/2014/main" id="{B9D46C05-5D98-478C-AED2-8A2B416BCD6C}"/>
               </a:ext>
             </a:extLst>
           </p:cNvPr>
@@ -19955,7 +19955,7 @@
           <p:cNvPr id="18" name="">
             <a:extLst xmlns:a="http://schemas.openxmlformats.org/drawingml/2006/main">
               <a:ext uri="{FF2B5EF4-FFF2-40B4-BE49-F238E27FC236}">
-                <a16:creationId xmlns:a16="http://schemas.microsoft.com/office/drawing/2014/main" id="{9CDAA9D1-7FE7-46D4-81B0-FE07A65C17DF}"/>
+                <a16:creationId xmlns:a16="http://schemas.microsoft.com/office/drawing/2014/main" id="{6E200D63-AFFF-47C1-AFE1-B80A7CF94664}"/>
               </a:ext>
             </a:extLst>
           </p:cNvPr>
@@ -19990,7 +19990,7 @@
           <p:cNvPr id="19" name="">
             <a:extLst xmlns:a="http://schemas.openxmlformats.org/drawingml/2006/main">
               <a:ext uri="{FF2B5EF4-FFF2-40B4-BE49-F238E27FC236}">
-                <a16:creationId xmlns:a16="http://schemas.microsoft.com/office/drawing/2014/main" id="{B56A082A-357A-45BB-8480-6FD58A2B8594}"/>
+                <a16:creationId xmlns:a16="http://schemas.microsoft.com/office/drawing/2014/main" id="{27DB741D-DA28-43CC-93A0-0A5657C2683A}"/>
               </a:ext>
             </a:extLst>
           </p:cNvPr>
@@ -20035,7 +20035,7 @@
           <p:cNvPr id="20" name="">
             <a:extLst xmlns:a="http://schemas.openxmlformats.org/drawingml/2006/main">
               <a:ext uri="{FF2B5EF4-FFF2-40B4-BE49-F238E27FC236}">
-                <a16:creationId xmlns:a16="http://schemas.microsoft.com/office/drawing/2014/main" id="{AA46B24A-7603-4044-850C-F6B66EAF685E}"/>
+                <a16:creationId xmlns:a16="http://schemas.microsoft.com/office/drawing/2014/main" id="{57C961F9-CFB1-4162-AE69-B66BD2E9075E}"/>
               </a:ext>
             </a:extLst>
           </p:cNvPr>
@@ -20080,7 +20080,7 @@
           <p:cNvPr id="21" name="">
             <a:extLst xmlns:a="http://schemas.openxmlformats.org/drawingml/2006/main">
               <a:ext uri="{FF2B5EF4-FFF2-40B4-BE49-F238E27FC236}">
-                <a16:creationId xmlns:a16="http://schemas.microsoft.com/office/drawing/2014/main" id="{262BC628-DBEC-41CC-8347-93700612EE41}"/>
+                <a16:creationId xmlns:a16="http://schemas.microsoft.com/office/drawing/2014/main" id="{BCAEB1BC-B4D8-4A64-81E3-BC0F73CE2AC3}"/>
               </a:ext>
             </a:extLst>
           </p:cNvPr>
@@ -20125,7 +20125,7 @@
           <p:cNvPr id="22" name="">
             <a:extLst xmlns:a="http://schemas.openxmlformats.org/drawingml/2006/main">
               <a:ext uri="{FF2B5EF4-FFF2-40B4-BE49-F238E27FC236}">
-                <a16:creationId xmlns:a16="http://schemas.microsoft.com/office/drawing/2014/main" id="{5308D491-6BD6-45EA-9566-04CC9BFD88B9}"/>
+                <a16:creationId xmlns:a16="http://schemas.microsoft.com/office/drawing/2014/main" id="{7F208640-CF1B-427D-95D0-4FA0DE38E98A}"/>
               </a:ext>
             </a:extLst>
           </p:cNvPr>
@@ -20160,7 +20160,7 @@
           <p:cNvPr id="23" name="">
             <a:extLst xmlns:a="http://schemas.openxmlformats.org/drawingml/2006/main">
               <a:ext uri="{FF2B5EF4-FFF2-40B4-BE49-F238E27FC236}">
-                <a16:creationId xmlns:a16="http://schemas.microsoft.com/office/drawing/2014/main" id="{5DAF2100-D164-4D78-AF2C-91C410EFD0C2}"/>
+                <a16:creationId xmlns:a16="http://schemas.microsoft.com/office/drawing/2014/main" id="{F98BB739-5A32-4436-9871-34F0B102A568}"/>
               </a:ext>
             </a:extLst>
           </p:cNvPr>
@@ -20205,7 +20205,7 @@
           <p:cNvPr id="24" name="">
             <a:extLst xmlns:a="http://schemas.openxmlformats.org/drawingml/2006/main">
               <a:ext uri="{FF2B5EF4-FFF2-40B4-BE49-F238E27FC236}">
-                <a16:creationId xmlns:a16="http://schemas.microsoft.com/office/drawing/2014/main" id="{5B2396C1-5C58-4C52-8629-7986F2670EF9}"/>
+                <a16:creationId xmlns:a16="http://schemas.microsoft.com/office/drawing/2014/main" id="{4B227D2E-D166-40B2-96E5-FED8F23991B5}"/>
               </a:ext>
             </a:extLst>
           </p:cNvPr>
@@ -20250,7 +20250,7 @@
           <p:cNvPr id="25" name="">
             <a:extLst xmlns:a="http://schemas.openxmlformats.org/drawingml/2006/main">
               <a:ext uri="{FF2B5EF4-FFF2-40B4-BE49-F238E27FC236}">
-                <a16:creationId xmlns:a16="http://schemas.microsoft.com/office/drawing/2014/main" id="{D95F1329-6286-4619-B06A-BD502D1F08B8}"/>
+                <a16:creationId xmlns:a16="http://schemas.microsoft.com/office/drawing/2014/main" id="{C3541DEF-C25C-4CE9-A506-BB61430FCCAD}"/>
               </a:ext>
             </a:extLst>
           </p:cNvPr>
@@ -20295,7 +20295,7 @@
           <p:cNvPr id="26" name="">
             <a:extLst xmlns:a="http://schemas.openxmlformats.org/drawingml/2006/main">
               <a:ext uri="{FF2B5EF4-FFF2-40B4-BE49-F238E27FC236}">
-                <a16:creationId xmlns:a16="http://schemas.microsoft.com/office/drawing/2014/main" id="{60C48BED-22D6-4882-BE1D-8FEE32C4C875}"/>
+                <a16:creationId xmlns:a16="http://schemas.microsoft.com/office/drawing/2014/main" id="{3947AD43-CF6B-469A-877A-EDD9DF29B467}"/>
               </a:ext>
             </a:extLst>
           </p:cNvPr>
@@ -20330,7 +20330,7 @@
           <p:cNvPr id="27" name="">
             <a:extLst xmlns:a="http://schemas.openxmlformats.org/drawingml/2006/main">
               <a:ext uri="{FF2B5EF4-FFF2-40B4-BE49-F238E27FC236}">
-                <a16:creationId xmlns:a16="http://schemas.microsoft.com/office/drawing/2014/main" id="{F15C6FD3-094D-494E-A4FD-518BF03A87FC}"/>
+                <a16:creationId xmlns:a16="http://schemas.microsoft.com/office/drawing/2014/main" id="{42E3147C-FF0F-4333-AAB9-F49D9105132B}"/>
               </a:ext>
             </a:extLst>
           </p:cNvPr>
@@ -20375,7 +20375,7 @@
           <p:cNvPr id="28" name="">
             <a:extLst xmlns:a="http://schemas.openxmlformats.org/drawingml/2006/main">
               <a:ext uri="{FF2B5EF4-FFF2-40B4-BE49-F238E27FC236}">
-                <a16:creationId xmlns:a16="http://schemas.microsoft.com/office/drawing/2014/main" id="{D21E4A32-D417-4E4D-B38B-5AB70CCD04C4}"/>
+                <a16:creationId xmlns:a16="http://schemas.microsoft.com/office/drawing/2014/main" id="{7839783F-8199-4FC8-80C2-C64E1ED7599D}"/>
               </a:ext>
             </a:extLst>
           </p:cNvPr>
@@ -20420,7 +20420,7 @@
           <p:cNvPr id="29" name="">
             <a:extLst xmlns:a="http://schemas.openxmlformats.org/drawingml/2006/main">
               <a:ext uri="{FF2B5EF4-FFF2-40B4-BE49-F238E27FC236}">
-                <a16:creationId xmlns:a16="http://schemas.microsoft.com/office/drawing/2014/main" id="{1EC03ED1-B10D-4097-80B3-07E06748A2DB}"/>
+                <a16:creationId xmlns:a16="http://schemas.microsoft.com/office/drawing/2014/main" id="{302F5137-E92C-4324-805C-01E5F2F9F77E}"/>
               </a:ext>
             </a:extLst>
           </p:cNvPr>
@@ -20465,7 +20465,7 @@
           <p:cNvPr id="30" name="">
             <a:extLst xmlns:a="http://schemas.openxmlformats.org/drawingml/2006/main">
               <a:ext uri="{FF2B5EF4-FFF2-40B4-BE49-F238E27FC236}">
-                <a16:creationId xmlns:a16="http://schemas.microsoft.com/office/drawing/2014/main" id="{86A11FA8-0751-4668-9DDE-630327DB9EEB}"/>
+                <a16:creationId xmlns:a16="http://schemas.microsoft.com/office/drawing/2014/main" id="{A72F04C2-573E-430C-A7B8-EE9E72DC1C2F}"/>
               </a:ext>
             </a:extLst>
           </p:cNvPr>
@@ -20508,7 +20508,7 @@
     </p:spTree>
     <p:extLst>
       <p:ext uri="{BB962C8B-B14F-4D97-AF65-F5344CB8AC3E}">
-        <p14:creationId xmlns:p14="http://schemas.microsoft.com/office/powerpoint/2010/main" val="1583265416"/>
+        <p14:creationId xmlns:p14="http://schemas.microsoft.com/office/powerpoint/2010/main" val="648492196"/>
       </p:ext>
     </p:extLst>
   </p:cSld>
@@ -20532,7 +20532,7 @@
           <p:cNvPr id="41" name="">
             <a:extLst xmlns:a="http://schemas.openxmlformats.org/drawingml/2006/main">
               <a:ext uri="{FF2B5EF4-FFF2-40B4-BE49-F238E27FC236}">
-                <a16:creationId xmlns:a16="http://schemas.microsoft.com/office/drawing/2014/main" id="{5B4C321F-56B8-488F-A84E-A9B478740AD9}"/>
+                <a16:creationId xmlns:a16="http://schemas.microsoft.com/office/drawing/2014/main" id="{F54F0EE9-D279-49BE-9B04-4C1DDFCF68D6}"/>
               </a:ext>
             </a:extLst>
           </p:cNvPr>
@@ -20563,7 +20563,7 @@
           <p:cNvPr id="2" name="">
             <a:extLst xmlns:a="http://schemas.openxmlformats.org/drawingml/2006/main">
               <a:ext uri="{FF2B5EF4-FFF2-40B4-BE49-F238E27FC236}">
-                <a16:creationId xmlns:a16="http://schemas.microsoft.com/office/drawing/2014/main" id="{259A573E-CBEB-4353-8017-9A66E3E0ACCD}"/>
+                <a16:creationId xmlns:a16="http://schemas.microsoft.com/office/drawing/2014/main" id="{49C76DC5-DA93-4B72-BF34-FE4E574FA6BA}"/>
               </a:ext>
             </a:extLst>
           </p:cNvPr>
@@ -20608,7 +20608,7 @@
           <p:cNvPr id="3" name="">
             <a:extLst xmlns:a="http://schemas.openxmlformats.org/drawingml/2006/main">
               <a:ext uri="{FF2B5EF4-FFF2-40B4-BE49-F238E27FC236}">
-                <a16:creationId xmlns:a16="http://schemas.microsoft.com/office/drawing/2014/main" id="{0FAC1442-48C2-4AD1-8595-DFC8FC2D5422}"/>
+                <a16:creationId xmlns:a16="http://schemas.microsoft.com/office/drawing/2014/main" id="{1CA0CD15-D2DB-4ACA-8703-A4B83A5A15BF}"/>
               </a:ext>
             </a:extLst>
           </p:cNvPr>
@@ -20653,7 +20653,7 @@
           <p:cNvPr id="4" name="">
             <a:extLst xmlns:a="http://schemas.openxmlformats.org/drawingml/2006/main">
               <a:ext uri="{FF2B5EF4-FFF2-40B4-BE49-F238E27FC236}">
-                <a16:creationId xmlns:a16="http://schemas.microsoft.com/office/drawing/2014/main" id="{87DEF846-E040-4BA0-988C-83C07B09DBD2}"/>
+                <a16:creationId xmlns:a16="http://schemas.microsoft.com/office/drawing/2014/main" id="{66CE76E6-DF3F-48D5-AC9F-56BB1EFE0C9F}"/>
               </a:ext>
             </a:extLst>
           </p:cNvPr>
@@ -20698,7 +20698,7 @@
           <p:cNvPr id="5" name="">
             <a:extLst xmlns:a="http://schemas.openxmlformats.org/drawingml/2006/main">
               <a:ext uri="{FF2B5EF4-FFF2-40B4-BE49-F238E27FC236}">
-                <a16:creationId xmlns:a16="http://schemas.microsoft.com/office/drawing/2014/main" id="{0EDCDD42-6A41-4ACF-91A5-FE23EBBBD074}"/>
+                <a16:creationId xmlns:a16="http://schemas.microsoft.com/office/drawing/2014/main" id="{C8C1EC94-57EB-4407-B351-F0F938FCE922}"/>
               </a:ext>
             </a:extLst>
           </p:cNvPr>
@@ -20729,7 +20729,7 @@
           <p:cNvPr id="6" name="">
             <a:extLst xmlns:a="http://schemas.openxmlformats.org/drawingml/2006/main">
               <a:ext uri="{FF2B5EF4-FFF2-40B4-BE49-F238E27FC236}">
-                <a16:creationId xmlns:a16="http://schemas.microsoft.com/office/drawing/2014/main" id="{96A07172-623A-4F0B-9ED7-EBF1874E3CDD}"/>
+                <a16:creationId xmlns:a16="http://schemas.microsoft.com/office/drawing/2014/main" id="{19B5204E-5FC9-4CA2-ADA2-A920383C93A2}"/>
               </a:ext>
             </a:extLst>
           </p:cNvPr>
@@ -20760,7 +20760,7 @@
           <p:cNvPr id="7" name="">
             <a:extLst xmlns:a="http://schemas.openxmlformats.org/drawingml/2006/main">
               <a:ext uri="{FF2B5EF4-FFF2-40B4-BE49-F238E27FC236}">
-                <a16:creationId xmlns:a16="http://schemas.microsoft.com/office/drawing/2014/main" id="{74CFC276-27EB-4DFB-9800-1AF925BC404D}"/>
+                <a16:creationId xmlns:a16="http://schemas.microsoft.com/office/drawing/2014/main" id="{B70FDBA4-C28A-44A0-BCF4-66672A8CB18F}"/>
               </a:ext>
             </a:extLst>
           </p:cNvPr>
@@ -20805,7 +20805,7 @@
           <p:cNvPr id="8" name="">
             <a:extLst xmlns:a="http://schemas.openxmlformats.org/drawingml/2006/main">
               <a:ext uri="{FF2B5EF4-FFF2-40B4-BE49-F238E27FC236}">
-                <a16:creationId xmlns:a16="http://schemas.microsoft.com/office/drawing/2014/main" id="{53B46295-D035-4ED7-A180-0B9B5E70C4A1}"/>
+                <a16:creationId xmlns:a16="http://schemas.microsoft.com/office/drawing/2014/main" id="{180E43D3-8537-48EF-B1EA-8C4AD8BFEF35}"/>
               </a:ext>
             </a:extLst>
           </p:cNvPr>
@@ -20850,7 +20850,7 @@
           <p:cNvPr id="9" name="">
             <a:extLst xmlns:a="http://schemas.openxmlformats.org/drawingml/2006/main">
               <a:ext uri="{FF2B5EF4-FFF2-40B4-BE49-F238E27FC236}">
-                <a16:creationId xmlns:a16="http://schemas.microsoft.com/office/drawing/2014/main" id="{69EB3EB9-2131-4D5B-92A9-112B49E3B683}"/>
+                <a16:creationId xmlns:a16="http://schemas.microsoft.com/office/drawing/2014/main" id="{55E425F7-34DB-4C16-8170-42C9D52AB39C}"/>
               </a:ext>
             </a:extLst>
           </p:cNvPr>
@@ -20883,7 +20883,7 @@
           <p:cNvPr id="10" name="">
             <a:extLst xmlns:a="http://schemas.openxmlformats.org/drawingml/2006/main">
               <a:ext uri="{FF2B5EF4-FFF2-40B4-BE49-F238E27FC236}">
-                <a16:creationId xmlns:a16="http://schemas.microsoft.com/office/drawing/2014/main" id="{5BB5FACD-0C33-461E-B597-F4A2F0F73D3C}"/>
+                <a16:creationId xmlns:a16="http://schemas.microsoft.com/office/drawing/2014/main" id="{EB9FF04B-5183-4EBC-9C2F-83153BDF3A5B}"/>
               </a:ext>
             </a:extLst>
           </p:cNvPr>
@@ -20914,7 +20914,7 @@
           <p:cNvPr id="11" name="">
             <a:extLst xmlns:a="http://schemas.openxmlformats.org/drawingml/2006/main">
               <a:ext uri="{FF2B5EF4-FFF2-40B4-BE49-F238E27FC236}">
-                <a16:creationId xmlns:a16="http://schemas.microsoft.com/office/drawing/2014/main" id="{C4CDCC05-6D86-4467-BF6C-22982E661736}"/>
+                <a16:creationId xmlns:a16="http://schemas.microsoft.com/office/drawing/2014/main" id="{58F307CB-2411-4B29-8E49-F958F7B2546C}"/>
               </a:ext>
             </a:extLst>
           </p:cNvPr>
@@ -20959,7 +20959,7 @@
           <p:cNvPr id="12" name="">
             <a:extLst xmlns:a="http://schemas.openxmlformats.org/drawingml/2006/main">
               <a:ext uri="{FF2B5EF4-FFF2-40B4-BE49-F238E27FC236}">
-                <a16:creationId xmlns:a16="http://schemas.microsoft.com/office/drawing/2014/main" id="{ABB421F8-0C7F-409D-A765-242D998B52B8}"/>
+                <a16:creationId xmlns:a16="http://schemas.microsoft.com/office/drawing/2014/main" id="{54EC33A5-1083-4ADC-A756-1E8CA39743CC}"/>
               </a:ext>
             </a:extLst>
           </p:cNvPr>
@@ -21004,7 +21004,7 @@
           <p:cNvPr id="13" name="">
             <a:extLst xmlns:a="http://schemas.openxmlformats.org/drawingml/2006/main">
               <a:ext uri="{FF2B5EF4-FFF2-40B4-BE49-F238E27FC236}">
-                <a16:creationId xmlns:a16="http://schemas.microsoft.com/office/drawing/2014/main" id="{2EFE65F9-57FD-4E99-87EF-0AD30ED490AF}"/>
+                <a16:creationId xmlns:a16="http://schemas.microsoft.com/office/drawing/2014/main" id="{AB2E22C8-8DB6-4211-AE4B-16DAEA871598}"/>
               </a:ext>
             </a:extLst>
           </p:cNvPr>
@@ -21037,7 +21037,7 @@
           <p:cNvPr id="14" name="">
             <a:extLst xmlns:a="http://schemas.openxmlformats.org/drawingml/2006/main">
               <a:ext uri="{FF2B5EF4-FFF2-40B4-BE49-F238E27FC236}">
-                <a16:creationId xmlns:a16="http://schemas.microsoft.com/office/drawing/2014/main" id="{B84D7E05-0556-44FF-B39F-CF93130C04EA}"/>
+                <a16:creationId xmlns:a16="http://schemas.microsoft.com/office/drawing/2014/main" id="{C5D7C19B-A5C5-4FAA-B7FC-2A7425A8FB9B}"/>
               </a:ext>
             </a:extLst>
           </p:cNvPr>
@@ -21070,7 +21070,7 @@
           <p:cNvPr id="15" name="">
             <a:extLst xmlns:a="http://schemas.openxmlformats.org/drawingml/2006/main">
               <a:ext uri="{FF2B5EF4-FFF2-40B4-BE49-F238E27FC236}">
-                <a16:creationId xmlns:a16="http://schemas.microsoft.com/office/drawing/2014/main" id="{DC5A79C5-0237-47A8-A36E-60D5FD543A26}"/>
+                <a16:creationId xmlns:a16="http://schemas.microsoft.com/office/drawing/2014/main" id="{70EB66BD-FBFB-43A5-AD7C-92EDFA5FC867}"/>
               </a:ext>
             </a:extLst>
           </p:cNvPr>
@@ -21101,7 +21101,7 @@
           <p:cNvPr id="16" name="">
             <a:extLst xmlns:a="http://schemas.openxmlformats.org/drawingml/2006/main">
               <a:ext uri="{FF2B5EF4-FFF2-40B4-BE49-F238E27FC236}">
-                <a16:creationId xmlns:a16="http://schemas.microsoft.com/office/drawing/2014/main" id="{ED903AE8-3D1B-4EC2-B950-4D59B47999F1}"/>
+                <a16:creationId xmlns:a16="http://schemas.microsoft.com/office/drawing/2014/main" id="{49F06C69-6642-4B32-B431-3A7367F79547}"/>
               </a:ext>
             </a:extLst>
           </p:cNvPr>
@@ -21146,7 +21146,7 @@
           <p:cNvPr id="17" name="">
             <a:extLst xmlns:a="http://schemas.openxmlformats.org/drawingml/2006/main">
               <a:ext uri="{FF2B5EF4-FFF2-40B4-BE49-F238E27FC236}">
-                <a16:creationId xmlns:a16="http://schemas.microsoft.com/office/drawing/2014/main" id="{84DC8DB8-EFB6-44B5-8AE6-B3F2459B0C7D}"/>
+                <a16:creationId xmlns:a16="http://schemas.microsoft.com/office/drawing/2014/main" id="{37C20A60-64FA-42B9-B566-B99CB386F6E7}"/>
               </a:ext>
             </a:extLst>
           </p:cNvPr>
@@ -21191,7 +21191,7 @@
           <p:cNvPr id="18" name="">
             <a:extLst xmlns:a="http://schemas.openxmlformats.org/drawingml/2006/main">
               <a:ext uri="{FF2B5EF4-FFF2-40B4-BE49-F238E27FC236}">
-                <a16:creationId xmlns:a16="http://schemas.microsoft.com/office/drawing/2014/main" id="{678D57D2-94EA-43DD-9C56-690F71611271}"/>
+                <a16:creationId xmlns:a16="http://schemas.microsoft.com/office/drawing/2014/main" id="{B7940939-CF9C-4FAB-A15C-2F514596C178}"/>
               </a:ext>
             </a:extLst>
           </p:cNvPr>
@@ -21224,7 +21224,7 @@
           <p:cNvPr id="19" name="">
             <a:extLst xmlns:a="http://schemas.openxmlformats.org/drawingml/2006/main">
               <a:ext uri="{FF2B5EF4-FFF2-40B4-BE49-F238E27FC236}">
-                <a16:creationId xmlns:a16="http://schemas.microsoft.com/office/drawing/2014/main" id="{746DA0C0-4A54-4282-929B-9C92C4E83CF5}"/>
+                <a16:creationId xmlns:a16="http://schemas.microsoft.com/office/drawing/2014/main" id="{6F1EB655-5474-4EB5-A783-61F4AA4240F8}"/>
               </a:ext>
             </a:extLst>
           </p:cNvPr>
@@ -21257,7 +21257,7 @@
           <p:cNvPr id="20" name="">
             <a:extLst xmlns:a="http://schemas.openxmlformats.org/drawingml/2006/main">
               <a:ext uri="{FF2B5EF4-FFF2-40B4-BE49-F238E27FC236}">
-                <a16:creationId xmlns:a16="http://schemas.microsoft.com/office/drawing/2014/main" id="{15B82664-803B-4E64-864E-83B2578D8FDD}"/>
+                <a16:creationId xmlns:a16="http://schemas.microsoft.com/office/drawing/2014/main" id="{47C1A7D6-BBF4-4F18-B36B-AEFCB5758F3F}"/>
               </a:ext>
             </a:extLst>
           </p:cNvPr>
@@ -21288,7 +21288,7 @@
           <p:cNvPr id="21" name="">
             <a:extLst xmlns:a="http://schemas.openxmlformats.org/drawingml/2006/main">
               <a:ext uri="{FF2B5EF4-FFF2-40B4-BE49-F238E27FC236}">
-                <a16:creationId xmlns:a16="http://schemas.microsoft.com/office/drawing/2014/main" id="{7B8C9F3C-2A52-43FC-B3BE-68ADDA0C8793}"/>
+                <a16:creationId xmlns:a16="http://schemas.microsoft.com/office/drawing/2014/main" id="{FD8338B4-5C69-495C-A3AC-2CD720E23795}"/>
               </a:ext>
             </a:extLst>
           </p:cNvPr>
@@ -21333,7 +21333,7 @@
           <p:cNvPr id="22" name="">
             <a:extLst xmlns:a="http://schemas.openxmlformats.org/drawingml/2006/main">
               <a:ext uri="{FF2B5EF4-FFF2-40B4-BE49-F238E27FC236}">
-                <a16:creationId xmlns:a16="http://schemas.microsoft.com/office/drawing/2014/main" id="{3EF18B3C-A4F5-4905-9B7D-18D8E9A31EFB}"/>
+                <a16:creationId xmlns:a16="http://schemas.microsoft.com/office/drawing/2014/main" id="{07EA692F-71D2-4DA3-A4DD-0C0A733F4B81}"/>
               </a:ext>
             </a:extLst>
           </p:cNvPr>
@@ -21378,7 +21378,7 @@
           <p:cNvPr id="23" name="">
             <a:extLst xmlns:a="http://schemas.openxmlformats.org/drawingml/2006/main">
               <a:ext uri="{FF2B5EF4-FFF2-40B4-BE49-F238E27FC236}">
-                <a16:creationId xmlns:a16="http://schemas.microsoft.com/office/drawing/2014/main" id="{BD5B2CBC-E217-4D47-9EE8-9AD1FB9225B4}"/>
+                <a16:creationId xmlns:a16="http://schemas.microsoft.com/office/drawing/2014/main" id="{A9F5F7CD-5A45-4095-ABA0-EE2BC2006FB0}"/>
               </a:ext>
             </a:extLst>
           </p:cNvPr>
@@ -21411,7 +21411,7 @@
           <p:cNvPr id="24" name="">
             <a:extLst xmlns:a="http://schemas.openxmlformats.org/drawingml/2006/main">
               <a:ext uri="{FF2B5EF4-FFF2-40B4-BE49-F238E27FC236}">
-                <a16:creationId xmlns:a16="http://schemas.microsoft.com/office/drawing/2014/main" id="{799AF72A-85EF-444A-90FC-F14542187EC4}"/>
+                <a16:creationId xmlns:a16="http://schemas.microsoft.com/office/drawing/2014/main" id="{BAA86EF3-773C-4037-B057-F06983A70200}"/>
               </a:ext>
             </a:extLst>
           </p:cNvPr>
@@ -21444,7 +21444,7 @@
           <p:cNvPr id="25" name="">
             <a:extLst xmlns:a="http://schemas.openxmlformats.org/drawingml/2006/main">
               <a:ext uri="{FF2B5EF4-FFF2-40B4-BE49-F238E27FC236}">
-                <a16:creationId xmlns:a16="http://schemas.microsoft.com/office/drawing/2014/main" id="{97CFD568-8E59-424F-BE8A-0695D0086926}"/>
+                <a16:creationId xmlns:a16="http://schemas.microsoft.com/office/drawing/2014/main" id="{8B3B3CBE-1BB7-4FED-ACAB-47B3185B7262}"/>
               </a:ext>
             </a:extLst>
           </p:cNvPr>
@@ -21475,7 +21475,7 @@
           <p:cNvPr id="26" name="">
             <a:extLst xmlns:a="http://schemas.openxmlformats.org/drawingml/2006/main">
               <a:ext uri="{FF2B5EF4-FFF2-40B4-BE49-F238E27FC236}">
-                <a16:creationId xmlns:a16="http://schemas.microsoft.com/office/drawing/2014/main" id="{C2877241-81A7-4747-A6B0-BF1C484FD3F8}"/>
+                <a16:creationId xmlns:a16="http://schemas.microsoft.com/office/drawing/2014/main" id="{996E12CE-2E92-42CE-B504-6C27D6669F2C}"/>
               </a:ext>
             </a:extLst>
           </p:cNvPr>
@@ -21520,7 +21520,7 @@
           <p:cNvPr id="27" name="">
             <a:extLst xmlns:a="http://schemas.openxmlformats.org/drawingml/2006/main">
               <a:ext uri="{FF2B5EF4-FFF2-40B4-BE49-F238E27FC236}">
-                <a16:creationId xmlns:a16="http://schemas.microsoft.com/office/drawing/2014/main" id="{0FD0EC54-3A59-48E0-813D-E075F414E82B}"/>
+                <a16:creationId xmlns:a16="http://schemas.microsoft.com/office/drawing/2014/main" id="{CEDEC10D-0F61-4CF0-8DD4-C332748B90BC}"/>
               </a:ext>
             </a:extLst>
           </p:cNvPr>
@@ -21565,7 +21565,7 @@
           <p:cNvPr id="28" name="">
             <a:extLst xmlns:a="http://schemas.openxmlformats.org/drawingml/2006/main">
               <a:ext uri="{FF2B5EF4-FFF2-40B4-BE49-F238E27FC236}">
-                <a16:creationId xmlns:a16="http://schemas.microsoft.com/office/drawing/2014/main" id="{3A827A37-EA27-4322-ADA6-660A83C24303}"/>
+                <a16:creationId xmlns:a16="http://schemas.microsoft.com/office/drawing/2014/main" id="{E2F7D20C-4D6E-4985-92D0-9B12053F4EF1}"/>
               </a:ext>
             </a:extLst>
           </p:cNvPr>
@@ -21600,7 +21600,7 @@
           <p:cNvPr id="29" name="">
             <a:extLst xmlns:a="http://schemas.openxmlformats.org/drawingml/2006/main">
               <a:ext uri="{FF2B5EF4-FFF2-40B4-BE49-F238E27FC236}">
-                <a16:creationId xmlns:a16="http://schemas.microsoft.com/office/drawing/2014/main" id="{0C10AF91-40DE-48EC-AF26-35383B334FB5}"/>
+                <a16:creationId xmlns:a16="http://schemas.microsoft.com/office/drawing/2014/main" id="{294B1FF1-E3E5-405B-A976-752585B1C051}"/>
               </a:ext>
             </a:extLst>
           </p:cNvPr>
@@ -21631,7 +21631,7 @@
           <p:cNvPr id="30" name="">
             <a:extLst xmlns:a="http://schemas.openxmlformats.org/drawingml/2006/main">
               <a:ext uri="{FF2B5EF4-FFF2-40B4-BE49-F238E27FC236}">
-                <a16:creationId xmlns:a16="http://schemas.microsoft.com/office/drawing/2014/main" id="{B5CF438D-7B6C-4A06-B498-5B7418059FB2}"/>
+                <a16:creationId xmlns:a16="http://schemas.microsoft.com/office/drawing/2014/main" id="{3D87B068-D079-4404-B9FB-07353C3639CF}"/>
               </a:ext>
             </a:extLst>
           </p:cNvPr>
@@ -21676,7 +21676,7 @@
           <p:cNvPr id="31" name="">
             <a:extLst xmlns:a="http://schemas.openxmlformats.org/drawingml/2006/main">
               <a:ext uri="{FF2B5EF4-FFF2-40B4-BE49-F238E27FC236}">
-                <a16:creationId xmlns:a16="http://schemas.microsoft.com/office/drawing/2014/main" id="{585F7187-20B4-48C1-BA15-B3CF1D0E1F17}"/>
+                <a16:creationId xmlns:a16="http://schemas.microsoft.com/office/drawing/2014/main" id="{51A49661-9CCA-4CB6-8124-3912248D33B7}"/>
               </a:ext>
             </a:extLst>
           </p:cNvPr>
@@ -21721,7 +21721,7 @@
           <p:cNvPr id="32" name="">
             <a:extLst xmlns:a="http://schemas.openxmlformats.org/drawingml/2006/main">
               <a:ext uri="{FF2B5EF4-FFF2-40B4-BE49-F238E27FC236}">
-                <a16:creationId xmlns:a16="http://schemas.microsoft.com/office/drawing/2014/main" id="{06D1AD77-ECC0-4DB4-83E1-91CF6EF62AC6}"/>
+                <a16:creationId xmlns:a16="http://schemas.microsoft.com/office/drawing/2014/main" id="{A34A261E-3809-445B-879B-10AAEA8DD937}"/>
               </a:ext>
             </a:extLst>
           </p:cNvPr>
@@ -21756,7 +21756,7 @@
           <p:cNvPr id="33" name="">
             <a:extLst xmlns:a="http://schemas.openxmlformats.org/drawingml/2006/main">
               <a:ext uri="{FF2B5EF4-FFF2-40B4-BE49-F238E27FC236}">
-                <a16:creationId xmlns:a16="http://schemas.microsoft.com/office/drawing/2014/main" id="{D0DF18D8-B6F8-476E-8ABD-9D33EC658FEB}"/>
+                <a16:creationId xmlns:a16="http://schemas.microsoft.com/office/drawing/2014/main" id="{FAD0ECDB-BA15-4797-84BE-50E121F08028}"/>
               </a:ext>
             </a:extLst>
           </p:cNvPr>
@@ -21787,7 +21787,7 @@
           <p:cNvPr id="34" name="">
             <a:extLst xmlns:a="http://schemas.openxmlformats.org/drawingml/2006/main">
               <a:ext uri="{FF2B5EF4-FFF2-40B4-BE49-F238E27FC236}">
-                <a16:creationId xmlns:a16="http://schemas.microsoft.com/office/drawing/2014/main" id="{6B466899-9E53-4028-B51F-ADEE35F0D30F}"/>
+                <a16:creationId xmlns:a16="http://schemas.microsoft.com/office/drawing/2014/main" id="{5F7D7089-4E8E-4D63-8D07-BA886FB7A5CA}"/>
               </a:ext>
             </a:extLst>
           </p:cNvPr>
@@ -21832,7 +21832,7 @@
           <p:cNvPr id="35" name="">
             <a:extLst xmlns:a="http://schemas.openxmlformats.org/drawingml/2006/main">
               <a:ext uri="{FF2B5EF4-FFF2-40B4-BE49-F238E27FC236}">
-                <a16:creationId xmlns:a16="http://schemas.microsoft.com/office/drawing/2014/main" id="{61840050-06C7-471A-8A9B-C3529D6B5D01}"/>
+                <a16:creationId xmlns:a16="http://schemas.microsoft.com/office/drawing/2014/main" id="{AE89D4DC-3879-4735-8C6F-AD506C9619B2}"/>
               </a:ext>
             </a:extLst>
           </p:cNvPr>
@@ -21877,7 +21877,7 @@
           <p:cNvPr id="36" name="">
             <a:extLst xmlns:a="http://schemas.openxmlformats.org/drawingml/2006/main">
               <a:ext uri="{FF2B5EF4-FFF2-40B4-BE49-F238E27FC236}">
-                <a16:creationId xmlns:a16="http://schemas.microsoft.com/office/drawing/2014/main" id="{BE547F74-7291-4B9F-BD4D-4ED0E806A3FF}"/>
+                <a16:creationId xmlns:a16="http://schemas.microsoft.com/office/drawing/2014/main" id="{B39912CB-EAE9-463F-A0D3-4C446EAEE693}"/>
               </a:ext>
             </a:extLst>
           </p:cNvPr>
@@ -21912,7 +21912,7 @@
           <p:cNvPr id="37" name="">
             <a:extLst xmlns:a="http://schemas.openxmlformats.org/drawingml/2006/main">
               <a:ext uri="{FF2B5EF4-FFF2-40B4-BE49-F238E27FC236}">
-                <a16:creationId xmlns:a16="http://schemas.microsoft.com/office/drawing/2014/main" id="{9A5E2E25-356A-4157-9D0C-BFB187841B80}"/>
+                <a16:creationId xmlns:a16="http://schemas.microsoft.com/office/drawing/2014/main" id="{31A991E3-B870-48FE-A9BE-A45882BACC4A}"/>
               </a:ext>
             </a:extLst>
           </p:cNvPr>
@@ -21943,7 +21943,7 @@
           <p:cNvPr id="38" name="">
             <a:extLst xmlns:a="http://schemas.openxmlformats.org/drawingml/2006/main">
               <a:ext uri="{FF2B5EF4-FFF2-40B4-BE49-F238E27FC236}">
-                <a16:creationId xmlns:a16="http://schemas.microsoft.com/office/drawing/2014/main" id="{30609674-9B77-4771-965C-B9E16A2DE53D}"/>
+                <a16:creationId xmlns:a16="http://schemas.microsoft.com/office/drawing/2014/main" id="{46AFBB15-9590-48BE-BF1C-9953FDEE137A}"/>
               </a:ext>
             </a:extLst>
           </p:cNvPr>
@@ -21988,7 +21988,7 @@
           <p:cNvPr id="39" name="">
             <a:extLst xmlns:a="http://schemas.openxmlformats.org/drawingml/2006/main">
               <a:ext uri="{FF2B5EF4-FFF2-40B4-BE49-F238E27FC236}">
-                <a16:creationId xmlns:a16="http://schemas.microsoft.com/office/drawing/2014/main" id="{947DEFA6-4444-4110-8C08-5900C85E89AA}"/>
+                <a16:creationId xmlns:a16="http://schemas.microsoft.com/office/drawing/2014/main" id="{2CCF4BD4-6278-41AE-814F-7C11117C6575}"/>
               </a:ext>
             </a:extLst>
           </p:cNvPr>
@@ -22033,7 +22033,7 @@
           <p:cNvPr id="40" name="">
             <a:extLst xmlns:a="http://schemas.openxmlformats.org/drawingml/2006/main">
               <a:ext uri="{FF2B5EF4-FFF2-40B4-BE49-F238E27FC236}">
-                <a16:creationId xmlns:a16="http://schemas.microsoft.com/office/drawing/2014/main" id="{BFC4DA5B-74C6-443E-AF4C-4C54CF6CBA2D}"/>
+                <a16:creationId xmlns:a16="http://schemas.microsoft.com/office/drawing/2014/main" id="{E7D0B749-5B5A-4E84-8B96-31E6730EBEA7}"/>
               </a:ext>
             </a:extLst>
           </p:cNvPr>
@@ -22076,7 +22076,7 @@
     </p:spTree>
     <p:extLst>
       <p:ext uri="{BB962C8B-B14F-4D97-AF65-F5344CB8AC3E}">
-        <p14:creationId xmlns:p14="http://schemas.microsoft.com/office/powerpoint/2010/main" val="289764765"/>
+        <p14:creationId xmlns:p14="http://schemas.microsoft.com/office/powerpoint/2010/main" val="1276085174"/>
       </p:ext>
     </p:extLst>
   </p:cSld>
@@ -22100,7 +22100,7 @@
           <p:cNvPr id="59" name="">
             <a:extLst xmlns:a="http://schemas.openxmlformats.org/drawingml/2006/main">
               <a:ext uri="{FF2B5EF4-FFF2-40B4-BE49-F238E27FC236}">
-                <a16:creationId xmlns:a16="http://schemas.microsoft.com/office/drawing/2014/main" id="{4EC8C965-35DF-4E5D-AC92-2690F15CDB90}"/>
+                <a16:creationId xmlns:a16="http://schemas.microsoft.com/office/drawing/2014/main" id="{64B87AED-4A01-427E-8A23-A8C1B439847C}"/>
               </a:ext>
             </a:extLst>
           </p:cNvPr>
@@ -22131,7 +22131,7 @@
           <p:cNvPr id="2" name="">
             <a:extLst xmlns:a="http://schemas.openxmlformats.org/drawingml/2006/main">
               <a:ext uri="{FF2B5EF4-FFF2-40B4-BE49-F238E27FC236}">
-                <a16:creationId xmlns:a16="http://schemas.microsoft.com/office/drawing/2014/main" id="{3725FAF7-6AFB-41CC-80BB-E8579146FC36}"/>
+                <a16:creationId xmlns:a16="http://schemas.microsoft.com/office/drawing/2014/main" id="{E37E563A-E4E4-47BE-954B-07D8160235E2}"/>
               </a:ext>
             </a:extLst>
           </p:cNvPr>
@@ -22176,7 +22176,7 @@
           <p:cNvPr id="3" name="">
             <a:extLst xmlns:a="http://schemas.openxmlformats.org/drawingml/2006/main">
               <a:ext uri="{FF2B5EF4-FFF2-40B4-BE49-F238E27FC236}">
-                <a16:creationId xmlns:a16="http://schemas.microsoft.com/office/drawing/2014/main" id="{A6235F9E-92CE-4C25-9854-9792E6BA49B8}"/>
+                <a16:creationId xmlns:a16="http://schemas.microsoft.com/office/drawing/2014/main" id="{74349377-489B-4627-B25C-326D122DC7FD}"/>
               </a:ext>
             </a:extLst>
           </p:cNvPr>
@@ -22221,7 +22221,7 @@
           <p:cNvPr id="4" name="">
             <a:extLst xmlns:a="http://schemas.openxmlformats.org/drawingml/2006/main">
               <a:ext uri="{FF2B5EF4-FFF2-40B4-BE49-F238E27FC236}">
-                <a16:creationId xmlns:a16="http://schemas.microsoft.com/office/drawing/2014/main" id="{D11A4754-AA3B-41CE-8CCD-51A960525FEE}"/>
+                <a16:creationId xmlns:a16="http://schemas.microsoft.com/office/drawing/2014/main" id="{2453464F-DB22-4D42-8804-731660747854}"/>
               </a:ext>
             </a:extLst>
           </p:cNvPr>
@@ -22266,7 +22266,7 @@
           <p:cNvPr id="5" name="">
             <a:extLst xmlns:a="http://schemas.openxmlformats.org/drawingml/2006/main">
               <a:ext uri="{FF2B5EF4-FFF2-40B4-BE49-F238E27FC236}">
-                <a16:creationId xmlns:a16="http://schemas.microsoft.com/office/drawing/2014/main" id="{50105344-6526-406B-8E74-C1FBAF798867}"/>
+                <a16:creationId xmlns:a16="http://schemas.microsoft.com/office/drawing/2014/main" id="{E0E15EFF-141D-4325-9BBC-2D6FCBC02016}"/>
               </a:ext>
             </a:extLst>
           </p:cNvPr>
@@ -22297,7 +22297,7 @@
           <p:cNvPr id="6" name="">
             <a:extLst xmlns:a="http://schemas.openxmlformats.org/drawingml/2006/main">
               <a:ext uri="{FF2B5EF4-FFF2-40B4-BE49-F238E27FC236}">
-                <a16:creationId xmlns:a16="http://schemas.microsoft.com/office/drawing/2014/main" id="{CB106793-3155-41D5-A0FF-5734DD37A5F2}"/>
+                <a16:creationId xmlns:a16="http://schemas.microsoft.com/office/drawing/2014/main" id="{ACAEA44A-6CAA-478D-944C-64C11B06C8E5}"/>
               </a:ext>
             </a:extLst>
           </p:cNvPr>
@@ -22328,7 +22328,7 @@
           <p:cNvPr id="7" name="">
             <a:extLst xmlns:a="http://schemas.openxmlformats.org/drawingml/2006/main">
               <a:ext uri="{FF2B5EF4-FFF2-40B4-BE49-F238E27FC236}">
-                <a16:creationId xmlns:a16="http://schemas.microsoft.com/office/drawing/2014/main" id="{F7696812-69F1-4CCF-9792-8D1F340989D2}"/>
+                <a16:creationId xmlns:a16="http://schemas.microsoft.com/office/drawing/2014/main" id="{BE46A1D2-0F41-41E0-8978-F1CCFEFBDAF9}"/>
               </a:ext>
             </a:extLst>
           </p:cNvPr>
@@ -22373,7 +22373,7 @@
           <p:cNvPr id="8" name="">
             <a:extLst xmlns:a="http://schemas.openxmlformats.org/drawingml/2006/main">
               <a:ext uri="{FF2B5EF4-FFF2-40B4-BE49-F238E27FC236}">
-                <a16:creationId xmlns:a16="http://schemas.microsoft.com/office/drawing/2014/main" id="{89ACCDAE-262A-4DAA-BDEE-E1DF5C58F570}"/>
+                <a16:creationId xmlns:a16="http://schemas.microsoft.com/office/drawing/2014/main" id="{FC496E46-FF5A-488F-BA62-80D09E72662D}"/>
               </a:ext>
             </a:extLst>
           </p:cNvPr>
@@ -22418,7 +22418,7 @@
           <p:cNvPr id="9" name="">
             <a:extLst xmlns:a="http://schemas.openxmlformats.org/drawingml/2006/main">
               <a:ext uri="{FF2B5EF4-FFF2-40B4-BE49-F238E27FC236}">
-                <a16:creationId xmlns:a16="http://schemas.microsoft.com/office/drawing/2014/main" id="{26C08286-7AF4-44E9-AC17-660062A13D0C}"/>
+                <a16:creationId xmlns:a16="http://schemas.microsoft.com/office/drawing/2014/main" id="{5797C35C-DC63-4994-92B5-DDE41B1C791D}"/>
               </a:ext>
             </a:extLst>
           </p:cNvPr>
@@ -22451,7 +22451,7 @@
           <p:cNvPr id="10" name="">
             <a:extLst xmlns:a="http://schemas.openxmlformats.org/drawingml/2006/main">
               <a:ext uri="{FF2B5EF4-FFF2-40B4-BE49-F238E27FC236}">
-                <a16:creationId xmlns:a16="http://schemas.microsoft.com/office/drawing/2014/main" id="{8031D9D6-EB62-4A7D-8429-10A7D4517797}"/>
+                <a16:creationId xmlns:a16="http://schemas.microsoft.com/office/drawing/2014/main" id="{45FAD9B4-6EDF-409D-B24F-E9C3377F76DC}"/>
               </a:ext>
             </a:extLst>
           </p:cNvPr>
@@ -22482,7 +22482,7 @@
           <p:cNvPr id="11" name="">
             <a:extLst xmlns:a="http://schemas.openxmlformats.org/drawingml/2006/main">
               <a:ext uri="{FF2B5EF4-FFF2-40B4-BE49-F238E27FC236}">
-                <a16:creationId xmlns:a16="http://schemas.microsoft.com/office/drawing/2014/main" id="{7C3AD905-B213-48E9-BC36-C7ABA42C7BE6}"/>
+                <a16:creationId xmlns:a16="http://schemas.microsoft.com/office/drawing/2014/main" id="{A531285C-D733-487F-AFA4-217DC55C3558}"/>
               </a:ext>
             </a:extLst>
           </p:cNvPr>
@@ -22527,7 +22527,7 @@
           <p:cNvPr id="12" name="">
             <a:extLst xmlns:a="http://schemas.openxmlformats.org/drawingml/2006/main">
               <a:ext uri="{FF2B5EF4-FFF2-40B4-BE49-F238E27FC236}">
-                <a16:creationId xmlns:a16="http://schemas.microsoft.com/office/drawing/2014/main" id="{D4E8A5C5-D17E-45AB-A8BD-DE0A213026E3}"/>
+                <a16:creationId xmlns:a16="http://schemas.microsoft.com/office/drawing/2014/main" id="{4338B4F0-5761-4D8E-B776-5BFB0CD981C8}"/>
               </a:ext>
             </a:extLst>
           </p:cNvPr>
@@ -22602,7 +22602,7 @@
           <p:cNvPr id="13" name="">
             <a:extLst xmlns:a="http://schemas.openxmlformats.org/drawingml/2006/main">
               <a:ext uri="{FF2B5EF4-FFF2-40B4-BE49-F238E27FC236}">
-                <a16:creationId xmlns:a16="http://schemas.microsoft.com/office/drawing/2014/main" id="{0ADC6882-A969-456A-B8C9-3763B0966CCC}"/>
+                <a16:creationId xmlns:a16="http://schemas.microsoft.com/office/drawing/2014/main" id="{900C5CB5-B04E-492A-8EF6-A5DFBF313DF1}"/>
               </a:ext>
             </a:extLst>
           </p:cNvPr>
@@ -22635,7 +22635,7 @@
           <p:cNvPr id="14" name="">
             <a:extLst xmlns:a="http://schemas.openxmlformats.org/drawingml/2006/main">
               <a:ext uri="{FF2B5EF4-FFF2-40B4-BE49-F238E27FC236}">
-                <a16:creationId xmlns:a16="http://schemas.microsoft.com/office/drawing/2014/main" id="{0E63D282-F8F2-4967-83F8-FB69C2D6BB92}"/>
+                <a16:creationId xmlns:a16="http://schemas.microsoft.com/office/drawing/2014/main" id="{447393C4-5F86-4420-B1ED-D595BC757047}"/>
               </a:ext>
             </a:extLst>
           </p:cNvPr>
@@ -22666,7 +22666,7 @@
           <p:cNvPr id="15" name="">
             <a:extLst xmlns:a="http://schemas.openxmlformats.org/drawingml/2006/main">
               <a:ext uri="{FF2B5EF4-FFF2-40B4-BE49-F238E27FC236}">
-                <a16:creationId xmlns:a16="http://schemas.microsoft.com/office/drawing/2014/main" id="{3C768020-C3B0-4B55-ABC1-E592E4BDB5FD}"/>
+                <a16:creationId xmlns:a16="http://schemas.microsoft.com/office/drawing/2014/main" id="{4F73AE8C-7E21-4A33-B3DB-1AE8F0DA5105}"/>
               </a:ext>
             </a:extLst>
           </p:cNvPr>
@@ -22711,7 +22711,7 @@
           <p:cNvPr id="16" name="">
             <a:extLst xmlns:a="http://schemas.openxmlformats.org/drawingml/2006/main">
               <a:ext uri="{FF2B5EF4-FFF2-40B4-BE49-F238E27FC236}">
-                <a16:creationId xmlns:a16="http://schemas.microsoft.com/office/drawing/2014/main" id="{AE9B92D7-1791-4B1F-9F00-CB6476ADC5BD}"/>
+                <a16:creationId xmlns:a16="http://schemas.microsoft.com/office/drawing/2014/main" id="{98F828FC-E56F-4F60-97E7-05FB94473317}"/>
               </a:ext>
             </a:extLst>
           </p:cNvPr>
@@ -22786,7 +22786,7 @@
           <p:cNvPr id="17" name="">
             <a:extLst xmlns:a="http://schemas.openxmlformats.org/drawingml/2006/main">
               <a:ext uri="{FF2B5EF4-FFF2-40B4-BE49-F238E27FC236}">
-                <a16:creationId xmlns:a16="http://schemas.microsoft.com/office/drawing/2014/main" id="{C1EE0A1B-A0A7-4A5A-9FD1-B864DA75BEDF}"/>
+                <a16:creationId xmlns:a16="http://schemas.microsoft.com/office/drawing/2014/main" id="{4A0301ED-8FB4-4D71-9282-F00861C30D7F}"/>
               </a:ext>
             </a:extLst>
           </p:cNvPr>
@@ -22819,7 +22819,7 @@
           <p:cNvPr id="18" name="">
             <a:extLst xmlns:a="http://schemas.openxmlformats.org/drawingml/2006/main">
               <a:ext uri="{FF2B5EF4-FFF2-40B4-BE49-F238E27FC236}">
-                <a16:creationId xmlns:a16="http://schemas.microsoft.com/office/drawing/2014/main" id="{84166238-B2C5-4DB0-85A4-535FE398E3B2}"/>
+                <a16:creationId xmlns:a16="http://schemas.microsoft.com/office/drawing/2014/main" id="{7FA1C082-60B3-4C35-B6C4-B6E16C5CD249}"/>
               </a:ext>
             </a:extLst>
           </p:cNvPr>
@@ -22850,7 +22850,7 @@
           <p:cNvPr id="19" name="">
             <a:extLst xmlns:a="http://schemas.openxmlformats.org/drawingml/2006/main">
               <a:ext uri="{FF2B5EF4-FFF2-40B4-BE49-F238E27FC236}">
-                <a16:creationId xmlns:a16="http://schemas.microsoft.com/office/drawing/2014/main" id="{85356A5F-1D0E-4462-8D9A-47C1BEEA4141}"/>
+                <a16:creationId xmlns:a16="http://schemas.microsoft.com/office/drawing/2014/main" id="{46D011C2-254F-4F04-AB0F-8DEC23117267}"/>
               </a:ext>
             </a:extLst>
           </p:cNvPr>
@@ -22895,7 +22895,7 @@
           <p:cNvPr id="20" name="">
             <a:extLst xmlns:a="http://schemas.openxmlformats.org/drawingml/2006/main">
               <a:ext uri="{FF2B5EF4-FFF2-40B4-BE49-F238E27FC236}">
-                <a16:creationId xmlns:a16="http://schemas.microsoft.com/office/drawing/2014/main" id="{8B7A03D2-963E-41CB-B7DF-B2BCA589A4C5}"/>
+                <a16:creationId xmlns:a16="http://schemas.microsoft.com/office/drawing/2014/main" id="{C8048052-7AA1-4BB4-8604-771B7F4414A2}"/>
               </a:ext>
             </a:extLst>
           </p:cNvPr>
@@ -22970,7 +22970,7 @@
           <p:cNvPr id="21" name="">
             <a:extLst xmlns:a="http://schemas.openxmlformats.org/drawingml/2006/main">
               <a:ext uri="{FF2B5EF4-FFF2-40B4-BE49-F238E27FC236}">
-                <a16:creationId xmlns:a16="http://schemas.microsoft.com/office/drawing/2014/main" id="{CC7EEC4E-ADED-4A34-9F9B-8CEDD3D534B2}"/>
+                <a16:creationId xmlns:a16="http://schemas.microsoft.com/office/drawing/2014/main" id="{95606D2B-144E-48FD-9116-3407B5033E94}"/>
               </a:ext>
             </a:extLst>
           </p:cNvPr>
@@ -23001,7 +23001,7 @@
           <p:cNvPr id="22" name="">
             <a:extLst xmlns:a="http://schemas.openxmlformats.org/drawingml/2006/main">
               <a:ext uri="{FF2B5EF4-FFF2-40B4-BE49-F238E27FC236}">
-                <a16:creationId xmlns:a16="http://schemas.microsoft.com/office/drawing/2014/main" id="{9317E8BD-9B9E-44FF-8579-0A0C882BF8BE}"/>
+                <a16:creationId xmlns:a16="http://schemas.microsoft.com/office/drawing/2014/main" id="{05F3622C-59E0-43E5-98E1-22AB00A1037F}"/>
               </a:ext>
             </a:extLst>
           </p:cNvPr>
@@ -23046,7 +23046,7 @@
           <p:cNvPr id="23" name="">
             <a:extLst xmlns:a="http://schemas.openxmlformats.org/drawingml/2006/main">
               <a:ext uri="{FF2B5EF4-FFF2-40B4-BE49-F238E27FC236}">
-                <a16:creationId xmlns:a16="http://schemas.microsoft.com/office/drawing/2014/main" id="{20A7BCBE-DA62-43AE-A6F1-3631D1BDF55E}"/>
+                <a16:creationId xmlns:a16="http://schemas.microsoft.com/office/drawing/2014/main" id="{3129DC38-E521-4FB5-AE45-C0A7CA9620BD}"/>
               </a:ext>
             </a:extLst>
           </p:cNvPr>
@@ -23079,7 +23079,7 @@
           <p:cNvPr id="24" name="">
             <a:extLst xmlns:a="http://schemas.openxmlformats.org/drawingml/2006/main">
               <a:ext uri="{FF2B5EF4-FFF2-40B4-BE49-F238E27FC236}">
-                <a16:creationId xmlns:a16="http://schemas.microsoft.com/office/drawing/2014/main" id="{343FAD2D-C22D-448C-86A8-D7920BD4CDAC}"/>
+                <a16:creationId xmlns:a16="http://schemas.microsoft.com/office/drawing/2014/main" id="{FCAC2BF6-E7D1-44E9-96D8-6650245E98E2}"/>
               </a:ext>
             </a:extLst>
           </p:cNvPr>
@@ -23112,7 +23112,7 @@
           <p:cNvPr id="25" name="">
             <a:extLst xmlns:a="http://schemas.openxmlformats.org/drawingml/2006/main">
               <a:ext uri="{FF2B5EF4-FFF2-40B4-BE49-F238E27FC236}">
-                <a16:creationId xmlns:a16="http://schemas.microsoft.com/office/drawing/2014/main" id="{5614B1ED-02A4-4898-972F-A83AB17B085C}"/>
+                <a16:creationId xmlns:a16="http://schemas.microsoft.com/office/drawing/2014/main" id="{B36DA734-6DA3-47D3-8408-CB523949473E}"/>
               </a:ext>
             </a:extLst>
           </p:cNvPr>
@@ -23145,7 +23145,7 @@
           <p:cNvPr id="26" name="">
             <a:extLst xmlns:a="http://schemas.openxmlformats.org/drawingml/2006/main">
               <a:ext uri="{FF2B5EF4-FFF2-40B4-BE49-F238E27FC236}">
-                <a16:creationId xmlns:a16="http://schemas.microsoft.com/office/drawing/2014/main" id="{29BBC4E7-E478-4BCD-AC22-9E4CD9674E46}"/>
+                <a16:creationId xmlns:a16="http://schemas.microsoft.com/office/drawing/2014/main" id="{60826CE3-2600-4384-845F-7485E42C9A54}"/>
               </a:ext>
             </a:extLst>
           </p:cNvPr>
@@ -23178,7 +23178,7 @@
           <p:cNvPr id="27" name="">
             <a:extLst xmlns:a="http://schemas.openxmlformats.org/drawingml/2006/main">
               <a:ext uri="{FF2B5EF4-FFF2-40B4-BE49-F238E27FC236}">
-                <a16:creationId xmlns:a16="http://schemas.microsoft.com/office/drawing/2014/main" id="{BCFB745D-E04B-40A9-969B-F0E1D6089714}"/>
+                <a16:creationId xmlns:a16="http://schemas.microsoft.com/office/drawing/2014/main" id="{7AAE0E82-247B-4AAD-A9F3-3EDCD73313A2}"/>
               </a:ext>
             </a:extLst>
           </p:cNvPr>
@@ -23211,7 +23211,7 @@
           <p:cNvPr id="28" name="">
             <a:extLst xmlns:a="http://schemas.openxmlformats.org/drawingml/2006/main">
               <a:ext uri="{FF2B5EF4-FFF2-40B4-BE49-F238E27FC236}">
-                <a16:creationId xmlns:a16="http://schemas.microsoft.com/office/drawing/2014/main" id="{0A3E0ACB-C12E-4854-B1C2-A7724FD289C8}"/>
+                <a16:creationId xmlns:a16="http://schemas.microsoft.com/office/drawing/2014/main" id="{783891FC-1273-433D-823B-646B61DFF0B3}"/>
               </a:ext>
             </a:extLst>
           </p:cNvPr>
@@ -23244,7 +23244,7 @@
           <p:cNvPr id="29" name="">
             <a:extLst xmlns:a="http://schemas.openxmlformats.org/drawingml/2006/main">
               <a:ext uri="{FF2B5EF4-FFF2-40B4-BE49-F238E27FC236}">
-                <a16:creationId xmlns:a16="http://schemas.microsoft.com/office/drawing/2014/main" id="{2D62DA19-EC94-409B-9547-74DA4C947A55}"/>
+                <a16:creationId xmlns:a16="http://schemas.microsoft.com/office/drawing/2014/main" id="{D54ADDB4-0B80-4A89-A9A0-54E06F56C907}"/>
               </a:ext>
             </a:extLst>
           </p:cNvPr>
@@ -23277,7 +23277,7 @@
           <p:cNvPr id="30" name="">
             <a:extLst xmlns:a="http://schemas.openxmlformats.org/drawingml/2006/main">
               <a:ext uri="{FF2B5EF4-FFF2-40B4-BE49-F238E27FC236}">
-                <a16:creationId xmlns:a16="http://schemas.microsoft.com/office/drawing/2014/main" id="{948FB09D-D4E3-404C-B288-AE2E53A18AD4}"/>
+                <a16:creationId xmlns:a16="http://schemas.microsoft.com/office/drawing/2014/main" id="{B80B5CFA-0894-4363-8D4B-328A6C199439}"/>
               </a:ext>
             </a:extLst>
           </p:cNvPr>
@@ -23308,7 +23308,7 @@
           <p:cNvPr id="31" name="">
             <a:extLst xmlns:a="http://schemas.openxmlformats.org/drawingml/2006/main">
               <a:ext uri="{FF2B5EF4-FFF2-40B4-BE49-F238E27FC236}">
-                <a16:creationId xmlns:a16="http://schemas.microsoft.com/office/drawing/2014/main" id="{5791350C-7FE3-4DEF-8074-1B908AFB0439}"/>
+                <a16:creationId xmlns:a16="http://schemas.microsoft.com/office/drawing/2014/main" id="{411A2078-F8BA-42D4-8A82-7F4DFE8A5146}"/>
               </a:ext>
             </a:extLst>
           </p:cNvPr>
@@ -23353,7 +23353,7 @@
           <p:cNvPr id="32" name="">
             <a:extLst xmlns:a="http://schemas.openxmlformats.org/drawingml/2006/main">
               <a:ext uri="{FF2B5EF4-FFF2-40B4-BE49-F238E27FC236}">
-                <a16:creationId xmlns:a16="http://schemas.microsoft.com/office/drawing/2014/main" id="{11C2659C-6F1C-421B-A794-8E8317AA984A}"/>
+                <a16:creationId xmlns:a16="http://schemas.microsoft.com/office/drawing/2014/main" id="{1C1010CC-DCCC-4E1A-84D9-04C04AAB21FE}"/>
               </a:ext>
             </a:extLst>
           </p:cNvPr>
@@ -23428,7 +23428,7 @@
           <p:cNvPr id="33" name="">
             <a:extLst xmlns:a="http://schemas.openxmlformats.org/drawingml/2006/main">
               <a:ext uri="{FF2B5EF4-FFF2-40B4-BE49-F238E27FC236}">
-                <a16:creationId xmlns:a16="http://schemas.microsoft.com/office/drawing/2014/main" id="{B38583B4-EFB1-41E6-A34C-E5AF5D7E1A77}"/>
+                <a16:creationId xmlns:a16="http://schemas.microsoft.com/office/drawing/2014/main" id="{7C9B2609-7DB5-42D3-9C1D-11C6EFDD7AC5}"/>
               </a:ext>
             </a:extLst>
           </p:cNvPr>
@@ -23461,7 +23461,7 @@
           <p:cNvPr id="34" name="">
             <a:extLst xmlns:a="http://schemas.openxmlformats.org/drawingml/2006/main">
               <a:ext uri="{FF2B5EF4-FFF2-40B4-BE49-F238E27FC236}">
-                <a16:creationId xmlns:a16="http://schemas.microsoft.com/office/drawing/2014/main" id="{E1C39E4F-A863-4214-A043-0FCD44DE2416}"/>
+                <a16:creationId xmlns:a16="http://schemas.microsoft.com/office/drawing/2014/main" id="{26A7D874-DAA4-46A4-8DEE-AC8B6FFE3547}"/>
               </a:ext>
             </a:extLst>
           </p:cNvPr>
@@ -23492,7 +23492,7 @@
           <p:cNvPr id="35" name="">
             <a:extLst xmlns:a="http://schemas.openxmlformats.org/drawingml/2006/main">
               <a:ext uri="{FF2B5EF4-FFF2-40B4-BE49-F238E27FC236}">
-                <a16:creationId xmlns:a16="http://schemas.microsoft.com/office/drawing/2014/main" id="{3DC96CB6-120C-4FCF-90D8-AAE709762040}"/>
+                <a16:creationId xmlns:a16="http://schemas.microsoft.com/office/drawing/2014/main" id="{B022CD4D-72D6-4B3A-B0C7-36758CD1EC10}"/>
               </a:ext>
             </a:extLst>
           </p:cNvPr>
@@ -23537,7 +23537,7 @@
           <p:cNvPr id="36" name="">
             <a:extLst xmlns:a="http://schemas.openxmlformats.org/drawingml/2006/main">
               <a:ext uri="{FF2B5EF4-FFF2-40B4-BE49-F238E27FC236}">
-                <a16:creationId xmlns:a16="http://schemas.microsoft.com/office/drawing/2014/main" id="{C378DFE7-DDE2-4035-88F2-7007CFE3D1B5}"/>
+                <a16:creationId xmlns:a16="http://schemas.microsoft.com/office/drawing/2014/main" id="{45DE6830-8AF3-44FB-8B7D-933E2B47B62C}"/>
               </a:ext>
             </a:extLst>
           </p:cNvPr>
@@ -23612,7 +23612,7 @@
           <p:cNvPr id="37" name="">
             <a:extLst xmlns:a="http://schemas.openxmlformats.org/drawingml/2006/main">
               <a:ext uri="{FF2B5EF4-FFF2-40B4-BE49-F238E27FC236}">
-                <a16:creationId xmlns:a16="http://schemas.microsoft.com/office/drawing/2014/main" id="{A80298E1-C862-4851-8CB2-AF5F2D4FC119}"/>
+                <a16:creationId xmlns:a16="http://schemas.microsoft.com/office/drawing/2014/main" id="{C0548ACF-D4E5-456E-8B68-90A8F338FB07}"/>
               </a:ext>
             </a:extLst>
           </p:cNvPr>
@@ -23645,7 +23645,7 @@
           <p:cNvPr id="38" name="">
             <a:extLst xmlns:a="http://schemas.openxmlformats.org/drawingml/2006/main">
               <a:ext uri="{FF2B5EF4-FFF2-40B4-BE49-F238E27FC236}">
-                <a16:creationId xmlns:a16="http://schemas.microsoft.com/office/drawing/2014/main" id="{3D3D2F04-A1AB-4103-9C33-3EEFA8455ACA}"/>
+                <a16:creationId xmlns:a16="http://schemas.microsoft.com/office/drawing/2014/main" id="{DB317939-6590-495F-B9B8-8F32C4BCF2AE}"/>
               </a:ext>
             </a:extLst>
           </p:cNvPr>
@@ -23676,7 +23676,7 @@
           <p:cNvPr id="39" name="">
             <a:extLst xmlns:a="http://schemas.openxmlformats.org/drawingml/2006/main">
               <a:ext uri="{FF2B5EF4-FFF2-40B4-BE49-F238E27FC236}">
-                <a16:creationId xmlns:a16="http://schemas.microsoft.com/office/drawing/2014/main" id="{732A44FA-C2D2-4223-A6A9-AAE8715BCD75}"/>
+                <a16:creationId xmlns:a16="http://schemas.microsoft.com/office/drawing/2014/main" id="{F0242EEB-0A92-4076-B9BA-EAA7006C57AC}"/>
               </a:ext>
             </a:extLst>
           </p:cNvPr>
@@ -23721,7 +23721,7 @@
           <p:cNvPr id="40" name="">
             <a:extLst xmlns:a="http://schemas.openxmlformats.org/drawingml/2006/main">
               <a:ext uri="{FF2B5EF4-FFF2-40B4-BE49-F238E27FC236}">
-                <a16:creationId xmlns:a16="http://schemas.microsoft.com/office/drawing/2014/main" id="{02C14AB3-3E0B-45B6-8C02-5CDBDB6D3B7A}"/>
+                <a16:creationId xmlns:a16="http://schemas.microsoft.com/office/drawing/2014/main" id="{3067B9F7-9F22-4623-A89D-E18ACBCBE320}"/>
               </a:ext>
             </a:extLst>
           </p:cNvPr>
@@ -23796,7 +23796,7 @@
           <p:cNvPr id="41" name="">
             <a:extLst xmlns:a="http://schemas.openxmlformats.org/drawingml/2006/main">
               <a:ext uri="{FF2B5EF4-FFF2-40B4-BE49-F238E27FC236}">
-                <a16:creationId xmlns:a16="http://schemas.microsoft.com/office/drawing/2014/main" id="{C4378C1F-44D1-4234-825A-BCF268F162E5}"/>
+                <a16:creationId xmlns:a16="http://schemas.microsoft.com/office/drawing/2014/main" id="{A8C52D24-E9DC-40B8-9DBB-DAA44A130394}"/>
               </a:ext>
             </a:extLst>
           </p:cNvPr>
@@ -23841,7 +23841,7 @@
           <p:cNvPr id="42" name="">
             <a:extLst xmlns:a="http://schemas.openxmlformats.org/drawingml/2006/main">
               <a:ext uri="{FF2B5EF4-FFF2-40B4-BE49-F238E27FC236}">
-                <a16:creationId xmlns:a16="http://schemas.microsoft.com/office/drawing/2014/main" id="{B117C3E6-22DC-4278-8401-FFF81062742F}"/>
+                <a16:creationId xmlns:a16="http://schemas.microsoft.com/office/drawing/2014/main" id="{03242964-F9A9-4AC1-B196-6882338A7CBA}"/>
               </a:ext>
             </a:extLst>
           </p:cNvPr>
@@ -23872,7 +23872,7 @@
           <p:cNvPr id="43" name="">
             <a:extLst xmlns:a="http://schemas.openxmlformats.org/drawingml/2006/main">
               <a:ext uri="{FF2B5EF4-FFF2-40B4-BE49-F238E27FC236}">
-                <a16:creationId xmlns:a16="http://schemas.microsoft.com/office/drawing/2014/main" id="{D11739B5-A169-4E9F-BE37-F74873E2DC5A}"/>
+                <a16:creationId xmlns:a16="http://schemas.microsoft.com/office/drawing/2014/main" id="{C03DE522-5E35-4FE6-B0D9-3573E090F70E}"/>
               </a:ext>
             </a:extLst>
           </p:cNvPr>
@@ -23917,7 +23917,7 @@
           <p:cNvPr id="44" name="">
             <a:extLst xmlns:a="http://schemas.openxmlformats.org/drawingml/2006/main">
               <a:ext uri="{FF2B5EF4-FFF2-40B4-BE49-F238E27FC236}">
-                <a16:creationId xmlns:a16="http://schemas.microsoft.com/office/drawing/2014/main" id="{1CCA0B99-8A12-475D-926B-C3BCDA6A009B}"/>
+                <a16:creationId xmlns:a16="http://schemas.microsoft.com/office/drawing/2014/main" id="{A5DA2036-FEF7-448A-AF85-48AA99E55D6B}"/>
               </a:ext>
             </a:extLst>
           </p:cNvPr>
@@ -23962,7 +23962,7 @@
           <p:cNvPr id="45" name="">
             <a:extLst xmlns:a="http://schemas.openxmlformats.org/drawingml/2006/main">
               <a:ext uri="{FF2B5EF4-FFF2-40B4-BE49-F238E27FC236}">
-                <a16:creationId xmlns:a16="http://schemas.microsoft.com/office/drawing/2014/main" id="{DF0D7C9D-3A9F-4419-90F3-82615561A512}"/>
+                <a16:creationId xmlns:a16="http://schemas.microsoft.com/office/drawing/2014/main" id="{3EAE5567-A241-4998-8F76-184F2960A6A7}"/>
               </a:ext>
             </a:extLst>
           </p:cNvPr>
@@ -24007,7 +24007,7 @@
           <p:cNvPr id="46" name="">
             <a:extLst xmlns:a="http://schemas.openxmlformats.org/drawingml/2006/main">
               <a:ext uri="{FF2B5EF4-FFF2-40B4-BE49-F238E27FC236}">
-                <a16:creationId xmlns:a16="http://schemas.microsoft.com/office/drawing/2014/main" id="{3247F204-F484-404C-A283-1E42A1FF4637}"/>
+                <a16:creationId xmlns:a16="http://schemas.microsoft.com/office/drawing/2014/main" id="{F538DB07-8E73-49F1-A25E-362479242484}"/>
               </a:ext>
             </a:extLst>
           </p:cNvPr>
@@ -24038,7 +24038,7 @@
           <p:cNvPr id="47" name="">
             <a:extLst xmlns:a="http://schemas.openxmlformats.org/drawingml/2006/main">
               <a:ext uri="{FF2B5EF4-FFF2-40B4-BE49-F238E27FC236}">
-                <a16:creationId xmlns:a16="http://schemas.microsoft.com/office/drawing/2014/main" id="{DDD17064-0479-43DA-A62A-ECD484117CD0}"/>
+                <a16:creationId xmlns:a16="http://schemas.microsoft.com/office/drawing/2014/main" id="{C80C3F87-8733-4D88-9834-FC9A939374D3}"/>
               </a:ext>
             </a:extLst>
           </p:cNvPr>
@@ -24083,7 +24083,7 @@
           <p:cNvPr id="48" name="">
             <a:extLst xmlns:a="http://schemas.openxmlformats.org/drawingml/2006/main">
               <a:ext uri="{FF2B5EF4-FFF2-40B4-BE49-F238E27FC236}">
-                <a16:creationId xmlns:a16="http://schemas.microsoft.com/office/drawing/2014/main" id="{A07B6C9F-08F4-4021-8319-7F0FDD02EBA3}"/>
+                <a16:creationId xmlns:a16="http://schemas.microsoft.com/office/drawing/2014/main" id="{237DF2F1-675C-443D-BDAD-5246289D2C7F}"/>
               </a:ext>
             </a:extLst>
           </p:cNvPr>
@@ -24128,7 +24128,7 @@
           <p:cNvPr id="49" name="">
             <a:extLst xmlns:a="http://schemas.openxmlformats.org/drawingml/2006/main">
               <a:ext uri="{FF2B5EF4-FFF2-40B4-BE49-F238E27FC236}">
-                <a16:creationId xmlns:a16="http://schemas.microsoft.com/office/drawing/2014/main" id="{088EFED6-38B2-4CBC-B426-3B6461FB352F}"/>
+                <a16:creationId xmlns:a16="http://schemas.microsoft.com/office/drawing/2014/main" id="{F7A5FBD6-F9BC-4263-979E-4D9DF7757F00}"/>
               </a:ext>
             </a:extLst>
           </p:cNvPr>
@@ -24173,7 +24173,7 @@
           <p:cNvPr id="50" name="">
             <a:extLst xmlns:a="http://schemas.openxmlformats.org/drawingml/2006/main">
               <a:ext uri="{FF2B5EF4-FFF2-40B4-BE49-F238E27FC236}">
-                <a16:creationId xmlns:a16="http://schemas.microsoft.com/office/drawing/2014/main" id="{BC10D282-E584-424C-879C-E8D9D1DE69D5}"/>
+                <a16:creationId xmlns:a16="http://schemas.microsoft.com/office/drawing/2014/main" id="{5C672961-FC63-4DC0-BAD2-D7FC3B172E9B}"/>
               </a:ext>
             </a:extLst>
           </p:cNvPr>
@@ -24204,7 +24204,7 @@
           <p:cNvPr id="51" name="">
             <a:extLst xmlns:a="http://schemas.openxmlformats.org/drawingml/2006/main">
               <a:ext uri="{FF2B5EF4-FFF2-40B4-BE49-F238E27FC236}">
-                <a16:creationId xmlns:a16="http://schemas.microsoft.com/office/drawing/2014/main" id="{4C7D2660-C2C4-41B9-84AE-82FFC03EEA33}"/>
+                <a16:creationId xmlns:a16="http://schemas.microsoft.com/office/drawing/2014/main" id="{677ACCCB-951A-484C-BCCF-C6F1EE63F310}"/>
               </a:ext>
             </a:extLst>
           </p:cNvPr>
@@ -24249,7 +24249,7 @@
           <p:cNvPr id="52" name="">
             <a:extLst xmlns:a="http://schemas.openxmlformats.org/drawingml/2006/main">
               <a:ext uri="{FF2B5EF4-FFF2-40B4-BE49-F238E27FC236}">
-                <a16:creationId xmlns:a16="http://schemas.microsoft.com/office/drawing/2014/main" id="{B2C6AA78-74EE-40D1-81DF-045FB09E02AB}"/>
+                <a16:creationId xmlns:a16="http://schemas.microsoft.com/office/drawing/2014/main" id="{799E6E22-8C54-4B33-8805-6B21B2B96E7C}"/>
               </a:ext>
             </a:extLst>
           </p:cNvPr>
@@ -24294,7 +24294,7 @@
           <p:cNvPr id="53" name="">
             <a:extLst xmlns:a="http://schemas.openxmlformats.org/drawingml/2006/main">
               <a:ext uri="{FF2B5EF4-FFF2-40B4-BE49-F238E27FC236}">
-                <a16:creationId xmlns:a16="http://schemas.microsoft.com/office/drawing/2014/main" id="{8E326A8E-10F2-4140-A3E7-826E9D292A17}"/>
+                <a16:creationId xmlns:a16="http://schemas.microsoft.com/office/drawing/2014/main" id="{F5FFBE04-EA51-49F0-877C-420A3688878A}"/>
               </a:ext>
             </a:extLst>
           </p:cNvPr>
@@ -24339,7 +24339,7 @@
           <p:cNvPr id="54" name="">
             <a:extLst xmlns:a="http://schemas.openxmlformats.org/drawingml/2006/main">
               <a:ext uri="{FF2B5EF4-FFF2-40B4-BE49-F238E27FC236}">
-                <a16:creationId xmlns:a16="http://schemas.microsoft.com/office/drawing/2014/main" id="{FDE667A3-5267-41E7-8E2D-F76E9342404D}"/>
+                <a16:creationId xmlns:a16="http://schemas.microsoft.com/office/drawing/2014/main" id="{3898362F-2D7C-444E-B563-D4E071EBA92F}"/>
               </a:ext>
             </a:extLst>
           </p:cNvPr>
@@ -24370,7 +24370,7 @@
           <p:cNvPr id="55" name="">
             <a:extLst xmlns:a="http://schemas.openxmlformats.org/drawingml/2006/main">
               <a:ext uri="{FF2B5EF4-FFF2-40B4-BE49-F238E27FC236}">
-                <a16:creationId xmlns:a16="http://schemas.microsoft.com/office/drawing/2014/main" id="{C36FC3CB-C885-4029-A27D-C80D39A8DA43}"/>
+                <a16:creationId xmlns:a16="http://schemas.microsoft.com/office/drawing/2014/main" id="{25CC966E-9B11-47B8-8185-FA9F1FEE6B53}"/>
               </a:ext>
             </a:extLst>
           </p:cNvPr>
@@ -24415,7 +24415,7 @@
           <p:cNvPr id="56" name="">
             <a:extLst xmlns:a="http://schemas.openxmlformats.org/drawingml/2006/main">
               <a:ext uri="{FF2B5EF4-FFF2-40B4-BE49-F238E27FC236}">
-                <a16:creationId xmlns:a16="http://schemas.microsoft.com/office/drawing/2014/main" id="{4822F158-71D6-4AC2-B230-C94F35634077}"/>
+                <a16:creationId xmlns:a16="http://schemas.microsoft.com/office/drawing/2014/main" id="{05384C87-3BE4-40C6-8FA6-473D0623F4D4}"/>
               </a:ext>
             </a:extLst>
           </p:cNvPr>
@@ -24460,7 +24460,7 @@
           <p:cNvPr id="57" name="">
             <a:extLst xmlns:a="http://schemas.openxmlformats.org/drawingml/2006/main">
               <a:ext uri="{FF2B5EF4-FFF2-40B4-BE49-F238E27FC236}">
-                <a16:creationId xmlns:a16="http://schemas.microsoft.com/office/drawing/2014/main" id="{E96F1815-15B2-4DC1-B446-1DE6255CD6CE}"/>
+                <a16:creationId xmlns:a16="http://schemas.microsoft.com/office/drawing/2014/main" id="{8CA88725-DDFA-4F9B-BFDF-85B63B34DB88}"/>
               </a:ext>
             </a:extLst>
           </p:cNvPr>
@@ -24505,7 +24505,7 @@
           <p:cNvPr id="58" name="">
             <a:extLst xmlns:a="http://schemas.openxmlformats.org/drawingml/2006/main">
               <a:ext uri="{FF2B5EF4-FFF2-40B4-BE49-F238E27FC236}">
-                <a16:creationId xmlns:a16="http://schemas.microsoft.com/office/drawing/2014/main" id="{807318D5-0A4B-486E-AFD6-0C736B717AAB}"/>
+                <a16:creationId xmlns:a16="http://schemas.microsoft.com/office/drawing/2014/main" id="{7D0D8333-0E6E-4E8B-8028-6E97C9EF6878}"/>
               </a:ext>
             </a:extLst>
           </p:cNvPr>
@@ -24548,7 +24548,7 @@
     </p:spTree>
     <p:extLst>
       <p:ext uri="{BB962C8B-B14F-4D97-AF65-F5344CB8AC3E}">
-        <p14:creationId xmlns:p14="http://schemas.microsoft.com/office/powerpoint/2010/main" val="352088759"/>
+        <p14:creationId xmlns:p14="http://schemas.microsoft.com/office/powerpoint/2010/main" val="1850245128"/>
       </p:ext>
     </p:extLst>
   </p:cSld>
@@ -24572,7 +24572,7 @@
           <p:cNvPr id="35" name="">
             <a:extLst xmlns:a="http://schemas.openxmlformats.org/drawingml/2006/main">
               <a:ext uri="{FF2B5EF4-FFF2-40B4-BE49-F238E27FC236}">
-                <a16:creationId xmlns:a16="http://schemas.microsoft.com/office/drawing/2014/main" id="{6A291113-D2F5-4D13-95E3-901276FB78F8}"/>
+                <a16:creationId xmlns:a16="http://schemas.microsoft.com/office/drawing/2014/main" id="{77F25725-2E10-4414-B238-6A8A953BB1B0}"/>
               </a:ext>
             </a:extLst>
           </p:cNvPr>
@@ -24603,7 +24603,7 @@
           <p:cNvPr id="2" name="">
             <a:extLst xmlns:a="http://schemas.openxmlformats.org/drawingml/2006/main">
               <a:ext uri="{FF2B5EF4-FFF2-40B4-BE49-F238E27FC236}">
-                <a16:creationId xmlns:a16="http://schemas.microsoft.com/office/drawing/2014/main" id="{264C4F78-B66E-4F01-BC1A-8B98DA48ACE8}"/>
+                <a16:creationId xmlns:a16="http://schemas.microsoft.com/office/drawing/2014/main" id="{57267E70-9515-4656-9373-6CF48F239239}"/>
               </a:ext>
             </a:extLst>
           </p:cNvPr>
@@ -24648,7 +24648,7 @@
           <p:cNvPr id="3" name="">
             <a:extLst xmlns:a="http://schemas.openxmlformats.org/drawingml/2006/main">
               <a:ext uri="{FF2B5EF4-FFF2-40B4-BE49-F238E27FC236}">
-                <a16:creationId xmlns:a16="http://schemas.microsoft.com/office/drawing/2014/main" id="{9097CE77-43C1-4D8D-8AC0-5032CEC5550D}"/>
+                <a16:creationId xmlns:a16="http://schemas.microsoft.com/office/drawing/2014/main" id="{BF247081-2883-4758-93C8-EF4610149A4C}"/>
               </a:ext>
             </a:extLst>
           </p:cNvPr>
@@ -24693,7 +24693,7 @@
           <p:cNvPr id="4" name="">
             <a:extLst xmlns:a="http://schemas.openxmlformats.org/drawingml/2006/main">
               <a:ext uri="{FF2B5EF4-FFF2-40B4-BE49-F238E27FC236}">
-                <a16:creationId xmlns:a16="http://schemas.microsoft.com/office/drawing/2014/main" id="{7DC357C4-3389-4B74-8950-15BF58727811}"/>
+                <a16:creationId xmlns:a16="http://schemas.microsoft.com/office/drawing/2014/main" id="{DAEC8785-CA94-4D81-9D55-43256C122A6D}"/>
               </a:ext>
             </a:extLst>
           </p:cNvPr>
@@ -24738,7 +24738,7 @@
           <p:cNvPr id="5" name="">
             <a:extLst xmlns:a="http://schemas.openxmlformats.org/drawingml/2006/main">
               <a:ext uri="{FF2B5EF4-FFF2-40B4-BE49-F238E27FC236}">
-                <a16:creationId xmlns:a16="http://schemas.microsoft.com/office/drawing/2014/main" id="{FBC850D6-18CF-46F5-A6E4-C0B7C51F608A}"/>
+                <a16:creationId xmlns:a16="http://schemas.microsoft.com/office/drawing/2014/main" id="{B10CD07F-B1BB-4C9B-8A5F-6FEB3C85746A}"/>
               </a:ext>
             </a:extLst>
           </p:cNvPr>
@@ -24769,7 +24769,7 @@
           <p:cNvPr id="6" name="">
             <a:extLst xmlns:a="http://schemas.openxmlformats.org/drawingml/2006/main">
               <a:ext uri="{FF2B5EF4-FFF2-40B4-BE49-F238E27FC236}">
-                <a16:creationId xmlns:a16="http://schemas.microsoft.com/office/drawing/2014/main" id="{9E2ECBAA-A56C-4C44-993D-961DA0C08A62}"/>
+                <a16:creationId xmlns:a16="http://schemas.microsoft.com/office/drawing/2014/main" id="{C267D177-3FCF-46B4-B389-F337DD8712E7}"/>
               </a:ext>
             </a:extLst>
           </p:cNvPr>
@@ -24800,7 +24800,7 @@
           <p:cNvPr id="7" name="">
             <a:extLst xmlns:a="http://schemas.openxmlformats.org/drawingml/2006/main">
               <a:ext uri="{FF2B5EF4-FFF2-40B4-BE49-F238E27FC236}">
-                <a16:creationId xmlns:a16="http://schemas.microsoft.com/office/drawing/2014/main" id="{E3BBDE10-1B2C-46D6-AB6C-850533D1F000}"/>
+                <a16:creationId xmlns:a16="http://schemas.microsoft.com/office/drawing/2014/main" id="{C08C99D7-FAFC-4AE1-9F69-753633580376}"/>
               </a:ext>
             </a:extLst>
           </p:cNvPr>
@@ -24845,7 +24845,7 @@
           <p:cNvPr id="8" name="">
             <a:extLst xmlns:a="http://schemas.openxmlformats.org/drawingml/2006/main">
               <a:ext uri="{FF2B5EF4-FFF2-40B4-BE49-F238E27FC236}">
-                <a16:creationId xmlns:a16="http://schemas.microsoft.com/office/drawing/2014/main" id="{31320A68-F04F-40A1-A52F-C0B807E5F50A}"/>
+                <a16:creationId xmlns:a16="http://schemas.microsoft.com/office/drawing/2014/main" id="{D9140755-7434-4DE9-B7E3-1F655A0DC841}"/>
               </a:ext>
             </a:extLst>
           </p:cNvPr>
@@ -24890,7 +24890,7 @@
           <p:cNvPr id="9" name="">
             <a:extLst xmlns:a="http://schemas.openxmlformats.org/drawingml/2006/main">
               <a:ext uri="{FF2B5EF4-FFF2-40B4-BE49-F238E27FC236}">
-                <a16:creationId xmlns:a16="http://schemas.microsoft.com/office/drawing/2014/main" id="{DF0DB0DB-AD2A-4577-B987-7284D243DE6B}"/>
+                <a16:creationId xmlns:a16="http://schemas.microsoft.com/office/drawing/2014/main" id="{2025BFB0-F2CE-43F0-BDBE-7401925505B8}"/>
               </a:ext>
             </a:extLst>
           </p:cNvPr>
@@ -24921,7 +24921,7 @@
           <p:cNvPr id="10" name="">
             <a:extLst xmlns:a="http://schemas.openxmlformats.org/drawingml/2006/main">
               <a:ext uri="{FF2B5EF4-FFF2-40B4-BE49-F238E27FC236}">
-                <a16:creationId xmlns:a16="http://schemas.microsoft.com/office/drawing/2014/main" id="{997BF27B-02D5-45F8-A285-C673B347404D}"/>
+                <a16:creationId xmlns:a16="http://schemas.microsoft.com/office/drawing/2014/main" id="{59AACFAF-3151-46C9-ADBD-7D3F2A4A53E8}"/>
               </a:ext>
             </a:extLst>
           </p:cNvPr>
@@ -24966,7 +24966,7 @@
           <p:cNvPr id="11" name="">
             <a:extLst xmlns:a="http://schemas.openxmlformats.org/drawingml/2006/main">
               <a:ext uri="{FF2B5EF4-FFF2-40B4-BE49-F238E27FC236}">
-                <a16:creationId xmlns:a16="http://schemas.microsoft.com/office/drawing/2014/main" id="{4D74DEBC-FC77-4CBD-9C21-DC62FCAAC4D6}"/>
+                <a16:creationId xmlns:a16="http://schemas.microsoft.com/office/drawing/2014/main" id="{FAD783AF-DECC-4356-84C0-3B2142D0FF75}"/>
               </a:ext>
             </a:extLst>
           </p:cNvPr>
@@ -25011,7 +25011,7 @@
           <p:cNvPr id="12" name="">
             <a:extLst xmlns:a="http://schemas.openxmlformats.org/drawingml/2006/main">
               <a:ext uri="{FF2B5EF4-FFF2-40B4-BE49-F238E27FC236}">
-                <a16:creationId xmlns:a16="http://schemas.microsoft.com/office/drawing/2014/main" id="{3B83BF78-F6D9-4FCF-8FD9-E4B541AE03A6}"/>
+                <a16:creationId xmlns:a16="http://schemas.microsoft.com/office/drawing/2014/main" id="{E77AA008-91BD-4C9E-88C0-D06024C679F6}"/>
               </a:ext>
             </a:extLst>
           </p:cNvPr>
@@ -25056,7 +25056,7 @@
           <p:cNvPr id="13" name="">
             <a:extLst xmlns:a="http://schemas.openxmlformats.org/drawingml/2006/main">
               <a:ext uri="{FF2B5EF4-FFF2-40B4-BE49-F238E27FC236}">
-                <a16:creationId xmlns:a16="http://schemas.microsoft.com/office/drawing/2014/main" id="{D4F03061-CB70-478B-AB50-8A5054AB0753}"/>
+                <a16:creationId xmlns:a16="http://schemas.microsoft.com/office/drawing/2014/main" id="{A493533C-6C64-40D2-8A83-7797AA5E7970}"/>
               </a:ext>
             </a:extLst>
           </p:cNvPr>
@@ -25089,7 +25089,7 @@
           <p:cNvPr id="14" name="">
             <a:extLst xmlns:a="http://schemas.openxmlformats.org/drawingml/2006/main">
               <a:ext uri="{FF2B5EF4-FFF2-40B4-BE49-F238E27FC236}">
-                <a16:creationId xmlns:a16="http://schemas.microsoft.com/office/drawing/2014/main" id="{74E17172-E41E-462B-8A42-FEA4D8048B89}"/>
+                <a16:creationId xmlns:a16="http://schemas.microsoft.com/office/drawing/2014/main" id="{08D3FFB1-14ED-46DE-B552-293A2D3AC0A0}"/>
               </a:ext>
             </a:extLst>
           </p:cNvPr>
@@ -25134,7 +25134,7 @@
           <p:cNvPr id="15" name="">
             <a:extLst xmlns:a="http://schemas.openxmlformats.org/drawingml/2006/main">
               <a:ext uri="{FF2B5EF4-FFF2-40B4-BE49-F238E27FC236}">
-                <a16:creationId xmlns:a16="http://schemas.microsoft.com/office/drawing/2014/main" id="{82CF08B2-669A-46C7-A04A-C5AB31B84287}"/>
+                <a16:creationId xmlns:a16="http://schemas.microsoft.com/office/drawing/2014/main" id="{A0BAB2B5-E7C9-4301-82B6-A23D033B1DD0}"/>
               </a:ext>
             </a:extLst>
           </p:cNvPr>
@@ -25179,7 +25179,7 @@
           <p:cNvPr id="16" name="">
             <a:extLst xmlns:a="http://schemas.openxmlformats.org/drawingml/2006/main">
               <a:ext uri="{FF2B5EF4-FFF2-40B4-BE49-F238E27FC236}">
-                <a16:creationId xmlns:a16="http://schemas.microsoft.com/office/drawing/2014/main" id="{102C08A3-5BF8-4E6E-AF90-C7D732444DE7}"/>
+                <a16:creationId xmlns:a16="http://schemas.microsoft.com/office/drawing/2014/main" id="{C1052CA2-92D7-4560-88FC-6CC9BB54499E}"/>
               </a:ext>
             </a:extLst>
           </p:cNvPr>
@@ -25224,7 +25224,7 @@
           <p:cNvPr id="17" name="">
             <a:extLst xmlns:a="http://schemas.openxmlformats.org/drawingml/2006/main">
               <a:ext uri="{FF2B5EF4-FFF2-40B4-BE49-F238E27FC236}">
-                <a16:creationId xmlns:a16="http://schemas.microsoft.com/office/drawing/2014/main" id="{5D3CCD2D-0C96-438C-B702-4670F2DA17A0}"/>
+                <a16:creationId xmlns:a16="http://schemas.microsoft.com/office/drawing/2014/main" id="{6F5521D7-1E3E-4C9C-9D3A-4D17EB86FC71}"/>
               </a:ext>
             </a:extLst>
           </p:cNvPr>
@@ -25257,7 +25257,7 @@
           <p:cNvPr id="18" name="">
             <a:extLst xmlns:a="http://schemas.openxmlformats.org/drawingml/2006/main">
               <a:ext uri="{FF2B5EF4-FFF2-40B4-BE49-F238E27FC236}">
-                <a16:creationId xmlns:a16="http://schemas.microsoft.com/office/drawing/2014/main" id="{5EC53D29-64E4-4375-B5F0-AEA3BCE1B448}"/>
+                <a16:creationId xmlns:a16="http://schemas.microsoft.com/office/drawing/2014/main" id="{24F82966-FF73-4347-9EE0-5E9084B847AE}"/>
               </a:ext>
             </a:extLst>
           </p:cNvPr>
@@ -25302,7 +25302,7 @@
           <p:cNvPr id="19" name="">
             <a:extLst xmlns:a="http://schemas.openxmlformats.org/drawingml/2006/main">
               <a:ext uri="{FF2B5EF4-FFF2-40B4-BE49-F238E27FC236}">
-                <a16:creationId xmlns:a16="http://schemas.microsoft.com/office/drawing/2014/main" id="{BB6583B1-E61F-4FAF-8655-B3A67783F07A}"/>
+                <a16:creationId xmlns:a16="http://schemas.microsoft.com/office/drawing/2014/main" id="{48EEF24C-AE4E-44A1-9091-C6ED6881211E}"/>
               </a:ext>
             </a:extLst>
           </p:cNvPr>
@@ -25347,7 +25347,7 @@
           <p:cNvPr id="20" name="">
             <a:extLst xmlns:a="http://schemas.openxmlformats.org/drawingml/2006/main">
               <a:ext uri="{FF2B5EF4-FFF2-40B4-BE49-F238E27FC236}">
-                <a16:creationId xmlns:a16="http://schemas.microsoft.com/office/drawing/2014/main" id="{B11B55E0-37BD-4FBD-9CEC-B46C9348F52E}"/>
+                <a16:creationId xmlns:a16="http://schemas.microsoft.com/office/drawing/2014/main" id="{F14514F2-96BF-4554-ADD4-D57F60A22245}"/>
               </a:ext>
             </a:extLst>
           </p:cNvPr>
@@ -25392,7 +25392,7 @@
           <p:cNvPr id="21" name="">
             <a:extLst xmlns:a="http://schemas.openxmlformats.org/drawingml/2006/main">
               <a:ext uri="{FF2B5EF4-FFF2-40B4-BE49-F238E27FC236}">
-                <a16:creationId xmlns:a16="http://schemas.microsoft.com/office/drawing/2014/main" id="{BD41F9B2-FECD-42DA-AECD-F4CE0CB9F1E6}"/>
+                <a16:creationId xmlns:a16="http://schemas.microsoft.com/office/drawing/2014/main" id="{95657255-F2C1-4CBE-97DD-D1BEAB0BE205}"/>
               </a:ext>
             </a:extLst>
           </p:cNvPr>
@@ -25425,7 +25425,7 @@
           <p:cNvPr id="22" name="">
             <a:extLst xmlns:a="http://schemas.openxmlformats.org/drawingml/2006/main">
               <a:ext uri="{FF2B5EF4-FFF2-40B4-BE49-F238E27FC236}">
-                <a16:creationId xmlns:a16="http://schemas.microsoft.com/office/drawing/2014/main" id="{2D68F976-9E7E-421E-8044-9818C1F0A282}"/>
+                <a16:creationId xmlns:a16="http://schemas.microsoft.com/office/drawing/2014/main" id="{A5409787-75D4-48F3-B870-DAB24A7B19FB}"/>
               </a:ext>
             </a:extLst>
           </p:cNvPr>
@@ -25456,7 +25456,7 @@
           <p:cNvPr id="23" name="">
             <a:extLst xmlns:a="http://schemas.openxmlformats.org/drawingml/2006/main">
               <a:ext uri="{FF2B5EF4-FFF2-40B4-BE49-F238E27FC236}">
-                <a16:creationId xmlns:a16="http://schemas.microsoft.com/office/drawing/2014/main" id="{E7911875-C674-4432-B926-9B01A698BED3}"/>
+                <a16:creationId xmlns:a16="http://schemas.microsoft.com/office/drawing/2014/main" id="{C352BB74-1EFB-41E7-ABE9-B19B354B78C4}"/>
               </a:ext>
             </a:extLst>
           </p:cNvPr>
@@ -25501,7 +25501,7 @@
           <p:cNvPr id="24" name="">
             <a:extLst xmlns:a="http://schemas.openxmlformats.org/drawingml/2006/main">
               <a:ext uri="{FF2B5EF4-FFF2-40B4-BE49-F238E27FC236}">
-                <a16:creationId xmlns:a16="http://schemas.microsoft.com/office/drawing/2014/main" id="{17132017-1B3C-4952-ABDA-25C7D1E88591}"/>
+                <a16:creationId xmlns:a16="http://schemas.microsoft.com/office/drawing/2014/main" id="{9AEE0AE6-9A23-46DB-8611-021536828F6E}"/>
               </a:ext>
             </a:extLst>
           </p:cNvPr>
@@ -25546,7 +25546,7 @@
           <p:cNvPr id="25" name="">
             <a:extLst xmlns:a="http://schemas.openxmlformats.org/drawingml/2006/main">
               <a:ext uri="{FF2B5EF4-FFF2-40B4-BE49-F238E27FC236}">
-                <a16:creationId xmlns:a16="http://schemas.microsoft.com/office/drawing/2014/main" id="{9F0F9E22-93F4-4D1E-B7C7-C011123D65AE}"/>
+                <a16:creationId xmlns:a16="http://schemas.microsoft.com/office/drawing/2014/main" id="{741DA8FF-2B17-4DDA-AB04-C59B1378DE0E}"/>
               </a:ext>
             </a:extLst>
           </p:cNvPr>
@@ -25591,7 +25591,7 @@
           <p:cNvPr id="26" name="">
             <a:extLst xmlns:a="http://schemas.openxmlformats.org/drawingml/2006/main">
               <a:ext uri="{FF2B5EF4-FFF2-40B4-BE49-F238E27FC236}">
-                <a16:creationId xmlns:a16="http://schemas.microsoft.com/office/drawing/2014/main" id="{1C900A2E-354D-4A65-AF27-CA5B724907BC}"/>
+                <a16:creationId xmlns:a16="http://schemas.microsoft.com/office/drawing/2014/main" id="{EFA1E1C1-BE36-457B-925E-58B8DA67EA24}"/>
               </a:ext>
             </a:extLst>
           </p:cNvPr>
@@ -25624,7 +25624,7 @@
           <p:cNvPr id="27" name="">
             <a:extLst xmlns:a="http://schemas.openxmlformats.org/drawingml/2006/main">
               <a:ext uri="{FF2B5EF4-FFF2-40B4-BE49-F238E27FC236}">
-                <a16:creationId xmlns:a16="http://schemas.microsoft.com/office/drawing/2014/main" id="{94FECCDB-6E73-4850-BB63-91B8E8262D76}"/>
+                <a16:creationId xmlns:a16="http://schemas.microsoft.com/office/drawing/2014/main" id="{699AC923-DD18-4CBD-B263-65AC876F4CEC}"/>
               </a:ext>
             </a:extLst>
           </p:cNvPr>
@@ -25669,7 +25669,7 @@
           <p:cNvPr id="28" name="">
             <a:extLst xmlns:a="http://schemas.openxmlformats.org/drawingml/2006/main">
               <a:ext uri="{FF2B5EF4-FFF2-40B4-BE49-F238E27FC236}">
-                <a16:creationId xmlns:a16="http://schemas.microsoft.com/office/drawing/2014/main" id="{04915857-8321-44CE-9464-CE4B93B6C4D9}"/>
+                <a16:creationId xmlns:a16="http://schemas.microsoft.com/office/drawing/2014/main" id="{3BEBE7D1-867C-43E7-87B5-86826E176107}"/>
               </a:ext>
             </a:extLst>
           </p:cNvPr>
@@ -25714,7 +25714,7 @@
           <p:cNvPr id="29" name="">
             <a:extLst xmlns:a="http://schemas.openxmlformats.org/drawingml/2006/main">
               <a:ext uri="{FF2B5EF4-FFF2-40B4-BE49-F238E27FC236}">
-                <a16:creationId xmlns:a16="http://schemas.microsoft.com/office/drawing/2014/main" id="{480BCAE4-6B5B-4115-93C6-20316AEA3228}"/>
+                <a16:creationId xmlns:a16="http://schemas.microsoft.com/office/drawing/2014/main" id="{2F5BFCCB-ACEC-4D75-9D2C-045EBFF725AE}"/>
               </a:ext>
             </a:extLst>
           </p:cNvPr>
@@ -25759,7 +25759,7 @@
           <p:cNvPr id="30" name="">
             <a:extLst xmlns:a="http://schemas.openxmlformats.org/drawingml/2006/main">
               <a:ext uri="{FF2B5EF4-FFF2-40B4-BE49-F238E27FC236}">
-                <a16:creationId xmlns:a16="http://schemas.microsoft.com/office/drawing/2014/main" id="{17B93EF3-C67E-4D56-8CF1-8D335D8777E8}"/>
+                <a16:creationId xmlns:a16="http://schemas.microsoft.com/office/drawing/2014/main" id="{51EF376F-3D38-4B8C-BE31-9A49E6B5B7EB}"/>
               </a:ext>
             </a:extLst>
           </p:cNvPr>
@@ -25794,7 +25794,7 @@
           <p:cNvPr id="31" name="">
             <a:extLst xmlns:a="http://schemas.openxmlformats.org/drawingml/2006/main">
               <a:ext uri="{FF2B5EF4-FFF2-40B4-BE49-F238E27FC236}">
-                <a16:creationId xmlns:a16="http://schemas.microsoft.com/office/drawing/2014/main" id="{CFF3A7A9-55F8-4C13-ACC4-578B553C3A5A}"/>
+                <a16:creationId xmlns:a16="http://schemas.microsoft.com/office/drawing/2014/main" id="{D3382AE6-7D49-4616-9EB3-060B7F389E56}"/>
               </a:ext>
             </a:extLst>
           </p:cNvPr>
@@ -25825,7 +25825,7 @@
           <p:cNvPr id="32" name="">
             <a:extLst xmlns:a="http://schemas.openxmlformats.org/drawingml/2006/main">
               <a:ext uri="{FF2B5EF4-FFF2-40B4-BE49-F238E27FC236}">
-                <a16:creationId xmlns:a16="http://schemas.microsoft.com/office/drawing/2014/main" id="{33911D10-1863-4B67-9699-0C1F9C4DD93E}"/>
+                <a16:creationId xmlns:a16="http://schemas.microsoft.com/office/drawing/2014/main" id="{5CA7F993-DB4C-4F4B-862C-7D8C073DC3E5}"/>
               </a:ext>
             </a:extLst>
           </p:cNvPr>
@@ -25870,7 +25870,7 @@
           <p:cNvPr id="33" name="">
             <a:extLst xmlns:a="http://schemas.openxmlformats.org/drawingml/2006/main">
               <a:ext uri="{FF2B5EF4-FFF2-40B4-BE49-F238E27FC236}">
-                <a16:creationId xmlns:a16="http://schemas.microsoft.com/office/drawing/2014/main" id="{601AEFC7-C2BB-4FAE-83EE-4939D9A72469}"/>
+                <a16:creationId xmlns:a16="http://schemas.microsoft.com/office/drawing/2014/main" id="{76706924-0279-41FE-8A67-6BC024FD7230}"/>
               </a:ext>
             </a:extLst>
           </p:cNvPr>
@@ -25915,7 +25915,7 @@
           <p:cNvPr id="34" name="">
             <a:extLst xmlns:a="http://schemas.openxmlformats.org/drawingml/2006/main">
               <a:ext uri="{FF2B5EF4-FFF2-40B4-BE49-F238E27FC236}">
-                <a16:creationId xmlns:a16="http://schemas.microsoft.com/office/drawing/2014/main" id="{D72477D8-0B8B-4E4F-BC09-4B31E6D2A727}"/>
+                <a16:creationId xmlns:a16="http://schemas.microsoft.com/office/drawing/2014/main" id="{12D3B68A-763B-4D24-9481-337099B3F6C1}"/>
               </a:ext>
             </a:extLst>
           </p:cNvPr>
@@ -25958,7 +25958,7 @@
     </p:spTree>
     <p:extLst>
       <p:ext uri="{BB962C8B-B14F-4D97-AF65-F5344CB8AC3E}">
-        <p14:creationId xmlns:p14="http://schemas.microsoft.com/office/powerpoint/2010/main" val="1976412895"/>
+        <p14:creationId xmlns:p14="http://schemas.microsoft.com/office/powerpoint/2010/main" val="1103123142"/>
       </p:ext>
     </p:extLst>
   </p:cSld>
@@ -25982,7 +25982,7 @@
           <p:cNvPr id="47" name="">
             <a:extLst xmlns:a="http://schemas.openxmlformats.org/drawingml/2006/main">
               <a:ext uri="{FF2B5EF4-FFF2-40B4-BE49-F238E27FC236}">
-                <a16:creationId xmlns:a16="http://schemas.microsoft.com/office/drawing/2014/main" id="{9D89163B-521A-4D64-B4A4-D706B7C34BF3}"/>
+                <a16:creationId xmlns:a16="http://schemas.microsoft.com/office/drawing/2014/main" id="{9CE33CAC-8738-490E-909E-4A4A66A99E04}"/>
               </a:ext>
             </a:extLst>
           </p:cNvPr>
@@ -26013,7 +26013,7 @@
           <p:cNvPr id="2" name="">
             <a:extLst xmlns:a="http://schemas.openxmlformats.org/drawingml/2006/main">
               <a:ext uri="{FF2B5EF4-FFF2-40B4-BE49-F238E27FC236}">
-                <a16:creationId xmlns:a16="http://schemas.microsoft.com/office/drawing/2014/main" id="{FD406887-7A0A-436A-8C7F-E7128B712676}"/>
+                <a16:creationId xmlns:a16="http://schemas.microsoft.com/office/drawing/2014/main" id="{30BEC851-3236-4A7E-96CA-F2D21C67FAD0}"/>
               </a:ext>
             </a:extLst>
           </p:cNvPr>
@@ -26058,7 +26058,7 @@
           <p:cNvPr id="3" name="">
             <a:extLst xmlns:a="http://schemas.openxmlformats.org/drawingml/2006/main">
               <a:ext uri="{FF2B5EF4-FFF2-40B4-BE49-F238E27FC236}">
-                <a16:creationId xmlns:a16="http://schemas.microsoft.com/office/drawing/2014/main" id="{7BFD4AAC-13B8-4E98-B70A-CB504767D36A}"/>
+                <a16:creationId xmlns:a16="http://schemas.microsoft.com/office/drawing/2014/main" id="{98362AF9-F19D-48CC-B817-AF16A89D3821}"/>
               </a:ext>
             </a:extLst>
           </p:cNvPr>
@@ -26103,7 +26103,7 @@
           <p:cNvPr id="4" name="">
             <a:extLst xmlns:a="http://schemas.openxmlformats.org/drawingml/2006/main">
               <a:ext uri="{FF2B5EF4-FFF2-40B4-BE49-F238E27FC236}">
-                <a16:creationId xmlns:a16="http://schemas.microsoft.com/office/drawing/2014/main" id="{AF55D4E0-FE99-4175-BE00-DD5AD048C0DB}"/>
+                <a16:creationId xmlns:a16="http://schemas.microsoft.com/office/drawing/2014/main" id="{2BEC326E-CB40-4D75-B3B8-800EFCA48DF9}"/>
               </a:ext>
             </a:extLst>
           </p:cNvPr>
@@ -26148,7 +26148,7 @@
           <p:cNvPr id="5" name="">
             <a:extLst xmlns:a="http://schemas.openxmlformats.org/drawingml/2006/main">
               <a:ext uri="{FF2B5EF4-FFF2-40B4-BE49-F238E27FC236}">
-                <a16:creationId xmlns:a16="http://schemas.microsoft.com/office/drawing/2014/main" id="{20B1A8DB-E7EA-4BB5-918C-E7EDBE89AD6D}"/>
+                <a16:creationId xmlns:a16="http://schemas.microsoft.com/office/drawing/2014/main" id="{90C8BFD1-E383-408D-BEF5-44BDA8014921}"/>
               </a:ext>
             </a:extLst>
           </p:cNvPr>
@@ -26179,7 +26179,7 @@
           <p:cNvPr id="6" name="">
             <a:extLst xmlns:a="http://schemas.openxmlformats.org/drawingml/2006/main">
               <a:ext uri="{FF2B5EF4-FFF2-40B4-BE49-F238E27FC236}">
-                <a16:creationId xmlns:a16="http://schemas.microsoft.com/office/drawing/2014/main" id="{87A9A4BF-C6ED-42F3-A192-F33390645DD9}"/>
+                <a16:creationId xmlns:a16="http://schemas.microsoft.com/office/drawing/2014/main" id="{F9D899D5-BF64-42EE-A747-CB9B2E1BFF82}"/>
               </a:ext>
             </a:extLst>
           </p:cNvPr>
@@ -26210,7 +26210,7 @@
           <p:cNvPr id="7" name="">
             <a:extLst xmlns:a="http://schemas.openxmlformats.org/drawingml/2006/main">
               <a:ext uri="{FF2B5EF4-FFF2-40B4-BE49-F238E27FC236}">
-                <a16:creationId xmlns:a16="http://schemas.microsoft.com/office/drawing/2014/main" id="{E64CAAB1-32A6-4CAB-BD9A-CC25459F0236}"/>
+                <a16:creationId xmlns:a16="http://schemas.microsoft.com/office/drawing/2014/main" id="{79FEB556-0605-45AF-8AAD-50E8B1D0CA2A}"/>
               </a:ext>
             </a:extLst>
           </p:cNvPr>
@@ -26255,7 +26255,7 @@
           <p:cNvPr id="8" name="">
             <a:extLst xmlns:a="http://schemas.openxmlformats.org/drawingml/2006/main">
               <a:ext uri="{FF2B5EF4-FFF2-40B4-BE49-F238E27FC236}">
-                <a16:creationId xmlns:a16="http://schemas.microsoft.com/office/drawing/2014/main" id="{043FB0E5-8A8C-4250-BBA0-91489795AD92}"/>
+                <a16:creationId xmlns:a16="http://schemas.microsoft.com/office/drawing/2014/main" id="{D164320C-1512-499A-AA4F-4C66700FEBA2}"/>
               </a:ext>
             </a:extLst>
           </p:cNvPr>
@@ -26300,7 +26300,7 @@
           <p:cNvPr id="9" name="">
             <a:extLst xmlns:a="http://schemas.openxmlformats.org/drawingml/2006/main">
               <a:ext uri="{FF2B5EF4-FFF2-40B4-BE49-F238E27FC236}">
-                <a16:creationId xmlns:a16="http://schemas.microsoft.com/office/drawing/2014/main" id="{E37FB766-54B2-4A02-B9D2-20A4E67F9ACC}"/>
+                <a16:creationId xmlns:a16="http://schemas.microsoft.com/office/drawing/2014/main" id="{584E20D3-6CC5-406E-87F7-4CBE43A50FCB}"/>
               </a:ext>
             </a:extLst>
           </p:cNvPr>
@@ -26333,7 +26333,7 @@
           <p:cNvPr id="10" name="">
             <a:extLst xmlns:a="http://schemas.openxmlformats.org/drawingml/2006/main">
               <a:ext uri="{FF2B5EF4-FFF2-40B4-BE49-F238E27FC236}">
-                <a16:creationId xmlns:a16="http://schemas.microsoft.com/office/drawing/2014/main" id="{3C54BEBE-7A61-4AB2-AB4E-631BBC918303}"/>
+                <a16:creationId xmlns:a16="http://schemas.microsoft.com/office/drawing/2014/main" id="{79948D2B-ADD1-4020-91D1-20B8B12CF6BE}"/>
               </a:ext>
             </a:extLst>
           </p:cNvPr>
@@ -26364,7 +26364,7 @@
           <p:cNvPr id="11" name="">
             <a:extLst xmlns:a="http://schemas.openxmlformats.org/drawingml/2006/main">
               <a:ext uri="{FF2B5EF4-FFF2-40B4-BE49-F238E27FC236}">
-                <a16:creationId xmlns:a16="http://schemas.microsoft.com/office/drawing/2014/main" id="{5D9FC82F-7C02-45AF-BA4E-FA63D291F6EB}"/>
+                <a16:creationId xmlns:a16="http://schemas.microsoft.com/office/drawing/2014/main" id="{B9FCDD61-401C-4E65-8CD0-C69C15BC3402}"/>
               </a:ext>
             </a:extLst>
           </p:cNvPr>
@@ -26409,7 +26409,7 @@
           <p:cNvPr id="12" name="">
             <a:extLst xmlns:a="http://schemas.openxmlformats.org/drawingml/2006/main">
               <a:ext uri="{FF2B5EF4-FFF2-40B4-BE49-F238E27FC236}">
-                <a16:creationId xmlns:a16="http://schemas.microsoft.com/office/drawing/2014/main" id="{FAAC3B15-4348-4D4A-BB52-66677E08420F}"/>
+                <a16:creationId xmlns:a16="http://schemas.microsoft.com/office/drawing/2014/main" id="{3A75663F-554F-41E3-A25F-574C90ED212F}"/>
               </a:ext>
             </a:extLst>
           </p:cNvPr>
@@ -26454,7 +26454,7 @@
           <p:cNvPr id="13" name="">
             <a:extLst xmlns:a="http://schemas.openxmlformats.org/drawingml/2006/main">
               <a:ext uri="{FF2B5EF4-FFF2-40B4-BE49-F238E27FC236}">
-                <a16:creationId xmlns:a16="http://schemas.microsoft.com/office/drawing/2014/main" id="{38A71E98-ABBD-4019-BDEC-D5CAAB432096}"/>
+                <a16:creationId xmlns:a16="http://schemas.microsoft.com/office/drawing/2014/main" id="{43AB3B39-82AC-48BA-B86C-A17CE3A1679D}"/>
               </a:ext>
             </a:extLst>
           </p:cNvPr>
@@ -26487,7 +26487,7 @@
           <p:cNvPr id="14" name="">
             <a:extLst xmlns:a="http://schemas.openxmlformats.org/drawingml/2006/main">
               <a:ext uri="{FF2B5EF4-FFF2-40B4-BE49-F238E27FC236}">
-                <a16:creationId xmlns:a16="http://schemas.microsoft.com/office/drawing/2014/main" id="{95D5F722-F7D5-465A-B3CD-46B0691DD6CF}"/>
+                <a16:creationId xmlns:a16="http://schemas.microsoft.com/office/drawing/2014/main" id="{61DDE255-CAFF-42AA-9ACC-C31D2AFBE223}"/>
               </a:ext>
             </a:extLst>
           </p:cNvPr>
@@ -26520,7 +26520,7 @@
           <p:cNvPr id="15" name="">
             <a:extLst xmlns:a="http://schemas.openxmlformats.org/drawingml/2006/main">
               <a:ext uri="{FF2B5EF4-FFF2-40B4-BE49-F238E27FC236}">
-                <a16:creationId xmlns:a16="http://schemas.microsoft.com/office/drawing/2014/main" id="{B0ADEEBC-9769-4173-A706-BB7AAAFCDA85}"/>
+                <a16:creationId xmlns:a16="http://schemas.microsoft.com/office/drawing/2014/main" id="{17C678B0-7135-4437-9281-051547427CB2}"/>
               </a:ext>
             </a:extLst>
           </p:cNvPr>
@@ -26551,7 +26551,7 @@
           <p:cNvPr id="16" name="">
             <a:extLst xmlns:a="http://schemas.openxmlformats.org/drawingml/2006/main">
               <a:ext uri="{FF2B5EF4-FFF2-40B4-BE49-F238E27FC236}">
-                <a16:creationId xmlns:a16="http://schemas.microsoft.com/office/drawing/2014/main" id="{B1014E6B-778B-4E48-A302-E725BEF8EBB0}"/>
+                <a16:creationId xmlns:a16="http://schemas.microsoft.com/office/drawing/2014/main" id="{DD1C761D-80CA-49C7-8BA1-18B2B1D2FD99}"/>
               </a:ext>
             </a:extLst>
           </p:cNvPr>
@@ -26596,7 +26596,7 @@
           <p:cNvPr id="17" name="">
             <a:extLst xmlns:a="http://schemas.openxmlformats.org/drawingml/2006/main">
               <a:ext uri="{FF2B5EF4-FFF2-40B4-BE49-F238E27FC236}">
-                <a16:creationId xmlns:a16="http://schemas.microsoft.com/office/drawing/2014/main" id="{AAB0FBE7-2A80-4C5B-95D0-D3D9963184D5}"/>
+                <a16:creationId xmlns:a16="http://schemas.microsoft.com/office/drawing/2014/main" id="{79AE57AD-0642-4EF9-84C1-4AD1C75F410E}"/>
               </a:ext>
             </a:extLst>
           </p:cNvPr>
@@ -26641,7 +26641,7 @@
           <p:cNvPr id="18" name="">
             <a:extLst xmlns:a="http://schemas.openxmlformats.org/drawingml/2006/main">
               <a:ext uri="{FF2B5EF4-FFF2-40B4-BE49-F238E27FC236}">
-                <a16:creationId xmlns:a16="http://schemas.microsoft.com/office/drawing/2014/main" id="{429D5854-044A-43F0-9003-1C16085A8F39}"/>
+                <a16:creationId xmlns:a16="http://schemas.microsoft.com/office/drawing/2014/main" id="{0D877A85-9C0C-4F1C-9A8B-8ECB99E7B1A4}"/>
               </a:ext>
             </a:extLst>
           </p:cNvPr>
@@ -26674,7 +26674,7 @@
           <p:cNvPr id="19" name="">
             <a:extLst xmlns:a="http://schemas.openxmlformats.org/drawingml/2006/main">
               <a:ext uri="{FF2B5EF4-FFF2-40B4-BE49-F238E27FC236}">
-                <a16:creationId xmlns:a16="http://schemas.microsoft.com/office/drawing/2014/main" id="{AA136119-BBE7-4167-9651-2500D62F6BA2}"/>
+                <a16:creationId xmlns:a16="http://schemas.microsoft.com/office/drawing/2014/main" id="{61CF8BD4-4158-4AB2-A28B-AB28721FF0B7}"/>
               </a:ext>
             </a:extLst>
           </p:cNvPr>
@@ -26707,7 +26707,7 @@
           <p:cNvPr id="20" name="">
             <a:extLst xmlns:a="http://schemas.openxmlformats.org/drawingml/2006/main">
               <a:ext uri="{FF2B5EF4-FFF2-40B4-BE49-F238E27FC236}">
-                <a16:creationId xmlns:a16="http://schemas.microsoft.com/office/drawing/2014/main" id="{02E0F4AD-3C83-45B1-8DCD-85F0BCBB91DD}"/>
+                <a16:creationId xmlns:a16="http://schemas.microsoft.com/office/drawing/2014/main" id="{92D2F812-DA9F-47AB-865D-41F418DDF948}"/>
               </a:ext>
             </a:extLst>
           </p:cNvPr>
@@ -26738,7 +26738,7 @@
           <p:cNvPr id="21" name="">
             <a:extLst xmlns:a="http://schemas.openxmlformats.org/drawingml/2006/main">
               <a:ext uri="{FF2B5EF4-FFF2-40B4-BE49-F238E27FC236}">
-                <a16:creationId xmlns:a16="http://schemas.microsoft.com/office/drawing/2014/main" id="{96ABC7F2-23CD-4C3C-811F-1883E52DB573}"/>
+                <a16:creationId xmlns:a16="http://schemas.microsoft.com/office/drawing/2014/main" id="{8E92FDEF-96B4-43C2-83D2-DD14C12FBDB5}"/>
               </a:ext>
             </a:extLst>
           </p:cNvPr>
@@ -26783,7 +26783,7 @@
           <p:cNvPr id="22" name="">
             <a:extLst xmlns:a="http://schemas.openxmlformats.org/drawingml/2006/main">
               <a:ext uri="{FF2B5EF4-FFF2-40B4-BE49-F238E27FC236}">
-                <a16:creationId xmlns:a16="http://schemas.microsoft.com/office/drawing/2014/main" id="{F6338529-83D3-4673-982E-E7D47FC05B4F}"/>
+                <a16:creationId xmlns:a16="http://schemas.microsoft.com/office/drawing/2014/main" id="{50B6F4B2-1938-4DC2-9B3E-91890635A192}"/>
               </a:ext>
             </a:extLst>
           </p:cNvPr>
@@ -26828,7 +26828,7 @@
           <p:cNvPr id="23" name="">
             <a:extLst xmlns:a="http://schemas.openxmlformats.org/drawingml/2006/main">
               <a:ext uri="{FF2B5EF4-FFF2-40B4-BE49-F238E27FC236}">
-                <a16:creationId xmlns:a16="http://schemas.microsoft.com/office/drawing/2014/main" id="{39710A55-04E4-4064-BD4D-0A9779291662}"/>
+                <a16:creationId xmlns:a16="http://schemas.microsoft.com/office/drawing/2014/main" id="{0D105BAB-ADAD-43D0-A492-F416463E82AF}"/>
               </a:ext>
             </a:extLst>
           </p:cNvPr>
@@ -26861,7 +26861,7 @@
           <p:cNvPr id="24" name="">
             <a:extLst xmlns:a="http://schemas.openxmlformats.org/drawingml/2006/main">
               <a:ext uri="{FF2B5EF4-FFF2-40B4-BE49-F238E27FC236}">
-                <a16:creationId xmlns:a16="http://schemas.microsoft.com/office/drawing/2014/main" id="{50A2A190-F8C6-4AC1-843E-3F9CAA39FF15}"/>
+                <a16:creationId xmlns:a16="http://schemas.microsoft.com/office/drawing/2014/main" id="{3814ABE7-100D-4F70-ACA8-2E4592EFAFD1}"/>
               </a:ext>
             </a:extLst>
           </p:cNvPr>
@@ -26894,7 +26894,7 @@
           <p:cNvPr id="25" name="">
             <a:extLst xmlns:a="http://schemas.openxmlformats.org/drawingml/2006/main">
               <a:ext uri="{FF2B5EF4-FFF2-40B4-BE49-F238E27FC236}">
-                <a16:creationId xmlns:a16="http://schemas.microsoft.com/office/drawing/2014/main" id="{270CE8B4-815C-434B-ADCA-123931C20768}"/>
+                <a16:creationId xmlns:a16="http://schemas.microsoft.com/office/drawing/2014/main" id="{F62DAAC4-B37C-45B0-84D6-0802F260B4FE}"/>
               </a:ext>
             </a:extLst>
           </p:cNvPr>
@@ -26925,7 +26925,7 @@
           <p:cNvPr id="26" name="">
             <a:extLst xmlns:a="http://schemas.openxmlformats.org/drawingml/2006/main">
               <a:ext uri="{FF2B5EF4-FFF2-40B4-BE49-F238E27FC236}">
-                <a16:creationId xmlns:a16="http://schemas.microsoft.com/office/drawing/2014/main" id="{91658AE5-28DA-4BDC-A86B-A375E1D58BA4}"/>
+                <a16:creationId xmlns:a16="http://schemas.microsoft.com/office/drawing/2014/main" id="{82092D92-FFA3-423A-A5EA-2CDBFEFF3431}"/>
               </a:ext>
             </a:extLst>
           </p:cNvPr>
@@ -26970,7 +26970,7 @@
           <p:cNvPr id="27" name="">
             <a:extLst xmlns:a="http://schemas.openxmlformats.org/drawingml/2006/main">
               <a:ext uri="{FF2B5EF4-FFF2-40B4-BE49-F238E27FC236}">
-                <a16:creationId xmlns:a16="http://schemas.microsoft.com/office/drawing/2014/main" id="{C5E5F3C1-295E-4491-A9FE-630D56B0ABC7}"/>
+                <a16:creationId xmlns:a16="http://schemas.microsoft.com/office/drawing/2014/main" id="{12D9289A-CF69-4CC2-A5CA-60729457B0E7}"/>
               </a:ext>
             </a:extLst>
           </p:cNvPr>
@@ -27015,7 +27015,7 @@
           <p:cNvPr id="28" name="">
             <a:extLst xmlns:a="http://schemas.openxmlformats.org/drawingml/2006/main">
               <a:ext uri="{FF2B5EF4-FFF2-40B4-BE49-F238E27FC236}">
-                <a16:creationId xmlns:a16="http://schemas.microsoft.com/office/drawing/2014/main" id="{A61C5EAA-84D8-4932-895E-071127008E75}"/>
+                <a16:creationId xmlns:a16="http://schemas.microsoft.com/office/drawing/2014/main" id="{051B6799-F601-4F6D-9E59-95F437B8BF85}"/>
               </a:ext>
             </a:extLst>
           </p:cNvPr>
@@ -27048,7 +27048,7 @@
           <p:cNvPr id="29" name="">
             <a:extLst xmlns:a="http://schemas.openxmlformats.org/drawingml/2006/main">
               <a:ext uri="{FF2B5EF4-FFF2-40B4-BE49-F238E27FC236}">
-                <a16:creationId xmlns:a16="http://schemas.microsoft.com/office/drawing/2014/main" id="{B69C7F69-32D0-4E81-A3F7-68573A06D9B4}"/>
+                <a16:creationId xmlns:a16="http://schemas.microsoft.com/office/drawing/2014/main" id="{86C9D664-1E1B-4443-A250-51089A10FED3}"/>
               </a:ext>
             </a:extLst>
           </p:cNvPr>
@@ -27081,7 +27081,7 @@
           <p:cNvPr id="30" name="">
             <a:extLst xmlns:a="http://schemas.openxmlformats.org/drawingml/2006/main">
               <a:ext uri="{FF2B5EF4-FFF2-40B4-BE49-F238E27FC236}">
-                <a16:creationId xmlns:a16="http://schemas.microsoft.com/office/drawing/2014/main" id="{29F32039-D0E5-4EFB-8E8F-9531CEFA6F51}"/>
+                <a16:creationId xmlns:a16="http://schemas.microsoft.com/office/drawing/2014/main" id="{CDE183C4-2D4A-421E-8269-697442D1DD9C}"/>
               </a:ext>
             </a:extLst>
           </p:cNvPr>
@@ -27112,7 +27112,7 @@
           <p:cNvPr id="31" name="">
             <a:extLst xmlns:a="http://schemas.openxmlformats.org/drawingml/2006/main">
               <a:ext uri="{FF2B5EF4-FFF2-40B4-BE49-F238E27FC236}">
-                <a16:creationId xmlns:a16="http://schemas.microsoft.com/office/drawing/2014/main" id="{DC7F7A4A-0D85-4962-B4BA-93F7E27B2643}"/>
+                <a16:creationId xmlns:a16="http://schemas.microsoft.com/office/drawing/2014/main" id="{F14C36C4-21F7-41AA-BA4F-6935C44A492E}"/>
               </a:ext>
             </a:extLst>
           </p:cNvPr>
@@ -27157,7 +27157,7 @@
           <p:cNvPr id="32" name="">
             <a:extLst xmlns:a="http://schemas.openxmlformats.org/drawingml/2006/main">
               <a:ext uri="{FF2B5EF4-FFF2-40B4-BE49-F238E27FC236}">
-                <a16:creationId xmlns:a16="http://schemas.microsoft.com/office/drawing/2014/main" id="{09C0A907-4942-41CD-90A0-C265FD67D4C4}"/>
+                <a16:creationId xmlns:a16="http://schemas.microsoft.com/office/drawing/2014/main" id="{6FD2BF35-B17F-4AF4-A977-15EDB7EAC233}"/>
               </a:ext>
             </a:extLst>
           </p:cNvPr>
@@ -27202,7 +27202,7 @@
           <p:cNvPr id="33" name="">
             <a:extLst xmlns:a="http://schemas.openxmlformats.org/drawingml/2006/main">
               <a:ext uri="{FF2B5EF4-FFF2-40B4-BE49-F238E27FC236}">
-                <a16:creationId xmlns:a16="http://schemas.microsoft.com/office/drawing/2014/main" id="{FD578101-771E-4216-84C9-D75184D1A5E8}"/>
+                <a16:creationId xmlns:a16="http://schemas.microsoft.com/office/drawing/2014/main" id="{BB966506-5499-4E91-88BD-44994A4FCCA3}"/>
               </a:ext>
             </a:extLst>
           </p:cNvPr>
@@ -27237,7 +27237,7 @@
           <p:cNvPr id="34" name="">
             <a:extLst xmlns:a="http://schemas.openxmlformats.org/drawingml/2006/main">
               <a:ext uri="{FF2B5EF4-FFF2-40B4-BE49-F238E27FC236}">
-                <a16:creationId xmlns:a16="http://schemas.microsoft.com/office/drawing/2014/main" id="{5D421A87-1903-402D-B628-81D2F097E7A5}"/>
+                <a16:creationId xmlns:a16="http://schemas.microsoft.com/office/drawing/2014/main" id="{104C05CB-6C20-4FEA-9000-08F2EA9C8D6C}"/>
               </a:ext>
             </a:extLst>
           </p:cNvPr>
@@ -27268,7 +27268,7 @@
           <p:cNvPr id="35" name="">
             <a:extLst xmlns:a="http://schemas.openxmlformats.org/drawingml/2006/main">
               <a:ext uri="{FF2B5EF4-FFF2-40B4-BE49-F238E27FC236}">
-                <a16:creationId xmlns:a16="http://schemas.microsoft.com/office/drawing/2014/main" id="{B418B35E-10B2-4D70-84FB-E0CDE1425412}"/>
+                <a16:creationId xmlns:a16="http://schemas.microsoft.com/office/drawing/2014/main" id="{BD4CAEC4-0C58-4496-8563-CC3DC8417B99}"/>
               </a:ext>
             </a:extLst>
           </p:cNvPr>
@@ -27313,7 +27313,7 @@
           <p:cNvPr id="36" name="">
             <a:extLst xmlns:a="http://schemas.openxmlformats.org/drawingml/2006/main">
               <a:ext uri="{FF2B5EF4-FFF2-40B4-BE49-F238E27FC236}">
-                <a16:creationId xmlns:a16="http://schemas.microsoft.com/office/drawing/2014/main" id="{D69DD0F0-64DD-45D9-B3A9-6ABB90E87797}"/>
+                <a16:creationId xmlns:a16="http://schemas.microsoft.com/office/drawing/2014/main" id="{2E55E7DB-53E6-40D0-9301-CC4E71512C26}"/>
               </a:ext>
             </a:extLst>
           </p:cNvPr>
@@ -27358,7 +27358,7 @@
           <p:cNvPr id="37" name="">
             <a:extLst xmlns:a="http://schemas.openxmlformats.org/drawingml/2006/main">
               <a:ext uri="{FF2B5EF4-FFF2-40B4-BE49-F238E27FC236}">
-                <a16:creationId xmlns:a16="http://schemas.microsoft.com/office/drawing/2014/main" id="{3694CB99-1255-4C36-86BE-0349F66E3F45}"/>
+                <a16:creationId xmlns:a16="http://schemas.microsoft.com/office/drawing/2014/main" id="{6F6D91F3-6CD6-46E4-9278-83D8E86CB09E}"/>
               </a:ext>
             </a:extLst>
           </p:cNvPr>
@@ -27393,7 +27393,7 @@
           <p:cNvPr id="38" name="">
             <a:extLst xmlns:a="http://schemas.openxmlformats.org/drawingml/2006/main">
               <a:ext uri="{FF2B5EF4-FFF2-40B4-BE49-F238E27FC236}">
-                <a16:creationId xmlns:a16="http://schemas.microsoft.com/office/drawing/2014/main" id="{A4BA2485-88E2-4B20-8374-6B9C4CA0F50E}"/>
+                <a16:creationId xmlns:a16="http://schemas.microsoft.com/office/drawing/2014/main" id="{B9942ECF-464D-4587-80AD-0449973415C8}"/>
               </a:ext>
             </a:extLst>
           </p:cNvPr>
@@ -27424,7 +27424,7 @@
           <p:cNvPr id="39" name="">
             <a:extLst xmlns:a="http://schemas.openxmlformats.org/drawingml/2006/main">
               <a:ext uri="{FF2B5EF4-FFF2-40B4-BE49-F238E27FC236}">
-                <a16:creationId xmlns:a16="http://schemas.microsoft.com/office/drawing/2014/main" id="{5ED75B35-E688-4234-9FE9-B29B56E6E380}"/>
+                <a16:creationId xmlns:a16="http://schemas.microsoft.com/office/drawing/2014/main" id="{D1816677-48FA-40F9-9AAF-AF8BD470ACA0}"/>
               </a:ext>
             </a:extLst>
           </p:cNvPr>
@@ -27469,7 +27469,7 @@
           <p:cNvPr id="40" name="">
             <a:extLst xmlns:a="http://schemas.openxmlformats.org/drawingml/2006/main">
               <a:ext uri="{FF2B5EF4-FFF2-40B4-BE49-F238E27FC236}">
-                <a16:creationId xmlns:a16="http://schemas.microsoft.com/office/drawing/2014/main" id="{A253B695-615F-4596-AFBF-6E439566A9F9}"/>
+                <a16:creationId xmlns:a16="http://schemas.microsoft.com/office/drawing/2014/main" id="{6C733662-B9B6-4F78-BA8F-3ECAFAD37F04}"/>
               </a:ext>
             </a:extLst>
           </p:cNvPr>
@@ -27514,7 +27514,7 @@
           <p:cNvPr id="41" name="">
             <a:extLst xmlns:a="http://schemas.openxmlformats.org/drawingml/2006/main">
               <a:ext uri="{FF2B5EF4-FFF2-40B4-BE49-F238E27FC236}">
-                <a16:creationId xmlns:a16="http://schemas.microsoft.com/office/drawing/2014/main" id="{FA42034F-7E51-4F9A-8740-B992B5668ED0}"/>
+                <a16:creationId xmlns:a16="http://schemas.microsoft.com/office/drawing/2014/main" id="{D8239045-BE8D-46A3-AFD0-BE55F5119706}"/>
               </a:ext>
             </a:extLst>
           </p:cNvPr>
@@ -27549,7 +27549,7 @@
           <p:cNvPr id="42" name="">
             <a:extLst xmlns:a="http://schemas.openxmlformats.org/drawingml/2006/main">
               <a:ext uri="{FF2B5EF4-FFF2-40B4-BE49-F238E27FC236}">
-                <a16:creationId xmlns:a16="http://schemas.microsoft.com/office/drawing/2014/main" id="{AA927263-1E71-49B7-8305-16278B598FA2}"/>
+                <a16:creationId xmlns:a16="http://schemas.microsoft.com/office/drawing/2014/main" id="{538DB5AF-C1D7-436E-B830-10F45DF02882}"/>
               </a:ext>
             </a:extLst>
           </p:cNvPr>
@@ -27580,7 +27580,7 @@
           <p:cNvPr id="43" name="">
             <a:extLst xmlns:a="http://schemas.openxmlformats.org/drawingml/2006/main">
               <a:ext uri="{FF2B5EF4-FFF2-40B4-BE49-F238E27FC236}">
-                <a16:creationId xmlns:a16="http://schemas.microsoft.com/office/drawing/2014/main" id="{5D676F13-2FE1-4B53-A0BC-E053E92EF51C}"/>
+                <a16:creationId xmlns:a16="http://schemas.microsoft.com/office/drawing/2014/main" id="{9DA54359-2347-425F-8BB8-B91133E28419}"/>
               </a:ext>
             </a:extLst>
           </p:cNvPr>
@@ -27625,7 +27625,7 @@
           <p:cNvPr id="44" name="">
             <a:extLst xmlns:a="http://schemas.openxmlformats.org/drawingml/2006/main">
               <a:ext uri="{FF2B5EF4-FFF2-40B4-BE49-F238E27FC236}">
-                <a16:creationId xmlns:a16="http://schemas.microsoft.com/office/drawing/2014/main" id="{78A9957A-7957-4810-BBEE-B867651C0F28}"/>
+                <a16:creationId xmlns:a16="http://schemas.microsoft.com/office/drawing/2014/main" id="{511BD09C-7F4B-4498-A1E9-104C145129B5}"/>
               </a:ext>
             </a:extLst>
           </p:cNvPr>
@@ -27670,7 +27670,7 @@
           <p:cNvPr id="45" name="">
             <a:extLst xmlns:a="http://schemas.openxmlformats.org/drawingml/2006/main">
               <a:ext uri="{FF2B5EF4-FFF2-40B4-BE49-F238E27FC236}">
-                <a16:creationId xmlns:a16="http://schemas.microsoft.com/office/drawing/2014/main" id="{280F2B57-0355-45D4-BDDB-191FD0E4BE4C}"/>
+                <a16:creationId xmlns:a16="http://schemas.microsoft.com/office/drawing/2014/main" id="{31C978F2-785C-4256-B440-52F9DAA96ED2}"/>
               </a:ext>
             </a:extLst>
           </p:cNvPr>
@@ -27715,7 +27715,7 @@
           <p:cNvPr id="46" name="">
             <a:extLst xmlns:a="http://schemas.openxmlformats.org/drawingml/2006/main">
               <a:ext uri="{FF2B5EF4-FFF2-40B4-BE49-F238E27FC236}">
-                <a16:creationId xmlns:a16="http://schemas.microsoft.com/office/drawing/2014/main" id="{7F20CFA4-DE4A-4B8A-9877-2E5B66F1E0C4}"/>
+                <a16:creationId xmlns:a16="http://schemas.microsoft.com/office/drawing/2014/main" id="{857F4163-7085-49E0-947B-45F88FC36561}"/>
               </a:ext>
             </a:extLst>
           </p:cNvPr>
@@ -27758,7 +27758,7 @@
     </p:spTree>
     <p:extLst>
       <p:ext uri="{BB962C8B-B14F-4D97-AF65-F5344CB8AC3E}">
-        <p14:creationId xmlns:p14="http://schemas.microsoft.com/office/powerpoint/2010/main" val="1856589854"/>
+        <p14:creationId xmlns:p14="http://schemas.microsoft.com/office/powerpoint/2010/main" val="1534405609"/>
       </p:ext>
     </p:extLst>
   </p:cSld>
@@ -27782,7 +27782,7 @@
           <p:cNvPr id="49" name="">
             <a:extLst xmlns:a="http://schemas.openxmlformats.org/drawingml/2006/main">
               <a:ext uri="{FF2B5EF4-FFF2-40B4-BE49-F238E27FC236}">
-                <a16:creationId xmlns:a16="http://schemas.microsoft.com/office/drawing/2014/main" id="{0C31800A-E11C-4817-B36C-4402DD45306D}"/>
+                <a16:creationId xmlns:a16="http://schemas.microsoft.com/office/drawing/2014/main" id="{94374538-031B-4CAB-ACDC-866894B11F73}"/>
               </a:ext>
             </a:extLst>
           </p:cNvPr>
@@ -27813,7 +27813,7 @@
           <p:cNvPr id="2" name="">
             <a:extLst xmlns:a="http://schemas.openxmlformats.org/drawingml/2006/main">
               <a:ext uri="{FF2B5EF4-FFF2-40B4-BE49-F238E27FC236}">
-                <a16:creationId xmlns:a16="http://schemas.microsoft.com/office/drawing/2014/main" id="{BB74E392-7284-407C-A76A-7F7F8F8FC8A0}"/>
+                <a16:creationId xmlns:a16="http://schemas.microsoft.com/office/drawing/2014/main" id="{5EDF38EA-B316-4C45-BAD5-4F984BD3CA67}"/>
               </a:ext>
             </a:extLst>
           </p:cNvPr>
@@ -27858,7 +27858,7 @@
           <p:cNvPr id="3" name="">
             <a:extLst xmlns:a="http://schemas.openxmlformats.org/drawingml/2006/main">
               <a:ext uri="{FF2B5EF4-FFF2-40B4-BE49-F238E27FC236}">
-                <a16:creationId xmlns:a16="http://schemas.microsoft.com/office/drawing/2014/main" id="{C9C279D5-FCEE-4633-80FD-D7D225163C97}"/>
+                <a16:creationId xmlns:a16="http://schemas.microsoft.com/office/drawing/2014/main" id="{B2DA9F46-088F-4958-B1E0-944FDEB9D96E}"/>
               </a:ext>
             </a:extLst>
           </p:cNvPr>
@@ -27903,7 +27903,7 @@
           <p:cNvPr id="4" name="">
             <a:extLst xmlns:a="http://schemas.openxmlformats.org/drawingml/2006/main">
               <a:ext uri="{FF2B5EF4-FFF2-40B4-BE49-F238E27FC236}">
-                <a16:creationId xmlns:a16="http://schemas.microsoft.com/office/drawing/2014/main" id="{3B8D48DC-F009-46CA-B628-198A0E06E169}"/>
+                <a16:creationId xmlns:a16="http://schemas.microsoft.com/office/drawing/2014/main" id="{56AA8775-0B39-4896-AC21-7A5B511DD0DA}"/>
               </a:ext>
             </a:extLst>
           </p:cNvPr>
@@ -27948,7 +27948,7 @@
           <p:cNvPr id="5" name="">
             <a:extLst xmlns:a="http://schemas.openxmlformats.org/drawingml/2006/main">
               <a:ext uri="{FF2B5EF4-FFF2-40B4-BE49-F238E27FC236}">
-                <a16:creationId xmlns:a16="http://schemas.microsoft.com/office/drawing/2014/main" id="{34548254-7404-41EC-AA4B-FACCBFE23B46}"/>
+                <a16:creationId xmlns:a16="http://schemas.microsoft.com/office/drawing/2014/main" id="{03602AC8-43F4-4310-BC21-7D3740EF29A8}"/>
               </a:ext>
             </a:extLst>
           </p:cNvPr>
@@ -27979,7 +27979,7 @@
           <p:cNvPr id="6" name="">
             <a:extLst xmlns:a="http://schemas.openxmlformats.org/drawingml/2006/main">
               <a:ext uri="{FF2B5EF4-FFF2-40B4-BE49-F238E27FC236}">
-                <a16:creationId xmlns:a16="http://schemas.microsoft.com/office/drawing/2014/main" id="{6FDFB5FE-0813-4613-BD3A-C8064537FFEB}"/>
+                <a16:creationId xmlns:a16="http://schemas.microsoft.com/office/drawing/2014/main" id="{46BEB175-F96C-4440-87F6-AF43E3D116A0}"/>
               </a:ext>
             </a:extLst>
           </p:cNvPr>
@@ -28010,7 +28010,7 @@
           <p:cNvPr id="7" name="">
             <a:extLst xmlns:a="http://schemas.openxmlformats.org/drawingml/2006/main">
               <a:ext uri="{FF2B5EF4-FFF2-40B4-BE49-F238E27FC236}">
-                <a16:creationId xmlns:a16="http://schemas.microsoft.com/office/drawing/2014/main" id="{B9EFEDC4-0773-42AE-8A95-1D39B1C434F7}"/>
+                <a16:creationId xmlns:a16="http://schemas.microsoft.com/office/drawing/2014/main" id="{1A66887D-CF4D-4A27-AB7B-F0166DB71424}"/>
               </a:ext>
             </a:extLst>
           </p:cNvPr>
@@ -28055,7 +28055,7 @@
           <p:cNvPr id="8" name="">
             <a:extLst xmlns:a="http://schemas.openxmlformats.org/drawingml/2006/main">
               <a:ext uri="{FF2B5EF4-FFF2-40B4-BE49-F238E27FC236}">
-                <a16:creationId xmlns:a16="http://schemas.microsoft.com/office/drawing/2014/main" id="{71418046-C48E-4A10-B9B0-7E32B72923CB}"/>
+                <a16:creationId xmlns:a16="http://schemas.microsoft.com/office/drawing/2014/main" id="{2FAB447A-F78A-4404-A6FD-CF579A3249F3}"/>
               </a:ext>
             </a:extLst>
           </p:cNvPr>
@@ -28100,7 +28100,7 @@
           <p:cNvPr id="9" name="">
             <a:extLst xmlns:a="http://schemas.openxmlformats.org/drawingml/2006/main">
               <a:ext uri="{FF2B5EF4-FFF2-40B4-BE49-F238E27FC236}">
-                <a16:creationId xmlns:a16="http://schemas.microsoft.com/office/drawing/2014/main" id="{BB8BB896-DD0C-4F34-A7A3-208C5477323E}"/>
+                <a16:creationId xmlns:a16="http://schemas.microsoft.com/office/drawing/2014/main" id="{33952F92-7211-4FEA-9D95-5CC3CF4ECD8A}"/>
               </a:ext>
             </a:extLst>
           </p:cNvPr>
@@ -28133,7 +28133,7 @@
           <p:cNvPr id="10" name="">
             <a:extLst xmlns:a="http://schemas.openxmlformats.org/drawingml/2006/main">
               <a:ext uri="{FF2B5EF4-FFF2-40B4-BE49-F238E27FC236}">
-                <a16:creationId xmlns:a16="http://schemas.microsoft.com/office/drawing/2014/main" id="{886D8DF8-FE4D-47FE-A7D2-D606BE607D61}"/>
+                <a16:creationId xmlns:a16="http://schemas.microsoft.com/office/drawing/2014/main" id="{BB95F093-3C85-4957-965F-3EB09D0E43B9}"/>
               </a:ext>
             </a:extLst>
           </p:cNvPr>
@@ -28164,7 +28164,7 @@
           <p:cNvPr id="11" name="">
             <a:extLst xmlns:a="http://schemas.openxmlformats.org/drawingml/2006/main">
               <a:ext uri="{FF2B5EF4-FFF2-40B4-BE49-F238E27FC236}">
-                <a16:creationId xmlns:a16="http://schemas.microsoft.com/office/drawing/2014/main" id="{414851FC-A2DD-4786-A904-AB4A7BDBF8C3}"/>
+                <a16:creationId xmlns:a16="http://schemas.microsoft.com/office/drawing/2014/main" id="{36473921-04A8-4AD9-9A44-FED85EF7DF0F}"/>
               </a:ext>
             </a:extLst>
           </p:cNvPr>
@@ -28209,7 +28209,7 @@
           <p:cNvPr id="12" name="">
             <a:extLst xmlns:a="http://schemas.openxmlformats.org/drawingml/2006/main">
               <a:ext uri="{FF2B5EF4-FFF2-40B4-BE49-F238E27FC236}">
-                <a16:creationId xmlns:a16="http://schemas.microsoft.com/office/drawing/2014/main" id="{38F00007-1D42-4CF3-B12E-263ACF9380AB}"/>
+                <a16:creationId xmlns:a16="http://schemas.microsoft.com/office/drawing/2014/main" id="{7E5D2CAB-86AB-48BC-A1BC-F49FB160D346}"/>
               </a:ext>
             </a:extLst>
           </p:cNvPr>
@@ -28254,7 +28254,7 @@
           <p:cNvPr id="13" name="">
             <a:extLst xmlns:a="http://schemas.openxmlformats.org/drawingml/2006/main">
               <a:ext uri="{FF2B5EF4-FFF2-40B4-BE49-F238E27FC236}">
-                <a16:creationId xmlns:a16="http://schemas.microsoft.com/office/drawing/2014/main" id="{DEBA2D82-CB26-48E3-A03D-F82B61CB06CB}"/>
+                <a16:creationId xmlns:a16="http://schemas.microsoft.com/office/drawing/2014/main" id="{1C07EC2C-3ADC-4AD5-8BB0-22DCF76AA62F}"/>
               </a:ext>
             </a:extLst>
           </p:cNvPr>
@@ -28287,7 +28287,7 @@
           <p:cNvPr id="14" name="">
             <a:extLst xmlns:a="http://schemas.openxmlformats.org/drawingml/2006/main">
               <a:ext uri="{FF2B5EF4-FFF2-40B4-BE49-F238E27FC236}">
-                <a16:creationId xmlns:a16="http://schemas.microsoft.com/office/drawing/2014/main" id="{51E778F2-4C57-4216-8164-439B32981775}"/>
+                <a16:creationId xmlns:a16="http://schemas.microsoft.com/office/drawing/2014/main" id="{FBD051F3-3727-4EC5-896C-DDEE42189CF8}"/>
               </a:ext>
             </a:extLst>
           </p:cNvPr>
@@ -28320,7 +28320,7 @@
           <p:cNvPr id="15" name="">
             <a:extLst xmlns:a="http://schemas.openxmlformats.org/drawingml/2006/main">
               <a:ext uri="{FF2B5EF4-FFF2-40B4-BE49-F238E27FC236}">
-                <a16:creationId xmlns:a16="http://schemas.microsoft.com/office/drawing/2014/main" id="{CE283F76-7619-48B6-B2D0-6079E9CD17EB}"/>
+                <a16:creationId xmlns:a16="http://schemas.microsoft.com/office/drawing/2014/main" id="{3D467C39-EF92-4592-9B17-B39F22544AF1}"/>
               </a:ext>
             </a:extLst>
           </p:cNvPr>
@@ -28351,7 +28351,7 @@
           <p:cNvPr id="16" name="">
             <a:extLst xmlns:a="http://schemas.openxmlformats.org/drawingml/2006/main">
               <a:ext uri="{FF2B5EF4-FFF2-40B4-BE49-F238E27FC236}">
-                <a16:creationId xmlns:a16="http://schemas.microsoft.com/office/drawing/2014/main" id="{A3438C8B-41E8-4618-8F82-E5E6AC525535}"/>
+                <a16:creationId xmlns:a16="http://schemas.microsoft.com/office/drawing/2014/main" id="{0B9593A5-D1FD-4A02-AD97-1EE340B615C4}"/>
               </a:ext>
             </a:extLst>
           </p:cNvPr>
@@ -28396,7 +28396,7 @@
           <p:cNvPr id="17" name="">
             <a:extLst xmlns:a="http://schemas.openxmlformats.org/drawingml/2006/main">
               <a:ext uri="{FF2B5EF4-FFF2-40B4-BE49-F238E27FC236}">
-                <a16:creationId xmlns:a16="http://schemas.microsoft.com/office/drawing/2014/main" id="{59C31148-E2B8-4FDE-B2A6-05E37F0E66C2}"/>
+                <a16:creationId xmlns:a16="http://schemas.microsoft.com/office/drawing/2014/main" id="{E0D5C05A-3334-45CE-B097-EF48613D3917}"/>
               </a:ext>
             </a:extLst>
           </p:cNvPr>
@@ -28441,7 +28441,7 @@
           <p:cNvPr id="18" name="">
             <a:extLst xmlns:a="http://schemas.openxmlformats.org/drawingml/2006/main">
               <a:ext uri="{FF2B5EF4-FFF2-40B4-BE49-F238E27FC236}">
-                <a16:creationId xmlns:a16="http://schemas.microsoft.com/office/drawing/2014/main" id="{BBEC5186-D4B6-48F5-B4B9-AC3F3A37DE46}"/>
+                <a16:creationId xmlns:a16="http://schemas.microsoft.com/office/drawing/2014/main" id="{4CEAE259-438A-4CBD-994E-F4D8DA4D03BA}"/>
               </a:ext>
             </a:extLst>
           </p:cNvPr>
@@ -28474,7 +28474,7 @@
           <p:cNvPr id="19" name="">
             <a:extLst xmlns:a="http://schemas.openxmlformats.org/drawingml/2006/main">
               <a:ext uri="{FF2B5EF4-FFF2-40B4-BE49-F238E27FC236}">
-                <a16:creationId xmlns:a16="http://schemas.microsoft.com/office/drawing/2014/main" id="{C625B0E8-AAF6-4B5A-8FEA-11780FA14D30}"/>
+                <a16:creationId xmlns:a16="http://schemas.microsoft.com/office/drawing/2014/main" id="{DC455C18-4584-4F56-AE5A-1FE6FFF9A54E}"/>
               </a:ext>
             </a:extLst>
           </p:cNvPr>
@@ -28507,7 +28507,7 @@
           <p:cNvPr id="20" name="">
             <a:extLst xmlns:a="http://schemas.openxmlformats.org/drawingml/2006/main">
               <a:ext uri="{FF2B5EF4-FFF2-40B4-BE49-F238E27FC236}">
-                <a16:creationId xmlns:a16="http://schemas.microsoft.com/office/drawing/2014/main" id="{1DBEBCB3-3334-4EF7-B637-5283D70B4CF5}"/>
+                <a16:creationId xmlns:a16="http://schemas.microsoft.com/office/drawing/2014/main" id="{F33885E7-9AF3-4081-BFC7-154841600FCD}"/>
               </a:ext>
             </a:extLst>
           </p:cNvPr>
@@ -28538,7 +28538,7 @@
           <p:cNvPr id="21" name="">
             <a:extLst xmlns:a="http://schemas.openxmlformats.org/drawingml/2006/main">
               <a:ext uri="{FF2B5EF4-FFF2-40B4-BE49-F238E27FC236}">
-                <a16:creationId xmlns:a16="http://schemas.microsoft.com/office/drawing/2014/main" id="{1AABBCBF-7B9F-45FD-9E36-7B3095BD4872}"/>
+                <a16:creationId xmlns:a16="http://schemas.microsoft.com/office/drawing/2014/main" id="{80BB037E-3E4B-4D40-AEC9-7DA47BA13140}"/>
               </a:ext>
             </a:extLst>
           </p:cNvPr>
@@ -28583,7 +28583,7 @@
           <p:cNvPr id="22" name="">
             <a:extLst xmlns:a="http://schemas.openxmlformats.org/drawingml/2006/main">
               <a:ext uri="{FF2B5EF4-FFF2-40B4-BE49-F238E27FC236}">
-                <a16:creationId xmlns:a16="http://schemas.microsoft.com/office/drawing/2014/main" id="{013E7F8B-E2DC-40BC-8D71-C344C9395678}"/>
+                <a16:creationId xmlns:a16="http://schemas.microsoft.com/office/drawing/2014/main" id="{F7FB2011-207C-470F-AFE0-35ACFC469DB1}"/>
               </a:ext>
             </a:extLst>
           </p:cNvPr>
@@ -28628,7 +28628,7 @@
           <p:cNvPr id="23" name="">
             <a:extLst xmlns:a="http://schemas.openxmlformats.org/drawingml/2006/main">
               <a:ext uri="{FF2B5EF4-FFF2-40B4-BE49-F238E27FC236}">
-                <a16:creationId xmlns:a16="http://schemas.microsoft.com/office/drawing/2014/main" id="{F920DC8A-4F81-410D-9A7C-4E2B157E724F}"/>
+                <a16:creationId xmlns:a16="http://schemas.microsoft.com/office/drawing/2014/main" id="{F8644426-500C-40A4-9DD8-CAC80A1BF377}"/>
               </a:ext>
             </a:extLst>
           </p:cNvPr>
@@ -28661,7 +28661,7 @@
           <p:cNvPr id="24" name="">
             <a:extLst xmlns:a="http://schemas.openxmlformats.org/drawingml/2006/main">
               <a:ext uri="{FF2B5EF4-FFF2-40B4-BE49-F238E27FC236}">
-                <a16:creationId xmlns:a16="http://schemas.microsoft.com/office/drawing/2014/main" id="{6F875333-B32F-4226-BB93-E5CAA49CD12A}"/>
+                <a16:creationId xmlns:a16="http://schemas.microsoft.com/office/drawing/2014/main" id="{7280D33A-9652-45CD-B056-D8518F328279}"/>
               </a:ext>
             </a:extLst>
           </p:cNvPr>
@@ -28694,7 +28694,7 @@
           <p:cNvPr id="25" name="">
             <a:extLst xmlns:a="http://schemas.openxmlformats.org/drawingml/2006/main">
               <a:ext uri="{FF2B5EF4-FFF2-40B4-BE49-F238E27FC236}">
-                <a16:creationId xmlns:a16="http://schemas.microsoft.com/office/drawing/2014/main" id="{81A2F6A7-CFA0-4A04-84BD-D281BC4EAA4D}"/>
+                <a16:creationId xmlns:a16="http://schemas.microsoft.com/office/drawing/2014/main" id="{E9023C66-8AA0-4347-8689-45FB178F227D}"/>
               </a:ext>
             </a:extLst>
           </p:cNvPr>
@@ -28725,7 +28725,7 @@
           <p:cNvPr id="26" name="">
             <a:extLst xmlns:a="http://schemas.openxmlformats.org/drawingml/2006/main">
               <a:ext uri="{FF2B5EF4-FFF2-40B4-BE49-F238E27FC236}">
-                <a16:creationId xmlns:a16="http://schemas.microsoft.com/office/drawing/2014/main" id="{C0EA81C3-4277-4971-8AA6-9F1A536FE822}"/>
+                <a16:creationId xmlns:a16="http://schemas.microsoft.com/office/drawing/2014/main" id="{4EADB81E-D807-4EDD-880C-5878760BEEDC}"/>
               </a:ext>
             </a:extLst>
           </p:cNvPr>
@@ -28770,7 +28770,7 @@
           <p:cNvPr id="27" name="">
             <a:extLst xmlns:a="http://schemas.openxmlformats.org/drawingml/2006/main">
               <a:ext uri="{FF2B5EF4-FFF2-40B4-BE49-F238E27FC236}">
-                <a16:creationId xmlns:a16="http://schemas.microsoft.com/office/drawing/2014/main" id="{5AAE82AA-8BA9-4216-BC3A-EB6C50B3190F}"/>
+                <a16:creationId xmlns:a16="http://schemas.microsoft.com/office/drawing/2014/main" id="{8A1C456D-27A1-4A5C-8FC6-C7792F333DD3}"/>
               </a:ext>
             </a:extLst>
           </p:cNvPr>
@@ -28815,7 +28815,7 @@
           <p:cNvPr id="28" name="">
             <a:extLst xmlns:a="http://schemas.openxmlformats.org/drawingml/2006/main">
               <a:ext uri="{FF2B5EF4-FFF2-40B4-BE49-F238E27FC236}">
-                <a16:creationId xmlns:a16="http://schemas.microsoft.com/office/drawing/2014/main" id="{0806A3F5-FCC0-4DE3-844C-54E09066883E}"/>
+                <a16:creationId xmlns:a16="http://schemas.microsoft.com/office/drawing/2014/main" id="{C00A1956-0D62-45BE-B2B5-40BA9E64615B}"/>
               </a:ext>
             </a:extLst>
           </p:cNvPr>
@@ -28850,7 +28850,7 @@
           <p:cNvPr id="29" name="">
             <a:extLst xmlns:a="http://schemas.openxmlformats.org/drawingml/2006/main">
               <a:ext uri="{FF2B5EF4-FFF2-40B4-BE49-F238E27FC236}">
-                <a16:creationId xmlns:a16="http://schemas.microsoft.com/office/drawing/2014/main" id="{6E5293F1-07C6-4451-A861-512E8D3992CA}"/>
+                <a16:creationId xmlns:a16="http://schemas.microsoft.com/office/drawing/2014/main" id="{B15A701A-64E6-4D6F-A6E2-786DFD5DF59A}"/>
               </a:ext>
             </a:extLst>
           </p:cNvPr>
@@ -28881,7 +28881,7 @@
           <p:cNvPr id="30" name="">
             <a:extLst xmlns:a="http://schemas.openxmlformats.org/drawingml/2006/main">
               <a:ext uri="{FF2B5EF4-FFF2-40B4-BE49-F238E27FC236}">
-                <a16:creationId xmlns:a16="http://schemas.microsoft.com/office/drawing/2014/main" id="{FF913DED-5F60-4269-858D-330C4677B851}"/>
+                <a16:creationId xmlns:a16="http://schemas.microsoft.com/office/drawing/2014/main" id="{2F742693-EA00-4186-A9CE-9A5BB7A5151C}"/>
               </a:ext>
             </a:extLst>
           </p:cNvPr>
@@ -28926,7 +28926,7 @@
           <p:cNvPr id="31" name="">
             <a:extLst xmlns:a="http://schemas.openxmlformats.org/drawingml/2006/main">
               <a:ext uri="{FF2B5EF4-FFF2-40B4-BE49-F238E27FC236}">
-                <a16:creationId xmlns:a16="http://schemas.microsoft.com/office/drawing/2014/main" id="{A883A0C2-2BF1-4D6A-AE8A-5EC62F352F22}"/>
+                <a16:creationId xmlns:a16="http://schemas.microsoft.com/office/drawing/2014/main" id="{0E8DD0C1-7A7F-4E47-AA49-3A0F7C9EF173}"/>
               </a:ext>
             </a:extLst>
           </p:cNvPr>
@@ -28971,7 +28971,7 @@
           <p:cNvPr id="32" name="">
             <a:extLst xmlns:a="http://schemas.openxmlformats.org/drawingml/2006/main">
               <a:ext uri="{FF2B5EF4-FFF2-40B4-BE49-F238E27FC236}">
-                <a16:creationId xmlns:a16="http://schemas.microsoft.com/office/drawing/2014/main" id="{3DB4E169-BA95-48A9-B352-7FE622362720}"/>
+                <a16:creationId xmlns:a16="http://schemas.microsoft.com/office/drawing/2014/main" id="{FB7DA51D-BCA7-4D33-A9B7-D9639635E34E}"/>
               </a:ext>
             </a:extLst>
           </p:cNvPr>
@@ -29006,7 +29006,7 @@
           <p:cNvPr id="33" name="">
             <a:extLst xmlns:a="http://schemas.openxmlformats.org/drawingml/2006/main">
               <a:ext uri="{FF2B5EF4-FFF2-40B4-BE49-F238E27FC236}">
-                <a16:creationId xmlns:a16="http://schemas.microsoft.com/office/drawing/2014/main" id="{7256C856-D675-4E65-B9B8-E81ECDC51A24}"/>
+                <a16:creationId xmlns:a16="http://schemas.microsoft.com/office/drawing/2014/main" id="{3C0BCC68-849F-4789-B91B-AEF17966F208}"/>
               </a:ext>
             </a:extLst>
           </p:cNvPr>
@@ -29037,7 +29037,7 @@
           <p:cNvPr id="34" name="">
             <a:extLst xmlns:a="http://schemas.openxmlformats.org/drawingml/2006/main">
               <a:ext uri="{FF2B5EF4-FFF2-40B4-BE49-F238E27FC236}">
-                <a16:creationId xmlns:a16="http://schemas.microsoft.com/office/drawing/2014/main" id="{C9756F35-364B-4499-BF89-3BCDB3138674}"/>
+                <a16:creationId xmlns:a16="http://schemas.microsoft.com/office/drawing/2014/main" id="{D7096F3E-8FD4-4989-8F1D-47D691072F73}"/>
               </a:ext>
             </a:extLst>
           </p:cNvPr>
@@ -29082,7 +29082,7 @@
           <p:cNvPr id="35" name="">
             <a:extLst xmlns:a="http://schemas.openxmlformats.org/drawingml/2006/main">
               <a:ext uri="{FF2B5EF4-FFF2-40B4-BE49-F238E27FC236}">
-                <a16:creationId xmlns:a16="http://schemas.microsoft.com/office/drawing/2014/main" id="{FFD6803F-EBA0-405F-8D83-FCDEB56DE88B}"/>
+                <a16:creationId xmlns:a16="http://schemas.microsoft.com/office/drawing/2014/main" id="{D36A3768-1D65-48C6-9182-E8CD4C2FFC89}"/>
               </a:ext>
             </a:extLst>
           </p:cNvPr>
@@ -29127,7 +29127,7 @@
           <p:cNvPr id="36" name="">
             <a:extLst xmlns:a="http://schemas.openxmlformats.org/drawingml/2006/main">
               <a:ext uri="{FF2B5EF4-FFF2-40B4-BE49-F238E27FC236}">
-                <a16:creationId xmlns:a16="http://schemas.microsoft.com/office/drawing/2014/main" id="{A688DC42-03B1-4513-9AEC-B9143949EEEC}"/>
+                <a16:creationId xmlns:a16="http://schemas.microsoft.com/office/drawing/2014/main" id="{808E4CDB-BC3E-42E0-9C45-CCBABC03F7E7}"/>
               </a:ext>
             </a:extLst>
           </p:cNvPr>
@@ -29162,7 +29162,7 @@
           <p:cNvPr id="37" name="">
             <a:extLst xmlns:a="http://schemas.openxmlformats.org/drawingml/2006/main">
               <a:ext uri="{FF2B5EF4-FFF2-40B4-BE49-F238E27FC236}">
-                <a16:creationId xmlns:a16="http://schemas.microsoft.com/office/drawing/2014/main" id="{D7AC873E-9096-4AAF-A0DA-50501DAA13F2}"/>
+                <a16:creationId xmlns:a16="http://schemas.microsoft.com/office/drawing/2014/main" id="{295B06DD-7ED8-4E47-AB89-C58B0558112B}"/>
               </a:ext>
             </a:extLst>
           </p:cNvPr>
@@ -29207,7 +29207,7 @@
           <p:cNvPr id="38" name="">
             <a:extLst xmlns:a="http://schemas.openxmlformats.org/drawingml/2006/main">
               <a:ext uri="{FF2B5EF4-FFF2-40B4-BE49-F238E27FC236}">
-                <a16:creationId xmlns:a16="http://schemas.microsoft.com/office/drawing/2014/main" id="{2D2E7771-7B31-46CA-B6DB-642005D2E3D4}"/>
+                <a16:creationId xmlns:a16="http://schemas.microsoft.com/office/drawing/2014/main" id="{2F39C10C-08C5-45B7-A2BD-BAA84DAFD80B}"/>
               </a:ext>
             </a:extLst>
           </p:cNvPr>
@@ -29252,7 +29252,7 @@
           <p:cNvPr id="39" name="">
             <a:extLst xmlns:a="http://schemas.openxmlformats.org/drawingml/2006/main">
               <a:ext uri="{FF2B5EF4-FFF2-40B4-BE49-F238E27FC236}">
-                <a16:creationId xmlns:a16="http://schemas.microsoft.com/office/drawing/2014/main" id="{A59F3BBB-CB5E-40FE-B50D-81D8CF9FC2A3}"/>
+                <a16:creationId xmlns:a16="http://schemas.microsoft.com/office/drawing/2014/main" id="{CE40A45E-0B10-4069-8572-7594DA38F0D9}"/>
               </a:ext>
             </a:extLst>
           </p:cNvPr>
@@ -29297,7 +29297,7 @@
           <p:cNvPr id="40" name="">
             <a:extLst xmlns:a="http://schemas.openxmlformats.org/drawingml/2006/main">
               <a:ext uri="{FF2B5EF4-FFF2-40B4-BE49-F238E27FC236}">
-                <a16:creationId xmlns:a16="http://schemas.microsoft.com/office/drawing/2014/main" id="{72844C23-A555-4EC9-86DE-433064336DA3}"/>
+                <a16:creationId xmlns:a16="http://schemas.microsoft.com/office/drawing/2014/main" id="{D1E13B8A-125D-4F46-A008-ACFC3BF230BE}"/>
               </a:ext>
             </a:extLst>
           </p:cNvPr>
@@ -29332,7 +29332,7 @@
           <p:cNvPr id="41" name="">
             <a:extLst xmlns:a="http://schemas.openxmlformats.org/drawingml/2006/main">
               <a:ext uri="{FF2B5EF4-FFF2-40B4-BE49-F238E27FC236}">
-                <a16:creationId xmlns:a16="http://schemas.microsoft.com/office/drawing/2014/main" id="{770479F0-1333-402B-8E50-4004DED4AF4C}"/>
+                <a16:creationId xmlns:a16="http://schemas.microsoft.com/office/drawing/2014/main" id="{3CEF1077-FA4D-45D4-880B-D8D5A4312F27}"/>
               </a:ext>
             </a:extLst>
           </p:cNvPr>
@@ -29377,7 +29377,7 @@
           <p:cNvPr id="42" name="">
             <a:extLst xmlns:a="http://schemas.openxmlformats.org/drawingml/2006/main">
               <a:ext uri="{FF2B5EF4-FFF2-40B4-BE49-F238E27FC236}">
-                <a16:creationId xmlns:a16="http://schemas.microsoft.com/office/drawing/2014/main" id="{D6D101BD-D256-4398-B558-F6DDAFD1C659}"/>
+                <a16:creationId xmlns:a16="http://schemas.microsoft.com/office/drawing/2014/main" id="{43EB9022-3FD8-43BF-94F6-4519995DE71F}"/>
               </a:ext>
             </a:extLst>
           </p:cNvPr>
@@ -29422,7 +29422,7 @@
           <p:cNvPr id="43" name="">
             <a:extLst xmlns:a="http://schemas.openxmlformats.org/drawingml/2006/main">
               <a:ext uri="{FF2B5EF4-FFF2-40B4-BE49-F238E27FC236}">
-                <a16:creationId xmlns:a16="http://schemas.microsoft.com/office/drawing/2014/main" id="{0DBF3974-A8CC-48D8-899C-82B9EF09DE71}"/>
+                <a16:creationId xmlns:a16="http://schemas.microsoft.com/office/drawing/2014/main" id="{3D3A8860-FF1E-4EE1-BB93-2C4114496995}"/>
               </a:ext>
             </a:extLst>
           </p:cNvPr>
@@ -29467,7 +29467,7 @@
           <p:cNvPr id="44" name="">
             <a:extLst xmlns:a="http://schemas.openxmlformats.org/drawingml/2006/main">
               <a:ext uri="{FF2B5EF4-FFF2-40B4-BE49-F238E27FC236}">
-                <a16:creationId xmlns:a16="http://schemas.microsoft.com/office/drawing/2014/main" id="{4B6F9FBC-4F72-4D1B-AE49-5EF94874FB70}"/>
+                <a16:creationId xmlns:a16="http://schemas.microsoft.com/office/drawing/2014/main" id="{B96B9C73-0DE6-4AAB-9F5C-9C0801C67B21}"/>
               </a:ext>
             </a:extLst>
           </p:cNvPr>
@@ -29502,7 +29502,7 @@
           <p:cNvPr id="45" name="">
             <a:extLst xmlns:a="http://schemas.openxmlformats.org/drawingml/2006/main">
               <a:ext uri="{FF2B5EF4-FFF2-40B4-BE49-F238E27FC236}">
-                <a16:creationId xmlns:a16="http://schemas.microsoft.com/office/drawing/2014/main" id="{82D73909-C75F-418D-A09C-43B795C88E1D}"/>
+                <a16:creationId xmlns:a16="http://schemas.microsoft.com/office/drawing/2014/main" id="{5E09E43C-FD73-4FB5-9571-DBB70972086A}"/>
               </a:ext>
             </a:extLst>
           </p:cNvPr>
@@ -29547,7 +29547,7 @@
           <p:cNvPr id="46" name="">
             <a:extLst xmlns:a="http://schemas.openxmlformats.org/drawingml/2006/main">
               <a:ext uri="{FF2B5EF4-FFF2-40B4-BE49-F238E27FC236}">
-                <a16:creationId xmlns:a16="http://schemas.microsoft.com/office/drawing/2014/main" id="{D82950A0-4A07-45AD-ADC8-82C64E2E693B}"/>
+                <a16:creationId xmlns:a16="http://schemas.microsoft.com/office/drawing/2014/main" id="{092C3EAE-B369-488F-81E4-D68E5B6F820F}"/>
               </a:ext>
             </a:extLst>
           </p:cNvPr>
@@ -29592,7 +29592,7 @@
           <p:cNvPr id="47" name="">
             <a:extLst xmlns:a="http://schemas.openxmlformats.org/drawingml/2006/main">
               <a:ext uri="{FF2B5EF4-FFF2-40B4-BE49-F238E27FC236}">
-                <a16:creationId xmlns:a16="http://schemas.microsoft.com/office/drawing/2014/main" id="{21B71E0B-DAE9-47F8-A55F-A6293790B102}"/>
+                <a16:creationId xmlns:a16="http://schemas.microsoft.com/office/drawing/2014/main" id="{5AAA94C0-3B25-417E-9081-DAD1E03EE977}"/>
               </a:ext>
             </a:extLst>
           </p:cNvPr>
@@ -29637,7 +29637,7 @@
           <p:cNvPr id="48" name="">
             <a:extLst xmlns:a="http://schemas.openxmlformats.org/drawingml/2006/main">
               <a:ext uri="{FF2B5EF4-FFF2-40B4-BE49-F238E27FC236}">
-                <a16:creationId xmlns:a16="http://schemas.microsoft.com/office/drawing/2014/main" id="{50E8166C-6DE2-40AE-B463-9064B86B0A9E}"/>
+                <a16:creationId xmlns:a16="http://schemas.microsoft.com/office/drawing/2014/main" id="{7EC5F48A-ED71-471D-A836-C908624526D8}"/>
               </a:ext>
             </a:extLst>
           </p:cNvPr>
@@ -29680,7 +29680,7 @@
     </p:spTree>
     <p:extLst>
       <p:ext uri="{BB962C8B-B14F-4D97-AF65-F5344CB8AC3E}">
-        <p14:creationId xmlns:p14="http://schemas.microsoft.com/office/powerpoint/2010/main" val="529325833"/>
+        <p14:creationId xmlns:p14="http://schemas.microsoft.com/office/powerpoint/2010/main" val="508593929"/>
       </p:ext>
     </p:extLst>
   </p:cSld>
@@ -29704,7 +29704,7 @@
           <p:cNvPr id="59" name="">
             <a:extLst xmlns:a="http://schemas.openxmlformats.org/drawingml/2006/main">
               <a:ext uri="{FF2B5EF4-FFF2-40B4-BE49-F238E27FC236}">
-                <a16:creationId xmlns:a16="http://schemas.microsoft.com/office/drawing/2014/main" id="{73A38019-5246-4664-BC79-F4CF57DEEEB4}"/>
+                <a16:creationId xmlns:a16="http://schemas.microsoft.com/office/drawing/2014/main" id="{92419E75-9D53-49DB-BEBF-4667518148EA}"/>
               </a:ext>
             </a:extLst>
           </p:cNvPr>
@@ -29735,7 +29735,7 @@
           <p:cNvPr id="2" name="">
             <a:extLst xmlns:a="http://schemas.openxmlformats.org/drawingml/2006/main">
               <a:ext uri="{FF2B5EF4-FFF2-40B4-BE49-F238E27FC236}">
-                <a16:creationId xmlns:a16="http://schemas.microsoft.com/office/drawing/2014/main" id="{29DDBF77-2A37-47C2-B198-B48E0E3958CD}"/>
+                <a16:creationId xmlns:a16="http://schemas.microsoft.com/office/drawing/2014/main" id="{A029214E-0AF6-46B8-B702-450B0B45D926}"/>
               </a:ext>
             </a:extLst>
           </p:cNvPr>
@@ -29780,7 +29780,7 @@
           <p:cNvPr id="3" name="">
             <a:extLst xmlns:a="http://schemas.openxmlformats.org/drawingml/2006/main">
               <a:ext uri="{FF2B5EF4-FFF2-40B4-BE49-F238E27FC236}">
-                <a16:creationId xmlns:a16="http://schemas.microsoft.com/office/drawing/2014/main" id="{7800BEB0-DD68-41F1-A596-FA0A842CE547}"/>
+                <a16:creationId xmlns:a16="http://schemas.microsoft.com/office/drawing/2014/main" id="{931DF3DC-519A-46A3-90F6-D2AB464D93C6}"/>
               </a:ext>
             </a:extLst>
           </p:cNvPr>
@@ -29825,7 +29825,7 @@
           <p:cNvPr id="4" name="">
             <a:extLst xmlns:a="http://schemas.openxmlformats.org/drawingml/2006/main">
               <a:ext uri="{FF2B5EF4-FFF2-40B4-BE49-F238E27FC236}">
-                <a16:creationId xmlns:a16="http://schemas.microsoft.com/office/drawing/2014/main" id="{914BC7A3-3929-4E56-A2B4-E9ADCDBBA222}"/>
+                <a16:creationId xmlns:a16="http://schemas.microsoft.com/office/drawing/2014/main" id="{A0CC354F-B668-4EB9-836D-967943F049B5}"/>
               </a:ext>
             </a:extLst>
           </p:cNvPr>
@@ -29870,7 +29870,7 @@
           <p:cNvPr id="5" name="">
             <a:extLst xmlns:a="http://schemas.openxmlformats.org/drawingml/2006/main">
               <a:ext uri="{FF2B5EF4-FFF2-40B4-BE49-F238E27FC236}">
-                <a16:creationId xmlns:a16="http://schemas.microsoft.com/office/drawing/2014/main" id="{E1063634-4181-4AAA-B927-D4A8F3E00A29}"/>
+                <a16:creationId xmlns:a16="http://schemas.microsoft.com/office/drawing/2014/main" id="{FD94E2B4-193E-46EB-8CA4-BA038983EEA0}"/>
               </a:ext>
             </a:extLst>
           </p:cNvPr>
@@ -29901,7 +29901,7 @@
           <p:cNvPr id="6" name="">
             <a:extLst xmlns:a="http://schemas.openxmlformats.org/drawingml/2006/main">
               <a:ext uri="{FF2B5EF4-FFF2-40B4-BE49-F238E27FC236}">
-                <a16:creationId xmlns:a16="http://schemas.microsoft.com/office/drawing/2014/main" id="{68DDC956-3A24-45DC-B2E4-9BC38DED78B2}"/>
+                <a16:creationId xmlns:a16="http://schemas.microsoft.com/office/drawing/2014/main" id="{71D20D95-13E0-447C-9C01-6FA9E6BEFFB5}"/>
               </a:ext>
             </a:extLst>
           </p:cNvPr>
@@ -29932,7 +29932,7 @@
           <p:cNvPr id="7" name="">
             <a:extLst xmlns:a="http://schemas.openxmlformats.org/drawingml/2006/main">
               <a:ext uri="{FF2B5EF4-FFF2-40B4-BE49-F238E27FC236}">
-                <a16:creationId xmlns:a16="http://schemas.microsoft.com/office/drawing/2014/main" id="{5E74F5E8-72B8-490D-BF1B-AB67B2426FD2}"/>
+                <a16:creationId xmlns:a16="http://schemas.microsoft.com/office/drawing/2014/main" id="{451122E3-D385-40C6-BDC5-AF38A48E8E14}"/>
               </a:ext>
             </a:extLst>
           </p:cNvPr>
@@ -29977,7 +29977,7 @@
           <p:cNvPr id="8" name="">
             <a:extLst xmlns:a="http://schemas.openxmlformats.org/drawingml/2006/main">
               <a:ext uri="{FF2B5EF4-FFF2-40B4-BE49-F238E27FC236}">
-                <a16:creationId xmlns:a16="http://schemas.microsoft.com/office/drawing/2014/main" id="{8AF0C47B-EC58-4F57-9D4B-D772935C4D7C}"/>
+                <a16:creationId xmlns:a16="http://schemas.microsoft.com/office/drawing/2014/main" id="{28D2D3B3-A5BD-4527-8FF4-0F43EF17F095}"/>
               </a:ext>
             </a:extLst>
           </p:cNvPr>
@@ -30022,7 +30022,7 @@
           <p:cNvPr id="9" name="">
             <a:extLst xmlns:a="http://schemas.openxmlformats.org/drawingml/2006/main">
               <a:ext uri="{FF2B5EF4-FFF2-40B4-BE49-F238E27FC236}">
-                <a16:creationId xmlns:a16="http://schemas.microsoft.com/office/drawing/2014/main" id="{BC540E08-A43D-4C0D-8964-5A58B56AEF26}"/>
+                <a16:creationId xmlns:a16="http://schemas.microsoft.com/office/drawing/2014/main" id="{45CC6DAC-295E-43DA-B36F-1B90AA9E0435}"/>
               </a:ext>
             </a:extLst>
           </p:cNvPr>
@@ -30055,7 +30055,7 @@
           <p:cNvPr id="10" name="">
             <a:extLst xmlns:a="http://schemas.openxmlformats.org/drawingml/2006/main">
               <a:ext uri="{FF2B5EF4-FFF2-40B4-BE49-F238E27FC236}">
-                <a16:creationId xmlns:a16="http://schemas.microsoft.com/office/drawing/2014/main" id="{97418045-43FD-46F9-8DF0-153857407242}"/>
+                <a16:creationId xmlns:a16="http://schemas.microsoft.com/office/drawing/2014/main" id="{1E8EA292-A844-42F2-84A8-0E25174D5EFC}"/>
               </a:ext>
             </a:extLst>
           </p:cNvPr>
@@ -30086,7 +30086,7 @@
           <p:cNvPr id="11" name="">
             <a:extLst xmlns:a="http://schemas.openxmlformats.org/drawingml/2006/main">
               <a:ext uri="{FF2B5EF4-FFF2-40B4-BE49-F238E27FC236}">
-                <a16:creationId xmlns:a16="http://schemas.microsoft.com/office/drawing/2014/main" id="{208A9C49-89DA-435C-9A97-FAF44D7F2C6B}"/>
+                <a16:creationId xmlns:a16="http://schemas.microsoft.com/office/drawing/2014/main" id="{A6C36D3E-31C8-4BC1-B7F2-EE761DAAB966}"/>
               </a:ext>
             </a:extLst>
           </p:cNvPr>
@@ -30131,7 +30131,7 @@
           <p:cNvPr id="12" name="">
             <a:extLst xmlns:a="http://schemas.openxmlformats.org/drawingml/2006/main">
               <a:ext uri="{FF2B5EF4-FFF2-40B4-BE49-F238E27FC236}">
-                <a16:creationId xmlns:a16="http://schemas.microsoft.com/office/drawing/2014/main" id="{F10F7D02-63E8-4B1C-A0FE-CD8FD5704CE7}"/>
+                <a16:creationId xmlns:a16="http://schemas.microsoft.com/office/drawing/2014/main" id="{172006DB-0969-49E5-9B24-C85B1C1E6CB2}"/>
               </a:ext>
             </a:extLst>
           </p:cNvPr>
@@ -30176,7 +30176,7 @@
           <p:cNvPr id="13" name="">
             <a:extLst xmlns:a="http://schemas.openxmlformats.org/drawingml/2006/main">
               <a:ext uri="{FF2B5EF4-FFF2-40B4-BE49-F238E27FC236}">
-                <a16:creationId xmlns:a16="http://schemas.microsoft.com/office/drawing/2014/main" id="{4B94592B-DC18-42D2-9A49-505D15341919}"/>
+                <a16:creationId xmlns:a16="http://schemas.microsoft.com/office/drawing/2014/main" id="{F643DAB1-BDDB-477F-B357-F47DC2F371CE}"/>
               </a:ext>
             </a:extLst>
           </p:cNvPr>
@@ -30209,7 +30209,7 @@
           <p:cNvPr id="14" name="">
             <a:extLst xmlns:a="http://schemas.openxmlformats.org/drawingml/2006/main">
               <a:ext uri="{FF2B5EF4-FFF2-40B4-BE49-F238E27FC236}">
-                <a16:creationId xmlns:a16="http://schemas.microsoft.com/office/drawing/2014/main" id="{E77BCA18-5C97-4552-96D6-0DF9E53CF0D2}"/>
+                <a16:creationId xmlns:a16="http://schemas.microsoft.com/office/drawing/2014/main" id="{FECDEEA1-765F-46C3-9071-5B2628BEBB6F}"/>
               </a:ext>
             </a:extLst>
           </p:cNvPr>
@@ -30242,7 +30242,7 @@
           <p:cNvPr id="15" name="">
             <a:extLst xmlns:a="http://schemas.openxmlformats.org/drawingml/2006/main">
               <a:ext uri="{FF2B5EF4-FFF2-40B4-BE49-F238E27FC236}">
-                <a16:creationId xmlns:a16="http://schemas.microsoft.com/office/drawing/2014/main" id="{91F2D601-EFDC-4EB8-BB0F-C3E72F966ED9}"/>
+                <a16:creationId xmlns:a16="http://schemas.microsoft.com/office/drawing/2014/main" id="{658756BF-179C-4761-B910-C89B1E54CCE9}"/>
               </a:ext>
             </a:extLst>
           </p:cNvPr>
@@ -30273,7 +30273,7 @@
           <p:cNvPr id="16" name="">
             <a:extLst xmlns:a="http://schemas.openxmlformats.org/drawingml/2006/main">
               <a:ext uri="{FF2B5EF4-FFF2-40B4-BE49-F238E27FC236}">
-                <a16:creationId xmlns:a16="http://schemas.microsoft.com/office/drawing/2014/main" id="{C27CF5C7-7F17-4B13-8166-7D65F73EB95B}"/>
+                <a16:creationId xmlns:a16="http://schemas.microsoft.com/office/drawing/2014/main" id="{070D0E38-9DBE-4212-A476-389227345EEC}"/>
               </a:ext>
             </a:extLst>
           </p:cNvPr>
@@ -30318,7 +30318,7 @@
           <p:cNvPr id="17" name="">
             <a:extLst xmlns:a="http://schemas.openxmlformats.org/drawingml/2006/main">
               <a:ext uri="{FF2B5EF4-FFF2-40B4-BE49-F238E27FC236}">
-                <a16:creationId xmlns:a16="http://schemas.microsoft.com/office/drawing/2014/main" id="{504EAAFF-74CC-40A8-BD43-B8AE86DE479E}"/>
+                <a16:creationId xmlns:a16="http://schemas.microsoft.com/office/drawing/2014/main" id="{A89AF127-46CF-43F4-8E4A-E15A0D23F6FA}"/>
               </a:ext>
             </a:extLst>
           </p:cNvPr>
@@ -30363,7 +30363,7 @@
           <p:cNvPr id="18" name="">
             <a:extLst xmlns:a="http://schemas.openxmlformats.org/drawingml/2006/main">
               <a:ext uri="{FF2B5EF4-FFF2-40B4-BE49-F238E27FC236}">
-                <a16:creationId xmlns:a16="http://schemas.microsoft.com/office/drawing/2014/main" id="{596E9193-C51C-4FFC-9AE4-B89864FD0D9C}"/>
+                <a16:creationId xmlns:a16="http://schemas.microsoft.com/office/drawing/2014/main" id="{317E891A-D04C-4A4D-A235-6C4F77C4C29C}"/>
               </a:ext>
             </a:extLst>
           </p:cNvPr>
@@ -30396,7 +30396,7 @@
           <p:cNvPr id="19" name="">
             <a:extLst xmlns:a="http://schemas.openxmlformats.org/drawingml/2006/main">
               <a:ext uri="{FF2B5EF4-FFF2-40B4-BE49-F238E27FC236}">
-                <a16:creationId xmlns:a16="http://schemas.microsoft.com/office/drawing/2014/main" id="{B85BAA46-FA79-4B36-950A-E8CE51A353EE}"/>
+                <a16:creationId xmlns:a16="http://schemas.microsoft.com/office/drawing/2014/main" id="{47A7184B-3C03-4E10-9802-B6E2C966D8E2}"/>
               </a:ext>
             </a:extLst>
           </p:cNvPr>
@@ -30429,7 +30429,7 @@
           <p:cNvPr id="20" name="">
             <a:extLst xmlns:a="http://schemas.openxmlformats.org/drawingml/2006/main">
               <a:ext uri="{FF2B5EF4-FFF2-40B4-BE49-F238E27FC236}">
-                <a16:creationId xmlns:a16="http://schemas.microsoft.com/office/drawing/2014/main" id="{93567FE0-F86F-4391-B68A-37B1EF4B7850}"/>
+                <a16:creationId xmlns:a16="http://schemas.microsoft.com/office/drawing/2014/main" id="{C2D83EE0-2BBB-41EA-B1EE-2A3297498297}"/>
               </a:ext>
             </a:extLst>
           </p:cNvPr>
@@ -30460,7 +30460,7 @@
           <p:cNvPr id="21" name="">
             <a:extLst xmlns:a="http://schemas.openxmlformats.org/drawingml/2006/main">
               <a:ext uri="{FF2B5EF4-FFF2-40B4-BE49-F238E27FC236}">
-                <a16:creationId xmlns:a16="http://schemas.microsoft.com/office/drawing/2014/main" id="{730628EF-90A0-4D2F-A1CF-D5E3E1B611AB}"/>
+                <a16:creationId xmlns:a16="http://schemas.microsoft.com/office/drawing/2014/main" id="{A0E36A3C-B86A-47B7-A086-CFC059095DA1}"/>
               </a:ext>
             </a:extLst>
           </p:cNvPr>
@@ -30505,7 +30505,7 @@
           <p:cNvPr id="22" name="">
             <a:extLst xmlns:a="http://schemas.openxmlformats.org/drawingml/2006/main">
               <a:ext uri="{FF2B5EF4-FFF2-40B4-BE49-F238E27FC236}">
-                <a16:creationId xmlns:a16="http://schemas.microsoft.com/office/drawing/2014/main" id="{D3427A6A-AF61-48B7-8D59-64FFC8516E03}"/>
+                <a16:creationId xmlns:a16="http://schemas.microsoft.com/office/drawing/2014/main" id="{1452C611-9366-4169-88F0-8B012A79C43B}"/>
               </a:ext>
             </a:extLst>
           </p:cNvPr>
@@ -30550,7 +30550,7 @@
           <p:cNvPr id="23" name="">
             <a:extLst xmlns:a="http://schemas.openxmlformats.org/drawingml/2006/main">
               <a:ext uri="{FF2B5EF4-FFF2-40B4-BE49-F238E27FC236}">
-                <a16:creationId xmlns:a16="http://schemas.microsoft.com/office/drawing/2014/main" id="{75C7E222-7183-4BC3-8B45-5F26471680F5}"/>
+                <a16:creationId xmlns:a16="http://schemas.microsoft.com/office/drawing/2014/main" id="{BCFC1E08-D74D-45DD-BAEA-7AB17214FC2A}"/>
               </a:ext>
             </a:extLst>
           </p:cNvPr>
@@ -30583,7 +30583,7 @@
           <p:cNvPr id="24" name="">
             <a:extLst xmlns:a="http://schemas.openxmlformats.org/drawingml/2006/main">
               <a:ext uri="{FF2B5EF4-FFF2-40B4-BE49-F238E27FC236}">
-                <a16:creationId xmlns:a16="http://schemas.microsoft.com/office/drawing/2014/main" id="{E8873843-1E69-4E6C-B130-4479B2637F93}"/>
+                <a16:creationId xmlns:a16="http://schemas.microsoft.com/office/drawing/2014/main" id="{8D6B9B2A-71E7-45B0-83DE-61B107037DE2}"/>
               </a:ext>
             </a:extLst>
           </p:cNvPr>
@@ -30616,7 +30616,7 @@
           <p:cNvPr id="25" name="">
             <a:extLst xmlns:a="http://schemas.openxmlformats.org/drawingml/2006/main">
               <a:ext uri="{FF2B5EF4-FFF2-40B4-BE49-F238E27FC236}">
-                <a16:creationId xmlns:a16="http://schemas.microsoft.com/office/drawing/2014/main" id="{F7EA634C-A37E-4534-9AF2-40C198B24F4B}"/>
+                <a16:creationId xmlns:a16="http://schemas.microsoft.com/office/drawing/2014/main" id="{CBD5D4C7-0B8C-4332-A09A-18E1118DB541}"/>
               </a:ext>
             </a:extLst>
           </p:cNvPr>
@@ -30647,7 +30647,7 @@
           <p:cNvPr id="26" name="">
             <a:extLst xmlns:a="http://schemas.openxmlformats.org/drawingml/2006/main">
               <a:ext uri="{FF2B5EF4-FFF2-40B4-BE49-F238E27FC236}">
-                <a16:creationId xmlns:a16="http://schemas.microsoft.com/office/drawing/2014/main" id="{4D81B19A-89CE-46E5-99E1-EEA8080E6959}"/>
+                <a16:creationId xmlns:a16="http://schemas.microsoft.com/office/drawing/2014/main" id="{40110E0A-45C2-4DA6-BAB0-33EDA42E3006}"/>
               </a:ext>
             </a:extLst>
           </p:cNvPr>
@@ -30692,7 +30692,7 @@
           <p:cNvPr id="27" name="">
             <a:extLst xmlns:a="http://schemas.openxmlformats.org/drawingml/2006/main">
               <a:ext uri="{FF2B5EF4-FFF2-40B4-BE49-F238E27FC236}">
-                <a16:creationId xmlns:a16="http://schemas.microsoft.com/office/drawing/2014/main" id="{37126647-F51C-4976-A5CE-DFAA5A469B07}"/>
+                <a16:creationId xmlns:a16="http://schemas.microsoft.com/office/drawing/2014/main" id="{DB0B572E-A17F-43F4-8EEF-5925A2060973}"/>
               </a:ext>
             </a:extLst>
           </p:cNvPr>
@@ -30737,7 +30737,7 @@
           <p:cNvPr id="28" name="">
             <a:extLst xmlns:a="http://schemas.openxmlformats.org/drawingml/2006/main">
               <a:ext uri="{FF2B5EF4-FFF2-40B4-BE49-F238E27FC236}">
-                <a16:creationId xmlns:a16="http://schemas.microsoft.com/office/drawing/2014/main" id="{0F3E9929-7BE6-45BF-86DD-733525EE81AF}"/>
+                <a16:creationId xmlns:a16="http://schemas.microsoft.com/office/drawing/2014/main" id="{43B92A4B-995E-4056-817A-5DC2234A078F}"/>
               </a:ext>
             </a:extLst>
           </p:cNvPr>
@@ -30770,7 +30770,7 @@
           <p:cNvPr id="29" name="">
             <a:extLst xmlns:a="http://schemas.openxmlformats.org/drawingml/2006/main">
               <a:ext uri="{FF2B5EF4-FFF2-40B4-BE49-F238E27FC236}">
-                <a16:creationId xmlns:a16="http://schemas.microsoft.com/office/drawing/2014/main" id="{20CCD6FA-76AD-4B3A-82B7-DC43F9109E60}"/>
+                <a16:creationId xmlns:a16="http://schemas.microsoft.com/office/drawing/2014/main" id="{CD7A8ED3-8A08-492D-A265-4096EB83B81E}"/>
               </a:ext>
             </a:extLst>
           </p:cNvPr>
@@ -30803,7 +30803,7 @@
           <p:cNvPr id="30" name="">
             <a:extLst xmlns:a="http://schemas.openxmlformats.org/drawingml/2006/main">
               <a:ext uri="{FF2B5EF4-FFF2-40B4-BE49-F238E27FC236}">
-                <a16:creationId xmlns:a16="http://schemas.microsoft.com/office/drawing/2014/main" id="{8AAAAB37-C530-46A8-A27F-7F01C87BC036}"/>
+                <a16:creationId xmlns:a16="http://schemas.microsoft.com/office/drawing/2014/main" id="{AF31F715-026D-443D-9025-43976370D657}"/>
               </a:ext>
             </a:extLst>
           </p:cNvPr>
@@ -30834,7 +30834,7 @@
           <p:cNvPr id="31" name="">
             <a:extLst xmlns:a="http://schemas.openxmlformats.org/drawingml/2006/main">
               <a:ext uri="{FF2B5EF4-FFF2-40B4-BE49-F238E27FC236}">
-                <a16:creationId xmlns:a16="http://schemas.microsoft.com/office/drawing/2014/main" id="{3843B785-8959-4DA1-9A99-15912C1F96D8}"/>
+                <a16:creationId xmlns:a16="http://schemas.microsoft.com/office/drawing/2014/main" id="{754F9E76-973E-4879-8ABF-8870CB56F6A3}"/>
               </a:ext>
             </a:extLst>
           </p:cNvPr>
@@ -30879,7 +30879,7 @@
           <p:cNvPr id="32" name="">
             <a:extLst xmlns:a="http://schemas.openxmlformats.org/drawingml/2006/main">
               <a:ext uri="{FF2B5EF4-FFF2-40B4-BE49-F238E27FC236}">
-                <a16:creationId xmlns:a16="http://schemas.microsoft.com/office/drawing/2014/main" id="{AC763716-A9AF-4BFD-8EA4-F97A16ECB71E}"/>
+                <a16:creationId xmlns:a16="http://schemas.microsoft.com/office/drawing/2014/main" id="{AE69D323-42F3-4114-8EA9-1FF98CEF7096}"/>
               </a:ext>
             </a:extLst>
           </p:cNvPr>
@@ -30924,7 +30924,7 @@
           <p:cNvPr id="33" name="">
             <a:extLst xmlns:a="http://schemas.openxmlformats.org/drawingml/2006/main">
               <a:ext uri="{FF2B5EF4-FFF2-40B4-BE49-F238E27FC236}">
-                <a16:creationId xmlns:a16="http://schemas.microsoft.com/office/drawing/2014/main" id="{79A32879-4A07-4E68-AABB-A3F8476F015E}"/>
+                <a16:creationId xmlns:a16="http://schemas.microsoft.com/office/drawing/2014/main" id="{931132D8-B28B-4CC7-B0B9-F725052BEBAF}"/>
               </a:ext>
             </a:extLst>
           </p:cNvPr>
@@ -30957,7 +30957,7 @@
           <p:cNvPr id="34" name="">
             <a:extLst xmlns:a="http://schemas.openxmlformats.org/drawingml/2006/main">
               <a:ext uri="{FF2B5EF4-FFF2-40B4-BE49-F238E27FC236}">
-                <a16:creationId xmlns:a16="http://schemas.microsoft.com/office/drawing/2014/main" id="{FDCED31D-851C-485B-90F9-CC08DF933E63}"/>
+                <a16:creationId xmlns:a16="http://schemas.microsoft.com/office/drawing/2014/main" id="{BF142697-6472-4B01-876E-11C7D7A2DA95}"/>
               </a:ext>
             </a:extLst>
           </p:cNvPr>
@@ -30990,7 +30990,7 @@
           <p:cNvPr id="35" name="">
             <a:extLst xmlns:a="http://schemas.openxmlformats.org/drawingml/2006/main">
               <a:ext uri="{FF2B5EF4-FFF2-40B4-BE49-F238E27FC236}">
-                <a16:creationId xmlns:a16="http://schemas.microsoft.com/office/drawing/2014/main" id="{43680860-8CB4-405B-8EC0-671F230B5507}"/>
+                <a16:creationId xmlns:a16="http://schemas.microsoft.com/office/drawing/2014/main" id="{8AFC0EFD-2285-41B5-9C50-E2F8C3BA9C3B}"/>
               </a:ext>
             </a:extLst>
           </p:cNvPr>
@@ -31021,7 +31021,7 @@
           <p:cNvPr id="36" name="">
             <a:extLst xmlns:a="http://schemas.openxmlformats.org/drawingml/2006/main">
               <a:ext uri="{FF2B5EF4-FFF2-40B4-BE49-F238E27FC236}">
-                <a16:creationId xmlns:a16="http://schemas.microsoft.com/office/drawing/2014/main" id="{5275B280-1A2E-47A3-A198-0292DC2756B3}"/>
+                <a16:creationId xmlns:a16="http://schemas.microsoft.com/office/drawing/2014/main" id="{DCDF68DB-FC4C-4BA7-AEB2-19585B461D7A}"/>
               </a:ext>
             </a:extLst>
           </p:cNvPr>
@@ -31066,7 +31066,7 @@
           <p:cNvPr id="37" name="">
             <a:extLst xmlns:a="http://schemas.openxmlformats.org/drawingml/2006/main">
               <a:ext uri="{FF2B5EF4-FFF2-40B4-BE49-F238E27FC236}">
-                <a16:creationId xmlns:a16="http://schemas.microsoft.com/office/drawing/2014/main" id="{C435D2CC-8815-409A-B444-C7E50E6C02EB}"/>
+                <a16:creationId xmlns:a16="http://schemas.microsoft.com/office/drawing/2014/main" id="{D0E07AEB-171F-4E8A-AC67-6BAC8811AF0B}"/>
               </a:ext>
             </a:extLst>
           </p:cNvPr>
@@ -31111,7 +31111,7 @@
           <p:cNvPr id="38" name="">
             <a:extLst xmlns:a="http://schemas.openxmlformats.org/drawingml/2006/main">
               <a:ext uri="{FF2B5EF4-FFF2-40B4-BE49-F238E27FC236}">
-                <a16:creationId xmlns:a16="http://schemas.microsoft.com/office/drawing/2014/main" id="{82866067-4F52-4BB1-99B5-600E45CE74F9}"/>
+                <a16:creationId xmlns:a16="http://schemas.microsoft.com/office/drawing/2014/main" id="{F4CA8F76-74BA-451B-878A-2B5FD1CA0D5B}"/>
               </a:ext>
             </a:extLst>
           </p:cNvPr>
@@ -31146,7 +31146,7 @@
           <p:cNvPr id="39" name="">
             <a:extLst xmlns:a="http://schemas.openxmlformats.org/drawingml/2006/main">
               <a:ext uri="{FF2B5EF4-FFF2-40B4-BE49-F238E27FC236}">
-                <a16:creationId xmlns:a16="http://schemas.microsoft.com/office/drawing/2014/main" id="{F55AA905-6F59-4825-B19D-F9A3BF9CF66D}"/>
+                <a16:creationId xmlns:a16="http://schemas.microsoft.com/office/drawing/2014/main" id="{3848DA5C-BBF2-4E76-9055-1D7FFE19A75C}"/>
               </a:ext>
             </a:extLst>
           </p:cNvPr>
@@ -31177,7 +31177,7 @@
           <p:cNvPr id="40" name="">
             <a:extLst xmlns:a="http://schemas.openxmlformats.org/drawingml/2006/main">
               <a:ext uri="{FF2B5EF4-FFF2-40B4-BE49-F238E27FC236}">
-                <a16:creationId xmlns:a16="http://schemas.microsoft.com/office/drawing/2014/main" id="{A3D5E372-AB7C-4107-92D1-869EA5021BF4}"/>
+                <a16:creationId xmlns:a16="http://schemas.microsoft.com/office/drawing/2014/main" id="{4F906D2C-9519-4AE0-A5C6-83426D6AA7E9}"/>
               </a:ext>
             </a:extLst>
           </p:cNvPr>
@@ -31222,7 +31222,7 @@
           <p:cNvPr id="41" name="">
             <a:extLst xmlns:a="http://schemas.openxmlformats.org/drawingml/2006/main">
               <a:ext uri="{FF2B5EF4-FFF2-40B4-BE49-F238E27FC236}">
-                <a16:creationId xmlns:a16="http://schemas.microsoft.com/office/drawing/2014/main" id="{A72E1173-1C1F-4DF2-8F39-766272A3EC5E}"/>
+                <a16:creationId xmlns:a16="http://schemas.microsoft.com/office/drawing/2014/main" id="{3B22325A-648A-4532-B1D0-12FAC4136EB9}"/>
               </a:ext>
             </a:extLst>
           </p:cNvPr>
@@ -31267,7 +31267,7 @@
           <p:cNvPr id="42" name="">
             <a:extLst xmlns:a="http://schemas.openxmlformats.org/drawingml/2006/main">
               <a:ext uri="{FF2B5EF4-FFF2-40B4-BE49-F238E27FC236}">
-                <a16:creationId xmlns:a16="http://schemas.microsoft.com/office/drawing/2014/main" id="{BA7280E9-2C42-430B-93F1-899B836C8B4E}"/>
+                <a16:creationId xmlns:a16="http://schemas.microsoft.com/office/drawing/2014/main" id="{2C00217B-535D-4DD0-9E36-1F0EF737B339}"/>
               </a:ext>
             </a:extLst>
           </p:cNvPr>
@@ -31302,7 +31302,7 @@
           <p:cNvPr id="43" name="">
             <a:extLst xmlns:a="http://schemas.openxmlformats.org/drawingml/2006/main">
               <a:ext uri="{FF2B5EF4-FFF2-40B4-BE49-F238E27FC236}">
-                <a16:creationId xmlns:a16="http://schemas.microsoft.com/office/drawing/2014/main" id="{E325BBF1-E4B0-425B-94E7-8FB116F1D1CF}"/>
+                <a16:creationId xmlns:a16="http://schemas.microsoft.com/office/drawing/2014/main" id="{254C721F-0007-4DEE-A9F2-E07772617B49}"/>
               </a:ext>
             </a:extLst>
           </p:cNvPr>
@@ -31333,7 +31333,7 @@
           <p:cNvPr id="44" name="">
             <a:extLst xmlns:a="http://schemas.openxmlformats.org/drawingml/2006/main">
               <a:ext uri="{FF2B5EF4-FFF2-40B4-BE49-F238E27FC236}">
-                <a16:creationId xmlns:a16="http://schemas.microsoft.com/office/drawing/2014/main" id="{BCDF86FB-7E86-43CC-818E-245ECBBAA6FD}"/>
+                <a16:creationId xmlns:a16="http://schemas.microsoft.com/office/drawing/2014/main" id="{78E39407-48B0-4DD0-B3FE-FDABCB9CCE36}"/>
               </a:ext>
             </a:extLst>
           </p:cNvPr>
@@ -31378,7 +31378,7 @@
           <p:cNvPr id="45" name="">
             <a:extLst xmlns:a="http://schemas.openxmlformats.org/drawingml/2006/main">
               <a:ext uri="{FF2B5EF4-FFF2-40B4-BE49-F238E27FC236}">
-                <a16:creationId xmlns:a16="http://schemas.microsoft.com/office/drawing/2014/main" id="{FBD560D9-5C8D-48F8-95D9-BBEDC50A26F4}"/>
+                <a16:creationId xmlns:a16="http://schemas.microsoft.com/office/drawing/2014/main" id="{E84DFF7B-58D9-4026-9592-39F8CC6C7162}"/>
               </a:ext>
             </a:extLst>
           </p:cNvPr>
@@ -31423,7 +31423,7 @@
           <p:cNvPr id="46" name="">
             <a:extLst xmlns:a="http://schemas.openxmlformats.org/drawingml/2006/main">
               <a:ext uri="{FF2B5EF4-FFF2-40B4-BE49-F238E27FC236}">
-                <a16:creationId xmlns:a16="http://schemas.microsoft.com/office/drawing/2014/main" id="{6974B00C-2A40-48C4-9E6A-ECD7C33062ED}"/>
+                <a16:creationId xmlns:a16="http://schemas.microsoft.com/office/drawing/2014/main" id="{6DBEB1B3-7F32-4E97-91E3-9ABD95BA0462}"/>
               </a:ext>
             </a:extLst>
           </p:cNvPr>
@@ -31458,7 +31458,7 @@
           <p:cNvPr id="47" name="">
             <a:extLst xmlns:a="http://schemas.openxmlformats.org/drawingml/2006/main">
               <a:ext uri="{FF2B5EF4-FFF2-40B4-BE49-F238E27FC236}">
-                <a16:creationId xmlns:a16="http://schemas.microsoft.com/office/drawing/2014/main" id="{828AFF5D-9EBD-45B8-8D78-97F88E5993EC}"/>
+                <a16:creationId xmlns:a16="http://schemas.microsoft.com/office/drawing/2014/main" id="{D6B69456-5B6E-4A1E-9BF8-80F111AC8779}"/>
               </a:ext>
             </a:extLst>
           </p:cNvPr>
@@ -31503,7 +31503,7 @@
           <p:cNvPr id="48" name="">
             <a:extLst xmlns:a="http://schemas.openxmlformats.org/drawingml/2006/main">
               <a:ext uri="{FF2B5EF4-FFF2-40B4-BE49-F238E27FC236}">
-                <a16:creationId xmlns:a16="http://schemas.microsoft.com/office/drawing/2014/main" id="{3386BAC4-DA95-4F8C-B62F-C2AAE5B48CB1}"/>
+                <a16:creationId xmlns:a16="http://schemas.microsoft.com/office/drawing/2014/main" id="{853DB55F-730D-41FB-BF91-B24439AC80B3}"/>
               </a:ext>
             </a:extLst>
           </p:cNvPr>
@@ -31548,7 +31548,7 @@
           <p:cNvPr id="49" name="">
             <a:extLst xmlns:a="http://schemas.openxmlformats.org/drawingml/2006/main">
               <a:ext uri="{FF2B5EF4-FFF2-40B4-BE49-F238E27FC236}">
-                <a16:creationId xmlns:a16="http://schemas.microsoft.com/office/drawing/2014/main" id="{FA204E35-FB56-41DA-AB57-C7CAFBA40829}"/>
+                <a16:creationId xmlns:a16="http://schemas.microsoft.com/office/drawing/2014/main" id="{F9C6EB22-98AD-45E8-BBD9-68800B3D3C18}"/>
               </a:ext>
             </a:extLst>
           </p:cNvPr>
@@ -31593,7 +31593,7 @@
           <p:cNvPr id="50" name="">
             <a:extLst xmlns:a="http://schemas.openxmlformats.org/drawingml/2006/main">
               <a:ext uri="{FF2B5EF4-FFF2-40B4-BE49-F238E27FC236}">
-                <a16:creationId xmlns:a16="http://schemas.microsoft.com/office/drawing/2014/main" id="{D0C8FE41-DF55-4344-9692-20D454466074}"/>
+                <a16:creationId xmlns:a16="http://schemas.microsoft.com/office/drawing/2014/main" id="{D795F5FD-B3E0-41C3-B300-858EC47D5F48}"/>
               </a:ext>
             </a:extLst>
           </p:cNvPr>
@@ -31628,7 +31628,7 @@
           <p:cNvPr id="51" name="">
             <a:extLst xmlns:a="http://schemas.openxmlformats.org/drawingml/2006/main">
               <a:ext uri="{FF2B5EF4-FFF2-40B4-BE49-F238E27FC236}">
-                <a16:creationId xmlns:a16="http://schemas.microsoft.com/office/drawing/2014/main" id="{D6411D14-607C-4B99-BB8F-D3DE78736D6F}"/>
+                <a16:creationId xmlns:a16="http://schemas.microsoft.com/office/drawing/2014/main" id="{8A057934-FC7D-40EB-B4D7-DACF69114307}"/>
               </a:ext>
             </a:extLst>
           </p:cNvPr>
@@ -31673,7 +31673,7 @@
           <p:cNvPr id="52" name="">
             <a:extLst xmlns:a="http://schemas.openxmlformats.org/drawingml/2006/main">
               <a:ext uri="{FF2B5EF4-FFF2-40B4-BE49-F238E27FC236}">
-                <a16:creationId xmlns:a16="http://schemas.microsoft.com/office/drawing/2014/main" id="{C2521A5B-A992-4702-86A2-BA662250626C}"/>
+                <a16:creationId xmlns:a16="http://schemas.microsoft.com/office/drawing/2014/main" id="{5A19A8AE-FD57-4853-96DC-5A98A4138544}"/>
               </a:ext>
             </a:extLst>
           </p:cNvPr>
@@ -31718,7 +31718,7 @@
           <p:cNvPr id="53" name="">
             <a:extLst xmlns:a="http://schemas.openxmlformats.org/drawingml/2006/main">
               <a:ext uri="{FF2B5EF4-FFF2-40B4-BE49-F238E27FC236}">
-                <a16:creationId xmlns:a16="http://schemas.microsoft.com/office/drawing/2014/main" id="{BA351B54-08D6-4E93-85DA-25374880E98D}"/>
+                <a16:creationId xmlns:a16="http://schemas.microsoft.com/office/drawing/2014/main" id="{699BF6EE-96D8-48F7-AA89-30A9A97E226D}"/>
               </a:ext>
             </a:extLst>
           </p:cNvPr>
@@ -31763,7 +31763,7 @@
           <p:cNvPr id="54" name="">
             <a:extLst xmlns:a="http://schemas.openxmlformats.org/drawingml/2006/main">
               <a:ext uri="{FF2B5EF4-FFF2-40B4-BE49-F238E27FC236}">
-                <a16:creationId xmlns:a16="http://schemas.microsoft.com/office/drawing/2014/main" id="{C3A332DC-64F7-46A6-B431-AF500B5495E9}"/>
+                <a16:creationId xmlns:a16="http://schemas.microsoft.com/office/drawing/2014/main" id="{0CCA639F-B921-4CC5-9F05-41508B0BF061}"/>
               </a:ext>
             </a:extLst>
           </p:cNvPr>
@@ -31798,7 +31798,7 @@
           <p:cNvPr id="55" name="">
             <a:extLst xmlns:a="http://schemas.openxmlformats.org/drawingml/2006/main">
               <a:ext uri="{FF2B5EF4-FFF2-40B4-BE49-F238E27FC236}">
-                <a16:creationId xmlns:a16="http://schemas.microsoft.com/office/drawing/2014/main" id="{43CB03EF-EABB-4A22-80D4-737B07A8BE6E}"/>
+                <a16:creationId xmlns:a16="http://schemas.microsoft.com/office/drawing/2014/main" id="{2EB54676-34C6-4A2A-B8A5-7D5EAF192498}"/>
               </a:ext>
             </a:extLst>
           </p:cNvPr>
@@ -31843,7 +31843,7 @@
           <p:cNvPr id="56" name="">
             <a:extLst xmlns:a="http://schemas.openxmlformats.org/drawingml/2006/main">
               <a:ext uri="{FF2B5EF4-FFF2-40B4-BE49-F238E27FC236}">
-                <a16:creationId xmlns:a16="http://schemas.microsoft.com/office/drawing/2014/main" id="{50FAADE9-C5E9-494B-B029-1A3BDF9DC0E8}"/>
+                <a16:creationId xmlns:a16="http://schemas.microsoft.com/office/drawing/2014/main" id="{1BA2FDCA-E582-4B88-AC75-82A2EF1700C0}"/>
               </a:ext>
             </a:extLst>
           </p:cNvPr>
@@ -31888,7 +31888,7 @@
           <p:cNvPr id="57" name="">
             <a:extLst xmlns:a="http://schemas.openxmlformats.org/drawingml/2006/main">
               <a:ext uri="{FF2B5EF4-FFF2-40B4-BE49-F238E27FC236}">
-                <a16:creationId xmlns:a16="http://schemas.microsoft.com/office/drawing/2014/main" id="{6563488D-E822-4548-BE87-794E961666B1}"/>
+                <a16:creationId xmlns:a16="http://schemas.microsoft.com/office/drawing/2014/main" id="{B9132E85-B12C-479D-956F-1D33E8B9BCDA}"/>
               </a:ext>
             </a:extLst>
           </p:cNvPr>
@@ -31933,7 +31933,7 @@
           <p:cNvPr id="58" name="">
             <a:extLst xmlns:a="http://schemas.openxmlformats.org/drawingml/2006/main">
               <a:ext uri="{FF2B5EF4-FFF2-40B4-BE49-F238E27FC236}">
-                <a16:creationId xmlns:a16="http://schemas.microsoft.com/office/drawing/2014/main" id="{810449D2-8113-4936-A2DA-A2273BB09A86}"/>
+                <a16:creationId xmlns:a16="http://schemas.microsoft.com/office/drawing/2014/main" id="{B7D032CA-3019-495C-883A-0FB273080DDA}"/>
               </a:ext>
             </a:extLst>
           </p:cNvPr>
@@ -31976,7 +31976,7 @@
     </p:spTree>
     <p:extLst>
       <p:ext uri="{BB962C8B-B14F-4D97-AF65-F5344CB8AC3E}">
-        <p14:creationId xmlns:p14="http://schemas.microsoft.com/office/powerpoint/2010/main" val="1917484037"/>
+        <p14:creationId xmlns:p14="http://schemas.microsoft.com/office/powerpoint/2010/main" val="1867759188"/>
       </p:ext>
     </p:extLst>
   </p:cSld>
@@ -32000,7 +32000,7 @@
           <p:cNvPr id="51" name="">
             <a:extLst xmlns:a="http://schemas.openxmlformats.org/drawingml/2006/main">
               <a:ext uri="{FF2B5EF4-FFF2-40B4-BE49-F238E27FC236}">
-                <a16:creationId xmlns:a16="http://schemas.microsoft.com/office/drawing/2014/main" id="{140A8BF8-B8BE-4909-9208-3CAC02156814}"/>
+                <a16:creationId xmlns:a16="http://schemas.microsoft.com/office/drawing/2014/main" id="{82B1E5C3-AFF7-4D84-8240-5CA41AFAAE8C}"/>
               </a:ext>
             </a:extLst>
           </p:cNvPr>
@@ -32031,7 +32031,7 @@
           <p:cNvPr id="2" name="">
             <a:extLst xmlns:a="http://schemas.openxmlformats.org/drawingml/2006/main">
               <a:ext uri="{FF2B5EF4-FFF2-40B4-BE49-F238E27FC236}">
-                <a16:creationId xmlns:a16="http://schemas.microsoft.com/office/drawing/2014/main" id="{3D678A92-A343-423A-8D1B-5DDABC16BC3B}"/>
+                <a16:creationId xmlns:a16="http://schemas.microsoft.com/office/drawing/2014/main" id="{C0E07874-55EE-4596-A66B-ED01EB551049}"/>
               </a:ext>
             </a:extLst>
           </p:cNvPr>
@@ -32076,7 +32076,7 @@
           <p:cNvPr id="3" name="">
             <a:extLst xmlns:a="http://schemas.openxmlformats.org/drawingml/2006/main">
               <a:ext uri="{FF2B5EF4-FFF2-40B4-BE49-F238E27FC236}">
-                <a16:creationId xmlns:a16="http://schemas.microsoft.com/office/drawing/2014/main" id="{B4881C9D-C00C-40A6-9DC3-E81313EEC7CF}"/>
+                <a16:creationId xmlns:a16="http://schemas.microsoft.com/office/drawing/2014/main" id="{20A040D2-8121-4011-9F26-129CF5D7B3A1}"/>
               </a:ext>
             </a:extLst>
           </p:cNvPr>
@@ -32121,7 +32121,7 @@
           <p:cNvPr id="4" name="">
             <a:extLst xmlns:a="http://schemas.openxmlformats.org/drawingml/2006/main">
               <a:ext uri="{FF2B5EF4-FFF2-40B4-BE49-F238E27FC236}">
-                <a16:creationId xmlns:a16="http://schemas.microsoft.com/office/drawing/2014/main" id="{024C5317-CB7E-4F2E-94E4-55343C180FC8}"/>
+                <a16:creationId xmlns:a16="http://schemas.microsoft.com/office/drawing/2014/main" id="{3C3E47F3-FBD5-4BC3-BC28-397F7A4BF373}"/>
               </a:ext>
             </a:extLst>
           </p:cNvPr>
@@ -32166,7 +32166,7 @@
           <p:cNvPr id="5" name="">
             <a:extLst xmlns:a="http://schemas.openxmlformats.org/drawingml/2006/main">
               <a:ext uri="{FF2B5EF4-FFF2-40B4-BE49-F238E27FC236}">
-                <a16:creationId xmlns:a16="http://schemas.microsoft.com/office/drawing/2014/main" id="{16E66364-F398-423A-BF6F-7483BE1DA88B}"/>
+                <a16:creationId xmlns:a16="http://schemas.microsoft.com/office/drawing/2014/main" id="{28ABE50F-1E29-4FFE-BC3D-024F21D9D3BB}"/>
               </a:ext>
             </a:extLst>
           </p:cNvPr>
@@ -32197,7 +32197,7 @@
           <p:cNvPr id="6" name="">
             <a:extLst xmlns:a="http://schemas.openxmlformats.org/drawingml/2006/main">
               <a:ext uri="{FF2B5EF4-FFF2-40B4-BE49-F238E27FC236}">
-                <a16:creationId xmlns:a16="http://schemas.microsoft.com/office/drawing/2014/main" id="{C6EBCDD6-81F0-490D-AC58-E19D5F9F9358}"/>
+                <a16:creationId xmlns:a16="http://schemas.microsoft.com/office/drawing/2014/main" id="{6894028D-B789-4B7E-9D79-E3779D3A5015}"/>
               </a:ext>
             </a:extLst>
           </p:cNvPr>
@@ -32228,7 +32228,7 @@
           <p:cNvPr id="7" name="">
             <a:extLst xmlns:a="http://schemas.openxmlformats.org/drawingml/2006/main">
               <a:ext uri="{FF2B5EF4-FFF2-40B4-BE49-F238E27FC236}">
-                <a16:creationId xmlns:a16="http://schemas.microsoft.com/office/drawing/2014/main" id="{DA2FDAD8-990A-46E9-8465-12D96B1813B5}"/>
+                <a16:creationId xmlns:a16="http://schemas.microsoft.com/office/drawing/2014/main" id="{06779702-DAF7-4DDF-9C5D-221241B395AD}"/>
               </a:ext>
             </a:extLst>
           </p:cNvPr>
@@ -32273,7 +32273,7 @@
           <p:cNvPr id="8" name="">
             <a:extLst xmlns:a="http://schemas.openxmlformats.org/drawingml/2006/main">
               <a:ext uri="{FF2B5EF4-FFF2-40B4-BE49-F238E27FC236}">
-                <a16:creationId xmlns:a16="http://schemas.microsoft.com/office/drawing/2014/main" id="{AAA5A3E4-3678-4348-8E51-DFA6DD81C147}"/>
+                <a16:creationId xmlns:a16="http://schemas.microsoft.com/office/drawing/2014/main" id="{AA2647BF-879E-4BDD-9618-AF536D97AC1D}"/>
               </a:ext>
             </a:extLst>
           </p:cNvPr>
@@ -32318,7 +32318,7 @@
           <p:cNvPr id="9" name="">
             <a:extLst xmlns:a="http://schemas.openxmlformats.org/drawingml/2006/main">
               <a:ext uri="{FF2B5EF4-FFF2-40B4-BE49-F238E27FC236}">
-                <a16:creationId xmlns:a16="http://schemas.microsoft.com/office/drawing/2014/main" id="{D8E25543-5035-4856-8CCC-A84364FE7F6B}"/>
+                <a16:creationId xmlns:a16="http://schemas.microsoft.com/office/drawing/2014/main" id="{F531F85C-0F10-47CD-A9D3-650EAA5BA41F}"/>
               </a:ext>
             </a:extLst>
           </p:cNvPr>
@@ -32349,7 +32349,7 @@
           <p:cNvPr id="10" name="">
             <a:extLst xmlns:a="http://schemas.openxmlformats.org/drawingml/2006/main">
               <a:ext uri="{FF2B5EF4-FFF2-40B4-BE49-F238E27FC236}">
-                <a16:creationId xmlns:a16="http://schemas.microsoft.com/office/drawing/2014/main" id="{A4C89C97-68C4-447A-807F-E43914EF4B62}"/>
+                <a16:creationId xmlns:a16="http://schemas.microsoft.com/office/drawing/2014/main" id="{1A4A6365-87C5-4EAC-BDB8-C07D8B33D6A0}"/>
               </a:ext>
             </a:extLst>
           </p:cNvPr>
@@ -32394,7 +32394,7 @@
           <p:cNvPr id="11" name="">
             <a:extLst xmlns:a="http://schemas.openxmlformats.org/drawingml/2006/main">
               <a:ext uri="{FF2B5EF4-FFF2-40B4-BE49-F238E27FC236}">
-                <a16:creationId xmlns:a16="http://schemas.microsoft.com/office/drawing/2014/main" id="{65CEEA3C-8E47-45C7-925B-E1A070AE2FDE}"/>
+                <a16:creationId xmlns:a16="http://schemas.microsoft.com/office/drawing/2014/main" id="{561FB26D-648E-4FA4-AF27-E4D547D8D86B}"/>
               </a:ext>
             </a:extLst>
           </p:cNvPr>
@@ -32439,7 +32439,7 @@
           <p:cNvPr id="12" name="">
             <a:extLst xmlns:a="http://schemas.openxmlformats.org/drawingml/2006/main">
               <a:ext uri="{FF2B5EF4-FFF2-40B4-BE49-F238E27FC236}">
-                <a16:creationId xmlns:a16="http://schemas.microsoft.com/office/drawing/2014/main" id="{26AA2E28-09E0-404E-AEB4-D64E00630F7A}"/>
+                <a16:creationId xmlns:a16="http://schemas.microsoft.com/office/drawing/2014/main" id="{848D551E-45E5-4F15-A51C-FA88045DB39E}"/>
               </a:ext>
             </a:extLst>
           </p:cNvPr>
@@ -32484,7 +32484,7 @@
           <p:cNvPr id="13" name="">
             <a:extLst xmlns:a="http://schemas.openxmlformats.org/drawingml/2006/main">
               <a:ext uri="{FF2B5EF4-FFF2-40B4-BE49-F238E27FC236}">
-                <a16:creationId xmlns:a16="http://schemas.microsoft.com/office/drawing/2014/main" id="{7BD142BC-685F-4BE6-A5B6-E1E24959D2AB}"/>
+                <a16:creationId xmlns:a16="http://schemas.microsoft.com/office/drawing/2014/main" id="{4E356D7E-303D-4E90-83EF-7C3EA821C81C}"/>
               </a:ext>
             </a:extLst>
           </p:cNvPr>
@@ -32517,7 +32517,7 @@
           <p:cNvPr id="14" name="">
             <a:extLst xmlns:a="http://schemas.openxmlformats.org/drawingml/2006/main">
               <a:ext uri="{FF2B5EF4-FFF2-40B4-BE49-F238E27FC236}">
-                <a16:creationId xmlns:a16="http://schemas.microsoft.com/office/drawing/2014/main" id="{5C108875-B15C-452B-9FFD-C5839C6E10E1}"/>
+                <a16:creationId xmlns:a16="http://schemas.microsoft.com/office/drawing/2014/main" id="{BA2066DB-36E1-4643-A9EF-876F074A4F7F}"/>
               </a:ext>
             </a:extLst>
           </p:cNvPr>
@@ -32562,7 +32562,7 @@
           <p:cNvPr id="15" name="">
             <a:extLst xmlns:a="http://schemas.openxmlformats.org/drawingml/2006/main">
               <a:ext uri="{FF2B5EF4-FFF2-40B4-BE49-F238E27FC236}">
-                <a16:creationId xmlns:a16="http://schemas.microsoft.com/office/drawing/2014/main" id="{4563CEC8-F188-4838-B3BD-37E717D60AE8}"/>
+                <a16:creationId xmlns:a16="http://schemas.microsoft.com/office/drawing/2014/main" id="{032A0DC3-DD3C-4538-A2CE-38B2D6939149}"/>
               </a:ext>
             </a:extLst>
           </p:cNvPr>
@@ -32607,7 +32607,7 @@
           <p:cNvPr id="16" name="">
             <a:extLst xmlns:a="http://schemas.openxmlformats.org/drawingml/2006/main">
               <a:ext uri="{FF2B5EF4-FFF2-40B4-BE49-F238E27FC236}">
-                <a16:creationId xmlns:a16="http://schemas.microsoft.com/office/drawing/2014/main" id="{D0A4616C-8632-4266-9D97-505390B1BF91}"/>
+                <a16:creationId xmlns:a16="http://schemas.microsoft.com/office/drawing/2014/main" id="{99990BAA-65B9-4308-84B4-BEC65F00EF56}"/>
               </a:ext>
             </a:extLst>
           </p:cNvPr>
@@ -32652,7 +32652,7 @@
           <p:cNvPr id="17" name="">
             <a:extLst xmlns:a="http://schemas.openxmlformats.org/drawingml/2006/main">
               <a:ext uri="{FF2B5EF4-FFF2-40B4-BE49-F238E27FC236}">
-                <a16:creationId xmlns:a16="http://schemas.microsoft.com/office/drawing/2014/main" id="{C26C688C-29E3-4D02-9648-5A7371E95BE1}"/>
+                <a16:creationId xmlns:a16="http://schemas.microsoft.com/office/drawing/2014/main" id="{98E76666-46EA-4518-AD1A-175FF376A301}"/>
               </a:ext>
             </a:extLst>
           </p:cNvPr>
@@ -32685,7 +32685,7 @@
           <p:cNvPr id="18" name="">
             <a:extLst xmlns:a="http://schemas.openxmlformats.org/drawingml/2006/main">
               <a:ext uri="{FF2B5EF4-FFF2-40B4-BE49-F238E27FC236}">
-                <a16:creationId xmlns:a16="http://schemas.microsoft.com/office/drawing/2014/main" id="{523EE5DF-61E5-4150-87AF-FC34FDA2DBDB}"/>
+                <a16:creationId xmlns:a16="http://schemas.microsoft.com/office/drawing/2014/main" id="{D141FAFA-DBEC-42AC-AA96-184782AB53A0}"/>
               </a:ext>
             </a:extLst>
           </p:cNvPr>
@@ -32730,7 +32730,7 @@
           <p:cNvPr id="19" name="">
             <a:extLst xmlns:a="http://schemas.openxmlformats.org/drawingml/2006/main">
               <a:ext uri="{FF2B5EF4-FFF2-40B4-BE49-F238E27FC236}">
-                <a16:creationId xmlns:a16="http://schemas.microsoft.com/office/drawing/2014/main" id="{2CD0A058-8F5A-43BF-9765-D918F3D6E65F}"/>
+                <a16:creationId xmlns:a16="http://schemas.microsoft.com/office/drawing/2014/main" id="{A0B29354-852D-4C95-814C-82213AC51D37}"/>
               </a:ext>
             </a:extLst>
           </p:cNvPr>
@@ -32775,7 +32775,7 @@
           <p:cNvPr id="20" name="">
             <a:extLst xmlns:a="http://schemas.openxmlformats.org/drawingml/2006/main">
               <a:ext uri="{FF2B5EF4-FFF2-40B4-BE49-F238E27FC236}">
-                <a16:creationId xmlns:a16="http://schemas.microsoft.com/office/drawing/2014/main" id="{948C0EAE-A866-45CB-BEEF-B4C8CB39AB01}"/>
+                <a16:creationId xmlns:a16="http://schemas.microsoft.com/office/drawing/2014/main" id="{90F760AA-9A98-45B8-AE25-082FBEBF2253}"/>
               </a:ext>
             </a:extLst>
           </p:cNvPr>
@@ -32820,7 +32820,7 @@
           <p:cNvPr id="21" name="">
             <a:extLst xmlns:a="http://schemas.openxmlformats.org/drawingml/2006/main">
               <a:ext uri="{FF2B5EF4-FFF2-40B4-BE49-F238E27FC236}">
-                <a16:creationId xmlns:a16="http://schemas.microsoft.com/office/drawing/2014/main" id="{995F4B7C-CE7A-4993-A030-5C2EC6A3278E}"/>
+                <a16:creationId xmlns:a16="http://schemas.microsoft.com/office/drawing/2014/main" id="{1A97BA1D-3E53-4088-AD44-C187ED647BDC}"/>
               </a:ext>
             </a:extLst>
           </p:cNvPr>
@@ -32853,7 +32853,7 @@
           <p:cNvPr id="22" name="">
             <a:extLst xmlns:a="http://schemas.openxmlformats.org/drawingml/2006/main">
               <a:ext uri="{FF2B5EF4-FFF2-40B4-BE49-F238E27FC236}">
-                <a16:creationId xmlns:a16="http://schemas.microsoft.com/office/drawing/2014/main" id="{AF7C2756-0CB2-4A69-A270-504331557F60}"/>
+                <a16:creationId xmlns:a16="http://schemas.microsoft.com/office/drawing/2014/main" id="{6BFD703D-8BB1-4CB6-AFDA-4F113D4687D4}"/>
               </a:ext>
             </a:extLst>
           </p:cNvPr>
@@ -32898,7 +32898,7 @@
           <p:cNvPr id="23" name="">
             <a:extLst xmlns:a="http://schemas.openxmlformats.org/drawingml/2006/main">
               <a:ext uri="{FF2B5EF4-FFF2-40B4-BE49-F238E27FC236}">
-                <a16:creationId xmlns:a16="http://schemas.microsoft.com/office/drawing/2014/main" id="{0015D50A-738E-42F8-9334-07081DFAA5BE}"/>
+                <a16:creationId xmlns:a16="http://schemas.microsoft.com/office/drawing/2014/main" id="{F8921DE1-D436-48D7-937A-8E52E7941A44}"/>
               </a:ext>
             </a:extLst>
           </p:cNvPr>
@@ -32943,7 +32943,7 @@
           <p:cNvPr id="24" name="">
             <a:extLst xmlns:a="http://schemas.openxmlformats.org/drawingml/2006/main">
               <a:ext uri="{FF2B5EF4-FFF2-40B4-BE49-F238E27FC236}">
-                <a16:creationId xmlns:a16="http://schemas.microsoft.com/office/drawing/2014/main" id="{B9E92703-823F-4B91-BF40-8D67369E3944}"/>
+                <a16:creationId xmlns:a16="http://schemas.microsoft.com/office/drawing/2014/main" id="{7336CFAC-7559-4BAE-8927-0850EAD8FB0A}"/>
               </a:ext>
             </a:extLst>
           </p:cNvPr>
@@ -32988,7 +32988,7 @@
           <p:cNvPr id="25" name="">
             <a:extLst xmlns:a="http://schemas.openxmlformats.org/drawingml/2006/main">
               <a:ext uri="{FF2B5EF4-FFF2-40B4-BE49-F238E27FC236}">
-                <a16:creationId xmlns:a16="http://schemas.microsoft.com/office/drawing/2014/main" id="{091ECC8B-0DDD-4D5A-BC77-6C497439A55F}"/>
+                <a16:creationId xmlns:a16="http://schemas.microsoft.com/office/drawing/2014/main" id="{7063E9AE-9F00-461D-97F0-E79126CB8615}"/>
               </a:ext>
             </a:extLst>
           </p:cNvPr>
@@ -33021,7 +33021,7 @@
           <p:cNvPr id="26" name="">
             <a:extLst xmlns:a="http://schemas.openxmlformats.org/drawingml/2006/main">
               <a:ext uri="{FF2B5EF4-FFF2-40B4-BE49-F238E27FC236}">
-                <a16:creationId xmlns:a16="http://schemas.microsoft.com/office/drawing/2014/main" id="{0B2C6534-033D-4A8E-AAD2-BFEBC8A83AB1}"/>
+                <a16:creationId xmlns:a16="http://schemas.microsoft.com/office/drawing/2014/main" id="{D7576C82-E37A-4CE2-B350-783B42A967D0}"/>
               </a:ext>
             </a:extLst>
           </p:cNvPr>
@@ -33066,7 +33066,7 @@
           <p:cNvPr id="27" name="">
             <a:extLst xmlns:a="http://schemas.openxmlformats.org/drawingml/2006/main">
               <a:ext uri="{FF2B5EF4-FFF2-40B4-BE49-F238E27FC236}">
-                <a16:creationId xmlns:a16="http://schemas.microsoft.com/office/drawing/2014/main" id="{91203559-F9CC-4EB7-A9FE-3FD9B2AEE64A}"/>
+                <a16:creationId xmlns:a16="http://schemas.microsoft.com/office/drawing/2014/main" id="{5F831723-D890-435D-9121-596BECD816A8}"/>
               </a:ext>
             </a:extLst>
           </p:cNvPr>
@@ -33111,7 +33111,7 @@
           <p:cNvPr id="28" name="">
             <a:extLst xmlns:a="http://schemas.openxmlformats.org/drawingml/2006/main">
               <a:ext uri="{FF2B5EF4-FFF2-40B4-BE49-F238E27FC236}">
-                <a16:creationId xmlns:a16="http://schemas.microsoft.com/office/drawing/2014/main" id="{0AD12F9C-F8A1-4FEF-B9F2-E89906AB3614}"/>
+                <a16:creationId xmlns:a16="http://schemas.microsoft.com/office/drawing/2014/main" id="{4A09F56D-D144-47A7-899D-3D8F96A47629}"/>
               </a:ext>
             </a:extLst>
           </p:cNvPr>
@@ -33156,7 +33156,7 @@
           <p:cNvPr id="29" name="">
             <a:extLst xmlns:a="http://schemas.openxmlformats.org/drawingml/2006/main">
               <a:ext uri="{FF2B5EF4-FFF2-40B4-BE49-F238E27FC236}">
-                <a16:creationId xmlns:a16="http://schemas.microsoft.com/office/drawing/2014/main" id="{80DCFE02-A55F-449B-998D-9D864DACC6A4}"/>
+                <a16:creationId xmlns:a16="http://schemas.microsoft.com/office/drawing/2014/main" id="{91EB674D-A607-4D99-A1BB-B3F1126457E8}"/>
               </a:ext>
             </a:extLst>
           </p:cNvPr>
@@ -33189,7 +33189,7 @@
           <p:cNvPr id="30" name="">
             <a:extLst xmlns:a="http://schemas.openxmlformats.org/drawingml/2006/main">
               <a:ext uri="{FF2B5EF4-FFF2-40B4-BE49-F238E27FC236}">
-                <a16:creationId xmlns:a16="http://schemas.microsoft.com/office/drawing/2014/main" id="{85F6E489-6EC0-42C4-A967-61508EFB62D8}"/>
+                <a16:creationId xmlns:a16="http://schemas.microsoft.com/office/drawing/2014/main" id="{2C64CFCA-80E6-4407-A287-641B462054AB}"/>
               </a:ext>
             </a:extLst>
           </p:cNvPr>
@@ -33234,7 +33234,7 @@
           <p:cNvPr id="31" name="">
             <a:extLst xmlns:a="http://schemas.openxmlformats.org/drawingml/2006/main">
               <a:ext uri="{FF2B5EF4-FFF2-40B4-BE49-F238E27FC236}">
-                <a16:creationId xmlns:a16="http://schemas.microsoft.com/office/drawing/2014/main" id="{E7BBD587-11FF-4D3A-B975-30A47CDBFB1D}"/>
+                <a16:creationId xmlns:a16="http://schemas.microsoft.com/office/drawing/2014/main" id="{56B3B33D-F161-4318-A213-F25F651C6CAE}"/>
               </a:ext>
             </a:extLst>
           </p:cNvPr>
@@ -33279,7 +33279,7 @@
           <p:cNvPr id="32" name="">
             <a:extLst xmlns:a="http://schemas.openxmlformats.org/drawingml/2006/main">
               <a:ext uri="{FF2B5EF4-FFF2-40B4-BE49-F238E27FC236}">
-                <a16:creationId xmlns:a16="http://schemas.microsoft.com/office/drawing/2014/main" id="{4966BA86-3217-4031-A08F-9994A2BA202D}"/>
+                <a16:creationId xmlns:a16="http://schemas.microsoft.com/office/drawing/2014/main" id="{B38E82D6-FBAB-48D5-B88C-28E1118B01C7}"/>
               </a:ext>
             </a:extLst>
           </p:cNvPr>
@@ -33324,7 +33324,7 @@
           <p:cNvPr id="33" name="">
             <a:extLst xmlns:a="http://schemas.openxmlformats.org/drawingml/2006/main">
               <a:ext uri="{FF2B5EF4-FFF2-40B4-BE49-F238E27FC236}">
-                <a16:creationId xmlns:a16="http://schemas.microsoft.com/office/drawing/2014/main" id="{2D0CD082-68E3-4F4A-A4D1-71EF521DBD07}"/>
+                <a16:creationId xmlns:a16="http://schemas.microsoft.com/office/drawing/2014/main" id="{88E5C444-406D-494B-9FB9-49D7312683DA}"/>
               </a:ext>
             </a:extLst>
           </p:cNvPr>
@@ -33357,7 +33357,7 @@
           <p:cNvPr id="34" name="">
             <a:extLst xmlns:a="http://schemas.openxmlformats.org/drawingml/2006/main">
               <a:ext uri="{FF2B5EF4-FFF2-40B4-BE49-F238E27FC236}">
-                <a16:creationId xmlns:a16="http://schemas.microsoft.com/office/drawing/2014/main" id="{DD324A2E-7609-4A26-98BE-95A5402AF6D3}"/>
+                <a16:creationId xmlns:a16="http://schemas.microsoft.com/office/drawing/2014/main" id="{BCF1F46C-1F06-4B13-94A8-A4A292F77810}"/>
               </a:ext>
             </a:extLst>
           </p:cNvPr>
@@ -33402,7 +33402,7 @@
           <p:cNvPr id="35" name="">
             <a:extLst xmlns:a="http://schemas.openxmlformats.org/drawingml/2006/main">
               <a:ext uri="{FF2B5EF4-FFF2-40B4-BE49-F238E27FC236}">
-                <a16:creationId xmlns:a16="http://schemas.microsoft.com/office/drawing/2014/main" id="{1467519C-0E52-4BA6-AF12-A1F3196CB760}"/>
+                <a16:creationId xmlns:a16="http://schemas.microsoft.com/office/drawing/2014/main" id="{9D4D7D14-994A-4FA7-84BF-B45771842EA1}"/>
               </a:ext>
             </a:extLst>
           </p:cNvPr>
@@ -33447,7 +33447,7 @@
           <p:cNvPr id="36" name="">
             <a:extLst xmlns:a="http://schemas.openxmlformats.org/drawingml/2006/main">
               <a:ext uri="{FF2B5EF4-FFF2-40B4-BE49-F238E27FC236}">
-                <a16:creationId xmlns:a16="http://schemas.microsoft.com/office/drawing/2014/main" id="{236D7DC9-96A6-414A-8E71-74CE3A7B302E}"/>
+                <a16:creationId xmlns:a16="http://schemas.microsoft.com/office/drawing/2014/main" id="{28A8E9AC-2A40-49D5-A263-ADC5AE0439F1}"/>
               </a:ext>
             </a:extLst>
           </p:cNvPr>
@@ -33492,7 +33492,7 @@
           <p:cNvPr id="37" name="">
             <a:extLst xmlns:a="http://schemas.openxmlformats.org/drawingml/2006/main">
               <a:ext uri="{FF2B5EF4-FFF2-40B4-BE49-F238E27FC236}">
-                <a16:creationId xmlns:a16="http://schemas.microsoft.com/office/drawing/2014/main" id="{81CB7389-49DD-454B-8B0B-033934D931D5}"/>
+                <a16:creationId xmlns:a16="http://schemas.microsoft.com/office/drawing/2014/main" id="{142D9BEE-2866-4CA2-AA8C-15892FE7E877}"/>
               </a:ext>
             </a:extLst>
           </p:cNvPr>
@@ -33527,7 +33527,7 @@
           <p:cNvPr id="38" name="">
             <a:extLst xmlns:a="http://schemas.openxmlformats.org/drawingml/2006/main">
               <a:ext uri="{FF2B5EF4-FFF2-40B4-BE49-F238E27FC236}">
-                <a16:creationId xmlns:a16="http://schemas.microsoft.com/office/drawing/2014/main" id="{FDC021D7-8C20-4D00-B4ED-EFD5D86DA858}"/>
+                <a16:creationId xmlns:a16="http://schemas.microsoft.com/office/drawing/2014/main" id="{5C8073F4-DB0C-454A-8A6D-D0411C44DBE1}"/>
               </a:ext>
             </a:extLst>
           </p:cNvPr>
@@ -33572,7 +33572,7 @@
           <p:cNvPr id="39" name="">
             <a:extLst xmlns:a="http://schemas.openxmlformats.org/drawingml/2006/main">
               <a:ext uri="{FF2B5EF4-FFF2-40B4-BE49-F238E27FC236}">
-                <a16:creationId xmlns:a16="http://schemas.microsoft.com/office/drawing/2014/main" id="{B069FD7C-8515-40EB-A398-C165CFE051E6}"/>
+                <a16:creationId xmlns:a16="http://schemas.microsoft.com/office/drawing/2014/main" id="{1AF8FA22-0AE4-4843-A4FE-738FA2EE441F}"/>
               </a:ext>
             </a:extLst>
           </p:cNvPr>
@@ -33617,7 +33617,7 @@
           <p:cNvPr id="40" name="">
             <a:extLst xmlns:a="http://schemas.openxmlformats.org/drawingml/2006/main">
               <a:ext uri="{FF2B5EF4-FFF2-40B4-BE49-F238E27FC236}">
-                <a16:creationId xmlns:a16="http://schemas.microsoft.com/office/drawing/2014/main" id="{8CFD61CA-F612-41FA-A6E3-455EBAC404C2}"/>
+                <a16:creationId xmlns:a16="http://schemas.microsoft.com/office/drawing/2014/main" id="{9B5FAE2F-5384-4B24-8BFC-71004DC85C2B}"/>
               </a:ext>
             </a:extLst>
           </p:cNvPr>
@@ -33662,7 +33662,7 @@
           <p:cNvPr id="41" name="">
             <a:extLst xmlns:a="http://schemas.openxmlformats.org/drawingml/2006/main">
               <a:ext uri="{FF2B5EF4-FFF2-40B4-BE49-F238E27FC236}">
-                <a16:creationId xmlns:a16="http://schemas.microsoft.com/office/drawing/2014/main" id="{B61D00ED-315B-4622-82D4-03CA7E0BEBD0}"/>
+                <a16:creationId xmlns:a16="http://schemas.microsoft.com/office/drawing/2014/main" id="{FF9EA494-471D-444B-A7C3-A46567341029}"/>
               </a:ext>
             </a:extLst>
           </p:cNvPr>
@@ -33697,7 +33697,7 @@
           <p:cNvPr id="42" name="">
             <a:extLst xmlns:a="http://schemas.openxmlformats.org/drawingml/2006/main">
               <a:ext uri="{FF2B5EF4-FFF2-40B4-BE49-F238E27FC236}">
-                <a16:creationId xmlns:a16="http://schemas.microsoft.com/office/drawing/2014/main" id="{6FE95C08-0F6A-4316-8767-0BFD3D897E48}"/>
+                <a16:creationId xmlns:a16="http://schemas.microsoft.com/office/drawing/2014/main" id="{DD81B9FA-6F6B-4818-A23D-B2805DC69D60}"/>
               </a:ext>
             </a:extLst>
           </p:cNvPr>
@@ -33728,7 +33728,7 @@
           <p:cNvPr id="43" name="">
             <a:extLst xmlns:a="http://schemas.openxmlformats.org/drawingml/2006/main">
               <a:ext uri="{FF2B5EF4-FFF2-40B4-BE49-F238E27FC236}">
-                <a16:creationId xmlns:a16="http://schemas.microsoft.com/office/drawing/2014/main" id="{27CD6BEF-FA3A-4F4E-9194-776199A2BC26}"/>
+                <a16:creationId xmlns:a16="http://schemas.microsoft.com/office/drawing/2014/main" id="{C9F5F6B6-6A43-468E-93A1-F9AFA4E51E0C}"/>
               </a:ext>
             </a:extLst>
           </p:cNvPr>
@@ -33773,7 +33773,7 @@
           <p:cNvPr id="44" name="">
             <a:extLst xmlns:a="http://schemas.openxmlformats.org/drawingml/2006/main">
               <a:ext uri="{FF2B5EF4-FFF2-40B4-BE49-F238E27FC236}">
-                <a16:creationId xmlns:a16="http://schemas.microsoft.com/office/drawing/2014/main" id="{7A9056BF-2082-4A17-B7E2-BBAE88A3E1C6}"/>
+                <a16:creationId xmlns:a16="http://schemas.microsoft.com/office/drawing/2014/main" id="{4973BB02-B17E-40CC-BD3E-4E361D75A4A2}"/>
               </a:ext>
             </a:extLst>
           </p:cNvPr>
@@ -33818,7 +33818,7 @@
           <p:cNvPr id="45" name="">
             <a:extLst xmlns:a="http://schemas.openxmlformats.org/drawingml/2006/main">
               <a:ext uri="{FF2B5EF4-FFF2-40B4-BE49-F238E27FC236}">
-                <a16:creationId xmlns:a16="http://schemas.microsoft.com/office/drawing/2014/main" id="{E7C42050-544C-4CD5-9B79-FBA2DAD98319}"/>
+                <a16:creationId xmlns:a16="http://schemas.microsoft.com/office/drawing/2014/main" id="{C25F9FE4-07F2-43AF-80CC-88518A0FB428}"/>
               </a:ext>
             </a:extLst>
           </p:cNvPr>
@@ -33863,7 +33863,7 @@
           <p:cNvPr id="46" name="">
             <a:extLst xmlns:a="http://schemas.openxmlformats.org/drawingml/2006/main">
               <a:ext uri="{FF2B5EF4-FFF2-40B4-BE49-F238E27FC236}">
-                <a16:creationId xmlns:a16="http://schemas.microsoft.com/office/drawing/2014/main" id="{9608F99B-895D-4B9C-80BF-2A2720B3C460}"/>
+                <a16:creationId xmlns:a16="http://schemas.microsoft.com/office/drawing/2014/main" id="{B8DA6689-3916-479F-8C0B-1F41569F4307}"/>
               </a:ext>
             </a:extLst>
           </p:cNvPr>
@@ -33894,7 +33894,7 @@
           <p:cNvPr id="47" name="">
             <a:extLst xmlns:a="http://schemas.openxmlformats.org/drawingml/2006/main">
               <a:ext uri="{FF2B5EF4-FFF2-40B4-BE49-F238E27FC236}">
-                <a16:creationId xmlns:a16="http://schemas.microsoft.com/office/drawing/2014/main" id="{D216EF9B-E5C0-4418-996E-05BBE9B10887}"/>
+                <a16:creationId xmlns:a16="http://schemas.microsoft.com/office/drawing/2014/main" id="{E2E04364-3F0E-4751-89B7-6CE6556682C0}"/>
               </a:ext>
             </a:extLst>
           </p:cNvPr>
@@ -33939,7 +33939,7 @@
           <p:cNvPr id="48" name="">
             <a:extLst xmlns:a="http://schemas.openxmlformats.org/drawingml/2006/main">
               <a:ext uri="{FF2B5EF4-FFF2-40B4-BE49-F238E27FC236}">
-                <a16:creationId xmlns:a16="http://schemas.microsoft.com/office/drawing/2014/main" id="{83E7F9A4-AF64-4678-B9C3-F5F284249AA6}"/>
+                <a16:creationId xmlns:a16="http://schemas.microsoft.com/office/drawing/2014/main" id="{08C14DF9-6F48-450E-BBE7-D4948BEA8632}"/>
               </a:ext>
             </a:extLst>
           </p:cNvPr>
@@ -33970,7 +33970,7 @@
           <p:cNvPr id="49" name="">
             <a:extLst xmlns:a="http://schemas.openxmlformats.org/drawingml/2006/main">
               <a:ext uri="{FF2B5EF4-FFF2-40B4-BE49-F238E27FC236}">
-                <a16:creationId xmlns:a16="http://schemas.microsoft.com/office/drawing/2014/main" id="{335BA769-B0C2-4291-9F1D-5D71706AA36B}"/>
+                <a16:creationId xmlns:a16="http://schemas.microsoft.com/office/drawing/2014/main" id="{F8E94001-2630-45D9-AED9-5E83D112379E}"/>
               </a:ext>
             </a:extLst>
           </p:cNvPr>
@@ -34015,7 +34015,7 @@
           <p:cNvPr id="50" name="">
             <a:extLst xmlns:a="http://schemas.openxmlformats.org/drawingml/2006/main">
               <a:ext uri="{FF2B5EF4-FFF2-40B4-BE49-F238E27FC236}">
-                <a16:creationId xmlns:a16="http://schemas.microsoft.com/office/drawing/2014/main" id="{15050142-D412-4784-8B0C-755C7F553F57}"/>
+                <a16:creationId xmlns:a16="http://schemas.microsoft.com/office/drawing/2014/main" id="{EB30CEE1-8813-4403-8772-1D92B8F85CC3}"/>
               </a:ext>
             </a:extLst>
           </p:cNvPr>
@@ -34058,7 +34058,7 @@
     </p:spTree>
     <p:extLst>
       <p:ext uri="{BB962C8B-B14F-4D97-AF65-F5344CB8AC3E}">
-        <p14:creationId xmlns:p14="http://schemas.microsoft.com/office/powerpoint/2010/main" val="576406942"/>
+        <p14:creationId xmlns:p14="http://schemas.microsoft.com/office/powerpoint/2010/main" val="1022231707"/>
       </p:ext>
     </p:extLst>
   </p:cSld>
